--- a/deck/iRent+_解決方案.pptx
+++ b/deck/iRent+_解決方案.pptx
@@ -122,54 +122,54 @@
   <p:extLst>
     <p:ext uri="{521415D9-36F7-43E2-AB2F-B90AF26B5E84}">
       <p14:sectionLst xmlns:p14="http://schemas.microsoft.com/office/powerpoint/2010/main">
-        <p14:section name="封面" id="{ce0e526b-3ed1-71b0-ee05-21ea87b0ad4b}">
+        <p14:section name="封面" id="{a67467d2-1536-60ec-0c6c-89a6f7e7499a}">
           <p14:sldIdLst>
             <p14:sldId id="256"/>
           </p14:sldIdLst>
         </p14:section>
-        <p14:section name="提案摘要" id="{136b17fb-0244-6a9f-e40b-cb262d8c80ee}">
+        <p14:section name="提案摘要" id="{3008c7fb-78aa-155a-b8de-16a11256ad09}">
           <p14:sldIdLst>
             <p14:sldId id="257"/>
           </p14:sldIdLst>
         </p14:section>
-        <p14:section name="1. 提案概述" id="{ae48235f-3689-4d44-6728-7d5d5d3f4720}">
+        <p14:section name="1. 提案概述" id="{1a2b1900-68d4-b2f0-d033-1a811a78dd81}">
           <p14:sldIdLst>
             <p14:sldId id="258"/>
           </p14:sldIdLst>
         </p14:section>
-        <p14:section name="2. 目標對象與痛點分析" id="{6a91363a-f2b6-5d1d-11bb-1218dd40629a}">
+        <p14:section name="2. 目標對象與痛點分析" id="{589aded2-83c1-dfa5-91c3-d99f23bc5e5a}">
           <p14:sldIdLst>
             <p14:sldId id="259"/>
             <p14:sldId id="260"/>
             <p14:sldId id="261"/>
           </p14:sldIdLst>
         </p14:section>
-        <p14:section name="3. 解決方案設計" id="{f2b80a24-7385-49b9-a0f5-f42630c4c41c}">
+        <p14:section name="3. 解決方案設計" id="{f4b0859f-45d4-cd83-25fe-c0d1664a6f76}">
           <p14:sldIdLst>
             <p14:sldId id="262"/>
             <p14:sldId id="263"/>
             <p14:sldId id="264"/>
           </p14:sldIdLst>
         </p14:section>
-        <p14:section name="4. AI 應用方法" id="{47dad575-b20d-c508-afb4-5c656251038f}">
+        <p14:section name="4. AI 應用方法" id="{47094873-b767-ab62-997a-a118a595a876}">
           <p14:sldIdLst>
             <p14:sldId id="265"/>
             <p14:sldId id="266"/>
             <p14:sldId id="267"/>
           </p14:sldIdLst>
         </p14:section>
-        <p14:section name="5. 獨特優勢與差異化" id="{28633cdc-6bf8-1e6a-9fa8-3ed689e32faa}">
+        <p14:section name="5. 獨特優勢與差異化" id="{e311c407-dc1b-a133-2d7b-b47e9e09c7d7}">
           <p14:sldIdLst>
             <p14:sldId id="268"/>
           </p14:sldIdLst>
         </p14:section>
-        <p14:section name="6. 預期效益與落地評估" id="{edd96e8a-809c-5b4e-2eb1-c1a0d653afb3}">
+        <p14:section name="6. 預期效益與落地評估" id="{9cbbc8c7-9a1f-88f3-3f30-4777d23fa61d}">
           <p14:sldIdLst>
             <p14:sldId id="269"/>
             <p14:sldId id="270"/>
           </p14:sldIdLst>
         </p14:section>
-        <p14:section name="7. 補充資料" id="{c440a483-7bd4-23b2-c04f-52bbc0a9d287}">
+        <p14:section name="7. 補充資料" id="{2b2e700c-9df9-7cfd-1393-2761e56e075e}">
           <p14:sldIdLst>
             <p14:sldId id="271"/>
           </p14:sldIdLst>
@@ -1294,7 +1294,7 @@
           <a:p>
             <a:r>
               <a:rPr lang="en-US" dirty="0"/>
-              <a:t>手機端把關拍照、後台 AI 判讀車況。手機端要快，全部在瀏覽器內運算：畫質（清晰度、亮度、過曝，門檻用 1,200 張還車照片校準）；車牌（PaddleOCR 每 0.5 秒讀一次，整張車牌入鏡時 92% 讀對，從未認成別台車）；角度與遠近（比對上一張同角度照片的車牌位置與大小，站對的 95% 通過、站錯的 77% 被抓到）；光線（比上一張暗很多就提醒）。後台要準：自架 Qwen 系列視覺語言模型，看車身四角、車內、卡夾、核對用戶回報；每張判讀 3 次取多數決，整潔度意見不一取較髒，無法比對的送人工。選用原因：VLM 不必先標註大量資料；自架讓照片不外流、每天約 8.2 萬次判讀不按次付費；檢查放手機才能在用戶離開前回饋；車牌用開源 PaddleOCR，約 15 MB，在手機上執行。</a:t>
+              <a:t>手機端把關拍照、後台 AI 判讀車況。手機端要快，全部在手機上運算（App 內建模型，原型以網頁版驗證）：畫質（清晰度、亮度、過曝，門檻用 1,200 張還車照片校準）；車牌（PaddleOCR 每 0.5 秒讀一次，整張車牌入鏡時 92% 讀對，從未認成別台車）；角度與遠近（比對上一張同角度照片的車牌位置與大小，站對的 95% 通過、站錯的 77% 被抓到）；光線（比上一張暗很多就提醒）。後台要準：自架 Qwen 系列視覺語言模型，看車身四角、車內、卡夾、核對用戶回報；每張判讀 3 次取多數決，整潔度意見不一取較髒，無法比對的送人工。選用原因：VLM 不必先標註大量資料；自架讓照片不外流、每天約 8.2 萬次判讀不按次付費；檢查放手機才能在用戶離開前回饋；車牌用開源 PaddleOCR，約 15 MB，在手機上執行。</a:t>
             </a:r>
             <a:endParaRPr lang="en-US" dirty="0"/>
           </a:p>
@@ -2438,7 +2438,7 @@
           <a:p>
             <a:r>
               <a:rPr lang="en-US" dirty="0"/>
-              <a:t>取還車流程。取車：先看到這台車已記錄的損傷；拍照時疊著上一次同角度的照片，手機每 0.5 秒檢查畫質、讀車牌判斷角度與遠近、比對光線，不合格當場重拍；可補拍損傷特寫後確認取車。還車：按開始還車，計費就停止；10 分鐘內先拍卡夾和前後座，下車關門後鎖門，鎖門不用等照片上傳；再拍車外四角與停車位置。之後在歷史訂單看得到取還車確認單。這直接回應評論裡「鎖門後才要拍內部照片」的抱怨。</a:t>
+              <a:t>取還車流程。取車：先看到這台車已記錄的損傷；拍照時疊著上一次同角度的照片，手機每 0.5 秒檢查畫質、讀車牌判斷角度與遠近、比對光線，不合格當場重拍；可補拍損傷特寫後確認取車。還車：按開始還車，計費就停止；5 分鐘內先拍卡夾和前後座，下車關門後鎖門，鎖門不用等照片上傳；再拍車外四角與停車位置。之後在歷史訂單看得到取還車確認單。這直接回應評論裡「鎖門後才要拍內部照片」的抱怨。</a:t>
             </a:r>
             <a:endParaRPr lang="en-US" dirty="0"/>
           </a:p>
@@ -6440,7 +6440,7 @@
                   <a:schemeClr val="tx2"/>
                 </a:solidFill>
               </a:rPr>
-              <a:t>開源、約 15 MB，手機上每 0.5 秒辨識；畫面不上傳</a:t>
+              <a:t>開源、約 15 MB 打包進 App，每 0.5 秒辨識；畫面不上傳</a:t>
             </a:r>
             <a:endParaRPr lang="zh-TW" sz="1100" dirty="0"/>
           </a:p>
@@ -18538,7 +18538,7 @@
                           <a:ea typeface="Microsoft JhengHei" pitchFamily="34" charset="-122"/>
                           <a:cs typeface="Microsoft JhengHei" pitchFamily="34" charset="-120"/>
                         </a:rPr>
-                        <a:t>手機端：PaddleOCR PP-OCRv4 車牌辨識（onnxruntime-web）與畫質檢查，都在手機上運算；</a:t>
+                        <a:t>手機端：PaddleOCR PP-OCRv4 車牌辨識（App 用 ONNX Runtime Mobile，原型以 onnxruntime-web 驗證）與畫質檢查，都在手機上運算；</a:t>
                       </a:r>
                       <a:endParaRPr lang="en-US" sz="1350" dirty="0">
                         <a:latin typeface="Microsoft JhengHei" charset="0"/>

--- a/deck/iRent+_解決方案.pptx
+++ b/deck/iRent+_解決方案.pptx
@@ -4,6 +4,9 @@
   <p:sldMasterIdLst>
     <p:sldMasterId id="2147483648" r:id="rId1"/>
   </p:sldMasterIdLst>
+  <p:notesMasterIdLst>
+    <p:notesMasterId r:id="rId18"/>
+  </p:notesMasterIdLst>
   <p:sldIdLst>
     <p:sldId id="256" r:id="rId2"/>
     <p:sldId id="257" r:id="rId3"/>
@@ -22,9 +25,6 @@
     <p:sldId id="270" r:id="rId16"/>
     <p:sldId id="271" r:id="rId17"/>
   </p:sldIdLst>
-  <p:notesMasterIdLst>
-    <p:notesMasterId r:id="rId18"/>
-  </p:notesMasterIdLst>
   <p:sldSz cx="12192000" cy="6858000"/>
   <p:notesSz cx="6858000" cy="12192000"/>
   <p:defaultTextStyle>
@@ -122,54 +122,54 @@
   <p:extLst>
     <p:ext uri="{521415D9-36F7-43E2-AB2F-B90AF26B5E84}">
       <p14:sectionLst xmlns:p14="http://schemas.microsoft.com/office/powerpoint/2010/main">
-        <p14:section name="封面" id="{a67467d2-1536-60ec-0c6c-89a6f7e7499a}">
+        <p14:section name="封面" id="{A67467D2-1536-60EC-0C6C-89A6F7E7499A}">
           <p14:sldIdLst>
             <p14:sldId id="256"/>
           </p14:sldIdLst>
         </p14:section>
-        <p14:section name="提案摘要" id="{3008c7fb-78aa-155a-b8de-16a11256ad09}">
+        <p14:section name="提案摘要" id="{3008C7FB-78AA-155A-B8DE-16A11256AD09}">
           <p14:sldIdLst>
             <p14:sldId id="257"/>
           </p14:sldIdLst>
         </p14:section>
-        <p14:section name="1. 提案概述" id="{1a2b1900-68d4-b2f0-d033-1a811a78dd81}">
+        <p14:section name="1. 提案概述" id="{1A2B1900-68D4-B2F0-D033-1A811A78DD81}">
           <p14:sldIdLst>
             <p14:sldId id="258"/>
           </p14:sldIdLst>
         </p14:section>
-        <p14:section name="2. 目標對象與痛點分析" id="{589aded2-83c1-dfa5-91c3-d99f23bc5e5a}">
+        <p14:section name="2. 目標對象與痛點分析" id="{589ADED2-83C1-DFA5-91C3-D99F23BC5E5A}">
           <p14:sldIdLst>
             <p14:sldId id="259"/>
             <p14:sldId id="260"/>
             <p14:sldId id="261"/>
           </p14:sldIdLst>
         </p14:section>
-        <p14:section name="3. 解決方案設計" id="{f4b0859f-45d4-cd83-25fe-c0d1664a6f76}">
+        <p14:section name="3. 解決方案設計" id="{F4B0859F-45D4-CD83-25FE-C0D1664A6F76}">
           <p14:sldIdLst>
             <p14:sldId id="262"/>
             <p14:sldId id="263"/>
             <p14:sldId id="264"/>
           </p14:sldIdLst>
         </p14:section>
-        <p14:section name="4. AI 應用方法" id="{47094873-b767-ab62-997a-a118a595a876}">
+        <p14:section name="4. AI 應用方法" id="{47094873-B767-AB62-997A-A118A595A876}">
           <p14:sldIdLst>
             <p14:sldId id="265"/>
             <p14:sldId id="266"/>
             <p14:sldId id="267"/>
           </p14:sldIdLst>
         </p14:section>
-        <p14:section name="5. 獨特優勢與差異化" id="{e311c407-dc1b-a133-2d7b-b47e9e09c7d7}">
+        <p14:section name="5. 獨特優勢與差異化" id="{E311C407-DC1B-A133-2D7B-B47E9E09C7D7}">
           <p14:sldIdLst>
             <p14:sldId id="268"/>
           </p14:sldIdLst>
         </p14:section>
-        <p14:section name="6. 預期效益與落地評估" id="{9cbbc8c7-9a1f-88f3-3f30-4777d23fa61d}">
+        <p14:section name="6. 預期效益與落地評估" id="{9CBBC8C7-9A1F-88F3-3F30-4777D23FA61D}">
           <p14:sldIdLst>
             <p14:sldId id="269"/>
             <p14:sldId id="270"/>
           </p14:sldIdLst>
         </p14:section>
-        <p14:section name="7. 補充資料" id="{2b2e700c-9df9-7cfd-1393-2761e56e075e}">
+        <p14:section name="7. 補充資料" id="{2B2E700C-9DF9-7CFD-1393-2761E56E075E}">
           <p14:sldIdLst>
             <p14:sldId id="271"/>
           </p14:sldIdLst>
@@ -184,9 +184,11 @@
 </file>
 
 <file path=ppt/charts/chart1.xml><?xml version="1.0" encoding="utf-8"?>
-<c:chartSpace xmlns:c="http://schemas.openxmlformats.org/drawingml/2006/chart" xmlns:a="http://schemas.openxmlformats.org/drawingml/2006/main" xmlns:r="http://schemas.openxmlformats.org/officeDocument/2006/relationships">
+<c:chartSpace xmlns:c="http://schemas.openxmlformats.org/drawingml/2006/chart" xmlns:a="http://schemas.openxmlformats.org/drawingml/2006/main" xmlns:r="http://schemas.openxmlformats.org/officeDocument/2006/relationships" xmlns:c16r2="http://schemas.microsoft.com/office/drawing/2015/06/chart">
   <c:date1904 val="0"/>
+  <c:lang val="zh-TW"/>
   <c:roundedCorners val="1"/>
+  <c:style val="2"/>
   <c:chart>
     <c:autoTitleDeleted val="1"/>
     <c:plotArea>
@@ -216,30 +218,6 @@
             <a:effectLst/>
           </c:spPr>
           <c:invertIfNegative val="0"/>
-          <c:dLbls>
-            <c:numFmt formatCode="#,##0" sourceLinked="0"/>
-            <c:txPr>
-              <a:bodyPr/>
-              <a:lstStyle/>
-              <a:p>
-                <a:pPr>
-                  <a:defRPr b="0" i="0" strike="noStrike" sz="1200" u="none">
-                    <a:solidFill>
-                      <a:srgbClr val="000000"/>
-                    </a:solidFill>
-                    <a:latin typeface="Arial"/>
-                  </a:defRPr>
-                </a:pPr>
-              </a:p>
-            </c:txPr>
-            <c:showLegendKey val="0"/>
-            <c:showVal val="0"/>
-            <c:showCatName val="0"/>
-            <c:showSerName val="0"/>
-            <c:showPercent val="0"/>
-            <c:showBubbleSize val="0"/>
-            <c:showLeaderLines val="0"/>
-          </c:dLbls>
           <c:dPt>
             <c:idx val="0"/>
             <c:invertIfNegative val="0"/>
@@ -250,6 +228,11 @@
               </a:solidFill>
               <a:effectLst/>
             </c:spPr>
+            <c:extLst>
+              <c:ext xmlns:c16="http://schemas.microsoft.com/office/drawing/2014/chart" uri="{C3380CC4-5D6E-409C-BE32-E72D297353CC}">
+                <c16:uniqueId val="{00000001-047D-2F48-82C6-FCFA3DB752B7}"/>
+              </c:ext>
+            </c:extLst>
           </c:dPt>
           <c:dPt>
             <c:idx val="1"/>
@@ -261,6 +244,11 @@
               </a:solidFill>
               <a:effectLst/>
             </c:spPr>
+            <c:extLst>
+              <c:ext xmlns:c16="http://schemas.microsoft.com/office/drawing/2014/chart" uri="{C3380CC4-5D6E-409C-BE32-E72D297353CC}">
+                <c16:uniqueId val="{00000003-047D-2F48-82C6-FCFA3DB752B7}"/>
+              </c:ext>
+            </c:extLst>
           </c:dPt>
           <c:dPt>
             <c:idx val="2"/>
@@ -272,6 +260,11 @@
               </a:solidFill>
               <a:effectLst/>
             </c:spPr>
+            <c:extLst>
+              <c:ext xmlns:c16="http://schemas.microsoft.com/office/drawing/2014/chart" uri="{C3380CC4-5D6E-409C-BE32-E72D297353CC}">
+                <c16:uniqueId val="{00000005-047D-2F48-82C6-FCFA3DB752B7}"/>
+              </c:ext>
+            </c:extLst>
           </c:dPt>
           <c:dPt>
             <c:idx val="3"/>
@@ -283,6 +276,11 @@
               </a:solidFill>
               <a:effectLst/>
             </c:spPr>
+            <c:extLst>
+              <c:ext xmlns:c16="http://schemas.microsoft.com/office/drawing/2014/chart" uri="{C3380CC4-5D6E-409C-BE32-E72D297353CC}">
+                <c16:uniqueId val="{00000007-047D-2F48-82C6-FCFA3DB752B7}"/>
+              </c:ext>
+            </c:extLst>
           </c:dPt>
           <c:dPt>
             <c:idx val="4"/>
@@ -294,6 +292,11 @@
               </a:solidFill>
               <a:effectLst/>
             </c:spPr>
+            <c:extLst>
+              <c:ext xmlns:c16="http://schemas.microsoft.com/office/drawing/2014/chart" uri="{C3380CC4-5D6E-409C-BE32-E72D297353CC}">
+                <c16:uniqueId val="{00000009-047D-2F48-82C6-FCFA3DB752B7}"/>
+              </c:ext>
+            </c:extLst>
           </c:dPt>
           <c:dPt>
             <c:idx val="5"/>
@@ -305,6 +308,11 @@
               </a:solidFill>
               <a:effectLst/>
             </c:spPr>
+            <c:extLst>
+              <c:ext xmlns:c16="http://schemas.microsoft.com/office/drawing/2014/chart" uri="{C3380CC4-5D6E-409C-BE32-E72D297353CC}">
+                <c16:uniqueId val="{0000000B-047D-2F48-82C6-FCFA3DB752B7}"/>
+              </c:ext>
+            </c:extLst>
           </c:dPt>
           <c:dPt>
             <c:idx val="6"/>
@@ -316,6 +324,11 @@
               </a:solidFill>
               <a:effectLst/>
             </c:spPr>
+            <c:extLst>
+              <c:ext xmlns:c16="http://schemas.microsoft.com/office/drawing/2014/chart" uri="{C3380CC4-5D6E-409C-BE32-E72D297353CC}">
+                <c16:uniqueId val="{0000000D-047D-2F48-82C6-FCFA3DB752B7}"/>
+              </c:ext>
+            </c:extLst>
           </c:dPt>
           <c:dPt>
             <c:idx val="7"/>
@@ -327,6 +340,11 @@
               </a:solidFill>
               <a:effectLst/>
             </c:spPr>
+            <c:extLst>
+              <c:ext xmlns:c16="http://schemas.microsoft.com/office/drawing/2014/chart" uri="{C3380CC4-5D6E-409C-BE32-E72D297353CC}">
+                <c16:uniqueId val="{0000000F-047D-2F48-82C6-FCFA3DB752B7}"/>
+              </c:ext>
+            </c:extLst>
           </c:dPt>
           <c:dPt>
             <c:idx val="8"/>
@@ -338,6 +356,11 @@
               </a:solidFill>
               <a:effectLst/>
             </c:spPr>
+            <c:extLst>
+              <c:ext xmlns:c16="http://schemas.microsoft.com/office/drawing/2014/chart" uri="{C3380CC4-5D6E-409C-BE32-E72D297353CC}">
+                <c16:uniqueId val="{00000011-047D-2F48-82C6-FCFA3DB752B7}"/>
+              </c:ext>
+            </c:extLst>
           </c:dPt>
           <c:dPt>
             <c:idx val="9"/>
@@ -349,6 +372,11 @@
               </a:solidFill>
               <a:effectLst/>
             </c:spPr>
+            <c:extLst>
+              <c:ext xmlns:c16="http://schemas.microsoft.com/office/drawing/2014/chart" uri="{C3380CC4-5D6E-409C-BE32-E72D297353CC}">
+                <c16:uniqueId val="{00000013-047D-2F48-82C6-FCFA3DB752B7}"/>
+              </c:ext>
+            </c:extLst>
           </c:dPt>
           <c:dPt>
             <c:idx val="10"/>
@@ -360,6 +388,11 @@
               </a:solidFill>
               <a:effectLst/>
             </c:spPr>
+            <c:extLst>
+              <c:ext xmlns:c16="http://schemas.microsoft.com/office/drawing/2014/chart" uri="{C3380CC4-5D6E-409C-BE32-E72D297353CC}">
+                <c16:uniqueId val="{00000015-047D-2F48-82C6-FCFA3DB752B7}"/>
+              </c:ext>
+            </c:extLst>
           </c:dPt>
           <c:dPt>
             <c:idx val="11"/>
@@ -371,6 +404,11 @@
               </a:solidFill>
               <a:effectLst/>
             </c:spPr>
+            <c:extLst>
+              <c:ext xmlns:c16="http://schemas.microsoft.com/office/drawing/2014/chart" uri="{C3380CC4-5D6E-409C-BE32-E72D297353CC}">
+                <c16:uniqueId val="{00000017-047D-2F48-82C6-FCFA3DB752B7}"/>
+              </c:ext>
+            </c:extLst>
           </c:dPt>
           <c:dPt>
             <c:idx val="12"/>
@@ -382,6 +420,11 @@
               </a:solidFill>
               <a:effectLst/>
             </c:spPr>
+            <c:extLst>
+              <c:ext xmlns:c16="http://schemas.microsoft.com/office/drawing/2014/chart" uri="{C3380CC4-5D6E-409C-BE32-E72D297353CC}">
+                <c16:uniqueId val="{00000019-047D-2F48-82C6-FCFA3DB752B7}"/>
+              </c:ext>
+            </c:extLst>
           </c:dPt>
           <c:dPt>
             <c:idx val="13"/>
@@ -393,6 +436,11 @@
               </a:solidFill>
               <a:effectLst/>
             </c:spPr>
+            <c:extLst>
+              <c:ext xmlns:c16="http://schemas.microsoft.com/office/drawing/2014/chart" uri="{C3380CC4-5D6E-409C-BE32-E72D297353CC}">
+                <c16:uniqueId val="{0000001B-047D-2F48-82C6-FCFA3DB752B7}"/>
+              </c:ext>
+            </c:extLst>
           </c:dPt>
           <c:dPt>
             <c:idx val="14"/>
@@ -404,6 +452,11 @@
               </a:solidFill>
               <a:effectLst/>
             </c:spPr>
+            <c:extLst>
+              <c:ext xmlns:c16="http://schemas.microsoft.com/office/drawing/2014/chart" uri="{C3380CC4-5D6E-409C-BE32-E72D297353CC}">
+                <c16:uniqueId val="{0000001D-047D-2F48-82C6-FCFA3DB752B7}"/>
+              </c:ext>
+            </c:extLst>
           </c:dPt>
           <c:dPt>
             <c:idx val="15"/>
@@ -415,6 +468,11 @@
               </a:solidFill>
               <a:effectLst/>
             </c:spPr>
+            <c:extLst>
+              <c:ext xmlns:c16="http://schemas.microsoft.com/office/drawing/2014/chart" uri="{C3380CC4-5D6E-409C-BE32-E72D297353CC}">
+                <c16:uniqueId val="{0000001F-047D-2F48-82C6-FCFA3DB752B7}"/>
+              </c:ext>
+            </c:extLst>
           </c:dPt>
           <c:dPt>
             <c:idx val="16"/>
@@ -426,6 +484,11 @@
               </a:solidFill>
               <a:effectLst/>
             </c:spPr>
+            <c:extLst>
+              <c:ext xmlns:c16="http://schemas.microsoft.com/office/drawing/2014/chart" uri="{C3380CC4-5D6E-409C-BE32-E72D297353CC}">
+                <c16:uniqueId val="{00000021-047D-2F48-82C6-FCFA3DB752B7}"/>
+              </c:ext>
+            </c:extLst>
           </c:dPt>
           <c:dPt>
             <c:idx val="17"/>
@@ -437,6 +500,11 @@
               </a:solidFill>
               <a:effectLst/>
             </c:spPr>
+            <c:extLst>
+              <c:ext xmlns:c16="http://schemas.microsoft.com/office/drawing/2014/chart" uri="{C3380CC4-5D6E-409C-BE32-E72D297353CC}">
+                <c16:uniqueId val="{00000023-047D-2F48-82C6-FCFA3DB752B7}"/>
+              </c:ext>
+            </c:extLst>
           </c:dPt>
           <c:dPt>
             <c:idx val="18"/>
@@ -448,6 +516,11 @@
               </a:solidFill>
               <a:effectLst/>
             </c:spPr>
+            <c:extLst>
+              <c:ext xmlns:c16="http://schemas.microsoft.com/office/drawing/2014/chart" uri="{C3380CC4-5D6E-409C-BE32-E72D297353CC}">
+                <c16:uniqueId val="{00000025-047D-2F48-82C6-FCFA3DB752B7}"/>
+              </c:ext>
+            </c:extLst>
           </c:dPt>
           <c:dPt>
             <c:idx val="19"/>
@@ -459,6 +532,11 @@
               </a:solidFill>
               <a:effectLst/>
             </c:spPr>
+            <c:extLst>
+              <c:ext xmlns:c16="http://schemas.microsoft.com/office/drawing/2014/chart" uri="{C3380CC4-5D6E-409C-BE32-E72D297353CC}">
+                <c16:uniqueId val="{00000027-047D-2F48-82C6-FCFA3DB752B7}"/>
+              </c:ext>
+            </c:extLst>
           </c:dPt>
           <c:dPt>
             <c:idx val="20"/>
@@ -470,6 +548,11 @@
               </a:solidFill>
               <a:effectLst/>
             </c:spPr>
+            <c:extLst>
+              <c:ext xmlns:c16="http://schemas.microsoft.com/office/drawing/2014/chart" uri="{C3380CC4-5D6E-409C-BE32-E72D297353CC}">
+                <c16:uniqueId val="{00000029-047D-2F48-82C6-FCFA3DB752B7}"/>
+              </c:ext>
+            </c:extLst>
           </c:dPt>
           <c:dPt>
             <c:idx val="21"/>
@@ -481,6 +564,11 @@
               </a:solidFill>
               <a:effectLst/>
             </c:spPr>
+            <c:extLst>
+              <c:ext xmlns:c16="http://schemas.microsoft.com/office/drawing/2014/chart" uri="{C3380CC4-5D6E-409C-BE32-E72D297353CC}">
+                <c16:uniqueId val="{0000002B-047D-2F48-82C6-FCFA3DB752B7}"/>
+              </c:ext>
+            </c:extLst>
           </c:dPt>
           <c:dPt>
             <c:idx val="22"/>
@@ -492,6 +580,11 @@
               </a:solidFill>
               <a:effectLst/>
             </c:spPr>
+            <c:extLst>
+              <c:ext xmlns:c16="http://schemas.microsoft.com/office/drawing/2014/chart" uri="{C3380CC4-5D6E-409C-BE32-E72D297353CC}">
+                <c16:uniqueId val="{0000002D-047D-2F48-82C6-FCFA3DB752B7}"/>
+              </c:ext>
+            </c:extLst>
           </c:dPt>
           <c:dPt>
             <c:idx val="23"/>
@@ -503,88 +596,91 @@
               </a:solidFill>
               <a:effectLst/>
             </c:spPr>
+            <c:extLst>
+              <c:ext xmlns:c16="http://schemas.microsoft.com/office/drawing/2014/chart" uri="{C3380CC4-5D6E-409C-BE32-E72D297353CC}">
+                <c16:uniqueId val="{0000002F-047D-2F48-82C6-FCFA3DB752B7}"/>
+              </c:ext>
+            </c:extLst>
           </c:dPt>
           <c:cat>
-            <c:multiLvlStrRef>
+            <c:strRef>
               <c:f>Sheet1!$A$2:$A$25</c:f>
-              <c:multiLvlStrCache>
+              <c:strCache>
                 <c:ptCount val="24"/>
-                <c:lvl>
-                  <c:pt idx="0">
-                    <c:v>0</c:v>
-                  </c:pt>
-                  <c:pt idx="1">
-                    <c:v>1</c:v>
-                  </c:pt>
-                  <c:pt idx="2">
-                    <c:v>2</c:v>
-                  </c:pt>
-                  <c:pt idx="3">
-                    <c:v>3</c:v>
-                  </c:pt>
-                  <c:pt idx="4">
-                    <c:v>4</c:v>
-                  </c:pt>
-                  <c:pt idx="5">
-                    <c:v>5</c:v>
-                  </c:pt>
-                  <c:pt idx="6">
-                    <c:v>6</c:v>
-                  </c:pt>
-                  <c:pt idx="7">
-                    <c:v>7</c:v>
-                  </c:pt>
-                  <c:pt idx="8">
-                    <c:v>8</c:v>
-                  </c:pt>
-                  <c:pt idx="9">
-                    <c:v>9</c:v>
-                  </c:pt>
-                  <c:pt idx="10">
-                    <c:v>10</c:v>
-                  </c:pt>
-                  <c:pt idx="11">
-                    <c:v>11</c:v>
-                  </c:pt>
-                  <c:pt idx="12">
-                    <c:v>12</c:v>
-                  </c:pt>
-                  <c:pt idx="13">
-                    <c:v>13</c:v>
-                  </c:pt>
-                  <c:pt idx="14">
-                    <c:v>14</c:v>
-                  </c:pt>
-                  <c:pt idx="15">
-                    <c:v>15</c:v>
-                  </c:pt>
-                  <c:pt idx="16">
-                    <c:v>16</c:v>
-                  </c:pt>
-                  <c:pt idx="17">
-                    <c:v>17</c:v>
-                  </c:pt>
-                  <c:pt idx="18">
-                    <c:v>18</c:v>
-                  </c:pt>
-                  <c:pt idx="19">
-                    <c:v>19</c:v>
-                  </c:pt>
-                  <c:pt idx="20">
-                    <c:v>20</c:v>
-                  </c:pt>
-                  <c:pt idx="21">
-                    <c:v>21</c:v>
-                  </c:pt>
-                  <c:pt idx="22">
-                    <c:v>22</c:v>
-                  </c:pt>
-                  <c:pt idx="23">
-                    <c:v>23</c:v>
-                  </c:pt>
-                </c:lvl>
-              </c:multiLvlStrCache>
-            </c:multiLvlStrRef>
+                <c:pt idx="0">
+                  <c:v>0</c:v>
+                </c:pt>
+                <c:pt idx="1">
+                  <c:v>1</c:v>
+                </c:pt>
+                <c:pt idx="2">
+                  <c:v>2</c:v>
+                </c:pt>
+                <c:pt idx="3">
+                  <c:v>3</c:v>
+                </c:pt>
+                <c:pt idx="4">
+                  <c:v>4</c:v>
+                </c:pt>
+                <c:pt idx="5">
+                  <c:v>5</c:v>
+                </c:pt>
+                <c:pt idx="6">
+                  <c:v>6</c:v>
+                </c:pt>
+                <c:pt idx="7">
+                  <c:v>7</c:v>
+                </c:pt>
+                <c:pt idx="8">
+                  <c:v>8</c:v>
+                </c:pt>
+                <c:pt idx="9">
+                  <c:v>9</c:v>
+                </c:pt>
+                <c:pt idx="10">
+                  <c:v>10</c:v>
+                </c:pt>
+                <c:pt idx="11">
+                  <c:v>11</c:v>
+                </c:pt>
+                <c:pt idx="12">
+                  <c:v>12</c:v>
+                </c:pt>
+                <c:pt idx="13">
+                  <c:v>13</c:v>
+                </c:pt>
+                <c:pt idx="14">
+                  <c:v>14</c:v>
+                </c:pt>
+                <c:pt idx="15">
+                  <c:v>15</c:v>
+                </c:pt>
+                <c:pt idx="16">
+                  <c:v>16</c:v>
+                </c:pt>
+                <c:pt idx="17">
+                  <c:v>17</c:v>
+                </c:pt>
+                <c:pt idx="18">
+                  <c:v>18</c:v>
+                </c:pt>
+                <c:pt idx="19">
+                  <c:v>19</c:v>
+                </c:pt>
+                <c:pt idx="20">
+                  <c:v>20</c:v>
+                </c:pt>
+                <c:pt idx="21">
+                  <c:v>21</c:v>
+                </c:pt>
+                <c:pt idx="22">
+                  <c:v>22</c:v>
+                </c:pt>
+                <c:pt idx="23">
+                  <c:v>23</c:v>
+                </c:pt>
+              </c:strCache>
+            </c:strRef>
           </c:cat>
           <c:val>
             <c:numRef>
@@ -667,36 +763,23 @@
               </c:numCache>
             </c:numRef>
           </c:val>
+          <c:extLst>
+            <c:ext xmlns:c16="http://schemas.microsoft.com/office/drawing/2014/chart" uri="{C3380CC4-5D6E-409C-BE32-E72D297353CC}">
+              <c16:uniqueId val="{00000030-047D-2F48-82C6-FCFA3DB752B7}"/>
+            </c:ext>
+          </c:extLst>
         </c:ser>
         <c:dLbls>
-          <c:numFmt formatCode="#,##0" sourceLinked="0"/>
-          <c:txPr>
-            <a:bodyPr/>
-            <a:lstStyle/>
-            <a:p>
-              <a:pPr>
-                <a:defRPr b="0" i="0" strike="noStrike" sz="1200" u="none">
-                  <a:solidFill>
-                    <a:srgbClr val="000000"/>
-                  </a:solidFill>
-                  <a:latin typeface="Arial"/>
-                </a:defRPr>
-              </a:pPr>
-            </a:p>
-          </c:txPr>
           <c:showLegendKey val="0"/>
           <c:showVal val="0"/>
           <c:showCatName val="0"/>
           <c:showSerName val="0"/>
           <c:showPercent val="0"/>
           <c:showBubbleSize val="0"/>
-          <c:showLeaderLines val="0"/>
         </c:dLbls>
         <c:gapWidth val="40"/>
-        <c:overlap val="0"/>
         <c:axId val="2094734554"/>
         <c:axId val="2094734552"/>
-        <c:axId val="2094734556"/>
       </c:barChart>
       <c:catAx>
         <c:axId val="2094734554"/>
@@ -735,6 +818,7 @@
         <c:crosses val="autoZero"/>
         <c:auto val="1"/>
         <c:lblAlgn val="ctr"/>
+        <c:lblOffset val="100"/>
         <c:noMultiLvlLbl val="1"/>
       </c:catAx>
       <c:valAx>
@@ -797,6 +881,7 @@
     </c:plotArea>
     <c:plotVisOnly val="1"/>
     <c:dispBlanksAs val="span"/>
+    <c:showDLblsOverMax val="1"/>
   </c:chart>
   <c:spPr>
     <a:noFill/>
@@ -833,234 +918,10 @@
           <a:chExt cx="0" cy="0"/>
         </a:xfrm>
       </p:grpSpPr>
-      <p:sp>
-        <p:nvSpPr>
-          <p:cNvPr id="2" name="Header Placeholder 1"/>
-          <p:cNvSpPr>
-            <a:spLocks noGrp="1"/>
-          </p:cNvSpPr>
-          <p:nvPr>
-            <p:ph type="hdr" sz="quarter"/>
-          </p:nvPr>
-        </p:nvSpPr>
-        <p:spPr>
-          <a:xfrm>
-            <a:off x="0" y="0"/>
-            <a:ext cx="2971800" cy="458788"/>
-          </a:xfrm>
-          <a:prstGeom prst="rect">
-            <a:avLst/>
-          </a:prstGeom>
-        </p:spPr>
-        <p:txBody>
-          <a:bodyPr vert="horz" lIns="91440" tIns="45720" rIns="91440" bIns="45720" rtlCol="0"/>
-          <a:lstStyle>
-            <a:lvl1pPr algn="l">
-              <a:defRPr sz="1200"/>
-            </a:lvl1pPr>
-          </a:lstStyle>
-          <a:p>
-            <a:endParaRPr lang="en-US"/>
-          </a:p>
-        </p:txBody>
-      </p:sp>
-      <p:sp>
-        <p:nvSpPr>
-          <p:cNvPr id="3" name="Date Placeholder 2"/>
-          <p:cNvSpPr>
-            <a:spLocks noGrp="1"/>
-          </p:cNvSpPr>
-          <p:nvPr>
-            <p:ph type="dt" idx="1"/>
-          </p:nvPr>
-        </p:nvSpPr>
-        <p:spPr>
-          <a:xfrm>
-            <a:off x="3884613" y="0"/>
-            <a:ext cx="2971800" cy="458788"/>
-          </a:xfrm>
-          <a:prstGeom prst="rect">
-            <a:avLst/>
-          </a:prstGeom>
-        </p:spPr>
-        <p:txBody>
-          <a:bodyPr vert="horz" lIns="91440" tIns="45720" rIns="91440" bIns="45720" rtlCol="0"/>
-          <a:lstStyle>
-            <a:lvl1pPr algn="r">
-              <a:defRPr sz="1200"/>
-            </a:lvl1pPr>
-          </a:lstStyle>
-          <a:p>
-            <a:fld id="{5282F153-3F37-0F45-9E97-73ACFA13230C}" type="datetimeFigureOut">
-              <a:rPr lang="en-US"/>
-              <a:t>7/23/19</a:t>
-            </a:fld>
-            <a:endParaRPr lang="en-US"/>
-          </a:p>
-        </p:txBody>
-      </p:sp>
-      <p:sp>
-        <p:nvSpPr>
-          <p:cNvPr id="4" name="Slide Image Placeholder 3"/>
-          <p:cNvSpPr>
-            <a:spLocks noGrp="1" noRot="1" noChangeAspect="1"/>
-          </p:cNvSpPr>
-          <p:nvPr>
-            <p:ph type="sldImg" idx="2"/>
-          </p:nvPr>
-        </p:nvSpPr>
-        <p:spPr>
-          <a:xfrm>
-            <a:off x="685800" y="1143000"/>
-            <a:ext cx="5486400" cy="3086100"/>
-          </a:xfrm>
-          <a:prstGeom prst="rect">
-            <a:avLst/>
-          </a:prstGeom>
-          <a:noFill/>
-          <a:ln w="12700">
-            <a:solidFill>
-              <a:prstClr val="black"/>
-            </a:solidFill>
-          </a:ln>
-        </p:spPr>
-        <p:txBody>
-          <a:bodyPr vert="horz" lIns="91440" tIns="45720" rIns="91440" bIns="45720" rtlCol="0" anchor="ctr"/>
-          <a:lstStyle/>
-          <a:p>
-            <a:endParaRPr lang="en-US"/>
-          </a:p>
-        </p:txBody>
-      </p:sp>
-      <p:sp>
-        <p:nvSpPr>
-          <p:cNvPr id="5" name="Notes Placeholder 4"/>
-          <p:cNvSpPr>
-            <a:spLocks noGrp="1"/>
-          </p:cNvSpPr>
-          <p:nvPr>
-            <p:ph type="body" sz="quarter" idx="3"/>
-          </p:nvPr>
-        </p:nvSpPr>
-        <p:spPr>
-          <a:xfrm>
-            <a:off x="685800" y="4400550"/>
-            <a:ext cx="5486400" cy="3600450"/>
-          </a:xfrm>
-          <a:prstGeom prst="rect">
-            <a:avLst/>
-          </a:prstGeom>
-        </p:spPr>
-        <p:txBody>
-          <a:bodyPr vert="horz" lIns="91440" tIns="45720" rIns="91440" bIns="45720" rtlCol="0"/>
-          <a:lstStyle/>
-          <a:p>
-            <a:pPr lvl="0"/>
-            <a:r>
-              <a:rPr lang="en-US"/>
-              <a:t>Click to edit Master text styles</a:t>
-            </a:r>
-          </a:p>
-          <a:p>
-            <a:pPr lvl="1"/>
-            <a:r>
-              <a:rPr lang="en-US"/>
-              <a:t>Second level</a:t>
-            </a:r>
-          </a:p>
-          <a:p>
-            <a:pPr lvl="2"/>
-            <a:r>
-              <a:rPr lang="en-US"/>
-              <a:t>Third level</a:t>
-            </a:r>
-          </a:p>
-          <a:p>
-            <a:pPr lvl="3"/>
-            <a:r>
-              <a:rPr lang="en-US"/>
-              <a:t>Fourth level</a:t>
-            </a:r>
-          </a:p>
-          <a:p>
-            <a:pPr lvl="4"/>
-            <a:r>
-              <a:rPr lang="en-US"/>
-              <a:t>Fifth level</a:t>
-            </a:r>
-          </a:p>
-        </p:txBody>
-      </p:sp>
-      <p:sp>
-        <p:nvSpPr>
-          <p:cNvPr id="6" name="Footer Placeholder 5"/>
-          <p:cNvSpPr>
-            <a:spLocks noGrp="1"/>
-          </p:cNvSpPr>
-          <p:nvPr>
-            <p:ph type="ftr" sz="quarter" idx="4"/>
-          </p:nvPr>
-        </p:nvSpPr>
-        <p:spPr>
-          <a:xfrm>
-            <a:off x="0" y="8685213"/>
-            <a:ext cx="2971800" cy="458787"/>
-          </a:xfrm>
-          <a:prstGeom prst="rect">
-            <a:avLst/>
-          </a:prstGeom>
-        </p:spPr>
-        <p:txBody>
-          <a:bodyPr vert="horz" lIns="91440" tIns="45720" rIns="91440" bIns="45720" rtlCol="0" anchor="b"/>
-          <a:lstStyle>
-            <a:lvl1pPr algn="l">
-              <a:defRPr sz="1200"/>
-            </a:lvl1pPr>
-          </a:lstStyle>
-          <a:p>
-            <a:endParaRPr lang="en-US"/>
-          </a:p>
-        </p:txBody>
-      </p:sp>
-      <p:sp>
-        <p:nvSpPr>
-          <p:cNvPr id="7" name="Slide Number Placeholder 6"/>
-          <p:cNvSpPr>
-            <a:spLocks noGrp="1"/>
-          </p:cNvSpPr>
-          <p:nvPr>
-            <p:ph type="sldNum" sz="quarter" idx="5"/>
-          </p:nvPr>
-        </p:nvSpPr>
-        <p:spPr>
-          <a:xfrm>
-            <a:off x="3884613" y="8685213"/>
-            <a:ext cx="2971800" cy="458787"/>
-          </a:xfrm>
-          <a:prstGeom prst="rect">
-            <a:avLst/>
-          </a:prstGeom>
-        </p:spPr>
-        <p:txBody>
-          <a:bodyPr vert="horz" lIns="91440" tIns="45720" rIns="91440" bIns="45720" rtlCol="0" anchor="b"/>
-          <a:lstStyle>
-            <a:lvl1pPr algn="r">
-              <a:defRPr sz="1200"/>
-            </a:lvl1pPr>
-          </a:lstStyle>
-          <a:p>
-            <a:fld id="{CE5E9CC1-C706-0F49-92D6-E571CC5EEA8F}" type="slidenum">
-              <a:rPr lang="en-US"/>
-              <a:t>‹#›</a:t>
-            </a:fld>
-            <a:endParaRPr lang="en-US"/>
-          </a:p>
-        </p:txBody>
-      </p:sp>
     </p:spTree>
     <p:extLst>
       <p:ext uri="{BB962C8B-B14F-4D97-AF65-F5344CB8AC3E}">
-        <p14:creationId xmlns:p14="http://schemas.microsoft.com/office/powerpoint/2010/main" val="1024086991"/>
+        <p14:creationId xmlns:p14="http://schemas.microsoft.com/office/powerpoint/2010/main" val="3088887757"/>
       </p:ext>
     </p:extLst>
   </p:cSld>
@@ -1208,7 +1069,6 @@
               <a:rPr lang="en-US" dirty="0"/>
               <a:t>封面。iRent+：AI 智能車況管家，團隊 pp。一句話：拍照當場把關、AI 前後比對、問題自動派工，讓每天 2.7 萬張取還車照片，從需要 10–20 人檢視變成 1–2 人確認。右邊是主辦方資料集的實際判讀：取車時完好、還車時左前受損，AI 三次判讀都判定為新車損。</a:t>
             </a:r>
-            <a:endParaRPr lang="en-US" dirty="0"/>
           </a:p>
         </p:txBody>
       </p:sp>
@@ -1296,7 +1156,6 @@
               <a:rPr lang="en-US" dirty="0"/>
               <a:t>手機端把關拍照、後台 AI 判讀車況。手機端要快，全部在手機上運算（App 內建模型，原型以網頁版驗證）：畫質（清晰度、亮度、過曝，門檻用 1,200 張還車照片校準）；車牌（PaddleOCR 每 0.5 秒讀一次，整張車牌入鏡時 92% 讀對，從未認成別台車）；角度與遠近（比對上一張同角度照片的車牌位置與大小，站對的 95% 通過、站錯的 77% 被抓到）；光線（比上一張暗很多就提醒）。後台要準：自架 Qwen 系列視覺語言模型，看車身四角、車內、卡夾、核對用戶回報；每張判讀 3 次取多數決，整潔度意見不一取較髒，無法比對的送人工。選用原因：VLM 不必先標註大量資料；自架讓照片不外流、每天約 8.2 萬次判讀不按次付費；檢查放手機才能在用戶離開前回饋；車牌用開源 PaddleOCR，約 15 MB，在手機上執行。</a:t>
             </a:r>
-            <a:endParaRPr lang="en-US" dirty="0"/>
           </a:p>
         </p:txBody>
       </p:sp>
@@ -1384,7 +1243,6 @@
               <a:rPr lang="en-US" dirty="0"/>
               <a:t>實測結果。用主辦方提供的 144 組取還車照片評估（24 組有索賠、120 組沒有），搭配拍照時的角度審核與光線判斷：有索賠的 24 組全部判為新車損，召回率 100%；沒有索賠的 120 組，誤報率 3%。右邊是實際判讀：白天左前、夜間左後的車損，三次判讀都一致；車內照片能分出乾淨與髒汙，並說出髒在哪裡。照片來自主辦方資料集，車牌已遮蔽。</a:t>
             </a:r>
-            <a:endParaRPr lang="en-US" dirty="0"/>
           </a:p>
         </p:txBody>
       </p:sp>
@@ -1472,7 +1330,6 @@
               <a:rPr lang="en-US" dirty="0"/>
               <a:t>導入後的系統架構。用戶手機：iRent App 內嵌 iRent+ 拍照模組，疊影對齊、畫質、車牌 OCR、角度遠近與光線都在手機上運算，不合格當場重拍。iRent 既有系統：會員與訂單、計費（按下還車即停）、車機遠端開鎖鎖門、照片儲存，以 API 與事件串接。iRent+ 平台部署在 iRent 自己的環境：車況資料庫記錄取還車、判讀、預警、工單與已知車損，用資料庫觸發器自動開工單、暫停出租；判讀任務佇列讓多台判讀服務不重複領取、失敗自動重試；自架 GPU 判讀服務跑 Qwen 系列視覺語言模型（vLLM），每張照片判讀 3 次取多數決，結果寫回資料庫。營運端：營運後台處理預警的確認或駁回、工單、車輛與已知車損、顧客評論；通知與派工把確認單推給用戶、把清潔檢修派給廠商。容量：每天約 8.2 萬次判讀、尖峰約每秒 1.8 次，加機器即可擴充。營運每次確認或駁回都累積成標註資料，重新訓練、離線評估召回率與誤報率，影子模式驗證後更新判讀服務。綠色標籤是原型已經在跑的部分；虛線是導入時要串接的 iRent 既有系統。</a:t>
             </a:r>
-            <a:endParaRPr lang="en-US" dirty="0"/>
           </a:p>
         </p:txBody>
       </p:sp>
@@ -1560,7 +1417,6 @@
               <a:rPr lang="en-US" dirty="0"/>
               <a:t>與現行做法比較：照片從事後存證，變成拍的當下把關、送出後立即比對、發現問題自動處理；還車不用鎖門後再開門拍車內；人從每筆都看，變成只確認 AI 標記的部分；用戶每次都有確認單。難以複製的地方：營運確認的結果是只有 iRent 能累積的訓練資料；每張照片都有比對基準；拍照流程是為 AI 設計的；從判讀到派工是閉環。</a:t>
             </a:r>
-            <a:endParaRPr lang="en-US" dirty="0"/>
           </a:p>
         </p:txBody>
       </p:sp>
@@ -1648,7 +1504,6 @@
               <a:rPr lang="en-US" dirty="0"/>
               <a:t>預期效益。若每筆取還車都要人工看，一天 80–160 工時、約 10–20 人；導入後人只確認 AI 標記的部分，以 10% 估算是 482 筆、8–16 工時、約 1–2 人，工時減少約 90%，以每人每年 60 萬元估約少 540–1,080 萬元人事成本（GPU 與導入成本另計）。實測誤報率 3%，所以 10% 是保守估計；就算 20% 也只需 2–4 人。用戶端：每天約 550–820 張不合格照片當場重拍；髒車與嚴重車損自動暫停出租；新車損對應到該筆租用；直接對應 208 則與車況有關的評論。</a:t>
             </a:r>
-            <a:endParaRPr lang="en-US" dirty="0"/>
           </a:p>
         </p:txBody>
       </p:sp>
@@ -1736,7 +1591,6 @@
               <a:rPr lang="en-US" dirty="0"/>
               <a:t>落地評估。四階段：第 1–2 個月擴大驗證（主辦方 144 組已完成，召回率 100%、誤報率 3%，再用更多歷史照片確認）；第 3–4 個月影子模式，App 拍照模組先上線，判讀服務只寫預警、不派工，與人工結果比對；第 5–6 個月區域試點，開啟自動工單、暫停出租與確認單，串接派工與推播；第 7 個月起依實測吞吐量擴充 GPU 到全車隊，資料回訓迴圈每月重新訓練。資源：GPU 伺服器自架模型（尖峰約每秒 1.8 次判讀，試點先 1 台）、App 拍照頁（車牌模型約 15 MB）與後台串接、營運確認 1–2 人；導入期需要工程人力，上線後併入既有團隊維運。</a:t>
             </a:r>
-            <a:endParaRPr lang="en-US" dirty="0"/>
           </a:p>
         </p:txBody>
       </p:sp>
@@ -1824,7 +1678,6 @@
               <a:rPr lang="en-US" dirty="0"/>
               <a:t>補充資料：資料來源、GitHub 程式碼（github.com/Allenwang2004/irent，README 有給評審的說明）與概念原型。程式碼：mobile 手機 App、web 營運後台、worker VLM 檢查服務、eval 評估腳本、supabase 資料表與自動工單。右邊是原型的實機畫面：營運後台預警頁、手機選擇車輛頁（整備中的車不能借）與還車確認單。</a:t>
             </a:r>
-            <a:endParaRPr lang="en-US" dirty="0"/>
           </a:p>
         </p:txBody>
       </p:sp>
@@ -1912,7 +1765,6 @@
               <a:rPr lang="en-US" dirty="0"/>
               <a:t>提案摘要（不計入 15 頁）。欄位名稱與順序依官方範本。</a:t>
             </a:r>
-            <a:endParaRPr lang="en-US" dirty="0"/>
           </a:p>
         </p:txBody>
       </p:sp>
@@ -2000,7 +1852,6 @@
               <a:rPr lang="en-US" dirty="0"/>
               <a:t>提案概述。核心價值：照片不再只是存檔，而是拍的當下就把關、送出後由 AI 比對、發現問題自動派工。目標：人力 10–20 人降到 1–2 人、不合格照片當場重拍；主辦方 144 組照片實測，車損召回率 100%、誤報率 3%。</a:t>
             </a:r>
-            <a:endParaRPr lang="en-US" dirty="0"/>
           </a:p>
         </p:txBody>
       </p:sp>
@@ -2088,7 +1939,6 @@
               <a:rPr lang="en-US" dirty="0"/>
               <a:t>目標對象：租車用戶與營運團隊。兩者都卡在車況照片。現行流程（依主辦方還車流程圖）：拍卡夾、車內、車身四角、其他車損，送出後由後台人員查看。三個斷點：拍照時沒人檢查、送出後人工看不完、出問題時前後照片對不上。</a:t>
             </a:r>
-            <a:endParaRPr lang="en-US" dirty="0"/>
           </a:p>
         </p:txBody>
       </p:sp>
@@ -2176,7 +2026,6 @@
               <a:rPr lang="en-US" dirty="0"/>
               <a:t>營運端痛點。主辦方資料：一天 27,367 張照片、4,820 筆取還車；16 點尖峰 2,144 張，每 1.7 秒一張；下午 4 點到午夜每小時都超過 1,500 張。若每筆都人工看，以 1–2 分鐘計，一天 80–160 工時，約 10–20 人。</a:t>
             </a:r>
-            <a:endParaRPr lang="en-US" dirty="0"/>
           </a:p>
         </p:txBody>
       </p:sp>
@@ -2264,7 +2113,6 @@
               <a:rPr lang="en-US" dirty="0"/>
               <a:t>用戶端痛點。我們做了評論管理後台，收集 Google Play、App Store、PTT、Dcard 共 924 則評論（同一篇只算一次），依關鍵字規則分成 7 類；其中 208 則（22.5%）跟車況有關。拍照流程類 145 則、髒亂類 60 則、車損類 49 則，常見的抱怨是拍照耗時常被要求重拍、接到上一位留下的髒車、車損賠償說不清責任。</a:t>
             </a:r>
-            <a:endParaRPr lang="en-US" dirty="0"/>
           </a:p>
         </p:txBody>
       </p:sp>
@@ -2352,7 +2200,6 @@
               <a:rPr lang="en-US" dirty="0"/>
               <a:t>整體架構：三個環節、9 個機制，補上三個斷點。拍照時（手機）：已知車損提前告知、疊影對齊、即時檢查畫質車牌角度、還車先拍車內再鎖門。送出後（後台 AI）：取車比上次、還車比取車；每張判讀三次取多數決。發現問題後：自動開工單與暫停出租、營運確認或駁回（嚴重車損先送修，小損傷記成已知車損後恢復出租，誤報駁回）、用戶確認單。9 個機制都已在原型實作。</a:t>
             </a:r>
-            <a:endParaRPr lang="en-US" dirty="0"/>
           </a:p>
         </p:txBody>
       </p:sp>
@@ -2440,7 +2287,6 @@
               <a:rPr lang="en-US" dirty="0"/>
               <a:t>取還車流程。取車：先看到這台車已記錄的損傷；拍照時疊著上一次同角度的照片，手機每 0.5 秒檢查畫質、讀車牌判斷角度與遠近、比對光線，不合格當場重拍；可補拍損傷特寫後確認取車。還車：按開始還車，計費就停止；5 分鐘內先拍卡夾和前後座，下車關門後鎖門，鎖門不用等照片上傳；再拍車外四角與停車位置。之後在歷史訂單看得到取還車確認單。這直接回應評論裡「鎖門後才要拍內部照片」的抱怨。</a:t>
             </a:r>
-            <a:endParaRPr lang="en-US" dirty="0"/>
           </a:p>
         </p:txBody>
       </p:sp>
@@ -2528,7 +2374,6 @@
               <a:rPr lang="en-US" dirty="0"/>
               <a:t>營運流程。VLM 檢查後寫入預警，資料庫自動開工單：車內髒汙排清潔、高嚴重度新車損排檢修，兩者都暫停出租；缺卡片或遺留物排聯絡用戶。營運人員在預警頁一次處理一筆取還車，最嚴重、等最久的排前面。確認是新車損時：嚴重的維持檢修工單，修好前暫停出租；小損傷恢復出租，並記成這台車的已知車損，下一位取車時會被提醒拍下來。駁回誤報時，工單自動取消、車輛恢復出租。左邊與右下都是原型的實機畫面。</a:t>
             </a:r>
-            <a:endParaRPr lang="en-US" dirty="0"/>
           </a:p>
         </p:txBody>
       </p:sp>
@@ -2606,6 +2451,7 @@
         <a:solidFill>
           <a:schemeClr val="bg1"/>
         </a:solidFill>
+        <a:effectLst/>
       </p:bgPr>
     </p:bg>
     <p:spTree>
@@ -2638,6 +2484,7 @@
         <a:solidFill>
           <a:schemeClr val="bg1"/>
         </a:solidFill>
+        <a:effectLst/>
       </p:bgPr>
     </p:bg>
     <p:spTree>
@@ -2675,7 +2522,7 @@
           <a:bodyPr wrap="square" lIns="0" tIns="0" rIns="0" bIns="0" rtlCol="0" anchor="ctr"/>
           <a:lstStyle/>
           <a:p>
-            <a:pPr indent="0" marL="0">
+            <a:pPr marL="0" indent="0">
               <a:buNone/>
             </a:pPr>
             <a:r>
@@ -2693,9 +2540,11 @@
       <p:sp>
         <p:nvSpPr>
           <p:cNvPr id="3" name="Text 1"/>
-          <p:cNvSpPr/>
+          <p:cNvSpPr>
+            <a:spLocks noGrp="1"/>
+          </p:cNvSpPr>
           <p:nvPr>
-            <p:ph idx="101" type="title" hasCustomPrompt="1"/>
+            <p:ph type="title" idx="101" hasCustomPrompt="1"/>
           </p:nvPr>
         </p:nvSpPr>
         <p:spPr>
@@ -2712,7 +2561,7 @@
         <p:txBody>
           <a:bodyPr wrap="square" rtlCol="0"/>
           <a:lstStyle>
-            <a:lvl1pPr algn="l" indent="0" marL="0">
+            <a:lvl1pPr marL="0" indent="0" algn="l">
               <a:buNone/>
               <a:defRPr lang="en-US" sz="2800" b="1" dirty="0">
                 <a:solidFill>
@@ -2722,7 +2571,7 @@
             </a:lvl1pPr>
           </a:lstStyle>
           <a:p>
-            <a:pPr algn="l" indent="0" marL="0">
+            <a:pPr marL="0" indent="0" algn="l">
               <a:buNone/>
             </a:pPr>
             <a:endParaRPr lang="en-US" sz="2800" dirty="0"/>
@@ -2749,7 +2598,7 @@
           </a:prstGeom>
           <a:extLst>
             <a:ext uri="{C572A759-6A51-4108-AA02-DFA0A04FC94B}">
-              <ma14:wrappingTextBoxFlag xmlns:ma14="http://schemas.microsoft.com/office/mac/drawingml/2011/main" val="0"/>
+              <ma14:wrappingTextBoxFlag xmlns:ma14="http://schemas.microsoft.com/office/mac/drawingml/2011/main" xmlns="" val="0"/>
             </a:ext>
           </a:extLst>
         </p:spPr>
@@ -2767,8 +2616,8 @@
           <a:p>
             <a:pPr algn="r"/>
             <a:fld id="{F7021451-1387-4CA6-816F-3879F97B5CBC}" type="slidenum">
-              <a:rPr b="0" lang="en-US"/>
-              <a:t>1003</a:t>
+              <a:rPr lang="en-US" b="0"/>
+              <a:t>‹#›</a:t>
             </a:fld>
             <a:endParaRPr lang="en-US"/>
           </a:p>
@@ -2790,6 +2639,7 @@
         <a:solidFill>
           <a:schemeClr val="bg1"/>
         </a:solidFill>
+        <a:effectLst/>
       </p:bgPr>
     </p:bg>
     <p:spTree>
@@ -2827,7 +2677,7 @@
           <a:bodyPr wrap="square" lIns="0" tIns="0" rIns="0" bIns="0" rtlCol="0" anchor="ctr"/>
           <a:lstStyle/>
           <a:p>
-            <a:pPr indent="0" marL="0">
+            <a:pPr marL="0" indent="0">
               <a:buNone/>
             </a:pPr>
             <a:r>
@@ -2845,9 +2695,11 @@
       <p:sp>
         <p:nvSpPr>
           <p:cNvPr id="3" name="Text 1"/>
-          <p:cNvSpPr/>
+          <p:cNvSpPr>
+            <a:spLocks noGrp="1"/>
+          </p:cNvSpPr>
           <p:nvPr>
-            <p:ph idx="101" type="body" hasCustomPrompt="1"/>
+            <p:ph type="body" idx="101" hasCustomPrompt="1"/>
           </p:nvPr>
         </p:nvSpPr>
         <p:spPr>
@@ -2864,7 +2716,7 @@
         <p:txBody>
           <a:bodyPr wrap="square" rtlCol="0"/>
           <a:lstStyle>
-            <a:lvl1pPr indent="0" marL="0">
+            <a:lvl1pPr marL="0" indent="0">
               <a:buNone/>
               <a:defRPr lang="en-US" sz="1300" b="1" dirty="0">
                 <a:solidFill>
@@ -2874,7 +2726,7 @@
             </a:lvl1pPr>
           </a:lstStyle>
           <a:p>
-            <a:pPr indent="0" marL="0">
+            <a:pPr marL="0" indent="0">
               <a:buNone/>
             </a:pPr>
             <a:endParaRPr lang="en-US" sz="1300" dirty="0"/>
@@ -2884,9 +2736,11 @@
       <p:sp>
         <p:nvSpPr>
           <p:cNvPr id="4" name="Text 1"/>
-          <p:cNvSpPr/>
+          <p:cNvSpPr>
+            <a:spLocks noGrp="1"/>
+          </p:cNvSpPr>
           <p:nvPr>
-            <p:ph idx="102" type="title" hasCustomPrompt="1"/>
+            <p:ph type="title" idx="102" hasCustomPrompt="1"/>
           </p:nvPr>
         </p:nvSpPr>
         <p:spPr>
@@ -2903,7 +2757,7 @@
         <p:txBody>
           <a:bodyPr wrap="square" rtlCol="0"/>
           <a:lstStyle>
-            <a:lvl1pPr algn="l" indent="0" marL="0">
+            <a:lvl1pPr marL="0" indent="0" algn="l">
               <a:buNone/>
               <a:defRPr lang="en-US" sz="2800" b="1" dirty="0">
                 <a:solidFill>
@@ -2913,7 +2767,7 @@
             </a:lvl1pPr>
           </a:lstStyle>
           <a:p>
-            <a:pPr algn="l" indent="0" marL="0">
+            <a:pPr marL="0" indent="0" algn="l">
               <a:buNone/>
             </a:pPr>
             <a:endParaRPr lang="en-US" sz="2800" dirty="0"/>
@@ -2940,7 +2794,7 @@
           </a:prstGeom>
           <a:extLst>
             <a:ext uri="{C572A759-6A51-4108-AA02-DFA0A04FC94B}">
-              <ma14:wrappingTextBoxFlag xmlns:ma14="http://schemas.microsoft.com/office/mac/drawingml/2011/main" val="0"/>
+              <ma14:wrappingTextBoxFlag xmlns:ma14="http://schemas.microsoft.com/office/mac/drawingml/2011/main" xmlns="" val="0"/>
             </a:ext>
           </a:extLst>
         </p:spPr>
@@ -2958,8 +2812,8 @@
           <a:p>
             <a:pPr algn="r"/>
             <a:fld id="{F7021451-1387-4CA6-816F-3879F97B5CBC}" type="slidenum">
-              <a:rPr b="0" lang="en-US"/>
-              <a:t>1004</a:t>
+              <a:rPr lang="en-US" b="0"/>
+              <a:t>‹#›</a:t>
             </a:fld>
             <a:endParaRPr lang="en-US"/>
           </a:p>
@@ -2976,6 +2830,11 @@
 <file path=ppt/slideMasters/slideMaster1.xml><?xml version="1.0" encoding="utf-8"?>
 <p:sldMaster xmlns:a="http://schemas.openxmlformats.org/drawingml/2006/main" xmlns:r="http://schemas.openxmlformats.org/officeDocument/2006/relationships" xmlns:p="http://schemas.openxmlformats.org/presentationml/2006/main">
   <p:cSld>
+    <p:bg>
+      <p:bgRef idx="1001">
+        <a:schemeClr val="bg1"/>
+      </p:bgRef>
+    </p:bg>
     <p:spTree>
       <p:nvGrpSpPr>
         <p:cNvPr id="1" name=""/>
@@ -3010,7 +2869,7 @@
           </a:prstGeom>
           <a:extLst>
             <a:ext uri="{C572A759-6A51-4108-AA02-DFA0A04FC94B}">
-              <ma14:wrappingTextBoxFlag xmlns:ma14="http://schemas.microsoft.com/office/mac/drawingml/2011/main" val="0"/>
+              <ma14:wrappingTextBoxFlag xmlns:ma14="http://schemas.microsoft.com/office/mac/drawingml/2011/main" xmlns="" val="0"/>
             </a:ext>
           </a:extLst>
         </p:spPr>
@@ -3028,8 +2887,8 @@
           <a:p>
             <a:pPr algn="r"/>
             <a:fld id="{F7021451-1387-4CA6-816F-3879F97B5CBC}" type="slidenum">
-              <a:rPr b="0" lang="en-US"/>
-              <a:t>null</a:t>
+              <a:rPr lang="en-US" b="0"/>
+              <a:t>‹#›</a:t>
             </a:fld>
             <a:endParaRPr lang="en-US"/>
           </a:p>
@@ -3336,7 +3195,7 @@
           <a:bodyPr wrap="square" lIns="0" tIns="0" rIns="0" bIns="0" rtlCol="0" anchor="t"/>
           <a:lstStyle/>
           <a:p>
-            <a:pPr indent="0" marL="0">
+            <a:pPr marL="0" indent="0">
               <a:buNone/>
             </a:pPr>
             <a:r>
@@ -3572,7 +3431,7 @@
           <a:bodyPr wrap="square" lIns="0" tIns="0" rIns="0" bIns="0" rtlCol="0" anchor="ctr"/>
           <a:lstStyle/>
           <a:p>
-            <a:pPr indent="0" marL="0">
+            <a:pPr marL="0" indent="0">
               <a:buNone/>
             </a:pPr>
             <a:r>
@@ -3608,7 +3467,7 @@
           <a:bodyPr wrap="square" lIns="0" tIns="0" rIns="0" bIns="0" rtlCol="0" anchor="ctr"/>
           <a:lstStyle/>
           <a:p>
-            <a:pPr indent="0" marL="0">
+            <a:pPr marL="0" indent="0">
               <a:buNone/>
             </a:pPr>
             <a:r>
@@ -3644,7 +3503,7 @@
           <a:bodyPr wrap="square" lIns="0" tIns="0" rIns="0" bIns="0" rtlCol="0" anchor="t"/>
           <a:lstStyle/>
           <a:p>
-            <a:pPr indent="0" marL="0">
+            <a:pPr marL="0" indent="0">
               <a:spcAft>
                 <a:spcPts val="600"/>
               </a:spcAft>
@@ -3661,7 +3520,7 @@
             <a:endParaRPr lang="zh-TW" sz="1700" dirty="0"/>
           </a:p>
           <a:p>
-            <a:pPr indent="0" marL="0">
+            <a:pPr marL="0" indent="0">
               <a:spcAft>
                 <a:spcPts val="600"/>
               </a:spcAft>
@@ -3700,7 +3559,7 @@
           <a:bodyPr wrap="square" lIns="0" tIns="0" rIns="0" bIns="0" rtlCol="0" anchor="t"/>
           <a:lstStyle/>
           <a:p>
-            <a:pPr indent="0" marL="0">
+            <a:pPr marL="0" indent="0">
               <a:buNone/>
             </a:pPr>
             <a:r>
@@ -3717,14 +3576,14 @@
       </p:sp>
       <p:pic>
         <p:nvPicPr>
-          <p:cNvPr id="15" name="Image 0" descr="主辦方照片：取車時車身左前完好（車牌已遮蔽）">    </p:cNvPr>
+          <p:cNvPr id="15" name="Image 0" descr="主辦方照片：取車時車身左前完好（車牌已遮蔽）"/>
           <p:cNvPicPr>
             <a:picLocks noChangeAspect="1"/>
           </p:cNvPicPr>
           <p:nvPr/>
         </p:nvPicPr>
         <p:blipFill>
-          <a:blip r:embed="rId1"/>
+          <a:blip r:embed="rId3"/>
           <a:stretch>
             <a:fillRect/>
           </a:stretch>
@@ -3764,7 +3623,7 @@
           <a:bodyPr wrap="square" lIns="0" tIns="0" rIns="0" bIns="0" rtlCol="0" anchor="ctr"/>
           <a:lstStyle/>
           <a:p>
-            <a:pPr algn="ctr" indent="0" marL="0">
+            <a:pPr marL="0" indent="0" algn="ctr">
               <a:buNone/>
             </a:pPr>
             <a:r>
@@ -3781,14 +3640,14 @@
       </p:sp>
       <p:pic>
         <p:nvPicPr>
-          <p:cNvPr id="17" name="Image 1" descr="主辦方照片：還車時車身左前嚴重受損">    </p:cNvPr>
+          <p:cNvPr id="17" name="Image 1" descr="主辦方照片：還車時車身左前嚴重受損"/>
           <p:cNvPicPr>
             <a:picLocks noChangeAspect="1"/>
           </p:cNvPicPr>
           <p:nvPr/>
         </p:nvPicPr>
         <p:blipFill>
-          <a:blip r:embed="rId2"/>
+          <a:blip r:embed="rId4"/>
           <a:stretch>
             <a:fillRect/>
           </a:stretch>
@@ -3828,7 +3687,7 @@
           <a:bodyPr wrap="square" lIns="0" tIns="0" rIns="0" bIns="0" rtlCol="0" anchor="ctr"/>
           <a:lstStyle/>
           <a:p>
-            <a:pPr algn="ctr" indent="0" marL="0">
+            <a:pPr marL="0" indent="0" algn="ctr">
               <a:buNone/>
             </a:pPr>
             <a:r>
@@ -3868,7 +3727,7 @@
           <a:bodyPr wrap="square" lIns="0" tIns="0" rIns="0" bIns="0" rtlCol="0" anchor="ctr"/>
           <a:lstStyle/>
           <a:p>
-            <a:pPr algn="ctr" indent="0" marL="0">
+            <a:pPr marL="0" indent="0" algn="ctr">
               <a:buNone/>
             </a:pPr>
             <a:r>
@@ -3904,7 +3763,7 @@
           <a:bodyPr wrap="square" lIns="0" tIns="0" rIns="0" bIns="0" rtlCol="0" anchor="t"/>
           <a:lstStyle/>
           <a:p>
-            <a:pPr algn="ctr" indent="0" marL="0">
+            <a:pPr marL="0" indent="0" algn="ctr">
               <a:buNone/>
             </a:pPr>
             <a:r>
@@ -3947,9 +3806,11 @@
       <p:sp>
         <p:nvSpPr>
           <p:cNvPr id="2" name="Text 1"/>
-          <p:cNvSpPr/>
+          <p:cNvSpPr>
+            <a:spLocks noGrp="1"/>
+          </p:cNvSpPr>
           <p:nvPr>
-            <p:ph idx="101" type="body" hasCustomPrompt="1"/>
+            <p:ph type="body" idx="101" hasCustomPrompt="1"/>
           </p:nvPr>
         </p:nvSpPr>
         <p:spPr>
@@ -3967,7 +3828,7 @@
           <a:bodyPr wrap="square" lIns="0" tIns="0" rIns="0" bIns="0" rtlCol="0" anchor="ctr"/>
           <a:lstStyle/>
           <a:p>
-            <a:pPr indent="0" marL="0">
+            <a:pPr marL="0" indent="0">
               <a:buNone/>
             </a:pPr>
             <a:r>
@@ -3985,9 +3846,11 @@
       <p:sp>
         <p:nvSpPr>
           <p:cNvPr id="3" name="Text 1"/>
-          <p:cNvSpPr/>
+          <p:cNvSpPr>
+            <a:spLocks noGrp="1"/>
+          </p:cNvSpPr>
           <p:nvPr>
-            <p:ph idx="102" type="title" hasCustomPrompt="1"/>
+            <p:ph type="title" idx="102" hasCustomPrompt="1"/>
           </p:nvPr>
         </p:nvSpPr>
         <p:spPr>
@@ -4005,7 +3868,7 @@
           <a:bodyPr wrap="square" lIns="0" tIns="0" rIns="0" bIns="0" rtlCol="0" anchor="ctr"/>
           <a:lstStyle/>
           <a:p>
-            <a:pPr algn="l" indent="0" marL="0">
+            <a:pPr marL="0" indent="0" algn="l">
               <a:buNone/>
             </a:pPr>
             <a:r>
@@ -4101,14 +3964,14 @@
       </p:sp>
       <p:pic>
         <p:nvPicPr>
-          <p:cNvPr id="7" name="Image 0" descr="preencoded.png">    </p:cNvPr>
+          <p:cNvPr id="7" name="Image 0" descr="preencoded.png"/>
           <p:cNvPicPr>
             <a:picLocks noChangeAspect="1"/>
           </p:cNvPicPr>
           <p:nvPr/>
         </p:nvPicPr>
         <p:blipFill>
-          <a:blip r:embed="rId1"/>
+          <a:blip r:embed="rId3"/>
           <a:stretch>
             <a:fillRect/>
           </a:stretch>
@@ -4144,7 +4007,7 @@
           <a:bodyPr wrap="square" lIns="0" tIns="0" rIns="0" bIns="0" rtlCol="0" anchor="t"/>
           <a:lstStyle/>
           <a:p>
-            <a:pPr indent="0" marL="0">
+            <a:pPr marL="0" indent="0">
               <a:buNone/>
             </a:pPr>
             <a:r>
@@ -4158,7 +4021,7 @@
             <a:endParaRPr lang="zh-TW" sz="1400" dirty="0"/>
           </a:p>
           <a:p>
-            <a:pPr indent="0" marL="0">
+            <a:pPr marL="0" indent="0">
               <a:buNone/>
             </a:pPr>
             <a:r>
@@ -4189,15 +4052,27 @@
         </p:nvGraphicFramePr>
         <p:xfrm>
           <a:off x="822960" y="2286000"/>
-          <a:ext cx="4526280" cy="914400"/>
+          <a:ext cx="4526280" cy="2103120"/>
         </p:xfrm>
         <a:graphic>
           <a:graphicData uri="http://schemas.openxmlformats.org/drawingml/2006/table">
             <a:tbl>
               <a:tblPr/>
               <a:tblGrid>
-                <a:gridCol w="1097280"/>
-                <a:gridCol w="3429000"/>
+                <a:gridCol w="1097280">
+                  <a:extLst>
+                    <a:ext uri="{9D8B030D-6E8A-4147-A177-3AD203B41FA5}">
+                      <a16:colId xmlns:a16="http://schemas.microsoft.com/office/drawing/2014/main" val="20000"/>
+                    </a:ext>
+                  </a:extLst>
+                </a:gridCol>
+                <a:gridCol w="3429000">
+                  <a:extLst>
+                    <a:ext uri="{9D8B030D-6E8A-4147-A177-3AD203B41FA5}">
+                      <a16:colId xmlns:a16="http://schemas.microsoft.com/office/drawing/2014/main" val="20001"/>
+                    </a:ext>
+                  </a:extLst>
+                </a:gridCol>
               </a:tblGrid>
               <a:tr h="274320">
                 <a:tc>
@@ -4205,7 +4080,7 @@
                     <a:bodyPr/>
                     <a:lstStyle/>
                     <a:p>
-                      <a:pPr indent="0" marL="0">
+                      <a:pPr marL="0" indent="0">
                         <a:buNone/>
                       </a:pPr>
                       <a:r>
@@ -4273,7 +4148,7 @@
                     <a:bodyPr/>
                     <a:lstStyle/>
                     <a:p>
-                      <a:pPr indent="0" marL="0">
+                      <a:pPr marL="0" indent="0">
                         <a:buNone/>
                       </a:pPr>
                       <a:r>
@@ -4336,6 +4211,11 @@
                     </a:solidFill>
                   </a:tcPr>
                 </a:tc>
+                <a:extLst>
+                  <a:ext uri="{0D108BD9-81ED-4DB2-BD59-A6C34878D82A}">
+                    <a16:rowId xmlns:a16="http://schemas.microsoft.com/office/drawing/2014/main" val="10000"/>
+                  </a:ext>
+                </a:extLst>
               </a:tr>
               <a:tr h="457200">
                 <a:tc>
@@ -4343,7 +4223,7 @@
                     <a:bodyPr/>
                     <a:lstStyle/>
                     <a:p>
-                      <a:pPr indent="0" marL="0">
+                      <a:pPr marL="0" indent="0">
                         <a:buNone/>
                       </a:pPr>
                       <a:r>
@@ -4411,7 +4291,7 @@
                     <a:bodyPr/>
                     <a:lstStyle/>
                     <a:p>
-                      <a:pPr indent="0" marL="0">
+                      <a:pPr marL="0" indent="0">
                         <a:buNone/>
                       </a:pPr>
                       <a:r>
@@ -4432,7 +4312,7 @@
                       </a:endParaRPr>
                     </a:p>
                     <a:p>
-                      <a:pPr indent="0" marL="0">
+                      <a:pPr marL="0" indent="0">
                         <a:buNone/>
                       </a:pPr>
                       <a:r>
@@ -4495,6 +4375,11 @@
                     </a:solidFill>
                   </a:tcPr>
                 </a:tc>
+                <a:extLst>
+                  <a:ext uri="{0D108BD9-81ED-4DB2-BD59-A6C34878D82A}">
+                    <a16:rowId xmlns:a16="http://schemas.microsoft.com/office/drawing/2014/main" val="10001"/>
+                  </a:ext>
+                </a:extLst>
               </a:tr>
               <a:tr h="457200">
                 <a:tc>
@@ -4502,7 +4387,7 @@
                     <a:bodyPr/>
                     <a:lstStyle/>
                     <a:p>
-                      <a:pPr indent="0" marL="0">
+                      <a:pPr marL="0" indent="0">
                         <a:buNone/>
                       </a:pPr>
                       <a:r>
@@ -4570,7 +4455,7 @@
                     <a:bodyPr/>
                     <a:lstStyle/>
                     <a:p>
-                      <a:pPr indent="0" marL="0">
+                      <a:pPr marL="0" indent="0">
                         <a:buNone/>
                       </a:pPr>
                       <a:r>
@@ -4591,7 +4476,7 @@
                       </a:endParaRPr>
                     </a:p>
                     <a:p>
-                      <a:pPr indent="0" marL="0">
+                      <a:pPr marL="0" indent="0">
                         <a:buNone/>
                       </a:pPr>
                       <a:r>
@@ -4654,6 +4539,11 @@
                     </a:solidFill>
                   </a:tcPr>
                 </a:tc>
+                <a:extLst>
+                  <a:ext uri="{0D108BD9-81ED-4DB2-BD59-A6C34878D82A}">
+                    <a16:rowId xmlns:a16="http://schemas.microsoft.com/office/drawing/2014/main" val="10002"/>
+                  </a:ext>
+                </a:extLst>
               </a:tr>
               <a:tr h="457200">
                 <a:tc>
@@ -4661,7 +4551,7 @@
                     <a:bodyPr/>
                     <a:lstStyle/>
                     <a:p>
-                      <a:pPr indent="0" marL="0">
+                      <a:pPr marL="0" indent="0">
                         <a:buNone/>
                       </a:pPr>
                       <a:r>
@@ -4729,7 +4619,7 @@
                     <a:bodyPr/>
                     <a:lstStyle/>
                     <a:p>
-                      <a:pPr indent="0" marL="0">
+                      <a:pPr marL="0" indent="0">
                         <a:buNone/>
                       </a:pPr>
                       <a:r>
@@ -4750,7 +4640,7 @@
                       </a:endParaRPr>
                     </a:p>
                     <a:p>
-                      <a:pPr indent="0" marL="0">
+                      <a:pPr marL="0" indent="0">
                         <a:buNone/>
                       </a:pPr>
                       <a:r>
@@ -4813,6 +4703,11 @@
                     </a:solidFill>
                   </a:tcPr>
                 </a:tc>
+                <a:extLst>
+                  <a:ext uri="{0D108BD9-81ED-4DB2-BD59-A6C34878D82A}">
+                    <a16:rowId xmlns:a16="http://schemas.microsoft.com/office/drawing/2014/main" val="10003"/>
+                  </a:ext>
+                </a:extLst>
               </a:tr>
               <a:tr h="457200">
                 <a:tc>
@@ -4820,7 +4715,7 @@
                     <a:bodyPr/>
                     <a:lstStyle/>
                     <a:p>
-                      <a:pPr indent="0" marL="0">
+                      <a:pPr marL="0" indent="0">
                         <a:buNone/>
                       </a:pPr>
                       <a:r>
@@ -4888,7 +4783,7 @@
                     <a:bodyPr/>
                     <a:lstStyle/>
                     <a:p>
-                      <a:pPr indent="0" marL="0">
+                      <a:pPr marL="0" indent="0">
                         <a:buNone/>
                       </a:pPr>
                       <a:r>
@@ -4909,7 +4804,7 @@
                       </a:endParaRPr>
                     </a:p>
                     <a:p>
-                      <a:pPr indent="0" marL="0">
+                      <a:pPr marL="0" indent="0">
                         <a:buNone/>
                       </a:pPr>
                       <a:r>
@@ -4972,6 +4867,11 @@
                     </a:solidFill>
                   </a:tcPr>
                 </a:tc>
+                <a:extLst>
+                  <a:ext uri="{0D108BD9-81ED-4DB2-BD59-A6C34878D82A}">
+                    <a16:rowId xmlns:a16="http://schemas.microsoft.com/office/drawing/2014/main" val="10004"/>
+                  </a:ext>
+                </a:extLst>
               </a:tr>
             </a:tbl>
           </a:graphicData>
@@ -5004,14 +4904,14 @@
       </p:sp>
       <p:pic>
         <p:nvPicPr>
-          <p:cNvPr id="11" name="Image 1" descr="preencoded.png">    </p:cNvPr>
+          <p:cNvPr id="9" name="Image 1" descr="preencoded.png"/>
           <p:cNvPicPr>
             <a:picLocks noChangeAspect="1"/>
           </p:cNvPicPr>
           <p:nvPr/>
         </p:nvPicPr>
         <p:blipFill>
-          <a:blip r:embed="rId2"/>
+          <a:blip r:embed="rId4"/>
           <a:stretch>
             <a:fillRect/>
           </a:stretch>
@@ -5047,7 +4947,7 @@
           <a:bodyPr wrap="square" lIns="0" tIns="0" rIns="0" bIns="0" rtlCol="0" anchor="t"/>
           <a:lstStyle/>
           <a:p>
-            <a:pPr indent="0" marL="0">
+            <a:pPr marL="0" indent="0">
               <a:buNone/>
             </a:pPr>
             <a:r>
@@ -5061,7 +4961,7 @@
             <a:endParaRPr lang="zh-TW" sz="1400" dirty="0"/>
           </a:p>
           <a:p>
-            <a:pPr indent="0" marL="0">
+            <a:pPr marL="0" indent="0">
               <a:buNone/>
             </a:pPr>
             <a:r>
@@ -5092,15 +4992,27 @@
         </p:nvGraphicFramePr>
         <p:xfrm>
           <a:off x="6172200" y="2286000"/>
-          <a:ext cx="5196535" cy="914400"/>
+          <a:ext cx="5196535" cy="1417320"/>
         </p:xfrm>
         <a:graphic>
           <a:graphicData uri="http://schemas.openxmlformats.org/drawingml/2006/table">
             <a:tbl>
               <a:tblPr/>
               <a:tblGrid>
-                <a:gridCol w="1600200"/>
-                <a:gridCol w="3596335"/>
+                <a:gridCol w="1600200">
+                  <a:extLst>
+                    <a:ext uri="{9D8B030D-6E8A-4147-A177-3AD203B41FA5}">
+                      <a16:colId xmlns:a16="http://schemas.microsoft.com/office/drawing/2014/main" val="20000"/>
+                    </a:ext>
+                  </a:extLst>
+                </a:gridCol>
+                <a:gridCol w="3596335">
+                  <a:extLst>
+                    <a:ext uri="{9D8B030D-6E8A-4147-A177-3AD203B41FA5}">
+                      <a16:colId xmlns:a16="http://schemas.microsoft.com/office/drawing/2014/main" val="20001"/>
+                    </a:ext>
+                  </a:extLst>
+                </a:gridCol>
               </a:tblGrid>
               <a:tr h="283464">
                 <a:tc>
@@ -5108,7 +5020,7 @@
                     <a:bodyPr/>
                     <a:lstStyle/>
                     <a:p>
-                      <a:pPr indent="0" marL="0">
+                      <a:pPr marL="0" indent="0">
                         <a:buNone/>
                       </a:pPr>
                       <a:r>
@@ -5176,7 +5088,7 @@
                     <a:bodyPr/>
                     <a:lstStyle/>
                     <a:p>
-                      <a:pPr indent="0" marL="0">
+                      <a:pPr marL="0" indent="0">
                         <a:buNone/>
                       </a:pPr>
                       <a:r>
@@ -5239,6 +5151,11 @@
                     </a:solidFill>
                   </a:tcPr>
                 </a:tc>
+                <a:extLst>
+                  <a:ext uri="{0D108BD9-81ED-4DB2-BD59-A6C34878D82A}">
+                    <a16:rowId xmlns:a16="http://schemas.microsoft.com/office/drawing/2014/main" val="10000"/>
+                  </a:ext>
+                </a:extLst>
               </a:tr>
               <a:tr h="283464">
                 <a:tc>
@@ -5246,7 +5163,7 @@
                     <a:bodyPr/>
                     <a:lstStyle/>
                     <a:p>
-                      <a:pPr indent="0" marL="0">
+                      <a:pPr marL="0" indent="0">
                         <a:buNone/>
                       </a:pPr>
                       <a:r>
@@ -5314,7 +5231,7 @@
                     <a:bodyPr/>
                     <a:lstStyle/>
                     <a:p>
-                      <a:pPr indent="0" marL="0">
+                      <a:pPr marL="0" indent="0">
                         <a:buNone/>
                       </a:pPr>
                       <a:r>
@@ -5377,6 +5294,11 @@
                     </a:solidFill>
                   </a:tcPr>
                 </a:tc>
+                <a:extLst>
+                  <a:ext uri="{0D108BD9-81ED-4DB2-BD59-A6C34878D82A}">
+                    <a16:rowId xmlns:a16="http://schemas.microsoft.com/office/drawing/2014/main" val="10001"/>
+                  </a:ext>
+                </a:extLst>
               </a:tr>
               <a:tr h="283464">
                 <a:tc>
@@ -5384,7 +5306,7 @@
                     <a:bodyPr/>
                     <a:lstStyle/>
                     <a:p>
-                      <a:pPr indent="0" marL="0">
+                      <a:pPr marL="0" indent="0">
                         <a:buNone/>
                       </a:pPr>
                       <a:r>
@@ -5452,7 +5374,7 @@
                     <a:bodyPr/>
                     <a:lstStyle/>
                     <a:p>
-                      <a:pPr indent="0" marL="0">
+                      <a:pPr marL="0" indent="0">
                         <a:buNone/>
                       </a:pPr>
                       <a:r>
@@ -5515,6 +5437,11 @@
                     </a:solidFill>
                   </a:tcPr>
                 </a:tc>
+                <a:extLst>
+                  <a:ext uri="{0D108BD9-81ED-4DB2-BD59-A6C34878D82A}">
+                    <a16:rowId xmlns:a16="http://schemas.microsoft.com/office/drawing/2014/main" val="10002"/>
+                  </a:ext>
+                </a:extLst>
               </a:tr>
               <a:tr h="283464">
                 <a:tc>
@@ -5522,7 +5449,7 @@
                     <a:bodyPr/>
                     <a:lstStyle/>
                     <a:p>
-                      <a:pPr indent="0" marL="0">
+                      <a:pPr marL="0" indent="0">
                         <a:buNone/>
                       </a:pPr>
                       <a:r>
@@ -5590,7 +5517,7 @@
                     <a:bodyPr/>
                     <a:lstStyle/>
                     <a:p>
-                      <a:pPr indent="0" marL="0">
+                      <a:pPr marL="0" indent="0">
                         <a:buNone/>
                       </a:pPr>
                       <a:r>
@@ -5653,6 +5580,11 @@
                     </a:solidFill>
                   </a:tcPr>
                 </a:tc>
+                <a:extLst>
+                  <a:ext uri="{0D108BD9-81ED-4DB2-BD59-A6C34878D82A}">
+                    <a16:rowId xmlns:a16="http://schemas.microsoft.com/office/drawing/2014/main" val="10003"/>
+                  </a:ext>
+                </a:extLst>
               </a:tr>
               <a:tr h="283464">
                 <a:tc>
@@ -5660,7 +5592,7 @@
                     <a:bodyPr/>
                     <a:lstStyle/>
                     <a:p>
-                      <a:pPr indent="0" marL="0">
+                      <a:pPr marL="0" indent="0">
                         <a:buNone/>
                       </a:pPr>
                       <a:r>
@@ -5728,7 +5660,7 @@
                     <a:bodyPr/>
                     <a:lstStyle/>
                     <a:p>
-                      <a:pPr indent="0" marL="0">
+                      <a:pPr marL="0" indent="0">
                         <a:buNone/>
                       </a:pPr>
                       <a:r>
@@ -5791,6 +5723,11 @@
                     </a:solidFill>
                   </a:tcPr>
                 </a:tc>
+                <a:extLst>
+                  <a:ext uri="{0D108BD9-81ED-4DB2-BD59-A6C34878D82A}">
+                    <a16:rowId xmlns:a16="http://schemas.microsoft.com/office/drawing/2014/main" val="10004"/>
+                  </a:ext>
+                </a:extLst>
               </a:tr>
             </a:tbl>
           </a:graphicData>
@@ -5908,14 +5845,14 @@
       </p:sp>
       <p:pic>
         <p:nvPicPr>
-          <p:cNvPr id="17" name="Image 2" descr="preencoded.png">    </p:cNvPr>
+          <p:cNvPr id="17" name="Image 2" descr="preencoded.png"/>
           <p:cNvPicPr>
             <a:picLocks noChangeAspect="1"/>
           </p:cNvPicPr>
           <p:nvPr/>
         </p:nvPicPr>
         <p:blipFill>
-          <a:blip r:embed="rId3"/>
+          <a:blip r:embed="rId5"/>
           <a:stretch>
             <a:fillRect/>
           </a:stretch>
@@ -5951,7 +5888,7 @@
           <a:bodyPr wrap="square" lIns="0" tIns="0" rIns="0" bIns="0" rtlCol="0" anchor="ctr"/>
           <a:lstStyle/>
           <a:p>
-            <a:pPr indent="0" marL="0">
+            <a:pPr marL="0" indent="0">
               <a:buNone/>
             </a:pPr>
             <a:r>
@@ -5987,7 +5924,7 @@
           <a:bodyPr wrap="square" lIns="0" tIns="0" rIns="0" bIns="0" rtlCol="0" anchor="t"/>
           <a:lstStyle/>
           <a:p>
-            <a:pPr indent="0" marL="0">
+            <a:pPr marL="0" indent="0">
               <a:buNone/>
             </a:pPr>
             <a:r>
@@ -6031,7 +5968,7 @@
       </p:sp>
       <p:sp>
         <p:nvSpPr>
-          <p:cNvPr id="21" name="Shape 14"/>
+          <p:cNvPr id="13" name="Shape 14"/>
           <p:cNvSpPr/>
           <p:nvPr/>
         </p:nvSpPr>
@@ -6056,14 +5993,14 @@
       </p:sp>
       <p:pic>
         <p:nvPicPr>
-          <p:cNvPr id="22" name="Image 3" descr="preencoded.png">    </p:cNvPr>
+          <p:cNvPr id="22" name="Image 3" descr="preencoded.png"/>
           <p:cNvPicPr>
             <a:picLocks noChangeAspect="1"/>
           </p:cNvPicPr>
           <p:nvPr/>
         </p:nvPicPr>
         <p:blipFill>
-          <a:blip r:embed="rId4"/>
+          <a:blip r:embed="rId6"/>
           <a:stretch>
             <a:fillRect/>
           </a:stretch>
@@ -6099,7 +6036,7 @@
           <a:bodyPr wrap="square" lIns="0" tIns="0" rIns="0" bIns="0" rtlCol="0" anchor="ctr"/>
           <a:lstStyle/>
           <a:p>
-            <a:pPr indent="0" marL="0">
+            <a:pPr marL="0" indent="0">
               <a:buNone/>
             </a:pPr>
             <a:r>
@@ -6135,7 +6072,7 @@
           <a:bodyPr wrap="square" lIns="0" tIns="0" rIns="0" bIns="0" rtlCol="0" anchor="t"/>
           <a:lstStyle/>
           <a:p>
-            <a:pPr indent="0" marL="0">
+            <a:pPr marL="0" indent="0">
               <a:buNone/>
             </a:pPr>
             <a:r>
@@ -6204,14 +6141,14 @@
       </p:sp>
       <p:pic>
         <p:nvPicPr>
-          <p:cNvPr id="27" name="Image 4" descr="preencoded.png">    </p:cNvPr>
+          <p:cNvPr id="27" name="Image 4" descr="preencoded.png"/>
           <p:cNvPicPr>
             <a:picLocks noChangeAspect="1"/>
           </p:cNvPicPr>
           <p:nvPr/>
         </p:nvPicPr>
         <p:blipFill>
-          <a:blip r:embed="rId5"/>
+          <a:blip r:embed="rId3"/>
           <a:stretch>
             <a:fillRect/>
           </a:stretch>
@@ -6247,7 +6184,7 @@
           <a:bodyPr wrap="square" lIns="0" tIns="0" rIns="0" bIns="0" rtlCol="0" anchor="ctr"/>
           <a:lstStyle/>
           <a:p>
-            <a:pPr indent="0" marL="0">
+            <a:pPr marL="0" indent="0">
               <a:buNone/>
             </a:pPr>
             <a:r>
@@ -6283,7 +6220,7 @@
           <a:bodyPr wrap="square" lIns="0" tIns="0" rIns="0" bIns="0" rtlCol="0" anchor="t"/>
           <a:lstStyle/>
           <a:p>
-            <a:pPr indent="0" marL="0">
+            <a:pPr marL="0" indent="0">
               <a:buNone/>
             </a:pPr>
             <a:r>
@@ -6352,14 +6289,14 @@
       </p:sp>
       <p:pic>
         <p:nvPicPr>
-          <p:cNvPr id="32" name="Image 5" descr="preencoded.png">    </p:cNvPr>
+          <p:cNvPr id="32" name="Image 5" descr="preencoded.png"/>
           <p:cNvPicPr>
             <a:picLocks noChangeAspect="1"/>
           </p:cNvPicPr>
           <p:nvPr/>
         </p:nvPicPr>
         <p:blipFill>
-          <a:blip r:embed="rId6"/>
+          <a:blip r:embed="rId7"/>
           <a:stretch>
             <a:fillRect/>
           </a:stretch>
@@ -6395,7 +6332,7 @@
           <a:bodyPr wrap="square" lIns="0" tIns="0" rIns="0" bIns="0" rtlCol="0" anchor="ctr"/>
           <a:lstStyle/>
           <a:p>
-            <a:pPr indent="0" marL="0">
+            <a:pPr marL="0" indent="0">
               <a:buNone/>
             </a:pPr>
             <a:r>
@@ -6431,7 +6368,7 @@
           <a:bodyPr wrap="square" lIns="0" tIns="0" rIns="0" bIns="0" rtlCol="0" anchor="t"/>
           <a:lstStyle/>
           <a:p>
-            <a:pPr indent="0" marL="0">
+            <a:pPr marL="0" indent="0">
               <a:buNone/>
             </a:pPr>
             <a:r>
@@ -6494,7 +6431,7 @@
           <a:bodyPr wrap="square" lIns="0" tIns="0" rIns="0" bIns="0" rtlCol="0" anchor="ctr"/>
           <a:lstStyle/>
           <a:p>
-            <a:pPr indent="0" marL="0">
+            <a:pPr marL="0" indent="0">
               <a:buNone/>
             </a:pPr>
             <a:r>
@@ -6519,7 +6456,7 @@
       </p:sp>
       <p:sp>
         <p:nvSpPr>
-          <p:cNvPr id="25" name="Slide Number Placeholder 0"/>
+          <p:cNvPr id="37" name="Slide Number Placeholder 0"/>
           <p:cNvSpPr>
             <a:spLocks noGrp="1"/>
           </p:cNvSpPr>
@@ -6537,7 +6474,7 @@
           </a:prstGeom>
           <a:extLst>
             <a:ext uri="{C572A759-6A51-4108-AA02-DFA0A04FC94B}">
-              <ma14:wrappingTextBoxFlag xmlns:ma14="http://schemas.microsoft.com/office/mac/drawingml/2011/main" val="0"/>
+              <ma14:wrappingTextBoxFlag xmlns:ma14="http://schemas.microsoft.com/office/mac/drawingml/2011/main" xmlns="" val="0"/>
             </a:ext>
           </a:extLst>
         </p:spPr>
@@ -6555,7 +6492,7 @@
           <a:p>
             <a:pPr algn="r"/>
             <a:fld id="{F7021451-1387-4CA6-816F-3879F97B5CBC}" type="slidenum">
-              <a:rPr b="0" lang="en-US"/>
+              <a:rPr lang="en-US" b="0"/>
               <a:t>10</a:t>
             </a:fld>
             <a:endParaRPr lang="en-US"/>
@@ -6590,9 +6527,11 @@
       <p:sp>
         <p:nvSpPr>
           <p:cNvPr id="2" name="Text 1"/>
-          <p:cNvSpPr/>
+          <p:cNvSpPr>
+            <a:spLocks noGrp="1"/>
+          </p:cNvSpPr>
           <p:nvPr>
-            <p:ph idx="101" type="body" hasCustomPrompt="1"/>
+            <p:ph type="body" idx="101" hasCustomPrompt="1"/>
           </p:nvPr>
         </p:nvSpPr>
         <p:spPr>
@@ -6610,7 +6549,7 @@
           <a:bodyPr wrap="square" lIns="0" tIns="0" rIns="0" bIns="0" rtlCol="0" anchor="ctr"/>
           <a:lstStyle/>
           <a:p>
-            <a:pPr indent="0" marL="0">
+            <a:pPr marL="0" indent="0">
               <a:buNone/>
             </a:pPr>
             <a:r>
@@ -6628,9 +6567,11 @@
       <p:sp>
         <p:nvSpPr>
           <p:cNvPr id="3" name="Text 1"/>
-          <p:cNvSpPr/>
+          <p:cNvSpPr>
+            <a:spLocks noGrp="1"/>
+          </p:cNvSpPr>
           <p:nvPr>
-            <p:ph idx="102" type="title" hasCustomPrompt="1"/>
+            <p:ph type="title" idx="102" hasCustomPrompt="1"/>
           </p:nvPr>
         </p:nvSpPr>
         <p:spPr>
@@ -6648,7 +6589,7 @@
           <a:bodyPr wrap="square" lIns="0" tIns="0" rIns="0" bIns="0" rtlCol="0" anchor="ctr"/>
           <a:lstStyle/>
           <a:p>
-            <a:pPr algn="l" indent="0" marL="0">
+            <a:pPr marL="0" indent="0" algn="l">
               <a:buNone/>
             </a:pPr>
             <a:r>
@@ -6711,7 +6652,7 @@
           <a:bodyPr wrap="square" lIns="0" tIns="0" rIns="0" bIns="0" rtlCol="0" anchor="ctr"/>
           <a:lstStyle/>
           <a:p>
-            <a:pPr indent="0" marL="0">
+            <a:pPr marL="0" indent="0">
               <a:buNone/>
             </a:pPr>
             <a:r>
@@ -6747,7 +6688,7 @@
           <a:bodyPr wrap="square" lIns="0" tIns="0" rIns="0" bIns="0" rtlCol="0" anchor="t"/>
           <a:lstStyle/>
           <a:p>
-            <a:pPr indent="0" marL="0">
+            <a:pPr marL="0" indent="0">
               <a:buNone/>
             </a:pPr>
             <a:r>
@@ -6761,7 +6702,7 @@
             <a:endParaRPr lang="zh-TW" sz="1400" dirty="0"/>
           </a:p>
           <a:p>
-            <a:pPr indent="0" marL="0">
+            <a:pPr marL="0" indent="0">
               <a:buNone/>
             </a:pPr>
             <a:r>
@@ -6775,7 +6716,7 @@
             <a:endParaRPr lang="zh-TW" sz="1400" dirty="0"/>
           </a:p>
           <a:p>
-            <a:pPr indent="0" marL="0">
+            <a:pPr marL="0" indent="0">
               <a:buNone/>
             </a:pPr>
             <a:r>
@@ -6838,7 +6779,7 @@
           <a:bodyPr wrap="square" lIns="0" tIns="0" rIns="0" bIns="0" rtlCol="0" anchor="ctr"/>
           <a:lstStyle/>
           <a:p>
-            <a:pPr indent="0" marL="0">
+            <a:pPr marL="0" indent="0">
               <a:buNone/>
             </a:pPr>
             <a:r>
@@ -6874,7 +6815,7 @@
           <a:bodyPr wrap="square" lIns="0" tIns="0" rIns="0" bIns="0" rtlCol="0" anchor="t"/>
           <a:lstStyle/>
           <a:p>
-            <a:pPr indent="0" marL="0">
+            <a:pPr marL="0" indent="0">
               <a:buNone/>
             </a:pPr>
             <a:r>
@@ -6888,7 +6829,7 @@
             <a:endParaRPr lang="zh-TW" sz="1400" dirty="0"/>
           </a:p>
           <a:p>
-            <a:pPr indent="0" marL="0">
+            <a:pPr marL="0" indent="0">
               <a:buNone/>
             </a:pPr>
             <a:r>
@@ -6902,7 +6843,7 @@
             <a:endParaRPr lang="zh-TW" sz="1400" dirty="0"/>
           </a:p>
           <a:p>
-            <a:pPr indent="0" marL="0">
+            <a:pPr marL="0" indent="0">
               <a:buNone/>
             </a:pPr>
             <a:r>
@@ -6938,7 +6879,7 @@
           <a:bodyPr wrap="square" lIns="0" tIns="0" rIns="0" bIns="0" rtlCol="0" anchor="t"/>
           <a:lstStyle/>
           <a:p>
-            <a:pPr indent="0" marL="0">
+            <a:pPr marL="0" indent="0">
               <a:buNone/>
             </a:pPr>
             <a:r>
@@ -6982,14 +6923,14 @@
       </p:sp>
       <p:pic>
         <p:nvPicPr>
-          <p:cNvPr id="12" name="Image 0" descr="主辦方照片：取車時車身左前完好（車牌已遮蔽）">    </p:cNvPr>
+          <p:cNvPr id="12" name="Image 0" descr="主辦方照片：取車時車身左前完好（車牌已遮蔽）"/>
           <p:cNvPicPr>
             <a:picLocks noChangeAspect="1"/>
           </p:cNvPicPr>
           <p:nvPr/>
         </p:nvPicPr>
         <p:blipFill>
-          <a:blip r:embed="rId1"/>
+          <a:blip r:embed="rId3"/>
           <a:stretch>
             <a:fillRect/>
           </a:stretch>
@@ -7029,7 +6970,7 @@
           <a:bodyPr wrap="square" lIns="0" tIns="0" rIns="0" bIns="0" rtlCol="0" anchor="ctr"/>
           <a:lstStyle/>
           <a:p>
-            <a:pPr algn="ctr" indent="0" marL="0">
+            <a:pPr marL="0" indent="0" algn="ctr">
               <a:buNone/>
             </a:pPr>
             <a:r>
@@ -7046,14 +6987,14 @@
       </p:sp>
       <p:pic>
         <p:nvPicPr>
-          <p:cNvPr id="14" name="Image 1" descr="主辦方照片：還車時車身左前嚴重受損">    </p:cNvPr>
+          <p:cNvPr id="14" name="Image 1" descr="主辦方照片：還車時車身左前嚴重受損"/>
           <p:cNvPicPr>
             <a:picLocks noChangeAspect="1"/>
           </p:cNvPicPr>
           <p:nvPr/>
         </p:nvPicPr>
         <p:blipFill>
-          <a:blip r:embed="rId2"/>
+          <a:blip r:embed="rId4"/>
           <a:stretch>
             <a:fillRect/>
           </a:stretch>
@@ -7093,7 +7034,7 @@
           <a:bodyPr wrap="square" lIns="0" tIns="0" rIns="0" bIns="0" rtlCol="0" anchor="ctr"/>
           <a:lstStyle/>
           <a:p>
-            <a:pPr algn="ctr" indent="0" marL="0">
+            <a:pPr marL="0" indent="0" algn="ctr">
               <a:buNone/>
             </a:pPr>
             <a:r>
@@ -7129,7 +7070,7 @@
           <a:bodyPr wrap="square" lIns="0" tIns="0" rIns="0" bIns="0" rtlCol="0" anchor="t"/>
           <a:lstStyle/>
           <a:p>
-            <a:pPr indent="0" marL="0">
+            <a:pPr marL="0" indent="0">
               <a:buNone/>
             </a:pPr>
             <a:r>
@@ -7165,7 +7106,7 @@
           <a:bodyPr wrap="square" lIns="0" tIns="0" rIns="0" bIns="0" rtlCol="0" anchor="ctr"/>
           <a:lstStyle/>
           <a:p>
-            <a:pPr indent="0" marL="0">
+            <a:pPr marL="0" indent="0">
               <a:buNone/>
             </a:pPr>
             <a:r>
@@ -7201,7 +7142,7 @@
           <a:bodyPr wrap="square" lIns="0" tIns="0" rIns="0" bIns="0" rtlCol="0" anchor="t"/>
           <a:lstStyle/>
           <a:p>
-            <a:pPr indent="0" marL="0">
+            <a:pPr marL="0" indent="0">
               <a:buNone/>
             </a:pPr>
             <a:r>
@@ -7237,7 +7178,7 @@
           <a:bodyPr wrap="square" lIns="0" tIns="0" rIns="0" bIns="0" rtlCol="0" anchor="t"/>
           <a:lstStyle/>
           <a:p>
-            <a:pPr indent="0" marL="0">
+            <a:pPr marL="0" indent="0">
               <a:buNone/>
             </a:pPr>
             <a:r>
@@ -7281,14 +7222,14 @@
       </p:sp>
       <p:pic>
         <p:nvPicPr>
-          <p:cNvPr id="21" name="Image 2" descr="主辦方照片：夜間取車時車身左後完好（車牌已遮蔽）">    </p:cNvPr>
+          <p:cNvPr id="21" name="Image 2" descr="主辦方照片：夜間取車時車身左後完好（車牌已遮蔽）"/>
           <p:cNvPicPr>
             <a:picLocks noChangeAspect="1"/>
           </p:cNvPicPr>
           <p:nvPr/>
         </p:nvPicPr>
         <p:blipFill>
-          <a:blip r:embed="rId3"/>
+          <a:blip r:embed="rId5"/>
           <a:stretch>
             <a:fillRect/>
           </a:stretch>
@@ -7328,7 +7269,7 @@
           <a:bodyPr wrap="square" lIns="0" tIns="0" rIns="0" bIns="0" rtlCol="0" anchor="ctr"/>
           <a:lstStyle/>
           <a:p>
-            <a:pPr algn="ctr" indent="0" marL="0">
+            <a:pPr marL="0" indent="0" algn="ctr">
               <a:buNone/>
             </a:pPr>
             <a:r>
@@ -7345,14 +7286,14 @@
       </p:sp>
       <p:pic>
         <p:nvPicPr>
-          <p:cNvPr id="23" name="Image 3" descr="主辦方照片：夜間還車時車身左後保險桿凹陷破裂（車牌已遮蔽）">    </p:cNvPr>
+          <p:cNvPr id="23" name="Image 3" descr="主辦方照片：夜間還車時車身左後保險桿凹陷破裂（車牌已遮蔽）"/>
           <p:cNvPicPr>
             <a:picLocks noChangeAspect="1"/>
           </p:cNvPicPr>
           <p:nvPr/>
         </p:nvPicPr>
         <p:blipFill>
-          <a:blip r:embed="rId4"/>
+          <a:blip r:embed="rId6"/>
           <a:stretch>
             <a:fillRect/>
           </a:stretch>
@@ -7392,7 +7333,7 @@
           <a:bodyPr wrap="square" lIns="0" tIns="0" rIns="0" bIns="0" rtlCol="0" anchor="ctr"/>
           <a:lstStyle/>
           <a:p>
-            <a:pPr algn="ctr" indent="0" marL="0">
+            <a:pPr marL="0" indent="0" algn="ctr">
               <a:buNone/>
             </a:pPr>
             <a:r>
@@ -7428,7 +7369,7 @@
           <a:bodyPr wrap="square" lIns="0" tIns="0" rIns="0" bIns="0" rtlCol="0" anchor="t"/>
           <a:lstStyle/>
           <a:p>
-            <a:pPr indent="0" marL="0">
+            <a:pPr marL="0" indent="0">
               <a:buNone/>
             </a:pPr>
             <a:r>
@@ -7464,7 +7405,7 @@
           <a:bodyPr wrap="square" lIns="0" tIns="0" rIns="0" bIns="0" rtlCol="0" anchor="ctr"/>
           <a:lstStyle/>
           <a:p>
-            <a:pPr indent="0" marL="0">
+            <a:pPr marL="0" indent="0">
               <a:buNone/>
             </a:pPr>
             <a:r>
@@ -7500,7 +7441,7 @@
           <a:bodyPr wrap="square" lIns="0" tIns="0" rIns="0" bIns="0" rtlCol="0" anchor="t"/>
           <a:lstStyle/>
           <a:p>
-            <a:pPr indent="0" marL="0">
+            <a:pPr marL="0" indent="0">
               <a:buNone/>
             </a:pPr>
             <a:r>
@@ -7536,7 +7477,7 @@
           <a:bodyPr wrap="square" lIns="0" tIns="0" rIns="0" bIns="0" rtlCol="0" anchor="t"/>
           <a:lstStyle/>
           <a:p>
-            <a:pPr indent="0" marL="0">
+            <a:pPr marL="0" indent="0">
               <a:buNone/>
             </a:pPr>
             <a:r>
@@ -7580,14 +7521,14 @@
       </p:sp>
       <p:pic>
         <p:nvPicPr>
-          <p:cNvPr id="30" name="Image 4" descr="主辦方照片：還車時前座乾淨（夜間）">    </p:cNvPr>
+          <p:cNvPr id="30" name="Image 4" descr="主辦方照片：還車時前座乾淨（夜間）"/>
           <p:cNvPicPr>
             <a:picLocks noChangeAspect="1"/>
           </p:cNvPicPr>
           <p:nvPr/>
         </p:nvPicPr>
         <p:blipFill>
-          <a:blip r:embed="rId5"/>
+          <a:blip r:embed="rId7"/>
           <a:stretch>
             <a:fillRect/>
           </a:stretch>
@@ -7627,7 +7568,7 @@
           <a:bodyPr wrap="square" lIns="0" tIns="0" rIns="0" bIns="0" rtlCol="0" anchor="ctr"/>
           <a:lstStyle/>
           <a:p>
-            <a:pPr algn="ctr" indent="0" marL="0">
+            <a:pPr marL="0" indent="0" algn="ctr">
               <a:buNone/>
             </a:pPr>
             <a:r>
@@ -7644,14 +7585,14 @@
       </p:sp>
       <p:pic>
         <p:nvPicPr>
-          <p:cNvPr id="32" name="Image 5" descr="主辦方照片：還車時後座座椅有碎屑、地墊有沙土">    </p:cNvPr>
+          <p:cNvPr id="32" name="Image 5" descr="主辦方照片：還車時後座座椅有碎屑、地墊有沙土"/>
           <p:cNvPicPr>
             <a:picLocks noChangeAspect="1"/>
           </p:cNvPicPr>
           <p:nvPr/>
         </p:nvPicPr>
         <p:blipFill>
-          <a:blip r:embed="rId6"/>
+          <a:blip r:embed="rId8"/>
           <a:stretch>
             <a:fillRect/>
           </a:stretch>
@@ -7691,7 +7632,7 @@
           <a:bodyPr wrap="square" lIns="0" tIns="0" rIns="0" bIns="0" rtlCol="0" anchor="ctr"/>
           <a:lstStyle/>
           <a:p>
-            <a:pPr algn="ctr" indent="0" marL="0">
+            <a:pPr marL="0" indent="0" algn="ctr">
               <a:buNone/>
             </a:pPr>
             <a:r>
@@ -7727,7 +7668,7 @@
           <a:bodyPr wrap="square" lIns="0" tIns="0" rIns="0" bIns="0" rtlCol="0" anchor="t"/>
           <a:lstStyle/>
           <a:p>
-            <a:pPr indent="0" marL="0">
+            <a:pPr marL="0" indent="0">
               <a:buNone/>
             </a:pPr>
             <a:r>
@@ -7763,7 +7704,7 @@
           <a:bodyPr wrap="square" lIns="0" tIns="0" rIns="0" bIns="0" rtlCol="0" anchor="ctr"/>
           <a:lstStyle/>
           <a:p>
-            <a:pPr indent="0" marL="0">
+            <a:pPr marL="0" indent="0">
               <a:buNone/>
             </a:pPr>
             <a:r>
@@ -7785,7 +7726,7 @@
             <a:endParaRPr lang="zh-TW" sz="1400" dirty="0"/>
           </a:p>
           <a:p>
-            <a:pPr indent="0" marL="0">
+            <a:pPr marL="0" indent="0">
               <a:buNone/>
             </a:pPr>
             <a:r>
@@ -7829,7 +7770,7 @@
           <a:bodyPr wrap="square" lIns="0" tIns="0" rIns="0" bIns="0" rtlCol="0" anchor="t"/>
           <a:lstStyle/>
           <a:p>
-            <a:pPr indent="0" marL="0">
+            <a:pPr marL="0" indent="0">
               <a:buNone/>
             </a:pPr>
             <a:r>
@@ -7865,7 +7806,7 @@
           <a:bodyPr wrap="square" lIns="0" tIns="0" rIns="0" bIns="0" rtlCol="0" anchor="t"/>
           <a:lstStyle/>
           <a:p>
-            <a:pPr indent="0" marL="0">
+            <a:pPr marL="0" indent="0">
               <a:buNone/>
             </a:pPr>
             <a:r>
@@ -7909,14 +7850,14 @@
       </p:sp>
       <p:pic>
         <p:nvPicPr>
-          <p:cNvPr id="39" name="Image 6" descr="主辦方照片：還車時前座儀表板有灰塵、腳踏墊有污漬">    </p:cNvPr>
+          <p:cNvPr id="39" name="Image 6" descr="主辦方照片：還車時前座儀表板有灰塵、腳踏墊有污漬"/>
           <p:cNvPicPr>
             <a:picLocks noChangeAspect="1"/>
           </p:cNvPicPr>
           <p:nvPr/>
         </p:nvPicPr>
         <p:blipFill>
-          <a:blip r:embed="rId7"/>
+          <a:blip r:embed="rId9"/>
           <a:stretch>
             <a:fillRect/>
           </a:stretch>
@@ -7956,7 +7897,7 @@
           <a:bodyPr wrap="square" lIns="0" tIns="0" rIns="0" bIns="0" rtlCol="0" anchor="ctr"/>
           <a:lstStyle/>
           <a:p>
-            <a:pPr algn="ctr" indent="0" marL="0">
+            <a:pPr marL="0" indent="0" algn="ctr">
               <a:buNone/>
             </a:pPr>
             <a:r>
@@ -7973,14 +7914,14 @@
       </p:sp>
       <p:pic>
         <p:nvPicPr>
-          <p:cNvPr id="41" name="Image 7" descr="主辦方照片：還車時後座乾淨">    </p:cNvPr>
+          <p:cNvPr id="41" name="Image 7" descr="主辦方照片：還車時後座乾淨"/>
           <p:cNvPicPr>
             <a:picLocks noChangeAspect="1"/>
           </p:cNvPicPr>
           <p:nvPr/>
         </p:nvPicPr>
         <p:blipFill>
-          <a:blip r:embed="rId8"/>
+          <a:blip r:embed="rId10"/>
           <a:stretch>
             <a:fillRect/>
           </a:stretch>
@@ -8020,7 +7961,7 @@
           <a:bodyPr wrap="square" lIns="0" tIns="0" rIns="0" bIns="0" rtlCol="0" anchor="ctr"/>
           <a:lstStyle/>
           <a:p>
-            <a:pPr algn="ctr" indent="0" marL="0">
+            <a:pPr marL="0" indent="0" algn="ctr">
               <a:buNone/>
             </a:pPr>
             <a:r>
@@ -8056,7 +7997,7 @@
           <a:bodyPr wrap="square" lIns="0" tIns="0" rIns="0" bIns="0" rtlCol="0" anchor="t"/>
           <a:lstStyle/>
           <a:p>
-            <a:pPr indent="0" marL="0">
+            <a:pPr marL="0" indent="0">
               <a:buNone/>
             </a:pPr>
             <a:r>
@@ -8092,7 +8033,7 @@
           <a:bodyPr wrap="square" lIns="0" tIns="0" rIns="0" bIns="0" rtlCol="0" anchor="ctr"/>
           <a:lstStyle/>
           <a:p>
-            <a:pPr indent="0" marL="0">
+            <a:pPr marL="0" indent="0">
               <a:buNone/>
             </a:pPr>
             <a:r>
@@ -8114,7 +8055,7 @@
             <a:endParaRPr lang="zh-TW" sz="1400" dirty="0"/>
           </a:p>
           <a:p>
-            <a:pPr indent="0" marL="0">
+            <a:pPr marL="0" indent="0">
               <a:buNone/>
             </a:pPr>
             <a:r>
@@ -8158,7 +8099,7 @@
           <a:bodyPr wrap="square" lIns="0" tIns="0" rIns="0" bIns="0" rtlCol="0" anchor="t"/>
           <a:lstStyle/>
           <a:p>
-            <a:pPr indent="0" marL="0">
+            <a:pPr marL="0" indent="0">
               <a:buNone/>
             </a:pPr>
             <a:r>
@@ -8194,7 +8135,7 @@
           <a:bodyPr wrap="square" lIns="0" tIns="0" rIns="0" bIns="0" rtlCol="0" anchor="t"/>
           <a:lstStyle/>
           <a:p>
-            <a:pPr indent="0" marL="0">
+            <a:pPr marL="0" indent="0">
               <a:buNone/>
             </a:pPr>
             <a:r>
@@ -8211,7 +8152,7 @@
       </p:sp>
       <p:sp>
         <p:nvSpPr>
-          <p:cNvPr id="25" name="Slide Number Placeholder 0"/>
+          <p:cNvPr id="47" name="Slide Number Placeholder 0"/>
           <p:cNvSpPr>
             <a:spLocks noGrp="1"/>
           </p:cNvSpPr>
@@ -8229,7 +8170,7 @@
           </a:prstGeom>
           <a:extLst>
             <a:ext uri="{C572A759-6A51-4108-AA02-DFA0A04FC94B}">
-              <ma14:wrappingTextBoxFlag xmlns:ma14="http://schemas.microsoft.com/office/mac/drawingml/2011/main" val="0"/>
+              <ma14:wrappingTextBoxFlag xmlns:ma14="http://schemas.microsoft.com/office/mac/drawingml/2011/main" xmlns="" val="0"/>
             </a:ext>
           </a:extLst>
         </p:spPr>
@@ -8247,7 +8188,7 @@
           <a:p>
             <a:pPr algn="r"/>
             <a:fld id="{F7021451-1387-4CA6-816F-3879F97B5CBC}" type="slidenum">
-              <a:rPr b="0" lang="en-US"/>
+              <a:rPr lang="en-US" b="0"/>
               <a:t>11</a:t>
             </a:fld>
             <a:endParaRPr lang="en-US"/>
@@ -8282,9 +8223,11 @@
       <p:sp>
         <p:nvSpPr>
           <p:cNvPr id="2" name="Text 1"/>
-          <p:cNvSpPr/>
+          <p:cNvSpPr>
+            <a:spLocks noGrp="1"/>
+          </p:cNvSpPr>
           <p:nvPr>
-            <p:ph idx="101" type="body" hasCustomPrompt="1"/>
+            <p:ph type="body" idx="101" hasCustomPrompt="1"/>
           </p:nvPr>
         </p:nvSpPr>
         <p:spPr>
@@ -8302,7 +8245,7 @@
           <a:bodyPr wrap="square" lIns="0" tIns="0" rIns="0" bIns="0" rtlCol="0" anchor="ctr"/>
           <a:lstStyle/>
           <a:p>
-            <a:pPr indent="0" marL="0">
+            <a:pPr marL="0" indent="0">
               <a:buNone/>
             </a:pPr>
             <a:r>
@@ -8320,9 +8263,11 @@
       <p:sp>
         <p:nvSpPr>
           <p:cNvPr id="3" name="Text 1"/>
-          <p:cNvSpPr/>
+          <p:cNvSpPr>
+            <a:spLocks noGrp="1"/>
+          </p:cNvSpPr>
           <p:nvPr>
-            <p:ph idx="102" type="title" hasCustomPrompt="1"/>
+            <p:ph type="title" idx="102" hasCustomPrompt="1"/>
           </p:nvPr>
         </p:nvSpPr>
         <p:spPr>
@@ -8340,7 +8285,7 @@
           <a:bodyPr wrap="square" lIns="0" tIns="0" rIns="0" bIns="0" rtlCol="0" anchor="ctr"/>
           <a:lstStyle/>
           <a:p>
-            <a:pPr algn="l" indent="0" marL="0">
+            <a:pPr marL="0" indent="0" algn="l">
               <a:buNone/>
             </a:pPr>
             <a:r>
@@ -8376,7 +8321,7 @@
           <a:bodyPr wrap="square" lIns="0" tIns="0" rIns="0" bIns="0" rtlCol="0" anchor="ctr"/>
           <a:lstStyle/>
           <a:p>
-            <a:pPr indent="0" marL="0">
+            <a:pPr marL="0" indent="0">
               <a:buNone/>
             </a:pPr>
             <a:r>
@@ -8443,7 +8388,7 @@
           <a:bodyPr wrap="square" lIns="0" tIns="0" rIns="0" bIns="0" rtlCol="0" anchor="ctr"/>
           <a:lstStyle/>
           <a:p>
-            <a:pPr algn="ctr" indent="0" marL="0">
+            <a:pPr marL="0" indent="0" algn="ctr">
               <a:buNone/>
             </a:pPr>
             <a:r>
@@ -8479,7 +8424,7 @@
           <a:bodyPr wrap="square" lIns="0" tIns="0" rIns="0" bIns="0" rtlCol="0" anchor="t"/>
           <a:lstStyle/>
           <a:p>
-            <a:pPr indent="0" marL="0">
+            <a:pPr marL="0" indent="0">
               <a:buNone/>
             </a:pPr>
             <a:r>
@@ -8493,7 +8438,7 @@
             <a:endParaRPr lang="zh-TW" sz="1400" dirty="0"/>
           </a:p>
           <a:p>
-            <a:pPr indent="0" marL="0">
+            <a:pPr marL="0" indent="0">
               <a:buNone/>
             </a:pPr>
             <a:r>
@@ -8623,7 +8568,7 @@
           <a:bodyPr wrap="square" lIns="0" tIns="0" rIns="0" bIns="0" rtlCol="0" anchor="t"/>
           <a:lstStyle/>
           <a:p>
-            <a:pPr indent="0" marL="0">
+            <a:pPr marL="0" indent="0">
               <a:buNone/>
             </a:pPr>
             <a:r>
@@ -8637,7 +8582,7 @@
             <a:endParaRPr lang="zh-TW" sz="1050" dirty="0"/>
           </a:p>
           <a:p>
-            <a:pPr indent="0" marL="0">
+            <a:pPr marL="0" indent="0">
               <a:buNone/>
             </a:pPr>
             <a:r>
@@ -8700,7 +8645,7 @@
           <a:bodyPr wrap="square" lIns="0" tIns="0" rIns="0" bIns="0" rtlCol="0" anchor="ctr"/>
           <a:lstStyle/>
           <a:p>
-            <a:pPr indent="0" marL="0">
+            <a:pPr marL="0" indent="0">
               <a:spcAft>
                 <a:spcPts val="100"/>
               </a:spcAft>
@@ -8739,7 +8684,7 @@
           <a:bodyPr wrap="square" lIns="0" tIns="0" rIns="0" bIns="0" rtlCol="0" anchor="ctr"/>
           <a:lstStyle/>
           <a:p>
-            <a:pPr indent="0" marL="0">
+            <a:pPr marL="0" indent="0">
               <a:buNone/>
             </a:pPr>
             <a:r>
@@ -8802,7 +8747,7 @@
           <a:bodyPr wrap="square" lIns="0" tIns="0" rIns="0" bIns="0" rtlCol="0" anchor="ctr"/>
           <a:lstStyle/>
           <a:p>
-            <a:pPr indent="0" marL="0">
+            <a:pPr marL="0" indent="0">
               <a:spcAft>
                 <a:spcPts val="100"/>
               </a:spcAft>
@@ -8819,7 +8764,7 @@
             <a:endParaRPr lang="zh-TW" sz="1400" dirty="0"/>
           </a:p>
           <a:p>
-            <a:pPr indent="0" marL="0">
+            <a:pPr marL="0" indent="0">
               <a:spcAft>
                 <a:spcPts val="100"/>
               </a:spcAft>
@@ -8885,7 +8830,7 @@
           <a:bodyPr wrap="square" lIns="0" tIns="0" rIns="0" bIns="0" rtlCol="0" anchor="ctr"/>
           <a:lstStyle/>
           <a:p>
-            <a:pPr indent="0" marL="0">
+            <a:pPr marL="0" indent="0">
               <a:spcAft>
                 <a:spcPts val="100"/>
               </a:spcAft>
@@ -8902,7 +8847,7 @@
             <a:endParaRPr lang="zh-TW" sz="1400" dirty="0"/>
           </a:p>
           <a:p>
-            <a:pPr indent="0" marL="0">
+            <a:pPr marL="0" indent="0">
               <a:spcAft>
                 <a:spcPts val="100"/>
               </a:spcAft>
@@ -8968,7 +8913,7 @@
           <a:bodyPr wrap="square" lIns="0" tIns="0" rIns="0" bIns="0" rtlCol="0" anchor="ctr"/>
           <a:lstStyle/>
           <a:p>
-            <a:pPr indent="0" marL="0">
+            <a:pPr marL="0" indent="0">
               <a:spcAft>
                 <a:spcPts val="100"/>
               </a:spcAft>
@@ -8985,7 +8930,7 @@
             <a:endParaRPr lang="zh-TW" sz="1400" dirty="0"/>
           </a:p>
           <a:p>
-            <a:pPr indent="0" marL="0">
+            <a:pPr marL="0" indent="0">
               <a:spcAft>
                 <a:spcPts val="100"/>
               </a:spcAft>
@@ -9051,7 +8996,7 @@
           <a:bodyPr wrap="square" lIns="0" tIns="0" rIns="0" bIns="0" rtlCol="0" anchor="ctr"/>
           <a:lstStyle/>
           <a:p>
-            <a:pPr indent="0" marL="0">
+            <a:pPr marL="0" indent="0">
               <a:spcAft>
                 <a:spcPts val="100"/>
               </a:spcAft>
@@ -9068,7 +9013,7 @@
             <a:endParaRPr lang="zh-TW" sz="1400" dirty="0"/>
           </a:p>
           <a:p>
-            <a:pPr indent="0" marL="0">
+            <a:pPr marL="0" indent="0">
               <a:spcAft>
                 <a:spcPts val="100"/>
               </a:spcAft>
@@ -9107,7 +9052,7 @@
           <a:bodyPr wrap="square" lIns="0" tIns="0" rIns="0" bIns="0" rtlCol="0" anchor="t"/>
           <a:lstStyle/>
           <a:p>
-            <a:pPr algn="ctr" indent="0" marL="0">
+            <a:pPr marL="0" indent="0" algn="ctr">
               <a:buNone/>
             </a:pPr>
             <a:r>
@@ -9143,7 +9088,7 @@
           <a:bodyPr wrap="square" lIns="0" tIns="0" rIns="0" bIns="0" rtlCol="0" anchor="ctr"/>
           <a:lstStyle/>
           <a:p>
-            <a:pPr indent="0" marL="0">
+            <a:pPr marL="0" indent="0">
               <a:buNone/>
             </a:pPr>
             <a:r>
@@ -9210,7 +9155,7 @@
           <a:bodyPr wrap="square" lIns="0" tIns="0" rIns="0" bIns="0" rtlCol="0" anchor="ctr"/>
           <a:lstStyle/>
           <a:p>
-            <a:pPr algn="ctr" indent="0" marL="0">
+            <a:pPr marL="0" indent="0" algn="ctr">
               <a:buNone/>
             </a:pPr>
             <a:r>
@@ -9273,7 +9218,7 @@
           <a:bodyPr wrap="square" lIns="0" tIns="0" rIns="0" bIns="0" rtlCol="0" anchor="ctr"/>
           <a:lstStyle/>
           <a:p>
-            <a:pPr indent="0" marL="0">
+            <a:pPr marL="0" indent="0">
               <a:spcAft>
                 <a:spcPts val="100"/>
               </a:spcAft>
@@ -9290,7 +9235,7 @@
             <a:endParaRPr lang="zh-TW" sz="1400" dirty="0"/>
           </a:p>
           <a:p>
-            <a:pPr indent="0" marL="0">
+            <a:pPr marL="0" indent="0">
               <a:spcAft>
                 <a:spcPts val="100"/>
               </a:spcAft>
@@ -9307,7 +9252,7 @@
             <a:endParaRPr lang="zh-TW" sz="1400" dirty="0"/>
           </a:p>
           <a:p>
-            <a:pPr indent="0" marL="0">
+            <a:pPr marL="0" indent="0">
               <a:spcAft>
                 <a:spcPts val="100"/>
               </a:spcAft>
@@ -9373,7 +9318,7 @@
           <a:bodyPr wrap="square" lIns="0" tIns="0" rIns="0" bIns="0" rtlCol="0" anchor="ctr"/>
           <a:lstStyle/>
           <a:p>
-            <a:pPr indent="0" marL="0">
+            <a:pPr marL="0" indent="0">
               <a:spcAft>
                 <a:spcPts val="100"/>
               </a:spcAft>
@@ -9390,7 +9335,7 @@
             <a:endParaRPr lang="zh-TW" sz="1400" dirty="0"/>
           </a:p>
           <a:p>
-            <a:pPr indent="0" marL="0">
+            <a:pPr marL="0" indent="0">
               <a:spcAft>
                 <a:spcPts val="100"/>
               </a:spcAft>
@@ -9456,7 +9401,7 @@
           <a:bodyPr wrap="square" lIns="0" tIns="0" rIns="0" bIns="0" rtlCol="0" anchor="ctr"/>
           <a:lstStyle/>
           <a:p>
-            <a:pPr indent="0" marL="0">
+            <a:pPr marL="0" indent="0">
               <a:spcAft>
                 <a:spcPts val="100"/>
               </a:spcAft>
@@ -9473,7 +9418,7 @@
             <a:endParaRPr lang="zh-TW" sz="1400" dirty="0"/>
           </a:p>
           <a:p>
-            <a:pPr indent="0" marL="0">
+            <a:pPr marL="0" indent="0">
               <a:spcAft>
                 <a:spcPts val="100"/>
               </a:spcAft>
@@ -9490,7 +9435,7 @@
             <a:endParaRPr lang="zh-TW" sz="1400" dirty="0"/>
           </a:p>
           <a:p>
-            <a:pPr indent="0" marL="0">
+            <a:pPr marL="0" indent="0">
               <a:spcAft>
                 <a:spcPts val="100"/>
               </a:spcAft>
@@ -9647,7 +9592,7 @@
           <a:bodyPr wrap="square" lIns="0" tIns="0" rIns="0" bIns="0" rtlCol="0" anchor="t"/>
           <a:lstStyle/>
           <a:p>
-            <a:pPr algn="r" indent="0" marL="0">
+            <a:pPr marL="0" indent="0" algn="r">
               <a:buNone/>
             </a:pPr>
             <a:r>
@@ -9683,7 +9628,7 @@
           <a:bodyPr wrap="square" lIns="0" tIns="0" rIns="0" bIns="0" rtlCol="0" anchor="ctr"/>
           <a:lstStyle/>
           <a:p>
-            <a:pPr indent="0" marL="0">
+            <a:pPr marL="0" indent="0">
               <a:buNone/>
             </a:pPr>
             <a:r>
@@ -9750,7 +9695,7 @@
           <a:bodyPr wrap="square" lIns="0" tIns="0" rIns="0" bIns="0" rtlCol="0" anchor="ctr"/>
           <a:lstStyle/>
           <a:p>
-            <a:pPr algn="ctr" indent="0" marL="0">
+            <a:pPr marL="0" indent="0" algn="ctr">
               <a:buNone/>
             </a:pPr>
             <a:r>
@@ -9786,7 +9731,7 @@
           <a:bodyPr wrap="square" lIns="0" tIns="0" rIns="0" bIns="0" rtlCol="0" anchor="t"/>
           <a:lstStyle/>
           <a:p>
-            <a:pPr indent="0" marL="0">
+            <a:pPr marL="0" indent="0">
               <a:buNone/>
             </a:pPr>
             <a:r>
@@ -9943,7 +9888,7 @@
           <a:bodyPr wrap="square" lIns="0" tIns="0" rIns="0" bIns="0" rtlCol="0" anchor="ctr"/>
           <a:lstStyle/>
           <a:p>
-            <a:pPr indent="0" marL="0">
+            <a:pPr marL="0" indent="0">
               <a:spcAft>
                 <a:spcPts val="100"/>
               </a:spcAft>
@@ -9960,7 +9905,7 @@
             <a:endParaRPr lang="zh-TW" sz="1400" dirty="0"/>
           </a:p>
           <a:p>
-            <a:pPr indent="0" marL="0">
+            <a:pPr marL="0" indent="0">
               <a:spcAft>
                 <a:spcPts val="100"/>
               </a:spcAft>
@@ -9977,7 +9922,7 @@
             <a:endParaRPr lang="zh-TW" sz="1400" dirty="0"/>
           </a:p>
           <a:p>
-            <a:pPr indent="0" marL="0">
+            <a:pPr marL="0" indent="0">
               <a:spcAft>
                 <a:spcPts val="100"/>
               </a:spcAft>
@@ -10016,7 +9961,7 @@
           <a:bodyPr wrap="square" lIns="0" tIns="0" rIns="0" bIns="0" rtlCol="0" anchor="t"/>
           <a:lstStyle/>
           <a:p>
-            <a:pPr algn="ctr" indent="0" marL="0">
+            <a:pPr marL="0" indent="0" algn="ctr">
               <a:buNone/>
             </a:pPr>
             <a:r>
@@ -10076,7 +10021,7 @@
           <a:bodyPr wrap="square" lIns="0" tIns="0" rIns="0" bIns="0" rtlCol="0" anchor="b"/>
           <a:lstStyle/>
           <a:p>
-            <a:pPr algn="ctr" indent="0" marL="0">
+            <a:pPr marL="0" indent="0" algn="ctr">
               <a:buNone/>
             </a:pPr>
             <a:r>
@@ -10090,7 +10035,7 @@
             <a:endParaRPr lang="zh-TW" sz="900" dirty="0"/>
           </a:p>
           <a:p>
-            <a:pPr algn="ctr" indent="0" marL="0">
+            <a:pPr marL="0" indent="0" algn="ctr">
               <a:buNone/>
             </a:pPr>
             <a:r>
@@ -10150,7 +10095,7 @@
           <a:bodyPr wrap="square" lIns="0" tIns="0" rIns="0" bIns="0" rtlCol="0" anchor="b"/>
           <a:lstStyle/>
           <a:p>
-            <a:pPr algn="ctr" indent="0" marL="0">
+            <a:pPr marL="0" indent="0" algn="ctr">
               <a:buNone/>
             </a:pPr>
             <a:r>
@@ -10164,7 +10109,7 @@
             <a:endParaRPr lang="zh-TW" sz="900" dirty="0"/>
           </a:p>
           <a:p>
-            <a:pPr algn="ctr" indent="0" marL="0">
+            <a:pPr marL="0" indent="0" algn="ctr">
               <a:buNone/>
             </a:pPr>
             <a:r>
@@ -10224,7 +10169,7 @@
           <a:bodyPr wrap="square" lIns="0" tIns="0" rIns="0" bIns="0" rtlCol="0" anchor="b"/>
           <a:lstStyle/>
           <a:p>
-            <a:pPr algn="ctr" indent="0" marL="0">
+            <a:pPr marL="0" indent="0" algn="ctr">
               <a:buNone/>
             </a:pPr>
             <a:r>
@@ -10238,7 +10183,7 @@
             <a:endParaRPr lang="zh-TW" sz="900" dirty="0"/>
           </a:p>
           <a:p>
-            <a:pPr algn="ctr" indent="0" marL="0">
+            <a:pPr marL="0" indent="0" algn="ctr">
               <a:buNone/>
             </a:pPr>
             <a:r>
@@ -10298,7 +10243,7 @@
           <a:bodyPr wrap="square" lIns="0" tIns="0" rIns="0" bIns="0" rtlCol="0" anchor="b"/>
           <a:lstStyle/>
           <a:p>
-            <a:pPr algn="ctr" indent="0" marL="0">
+            <a:pPr marL="0" indent="0" algn="ctr">
               <a:buNone/>
             </a:pPr>
             <a:r>
@@ -10312,7 +10257,7 @@
             <a:endParaRPr lang="zh-TW" sz="900" dirty="0"/>
           </a:p>
           <a:p>
-            <a:pPr algn="ctr" indent="0" marL="0">
+            <a:pPr marL="0" indent="0" algn="ctr">
               <a:buNone/>
             </a:pPr>
             <a:r>
@@ -10372,7 +10317,7 @@
           <a:bodyPr wrap="square" lIns="0" tIns="0" rIns="0" bIns="0" rtlCol="0" anchor="b"/>
           <a:lstStyle/>
           <a:p>
-            <a:pPr algn="ctr" indent="0" marL="0">
+            <a:pPr marL="0" indent="0" algn="ctr">
               <a:buNone/>
             </a:pPr>
             <a:r>
@@ -10386,7 +10331,7 @@
             <a:endParaRPr lang="zh-TW" sz="900" dirty="0"/>
           </a:p>
           <a:p>
-            <a:pPr algn="ctr" indent="0" marL="0">
+            <a:pPr marL="0" indent="0" algn="ctr">
               <a:buNone/>
             </a:pPr>
             <a:r>
@@ -10446,7 +10391,7 @@
           <a:bodyPr wrap="square" lIns="0" tIns="0" rIns="0" bIns="0" rtlCol="0" anchor="b"/>
           <a:lstStyle/>
           <a:p>
-            <a:pPr algn="ctr" indent="0" marL="0">
+            <a:pPr marL="0" indent="0" algn="ctr">
               <a:buNone/>
             </a:pPr>
             <a:r>
@@ -10482,7 +10427,7 @@
           <a:bodyPr wrap="square" lIns="0" tIns="0" rIns="0" bIns="0" rtlCol="0" anchor="t"/>
           <a:lstStyle/>
           <a:p>
-            <a:pPr algn="ctr" indent="0" marL="0">
+            <a:pPr marL="0" indent="0" algn="ctr">
               <a:buNone/>
             </a:pPr>
             <a:r>
@@ -10518,7 +10463,7 @@
           <a:bodyPr wrap="square" lIns="0" tIns="0" rIns="0" bIns="0" rtlCol="0" anchor="ctr"/>
           <a:lstStyle/>
           <a:p>
-            <a:pPr indent="0" marL="0">
+            <a:pPr marL="0" indent="0">
               <a:buNone/>
             </a:pPr>
             <a:r>
@@ -10532,7 +10477,7 @@
             <a:endParaRPr lang="zh-TW" sz="1400" dirty="0"/>
           </a:p>
           <a:p>
-            <a:pPr indent="0" marL="0">
+            <a:pPr marL="0" indent="0">
               <a:buNone/>
             </a:pPr>
             <a:r>
@@ -10595,7 +10540,7 @@
           <a:bodyPr wrap="square" lIns="0" tIns="0" rIns="0" bIns="0" rtlCol="0" anchor="ctr"/>
           <a:lstStyle/>
           <a:p>
-            <a:pPr algn="ctr" indent="0" marL="0">
+            <a:pPr marL="0" indent="0" algn="ctr">
               <a:buNone/>
             </a:pPr>
             <a:r>
@@ -10682,7 +10627,7 @@
           <a:bodyPr wrap="square" lIns="0" tIns="0" rIns="0" bIns="0" rtlCol="0" anchor="ctr"/>
           <a:lstStyle/>
           <a:p>
-            <a:pPr algn="ctr" indent="0" marL="0">
+            <a:pPr marL="0" indent="0" algn="ctr">
               <a:buNone/>
             </a:pPr>
             <a:r>
@@ -10769,7 +10714,7 @@
           <a:bodyPr wrap="square" lIns="0" tIns="0" rIns="0" bIns="0" rtlCol="0" anchor="ctr"/>
           <a:lstStyle/>
           <a:p>
-            <a:pPr algn="ctr" indent="0" marL="0">
+            <a:pPr marL="0" indent="0" algn="ctr">
               <a:buNone/>
             </a:pPr>
             <a:r>
@@ -10856,7 +10801,7 @@
           <a:bodyPr wrap="square" lIns="0" tIns="0" rIns="0" bIns="0" rtlCol="0" anchor="ctr"/>
           <a:lstStyle/>
           <a:p>
-            <a:pPr algn="ctr" indent="0" marL="0">
+            <a:pPr marL="0" indent="0" algn="ctr">
               <a:buNone/>
             </a:pPr>
             <a:r>
@@ -10870,7 +10815,7 @@
             <a:endParaRPr lang="zh-TW" sz="1150" dirty="0"/>
           </a:p>
           <a:p>
-            <a:pPr algn="ctr" indent="0" marL="0">
+            <a:pPr marL="0" indent="0" algn="ctr">
               <a:buNone/>
             </a:pPr>
             <a:r>
@@ -10957,7 +10902,7 @@
           <a:bodyPr wrap="square" lIns="0" tIns="0" rIns="0" bIns="0" rtlCol="0" anchor="ctr"/>
           <a:lstStyle/>
           <a:p>
-            <a:pPr algn="ctr" indent="0" marL="0">
+            <a:pPr marL="0" indent="0" algn="ctr">
               <a:buNone/>
             </a:pPr>
             <a:r>
@@ -10971,7 +10916,7 @@
             <a:endParaRPr lang="zh-TW" sz="1150" dirty="0"/>
           </a:p>
           <a:p>
-            <a:pPr algn="ctr" indent="0" marL="0">
+            <a:pPr marL="0" indent="0" algn="ctr">
               <a:buNone/>
             </a:pPr>
             <a:r>
@@ -11011,7 +10956,7 @@
           <a:bodyPr wrap="square" lIns="0" tIns="0" rIns="0" bIns="0" rtlCol="0" anchor="ctr"/>
           <a:lstStyle/>
           <a:p>
-            <a:pPr algn="ctr" indent="0" marL="0">
+            <a:pPr marL="0" indent="0" algn="ctr">
               <a:buNone/>
             </a:pPr>
             <a:r>
@@ -11047,7 +10992,7 @@
           <a:bodyPr wrap="square" lIns="0" tIns="0" rIns="0" bIns="0" rtlCol="0" anchor="ctr"/>
           <a:lstStyle/>
           <a:p>
-            <a:pPr indent="0" marL="0">
+            <a:pPr marL="0" indent="0">
               <a:buNone/>
             </a:pPr>
             <a:r>
@@ -11110,7 +11055,7 @@
           <a:bodyPr wrap="square" lIns="0" tIns="0" rIns="0" bIns="0" rtlCol="0" anchor="ctr"/>
           <a:lstStyle/>
           <a:p>
-            <a:pPr indent="0" marL="0">
+            <a:pPr marL="0" indent="0">
               <a:buNone/>
             </a:pPr>
             <a:r>
@@ -11127,7 +11072,7 @@
       </p:sp>
       <p:sp>
         <p:nvSpPr>
-          <p:cNvPr id="25" name="Slide Number Placeholder 0"/>
+          <p:cNvPr id="77" name="Slide Number Placeholder 0"/>
           <p:cNvSpPr>
             <a:spLocks noGrp="1"/>
           </p:cNvSpPr>
@@ -11145,7 +11090,7 @@
           </a:prstGeom>
           <a:extLst>
             <a:ext uri="{C572A759-6A51-4108-AA02-DFA0A04FC94B}">
-              <ma14:wrappingTextBoxFlag xmlns:ma14="http://schemas.microsoft.com/office/mac/drawingml/2011/main" val="0"/>
+              <ma14:wrappingTextBoxFlag xmlns:ma14="http://schemas.microsoft.com/office/mac/drawingml/2011/main" xmlns="" val="0"/>
             </a:ext>
           </a:extLst>
         </p:spPr>
@@ -11163,7 +11108,7 @@
           <a:p>
             <a:pPr algn="r"/>
             <a:fld id="{F7021451-1387-4CA6-816F-3879F97B5CBC}" type="slidenum">
-              <a:rPr b="0" lang="en-US"/>
+              <a:rPr lang="en-US" b="0"/>
               <a:t>12</a:t>
             </a:fld>
             <a:endParaRPr lang="en-US"/>
@@ -11198,9 +11143,11 @@
       <p:sp>
         <p:nvSpPr>
           <p:cNvPr id="2" name="Text 1"/>
-          <p:cNvSpPr/>
+          <p:cNvSpPr>
+            <a:spLocks noGrp="1"/>
+          </p:cNvSpPr>
           <p:nvPr>
-            <p:ph idx="101" type="body" hasCustomPrompt="1"/>
+            <p:ph type="body" idx="101" hasCustomPrompt="1"/>
           </p:nvPr>
         </p:nvSpPr>
         <p:spPr>
@@ -11218,7 +11165,7 @@
           <a:bodyPr wrap="square" lIns="0" tIns="0" rIns="0" bIns="0" rtlCol="0" anchor="ctr"/>
           <a:lstStyle/>
           <a:p>
-            <a:pPr indent="0" marL="0">
+            <a:pPr marL="0" indent="0">
               <a:buNone/>
             </a:pPr>
             <a:r>
@@ -11236,9 +11183,11 @@
       <p:sp>
         <p:nvSpPr>
           <p:cNvPr id="3" name="Text 1"/>
-          <p:cNvSpPr/>
+          <p:cNvSpPr>
+            <a:spLocks noGrp="1"/>
+          </p:cNvSpPr>
           <p:nvPr>
-            <p:ph idx="102" type="title" hasCustomPrompt="1"/>
+            <p:ph type="title" idx="102" hasCustomPrompt="1"/>
           </p:nvPr>
         </p:nvSpPr>
         <p:spPr>
@@ -11256,7 +11205,7 @@
           <a:bodyPr wrap="square" lIns="0" tIns="0" rIns="0" bIns="0" rtlCol="0" anchor="ctr"/>
           <a:lstStyle/>
           <a:p>
-            <a:pPr algn="l" indent="0" marL="0">
+            <a:pPr marL="0" indent="0" algn="l">
               <a:buNone/>
             </a:pPr>
             <a:r>
@@ -11280,23 +11229,41 @@
           <p:nvPr>
             <p:extLst>
               <p:ext uri="{D42A27DB-BD31-4B8C-83A1-F6EECF244321}">
-                <p14:modId xmlns:p14="http://schemas.microsoft.com/office/powerpoint/2010/main" val="1579011935"/>
+                <p14:modId xmlns:p14="http://schemas.microsoft.com/office/powerpoint/2010/main" val="801573182"/>
               </p:ext>
             </p:extLst>
           </p:nvPr>
         </p:nvGraphicFramePr>
         <p:xfrm>
           <a:off x="548640" y="1417320"/>
-          <a:ext cx="11094415" cy="914400"/>
+          <a:ext cx="11094415" cy="3035808"/>
         </p:xfrm>
         <a:graphic>
           <a:graphicData uri="http://schemas.openxmlformats.org/drawingml/2006/table">
             <a:tbl>
               <a:tblPr/>
               <a:tblGrid>
-                <a:gridCol w="1600200"/>
-                <a:gridCol w="4206240"/>
-                <a:gridCol w="5287975"/>
+                <a:gridCol w="1600200">
+                  <a:extLst>
+                    <a:ext uri="{9D8B030D-6E8A-4147-A177-3AD203B41FA5}">
+                      <a16:colId xmlns:a16="http://schemas.microsoft.com/office/drawing/2014/main" val="20000"/>
+                    </a:ext>
+                  </a:extLst>
+                </a:gridCol>
+                <a:gridCol w="4206240">
+                  <a:extLst>
+                    <a:ext uri="{9D8B030D-6E8A-4147-A177-3AD203B41FA5}">
+                      <a16:colId xmlns:a16="http://schemas.microsoft.com/office/drawing/2014/main" val="20001"/>
+                    </a:ext>
+                  </a:extLst>
+                </a:gridCol>
+                <a:gridCol w="5287975">
+                  <a:extLst>
+                    <a:ext uri="{9D8B030D-6E8A-4147-A177-3AD203B41FA5}">
+                      <a16:colId xmlns:a16="http://schemas.microsoft.com/office/drawing/2014/main" val="20002"/>
+                    </a:ext>
+                  </a:extLst>
+                </a:gridCol>
               </a:tblGrid>
               <a:tr h="347472">
                 <a:tc>
@@ -11304,7 +11271,7 @@
                     <a:bodyPr/>
                     <a:lstStyle/>
                     <a:p>
-                      <a:pPr indent="0" marL="0">
+                      <a:pPr marL="0" indent="0">
                         <a:buNone/>
                       </a:pPr>
                       <a:r>
@@ -11372,7 +11339,7 @@
                     <a:bodyPr/>
                     <a:lstStyle/>
                     <a:p>
-                      <a:pPr indent="0" marL="0">
+                      <a:pPr marL="0" indent="0">
                         <a:buNone/>
                       </a:pPr>
                       <a:r>
@@ -11440,7 +11407,7 @@
                     <a:bodyPr/>
                     <a:lstStyle/>
                     <a:p>
-                      <a:pPr indent="0" marL="0">
+                      <a:pPr marL="0" indent="0">
                         <a:buNone/>
                       </a:pPr>
                       <a:r>
@@ -11503,6 +11470,11 @@
                     </a:solidFill>
                   </a:tcPr>
                 </a:tc>
+                <a:extLst>
+                  <a:ext uri="{0D108BD9-81ED-4DB2-BD59-A6C34878D82A}">
+                    <a16:rowId xmlns:a16="http://schemas.microsoft.com/office/drawing/2014/main" val="10000"/>
+                  </a:ext>
+                </a:extLst>
               </a:tr>
               <a:tr h="384048">
                 <a:tc>
@@ -11510,7 +11482,7 @@
                     <a:bodyPr/>
                     <a:lstStyle/>
                     <a:p>
-                      <a:pPr indent="0" marL="0">
+                      <a:pPr marL="0" indent="0">
                         <a:buNone/>
                       </a:pPr>
                       <a:r>
@@ -11578,7 +11550,7 @@
                     <a:bodyPr/>
                     <a:lstStyle/>
                     <a:p>
-                      <a:pPr indent="0" marL="0">
+                      <a:pPr marL="0" indent="0">
                         <a:buNone/>
                       </a:pPr>
                       <a:r>
@@ -11643,7 +11615,7 @@
                     <a:bodyPr/>
                     <a:lstStyle/>
                     <a:p>
-                      <a:pPr indent="0" marL="0">
+                      <a:pPr marL="0" indent="0">
                         <a:buNone/>
                       </a:pPr>
                       <a:r>
@@ -11703,6 +11675,11 @@
                     </a:lnB>
                   </a:tcPr>
                 </a:tc>
+                <a:extLst>
+                  <a:ext uri="{0D108BD9-81ED-4DB2-BD59-A6C34878D82A}">
+                    <a16:rowId xmlns:a16="http://schemas.microsoft.com/office/drawing/2014/main" val="10001"/>
+                  </a:ext>
+                </a:extLst>
               </a:tr>
               <a:tr h="384048">
                 <a:tc>
@@ -11710,7 +11687,7 @@
                     <a:bodyPr/>
                     <a:lstStyle/>
                     <a:p>
-                      <a:pPr indent="0" marL="0">
+                      <a:pPr marL="0" indent="0">
                         <a:buNone/>
                       </a:pPr>
                       <a:r>
@@ -11778,7 +11755,7 @@
                     <a:bodyPr/>
                     <a:lstStyle/>
                     <a:p>
-                      <a:pPr indent="0" marL="0">
+                      <a:pPr marL="0" indent="0">
                         <a:buNone/>
                       </a:pPr>
                       <a:r>
@@ -11843,7 +11820,7 @@
                     <a:bodyPr/>
                     <a:lstStyle/>
                     <a:p>
-                      <a:pPr indent="0" marL="0">
+                      <a:pPr marL="0" indent="0">
                         <a:buNone/>
                       </a:pPr>
                       <a:r>
@@ -11903,6 +11880,11 @@
                     </a:lnB>
                   </a:tcPr>
                 </a:tc>
+                <a:extLst>
+                  <a:ext uri="{0D108BD9-81ED-4DB2-BD59-A6C34878D82A}">
+                    <a16:rowId xmlns:a16="http://schemas.microsoft.com/office/drawing/2014/main" val="10002"/>
+                  </a:ext>
+                </a:extLst>
               </a:tr>
               <a:tr h="384048">
                 <a:tc>
@@ -11910,7 +11892,7 @@
                     <a:bodyPr/>
                     <a:lstStyle/>
                     <a:p>
-                      <a:pPr indent="0" marL="0">
+                      <a:pPr marL="0" indent="0">
                         <a:buNone/>
                       </a:pPr>
                       <a:r>
@@ -11978,7 +11960,7 @@
                     <a:bodyPr/>
                     <a:lstStyle/>
                     <a:p>
-                      <a:pPr indent="0" marL="0">
+                      <a:pPr marL="0" indent="0">
                         <a:buNone/>
                       </a:pPr>
                       <a:r>
@@ -12043,7 +12025,7 @@
                     <a:bodyPr/>
                     <a:lstStyle/>
                     <a:p>
-                      <a:pPr indent="0" marL="0">
+                      <a:pPr marL="0" indent="0">
                         <a:buNone/>
                       </a:pPr>
                       <a:r>
@@ -12103,6 +12085,11 @@
                     </a:lnB>
                   </a:tcPr>
                 </a:tc>
+                <a:extLst>
+                  <a:ext uri="{0D108BD9-81ED-4DB2-BD59-A6C34878D82A}">
+                    <a16:rowId xmlns:a16="http://schemas.microsoft.com/office/drawing/2014/main" val="10003"/>
+                  </a:ext>
+                </a:extLst>
               </a:tr>
               <a:tr h="384048">
                 <a:tc>
@@ -12110,7 +12097,7 @@
                     <a:bodyPr/>
                     <a:lstStyle/>
                     <a:p>
-                      <a:pPr indent="0" marL="0">
+                      <a:pPr marL="0" indent="0">
                         <a:buNone/>
                       </a:pPr>
                       <a:r>
@@ -12178,11 +12165,11 @@
                     <a:bodyPr/>
                     <a:lstStyle/>
                     <a:p>
-                      <a:pPr indent="0" marL="0">
+                      <a:pPr marL="0" indent="0">
                         <a:buNone/>
                       </a:pPr>
                       <a:r>
-                        <a:rPr lang="en-US" sz="1300" dirty="0">
+                        <a:rPr lang="en-US" sz="1300" dirty="0" err="1">
                           <a:solidFill>
                             <a:srgbClr val="454545"/>
                           </a:solidFill>
@@ -12190,7 +12177,7 @@
                           <a:ea typeface="Microsoft JhengHei" pitchFamily="34" charset="-122"/>
                           <a:cs typeface="Microsoft JhengHei" pitchFamily="34" charset="-120"/>
                         </a:rPr>
-                        <a:t>靠人工查看，看不完也看得晚</a:t>
+                        <a:t>靠人工查看，耗費人力且不即時</a:t>
                       </a:r>
                       <a:endParaRPr lang="en-US" sz="1300" dirty="0">
                         <a:latin typeface="Microsoft JhengHei" charset="0"/>
@@ -12243,7 +12230,7 @@
                     <a:bodyPr/>
                     <a:lstStyle/>
                     <a:p>
-                      <a:pPr indent="0" marL="0">
+                      <a:pPr marL="0" indent="0">
                         <a:buNone/>
                       </a:pPr>
                       <a:r>
@@ -12303,6 +12290,11 @@
                     </a:lnB>
                   </a:tcPr>
                 </a:tc>
+                <a:extLst>
+                  <a:ext uri="{0D108BD9-81ED-4DB2-BD59-A6C34878D82A}">
+                    <a16:rowId xmlns:a16="http://schemas.microsoft.com/office/drawing/2014/main" val="10004"/>
+                  </a:ext>
+                </a:extLst>
               </a:tr>
               <a:tr h="384048">
                 <a:tc>
@@ -12310,7 +12302,7 @@
                     <a:bodyPr/>
                     <a:lstStyle/>
                     <a:p>
-                      <a:pPr indent="0" marL="0">
+                      <a:pPr marL="0" indent="0">
                         <a:buNone/>
                       </a:pPr>
                       <a:r>
@@ -12378,7 +12370,7 @@
                     <a:bodyPr/>
                     <a:lstStyle/>
                     <a:p>
-                      <a:pPr indent="0" marL="0">
+                      <a:pPr marL="0" indent="0">
                         <a:buNone/>
                       </a:pPr>
                       <a:r>
@@ -12443,7 +12435,7 @@
                     <a:bodyPr/>
                     <a:lstStyle/>
                     <a:p>
-                      <a:pPr indent="0" marL="0">
+                      <a:pPr marL="0" indent="0">
                         <a:buNone/>
                       </a:pPr>
                       <a:r>
@@ -12503,6 +12495,11 @@
                     </a:lnB>
                   </a:tcPr>
                 </a:tc>
+                <a:extLst>
+                  <a:ext uri="{0D108BD9-81ED-4DB2-BD59-A6C34878D82A}">
+                    <a16:rowId xmlns:a16="http://schemas.microsoft.com/office/drawing/2014/main" val="10005"/>
+                  </a:ext>
+                </a:extLst>
               </a:tr>
               <a:tr h="384048">
                 <a:tc>
@@ -12510,7 +12507,7 @@
                     <a:bodyPr/>
                     <a:lstStyle/>
                     <a:p>
-                      <a:pPr indent="0" marL="0">
+                      <a:pPr marL="0" indent="0">
                         <a:buNone/>
                       </a:pPr>
                       <a:r>
@@ -12578,7 +12575,7 @@
                     <a:bodyPr/>
                     <a:lstStyle/>
                     <a:p>
-                      <a:pPr indent="0" marL="0">
+                      <a:pPr marL="0" indent="0">
                         <a:buNone/>
                       </a:pPr>
                       <a:r>
@@ -12643,7 +12640,7 @@
                     <a:bodyPr/>
                     <a:lstStyle/>
                     <a:p>
-                      <a:pPr indent="0" marL="0">
+                      <a:pPr marL="0" indent="0">
                         <a:buNone/>
                       </a:pPr>
                       <a:r>
@@ -12703,6 +12700,11 @@
                     </a:lnB>
                   </a:tcPr>
                 </a:tc>
+                <a:extLst>
+                  <a:ext uri="{0D108BD9-81ED-4DB2-BD59-A6C34878D82A}">
+                    <a16:rowId xmlns:a16="http://schemas.microsoft.com/office/drawing/2014/main" val="10006"/>
+                  </a:ext>
+                </a:extLst>
               </a:tr>
               <a:tr h="384048">
                 <a:tc>
@@ -12710,7 +12712,7 @@
                     <a:bodyPr/>
                     <a:lstStyle/>
                     <a:p>
-                      <a:pPr indent="0" marL="0">
+                      <a:pPr marL="0" indent="0">
                         <a:buNone/>
                       </a:pPr>
                       <a:r>
@@ -12778,7 +12780,7 @@
                     <a:bodyPr/>
                     <a:lstStyle/>
                     <a:p>
-                      <a:pPr indent="0" marL="0">
+                      <a:pPr marL="0" indent="0">
                         <a:buNone/>
                       </a:pPr>
                       <a:r>
@@ -12843,7 +12845,7 @@
                     <a:bodyPr/>
                     <a:lstStyle/>
                     <a:p>
-                      <a:pPr indent="0" marL="0">
+                      <a:pPr marL="0" indent="0">
                         <a:buNone/>
                       </a:pPr>
                       <a:r>
@@ -12903,6 +12905,11 @@
                     </a:lnB>
                   </a:tcPr>
                 </a:tc>
+                <a:extLst>
+                  <a:ext uri="{0D108BD9-81ED-4DB2-BD59-A6C34878D82A}">
+                    <a16:rowId xmlns:a16="http://schemas.microsoft.com/office/drawing/2014/main" val="10007"/>
+                  </a:ext>
+                </a:extLst>
               </a:tr>
             </a:tbl>
           </a:graphicData>
@@ -12962,14 +12969,14 @@
       </p:sp>
       <p:pic>
         <p:nvPicPr>
-          <p:cNvPr id="7" name="Image 0" descr="preencoded.png">    </p:cNvPr>
+          <p:cNvPr id="7" name="Image 0" descr="preencoded.png"/>
           <p:cNvPicPr>
             <a:picLocks noChangeAspect="1"/>
           </p:cNvPicPr>
           <p:nvPr/>
         </p:nvPicPr>
         <p:blipFill>
-          <a:blip r:embed="rId1"/>
+          <a:blip r:embed="rId3"/>
           <a:stretch>
             <a:fillRect/>
           </a:stretch>
@@ -13005,7 +13012,7 @@
           <a:bodyPr wrap="square" lIns="0" tIns="0" rIns="0" bIns="0" rtlCol="0" anchor="ctr"/>
           <a:lstStyle/>
           <a:p>
-            <a:pPr indent="0" marL="0">
+            <a:pPr marL="0" indent="0">
               <a:buNone/>
             </a:pPr>
             <a:r>
@@ -13041,7 +13048,7 @@
           <a:bodyPr wrap="square" lIns="0" tIns="0" rIns="0" bIns="0" rtlCol="0" anchor="t"/>
           <a:lstStyle/>
           <a:p>
-            <a:pPr indent="0" marL="0">
+            <a:pPr marL="0" indent="0">
               <a:buNone/>
             </a:pPr>
             <a:r>
@@ -13055,7 +13062,7 @@
             <a:endParaRPr lang="zh-TW" sz="1150" dirty="0"/>
           </a:p>
           <a:p>
-            <a:pPr indent="0" marL="0">
+            <a:pPr marL="0" indent="0">
               <a:buNone/>
             </a:pPr>
             <a:r>
@@ -13124,14 +13131,14 @@
       </p:sp>
       <p:pic>
         <p:nvPicPr>
-          <p:cNvPr id="12" name="Image 1" descr="preencoded.png">    </p:cNvPr>
+          <p:cNvPr id="12" name="Image 1" descr="preencoded.png"/>
           <p:cNvPicPr>
             <a:picLocks noChangeAspect="1"/>
           </p:cNvPicPr>
           <p:nvPr/>
         </p:nvPicPr>
         <p:blipFill>
-          <a:blip r:embed="rId2"/>
+          <a:blip r:embed="rId4"/>
           <a:stretch>
             <a:fillRect/>
           </a:stretch>
@@ -13167,7 +13174,7 @@
           <a:bodyPr wrap="square" lIns="0" tIns="0" rIns="0" bIns="0" rtlCol="0" anchor="ctr"/>
           <a:lstStyle/>
           <a:p>
-            <a:pPr indent="0" marL="0">
+            <a:pPr marL="0" indent="0">
               <a:buNone/>
             </a:pPr>
             <a:r>
@@ -13184,7 +13191,7 @@
       </p:sp>
       <p:sp>
         <p:nvSpPr>
-          <p:cNvPr id="14" name="Text 9"/>
+          <p:cNvPr id="4" name="Text 9"/>
           <p:cNvSpPr txBox="1"/>
           <p:nvPr/>
         </p:nvSpPr>
@@ -13203,7 +13210,7 @@
           <a:bodyPr wrap="square" lIns="0" tIns="0" rIns="0" bIns="0" rtlCol="0" anchor="t"/>
           <a:lstStyle/>
           <a:p>
-            <a:pPr indent="0" marL="0">
+            <a:pPr marL="0" indent="0">
               <a:buNone/>
             </a:pPr>
             <a:r>
@@ -13217,7 +13224,7 @@
             <a:endParaRPr lang="zh-TW" sz="1150" dirty="0"/>
           </a:p>
           <a:p>
-            <a:pPr indent="0" marL="0">
+            <a:pPr marL="0" indent="0">
               <a:buNone/>
             </a:pPr>
             <a:r>
@@ -13286,14 +13293,14 @@
       </p:sp>
       <p:pic>
         <p:nvPicPr>
-          <p:cNvPr id="17" name="Image 2" descr="preencoded.png">    </p:cNvPr>
+          <p:cNvPr id="17" name="Image 2" descr="preencoded.png"/>
           <p:cNvPicPr>
             <a:picLocks noChangeAspect="1"/>
           </p:cNvPicPr>
           <p:nvPr/>
         </p:nvPicPr>
         <p:blipFill>
-          <a:blip r:embed="rId3"/>
+          <a:blip r:embed="rId5"/>
           <a:stretch>
             <a:fillRect/>
           </a:stretch>
@@ -13329,7 +13336,7 @@
           <a:bodyPr wrap="square" lIns="0" tIns="0" rIns="0" bIns="0" rtlCol="0" anchor="ctr"/>
           <a:lstStyle/>
           <a:p>
-            <a:pPr indent="0" marL="0">
+            <a:pPr marL="0" indent="0">
               <a:buNone/>
             </a:pPr>
             <a:r>
@@ -13365,7 +13372,7 @@
           <a:bodyPr wrap="square" lIns="0" tIns="0" rIns="0" bIns="0" rtlCol="0" anchor="t"/>
           <a:lstStyle/>
           <a:p>
-            <a:pPr indent="0" marL="0">
+            <a:pPr marL="0" indent="0">
               <a:buNone/>
             </a:pPr>
             <a:r>
@@ -13379,7 +13386,7 @@
             <a:endParaRPr lang="zh-TW" sz="1150" dirty="0"/>
           </a:p>
           <a:p>
-            <a:pPr indent="0" marL="0">
+            <a:pPr marL="0" indent="0">
               <a:buNone/>
             </a:pPr>
             <a:r>
@@ -13448,14 +13455,14 @@
       </p:sp>
       <p:pic>
         <p:nvPicPr>
-          <p:cNvPr id="22" name="Image 3" descr="preencoded.png">    </p:cNvPr>
+          <p:cNvPr id="22" name="Image 3" descr="preencoded.png"/>
           <p:cNvPicPr>
             <a:picLocks noChangeAspect="1"/>
           </p:cNvPicPr>
           <p:nvPr/>
         </p:nvPicPr>
         <p:blipFill>
-          <a:blip r:embed="rId4"/>
+          <a:blip r:embed="rId6"/>
           <a:stretch>
             <a:fillRect/>
           </a:stretch>
@@ -13491,7 +13498,7 @@
           <a:bodyPr wrap="square" lIns="0" tIns="0" rIns="0" bIns="0" rtlCol="0" anchor="ctr"/>
           <a:lstStyle/>
           <a:p>
-            <a:pPr indent="0" marL="0">
+            <a:pPr marL="0" indent="0">
               <a:buNone/>
             </a:pPr>
             <a:r>
@@ -13527,7 +13534,7 @@
           <a:bodyPr wrap="square" lIns="0" tIns="0" rIns="0" bIns="0" rtlCol="0" anchor="t"/>
           <a:lstStyle/>
           <a:p>
-            <a:pPr indent="0" marL="0">
+            <a:pPr marL="0" indent="0">
               <a:buNone/>
             </a:pPr>
             <a:r>
@@ -13541,7 +13548,7 @@
             <a:endParaRPr lang="zh-TW" sz="1150" dirty="0"/>
           </a:p>
           <a:p>
-            <a:pPr indent="0" marL="0">
+            <a:pPr marL="0" indent="0">
               <a:buNone/>
             </a:pPr>
             <a:r>
@@ -13577,7 +13584,7 @@
           <a:bodyPr wrap="square" lIns="0" tIns="0" rIns="0" bIns="0" rtlCol="0" anchor="t"/>
           <a:lstStyle/>
           <a:p>
-            <a:pPr indent="0" marL="0">
+            <a:pPr marL="0" indent="0">
               <a:buNone/>
             </a:pPr>
             <a:r>
@@ -13594,7 +13601,7 @@
       </p:sp>
       <p:sp>
         <p:nvSpPr>
-          <p:cNvPr id="25" name="Slide Number Placeholder 0"/>
+          <p:cNvPr id="26" name="Slide Number Placeholder 0"/>
           <p:cNvSpPr>
             <a:spLocks noGrp="1"/>
           </p:cNvSpPr>
@@ -13612,7 +13619,7 @@
           </a:prstGeom>
           <a:extLst>
             <a:ext uri="{C572A759-6A51-4108-AA02-DFA0A04FC94B}">
-              <ma14:wrappingTextBoxFlag xmlns:ma14="http://schemas.microsoft.com/office/mac/drawingml/2011/main" val="0"/>
+              <ma14:wrappingTextBoxFlag xmlns:ma14="http://schemas.microsoft.com/office/mac/drawingml/2011/main" xmlns="" val="0"/>
             </a:ext>
           </a:extLst>
         </p:spPr>
@@ -13630,7 +13637,7 @@
           <a:p>
             <a:pPr algn="r"/>
             <a:fld id="{F7021451-1387-4CA6-816F-3879F97B5CBC}" type="slidenum">
-              <a:rPr b="0" lang="en-US"/>
+              <a:rPr lang="en-US" b="0"/>
               <a:t>13</a:t>
             </a:fld>
             <a:endParaRPr lang="en-US"/>
@@ -13665,9 +13672,11 @@
       <p:sp>
         <p:nvSpPr>
           <p:cNvPr id="2" name="Text 1"/>
-          <p:cNvSpPr/>
+          <p:cNvSpPr>
+            <a:spLocks noGrp="1"/>
+          </p:cNvSpPr>
           <p:nvPr>
-            <p:ph idx="101" type="body" hasCustomPrompt="1"/>
+            <p:ph type="body" idx="101" hasCustomPrompt="1"/>
           </p:nvPr>
         </p:nvSpPr>
         <p:spPr>
@@ -13685,7 +13694,7 @@
           <a:bodyPr wrap="square" lIns="0" tIns="0" rIns="0" bIns="0" rtlCol="0" anchor="ctr"/>
           <a:lstStyle/>
           <a:p>
-            <a:pPr indent="0" marL="0">
+            <a:pPr marL="0" indent="0">
               <a:buNone/>
             </a:pPr>
             <a:r>
@@ -13703,9 +13712,11 @@
       <p:sp>
         <p:nvSpPr>
           <p:cNvPr id="3" name="Text 1"/>
-          <p:cNvSpPr/>
+          <p:cNvSpPr>
+            <a:spLocks noGrp="1"/>
+          </p:cNvSpPr>
           <p:nvPr>
-            <p:ph idx="102" type="title" hasCustomPrompt="1"/>
+            <p:ph type="title" idx="102" hasCustomPrompt="1"/>
           </p:nvPr>
         </p:nvSpPr>
         <p:spPr>
@@ -13723,7 +13734,7 @@
           <a:bodyPr wrap="square" lIns="0" tIns="0" rIns="0" bIns="0" rtlCol="0" anchor="ctr"/>
           <a:lstStyle/>
           <a:p>
-            <a:pPr algn="l" indent="0" marL="0">
+            <a:pPr marL="0" indent="0" algn="l">
               <a:buNone/>
             </a:pPr>
             <a:r>
@@ -13813,7 +13824,7 @@
           <a:bodyPr wrap="square" lIns="0" tIns="0" rIns="0" bIns="0" rtlCol="0" anchor="ctr"/>
           <a:lstStyle/>
           <a:p>
-            <a:pPr algn="ctr" indent="0" marL="0">
+            <a:pPr marL="0" indent="0" algn="ctr">
               <a:buNone/>
             </a:pPr>
             <a:r>
@@ -13849,7 +13860,7 @@
           <a:bodyPr wrap="square" lIns="0" tIns="0" rIns="0" bIns="0" rtlCol="0" anchor="t"/>
           <a:lstStyle/>
           <a:p>
-            <a:pPr indent="0" marL="0">
+            <a:pPr marL="0" indent="0">
               <a:buNone/>
             </a:pPr>
             <a:r>
@@ -13885,7 +13896,7 @@
           <a:bodyPr wrap="square" lIns="0" tIns="0" rIns="0" bIns="0" rtlCol="0" anchor="t"/>
           <a:lstStyle/>
           <a:p>
-            <a:pPr indent="0" marL="0">
+            <a:pPr marL="0" indent="0">
               <a:buNone/>
             </a:pPr>
             <a:r>
@@ -13899,7 +13910,7 @@
             <a:endParaRPr lang="zh-TW" sz="1600" dirty="0"/>
           </a:p>
           <a:p>
-            <a:pPr indent="0" marL="0">
+            <a:pPr marL="0" indent="0">
               <a:buNone/>
             </a:pPr>
             <a:r>
@@ -13935,7 +13946,7 @@
           <a:bodyPr wrap="square" lIns="0" tIns="0" rIns="0" bIns="0" rtlCol="0" anchor="ctr"/>
           <a:lstStyle/>
           <a:p>
-            <a:pPr indent="0" marL="0">
+            <a:pPr marL="0" indent="0">
               <a:buNone/>
             </a:pPr>
             <a:r>
@@ -13971,7 +13982,7 @@
           <a:bodyPr wrap="square" lIns="0" tIns="0" rIns="0" bIns="0" rtlCol="0" anchor="t"/>
           <a:lstStyle/>
           <a:p>
-            <a:pPr indent="0" marL="0">
+            <a:pPr marL="0" indent="0">
               <a:buNone/>
             </a:pPr>
             <a:r>
@@ -14007,7 +14018,7 @@
           <a:bodyPr wrap="square" lIns="0" tIns="0" rIns="0" bIns="0" rtlCol="0" anchor="t"/>
           <a:lstStyle/>
           <a:p>
-            <a:pPr indent="0" marL="0">
+            <a:pPr marL="0" indent="0">
               <a:buNone/>
             </a:pPr>
             <a:r>
@@ -14021,7 +14032,7 @@
             <a:endParaRPr lang="zh-TW" sz="1600" dirty="0"/>
           </a:p>
           <a:p>
-            <a:pPr indent="0" marL="0">
+            <a:pPr marL="0" indent="0">
               <a:buNone/>
             </a:pPr>
             <a:r>
@@ -14057,7 +14068,7 @@
           <a:bodyPr wrap="square" lIns="0" tIns="0" rIns="0" bIns="0" rtlCol="0" anchor="ctr"/>
           <a:lstStyle/>
           <a:p>
-            <a:pPr indent="0" marL="0">
+            <a:pPr marL="0" indent="0">
               <a:buNone/>
             </a:pPr>
             <a:r>
@@ -14093,7 +14104,7 @@
           <a:bodyPr wrap="square" lIns="0" tIns="0" rIns="0" bIns="0" rtlCol="0" anchor="ctr"/>
           <a:lstStyle/>
           <a:p>
-            <a:pPr indent="0" marL="0">
+            <a:pPr marL="0" indent="0">
               <a:buNone/>
             </a:pPr>
             <a:r>
@@ -14137,7 +14148,7 @@
           <a:bodyPr wrap="square" lIns="0" tIns="0" rIns="0" bIns="0" rtlCol="0" anchor="ctr"/>
           <a:lstStyle/>
           <a:p>
-            <a:pPr indent="0" marL="0">
+            <a:pPr marL="0" indent="0">
               <a:buNone/>
             </a:pPr>
             <a:r>
@@ -14200,7 +14211,7 @@
           <a:bodyPr wrap="square" lIns="0" tIns="0" rIns="0" bIns="0" rtlCol="0" anchor="ctr"/>
           <a:lstStyle/>
           <a:p>
-            <a:pPr indent="0" marL="0">
+            <a:pPr marL="0" indent="0">
               <a:buNone/>
             </a:pPr>
             <a:r>
@@ -14236,7 +14247,7 @@
           <a:bodyPr wrap="square" lIns="0" tIns="0" rIns="0" bIns="0" rtlCol="0" anchor="t"/>
           <a:lstStyle/>
           <a:p>
-            <a:pPr indent="0" marL="0">
+            <a:pPr marL="0" indent="0">
               <a:buNone/>
             </a:pPr>
             <a:r>
@@ -14250,7 +14261,7 @@
             <a:endParaRPr lang="zh-TW" sz="1250" dirty="0"/>
           </a:p>
           <a:p>
-            <a:pPr indent="0" marL="0">
+            <a:pPr marL="0" indent="0">
               <a:buNone/>
             </a:pPr>
             <a:r>
@@ -14313,7 +14324,7 @@
           <a:bodyPr wrap="square" lIns="0" tIns="0" rIns="0" bIns="0" rtlCol="0" anchor="ctr"/>
           <a:lstStyle/>
           <a:p>
-            <a:pPr indent="0" marL="0">
+            <a:pPr marL="0" indent="0">
               <a:buNone/>
             </a:pPr>
             <a:r>
@@ -14349,7 +14360,7 @@
           <a:bodyPr wrap="square" lIns="0" tIns="0" rIns="0" bIns="0" rtlCol="0" anchor="t"/>
           <a:lstStyle/>
           <a:p>
-            <a:pPr indent="0" marL="0">
+            <a:pPr marL="0" indent="0">
               <a:buNone/>
             </a:pPr>
             <a:r>
@@ -14363,7 +14374,7 @@
             <a:endParaRPr lang="zh-TW" sz="1250" dirty="0"/>
           </a:p>
           <a:p>
-            <a:pPr indent="0" marL="0">
+            <a:pPr marL="0" indent="0">
               <a:buNone/>
             </a:pPr>
             <a:r>
@@ -14426,7 +14437,7 @@
           <a:bodyPr wrap="square" lIns="0" tIns="0" rIns="0" bIns="0" rtlCol="0" anchor="ctr"/>
           <a:lstStyle/>
           <a:p>
-            <a:pPr indent="0" marL="0">
+            <a:pPr marL="0" indent="0">
               <a:buNone/>
             </a:pPr>
             <a:r>
@@ -14462,7 +14473,7 @@
           <a:bodyPr wrap="square" lIns="0" tIns="0" rIns="0" bIns="0" rtlCol="0" anchor="t"/>
           <a:lstStyle/>
           <a:p>
-            <a:pPr indent="0" marL="0">
+            <a:pPr marL="0" indent="0">
               <a:buNone/>
             </a:pPr>
             <a:r>
@@ -14476,7 +14487,7 @@
             <a:endParaRPr lang="zh-TW" sz="1250" dirty="0"/>
           </a:p>
           <a:p>
-            <a:pPr indent="0" marL="0">
+            <a:pPr marL="0" indent="0">
               <a:buNone/>
             </a:pPr>
             <a:r>
@@ -14539,7 +14550,7 @@
           <a:bodyPr wrap="square" lIns="0" tIns="0" rIns="0" bIns="0" rtlCol="0" anchor="ctr"/>
           <a:lstStyle/>
           <a:p>
-            <a:pPr indent="0" marL="0">
+            <a:pPr marL="0" indent="0">
               <a:buNone/>
             </a:pPr>
             <a:r>
@@ -14575,7 +14586,7 @@
           <a:bodyPr wrap="square" lIns="0" tIns="0" rIns="0" bIns="0" rtlCol="0" anchor="t"/>
           <a:lstStyle/>
           <a:p>
-            <a:pPr indent="0" marL="0">
+            <a:pPr marL="0" indent="0">
               <a:buNone/>
             </a:pPr>
             <a:r>
@@ -14589,7 +14600,7 @@
             <a:endParaRPr lang="zh-TW" sz="1250" dirty="0"/>
           </a:p>
           <a:p>
-            <a:pPr indent="0" marL="0">
+            <a:pPr marL="0" indent="0">
               <a:buNone/>
             </a:pPr>
             <a:r>
@@ -14625,7 +14636,7 @@
           <a:bodyPr wrap="square" lIns="0" tIns="0" rIns="0" bIns="0" rtlCol="0" anchor="t"/>
           <a:lstStyle/>
           <a:p>
-            <a:pPr indent="0" marL="0">
+            <a:pPr marL="0" indent="0">
               <a:buNone/>
             </a:pPr>
             <a:r>
@@ -14642,7 +14653,7 @@
       </p:sp>
       <p:sp>
         <p:nvSpPr>
-          <p:cNvPr id="25" name="Slide Number Placeholder 0"/>
+          <p:cNvPr id="28" name="Slide Number Placeholder 0"/>
           <p:cNvSpPr>
             <a:spLocks noGrp="1"/>
           </p:cNvSpPr>
@@ -14660,7 +14671,7 @@
           </a:prstGeom>
           <a:extLst>
             <a:ext uri="{C572A759-6A51-4108-AA02-DFA0A04FC94B}">
-              <ma14:wrappingTextBoxFlag xmlns:ma14="http://schemas.microsoft.com/office/mac/drawingml/2011/main" val="0"/>
+              <ma14:wrappingTextBoxFlag xmlns:ma14="http://schemas.microsoft.com/office/mac/drawingml/2011/main" xmlns="" val="0"/>
             </a:ext>
           </a:extLst>
         </p:spPr>
@@ -14678,7 +14689,7 @@
           <a:p>
             <a:pPr algn="r"/>
             <a:fld id="{F7021451-1387-4CA6-816F-3879F97B5CBC}" type="slidenum">
-              <a:rPr b="0" lang="en-US"/>
+              <a:rPr lang="en-US" b="0"/>
               <a:t>14</a:t>
             </a:fld>
             <a:endParaRPr lang="en-US"/>
@@ -14713,9 +14724,11 @@
       <p:sp>
         <p:nvSpPr>
           <p:cNvPr id="2" name="Text 1"/>
-          <p:cNvSpPr/>
+          <p:cNvSpPr>
+            <a:spLocks noGrp="1"/>
+          </p:cNvSpPr>
           <p:nvPr>
-            <p:ph idx="101" type="body" hasCustomPrompt="1"/>
+            <p:ph type="body" idx="101" hasCustomPrompt="1"/>
           </p:nvPr>
         </p:nvSpPr>
         <p:spPr>
@@ -14733,7 +14746,7 @@
           <a:bodyPr wrap="square" lIns="0" tIns="0" rIns="0" bIns="0" rtlCol="0" anchor="ctr"/>
           <a:lstStyle/>
           <a:p>
-            <a:pPr indent="0" marL="0">
+            <a:pPr marL="0" indent="0">
               <a:buNone/>
             </a:pPr>
             <a:r>
@@ -14751,9 +14764,11 @@
       <p:sp>
         <p:nvSpPr>
           <p:cNvPr id="3" name="Text 1"/>
-          <p:cNvSpPr/>
+          <p:cNvSpPr>
+            <a:spLocks noGrp="1"/>
+          </p:cNvSpPr>
           <p:nvPr>
-            <p:ph idx="102" type="title" hasCustomPrompt="1"/>
+            <p:ph type="title" idx="102" hasCustomPrompt="1"/>
           </p:nvPr>
         </p:nvSpPr>
         <p:spPr>
@@ -14771,7 +14786,7 @@
           <a:bodyPr wrap="square" lIns="0" tIns="0" rIns="0" bIns="0" rtlCol="0" anchor="ctr"/>
           <a:lstStyle/>
           <a:p>
-            <a:pPr algn="l" indent="0" marL="0">
+            <a:pPr marL="0" indent="0" algn="l">
               <a:buNone/>
             </a:pPr>
             <a:r>
@@ -14836,7 +14851,7 @@
           <a:bodyPr wrap="square" lIns="0" tIns="0" rIns="0" bIns="0" rtlCol="0" anchor="ctr"/>
           <a:lstStyle/>
           <a:p>
-            <a:pPr algn="ctr" indent="0" marL="0">
+            <a:pPr marL="0" indent="0" algn="ctr">
               <a:buNone/>
             </a:pPr>
             <a:r>
@@ -14872,7 +14887,7 @@
           <a:bodyPr wrap="square" lIns="0" tIns="0" rIns="0" bIns="0" rtlCol="0" anchor="ctr"/>
           <a:lstStyle/>
           <a:p>
-            <a:pPr indent="0" marL="0">
+            <a:pPr marL="0" indent="0">
               <a:buNone/>
             </a:pPr>
             <a:r>
@@ -14908,7 +14923,7 @@
           <a:bodyPr wrap="square" lIns="0" tIns="0" rIns="0" bIns="0" rtlCol="0" anchor="t"/>
           <a:lstStyle/>
           <a:p>
-            <a:pPr indent="0" marL="0">
+            <a:pPr marL="0" indent="0">
               <a:buNone/>
             </a:pPr>
             <a:r>
@@ -14944,7 +14959,7 @@
           <a:bodyPr wrap="square" lIns="0" tIns="0" rIns="0" bIns="0" rtlCol="0" anchor="t"/>
           <a:lstStyle/>
           <a:p>
-            <a:pPr indent="0" marL="0">
+            <a:pPr marL="0" indent="0">
               <a:buNone/>
             </a:pPr>
             <a:r>
@@ -14958,7 +14973,7 @@
             <a:endParaRPr lang="zh-TW" sz="1250" dirty="0"/>
           </a:p>
           <a:p>
-            <a:pPr indent="0" marL="0">
+            <a:pPr marL="0" indent="0">
               <a:buNone/>
             </a:pPr>
             <a:r>
@@ -14972,7 +14987,7 @@
             <a:endParaRPr lang="zh-TW" sz="1250" dirty="0"/>
           </a:p>
           <a:p>
-            <a:pPr indent="0" marL="0">
+            <a:pPr marL="0" indent="0">
               <a:buNone/>
             </a:pPr>
             <a:r>
@@ -15008,7 +15023,7 @@
           <a:bodyPr wrap="square" lIns="0" tIns="0" rIns="0" bIns="0" rtlCol="0" anchor="ctr"/>
           <a:lstStyle/>
           <a:p>
-            <a:pPr algn="ctr" indent="0" marL="0">
+            <a:pPr marL="0" indent="0" algn="ctr">
               <a:buNone/>
             </a:pPr>
             <a:r>
@@ -15073,7 +15088,7 @@
           <a:bodyPr wrap="square" lIns="0" tIns="0" rIns="0" bIns="0" rtlCol="0" anchor="ctr"/>
           <a:lstStyle/>
           <a:p>
-            <a:pPr algn="ctr" indent="0" marL="0">
+            <a:pPr marL="0" indent="0" algn="ctr">
               <a:buNone/>
             </a:pPr>
             <a:r>
@@ -15109,7 +15124,7 @@
           <a:bodyPr wrap="square" lIns="0" tIns="0" rIns="0" bIns="0" rtlCol="0" anchor="ctr"/>
           <a:lstStyle/>
           <a:p>
-            <a:pPr indent="0" marL="0">
+            <a:pPr marL="0" indent="0">
               <a:buNone/>
             </a:pPr>
             <a:r>
@@ -15145,7 +15160,7 @@
           <a:bodyPr wrap="square" lIns="0" tIns="0" rIns="0" bIns="0" rtlCol="0" anchor="t"/>
           <a:lstStyle/>
           <a:p>
-            <a:pPr indent="0" marL="0">
+            <a:pPr marL="0" indent="0">
               <a:buNone/>
             </a:pPr>
             <a:r>
@@ -15181,7 +15196,7 @@
           <a:bodyPr wrap="square" lIns="0" tIns="0" rIns="0" bIns="0" rtlCol="0" anchor="t"/>
           <a:lstStyle/>
           <a:p>
-            <a:pPr indent="0" marL="0">
+            <a:pPr marL="0" indent="0">
               <a:buNone/>
             </a:pPr>
             <a:r>
@@ -15195,7 +15210,7 @@
             <a:endParaRPr lang="zh-TW" sz="1250" dirty="0"/>
           </a:p>
           <a:p>
-            <a:pPr indent="0" marL="0">
+            <a:pPr marL="0" indent="0">
               <a:buNone/>
             </a:pPr>
             <a:r>
@@ -15209,7 +15224,7 @@
             <a:endParaRPr lang="zh-TW" sz="1250" dirty="0"/>
           </a:p>
           <a:p>
-            <a:pPr indent="0" marL="0">
+            <a:pPr marL="0" indent="0">
               <a:buNone/>
             </a:pPr>
             <a:r>
@@ -15245,7 +15260,7 @@
           <a:bodyPr wrap="square" lIns="0" tIns="0" rIns="0" bIns="0" rtlCol="0" anchor="ctr"/>
           <a:lstStyle/>
           <a:p>
-            <a:pPr algn="ctr" indent="0" marL="0">
+            <a:pPr marL="0" indent="0" algn="ctr">
               <a:buNone/>
             </a:pPr>
             <a:r>
@@ -15310,7 +15325,7 @@
           <a:bodyPr wrap="square" lIns="0" tIns="0" rIns="0" bIns="0" rtlCol="0" anchor="ctr"/>
           <a:lstStyle/>
           <a:p>
-            <a:pPr algn="ctr" indent="0" marL="0">
+            <a:pPr marL="0" indent="0" algn="ctr">
               <a:buNone/>
             </a:pPr>
             <a:r>
@@ -15346,7 +15361,7 @@
           <a:bodyPr wrap="square" lIns="0" tIns="0" rIns="0" bIns="0" rtlCol="0" anchor="ctr"/>
           <a:lstStyle/>
           <a:p>
-            <a:pPr indent="0" marL="0">
+            <a:pPr marL="0" indent="0">
               <a:buNone/>
             </a:pPr>
             <a:r>
@@ -15382,7 +15397,7 @@
           <a:bodyPr wrap="square" lIns="0" tIns="0" rIns="0" bIns="0" rtlCol="0" anchor="t"/>
           <a:lstStyle/>
           <a:p>
-            <a:pPr indent="0" marL="0">
+            <a:pPr marL="0" indent="0">
               <a:buNone/>
             </a:pPr>
             <a:r>
@@ -15418,7 +15433,7 @@
           <a:bodyPr wrap="square" lIns="0" tIns="0" rIns="0" bIns="0" rtlCol="0" anchor="t"/>
           <a:lstStyle/>
           <a:p>
-            <a:pPr indent="0" marL="0">
+            <a:pPr marL="0" indent="0">
               <a:buNone/>
             </a:pPr>
             <a:r>
@@ -15432,7 +15447,7 @@
             <a:endParaRPr lang="zh-TW" sz="1250" dirty="0"/>
           </a:p>
           <a:p>
-            <a:pPr indent="0" marL="0">
+            <a:pPr marL="0" indent="0">
               <a:buNone/>
             </a:pPr>
             <a:r>
@@ -15446,7 +15461,7 @@
             <a:endParaRPr lang="zh-TW" sz="1250" dirty="0"/>
           </a:p>
           <a:p>
-            <a:pPr indent="0" marL="0">
+            <a:pPr marL="0" indent="0">
               <a:buNone/>
             </a:pPr>
             <a:r>
@@ -15482,7 +15497,7 @@
           <a:bodyPr wrap="square" lIns="0" tIns="0" rIns="0" bIns="0" rtlCol="0" anchor="ctr"/>
           <a:lstStyle/>
           <a:p>
-            <a:pPr algn="ctr" indent="0" marL="0">
+            <a:pPr marL="0" indent="0" algn="ctr">
               <a:buNone/>
             </a:pPr>
             <a:r>
@@ -15547,7 +15562,7 @@
           <a:bodyPr wrap="square" lIns="0" tIns="0" rIns="0" bIns="0" rtlCol="0" anchor="ctr"/>
           <a:lstStyle/>
           <a:p>
-            <a:pPr algn="ctr" indent="0" marL="0">
+            <a:pPr marL="0" indent="0" algn="ctr">
               <a:buNone/>
             </a:pPr>
             <a:r>
@@ -15583,7 +15598,7 @@
           <a:bodyPr wrap="square" lIns="0" tIns="0" rIns="0" bIns="0" rtlCol="0" anchor="ctr"/>
           <a:lstStyle/>
           <a:p>
-            <a:pPr indent="0" marL="0">
+            <a:pPr marL="0" indent="0">
               <a:buNone/>
             </a:pPr>
             <a:r>
@@ -15619,7 +15634,7 @@
           <a:bodyPr wrap="square" lIns="0" tIns="0" rIns="0" bIns="0" rtlCol="0" anchor="t"/>
           <a:lstStyle/>
           <a:p>
-            <a:pPr indent="0" marL="0">
+            <a:pPr marL="0" indent="0">
               <a:buNone/>
             </a:pPr>
             <a:r>
@@ -15655,7 +15670,7 @@
           <a:bodyPr wrap="square" lIns="0" tIns="0" rIns="0" bIns="0" rtlCol="0" anchor="t"/>
           <a:lstStyle/>
           <a:p>
-            <a:pPr indent="0" marL="0">
+            <a:pPr marL="0" indent="0">
               <a:buNone/>
             </a:pPr>
             <a:r>
@@ -15669,7 +15684,7 @@
             <a:endParaRPr lang="zh-TW" sz="1250" dirty="0"/>
           </a:p>
           <a:p>
-            <a:pPr indent="0" marL="0">
+            <a:pPr marL="0" indent="0">
               <a:buNone/>
             </a:pPr>
             <a:r>
@@ -15683,7 +15698,7 @@
             <a:endParaRPr lang="zh-TW" sz="1250" dirty="0"/>
           </a:p>
           <a:p>
-            <a:pPr indent="0" marL="0">
+            <a:pPr marL="0" indent="0">
               <a:buNone/>
             </a:pPr>
             <a:r>
@@ -15719,7 +15734,7 @@
           <a:bodyPr wrap="square" lIns="0" tIns="0" rIns="0" bIns="0" rtlCol="0" anchor="t"/>
           <a:lstStyle/>
           <a:p>
-            <a:pPr indent="0" marL="0">
+            <a:pPr marL="0" indent="0">
               <a:buNone/>
             </a:pPr>
             <a:r>
@@ -15736,7 +15751,7 @@
       </p:sp>
       <p:graphicFrame>
         <p:nvGraphicFramePr>
-          <p:cNvPr id="16" name="Table 0"/>
+          <p:cNvPr id="28" name="Table 0"/>
           <p:cNvGraphicFramePr>
             <a:graphicFrameLocks noGrp="1"/>
           </p:cNvGraphicFramePr>
@@ -15750,15 +15765,27 @@
         </p:nvGraphicFramePr>
         <p:xfrm>
           <a:off x="548640" y="3931920"/>
-          <a:ext cx="6172200" cy="914400"/>
+          <a:ext cx="6172200" cy="2157984"/>
         </p:xfrm>
         <a:graphic>
           <a:graphicData uri="http://schemas.openxmlformats.org/drawingml/2006/table">
             <a:tbl>
               <a:tblPr/>
               <a:tblGrid>
-                <a:gridCol w="868680"/>
-                <a:gridCol w="5303520"/>
+                <a:gridCol w="868680">
+                  <a:extLst>
+                    <a:ext uri="{9D8B030D-6E8A-4147-A177-3AD203B41FA5}">
+                      <a16:colId xmlns:a16="http://schemas.microsoft.com/office/drawing/2014/main" val="20000"/>
+                    </a:ext>
+                  </a:extLst>
+                </a:gridCol>
+                <a:gridCol w="5303520">
+                  <a:extLst>
+                    <a:ext uri="{9D8B030D-6E8A-4147-A177-3AD203B41FA5}">
+                      <a16:colId xmlns:a16="http://schemas.microsoft.com/office/drawing/2014/main" val="20001"/>
+                    </a:ext>
+                  </a:extLst>
+                </a:gridCol>
               </a:tblGrid>
               <a:tr h="566928">
                 <a:tc>
@@ -15766,7 +15793,7 @@
                     <a:bodyPr/>
                     <a:lstStyle/>
                     <a:p>
-                      <a:pPr indent="0" marL="0">
+                      <a:pPr marL="0" indent="0">
                         <a:buNone/>
                       </a:pPr>
                       <a:r>
@@ -15834,7 +15861,7 @@
                     <a:bodyPr/>
                     <a:lstStyle/>
                     <a:p>
-                      <a:pPr indent="0" marL="0">
+                      <a:pPr marL="0" indent="0">
                         <a:buNone/>
                       </a:pPr>
                       <a:r>
@@ -15894,6 +15921,11 @@
                     </a:lnB>
                   </a:tcPr>
                 </a:tc>
+                <a:extLst>
+                  <a:ext uri="{0D108BD9-81ED-4DB2-BD59-A6C34878D82A}">
+                    <a16:rowId xmlns:a16="http://schemas.microsoft.com/office/drawing/2014/main" val="10000"/>
+                  </a:ext>
+                </a:extLst>
               </a:tr>
               <a:tr h="566928">
                 <a:tc>
@@ -15901,7 +15933,7 @@
                     <a:bodyPr/>
                     <a:lstStyle/>
                     <a:p>
-                      <a:pPr indent="0" marL="0">
+                      <a:pPr marL="0" indent="0">
                         <a:buNone/>
                       </a:pPr>
                       <a:r>
@@ -15969,7 +16001,7 @@
                     <a:bodyPr/>
                     <a:lstStyle/>
                     <a:p>
-                      <a:pPr indent="0" marL="0">
+                      <a:pPr marL="0" indent="0">
                         <a:buNone/>
                       </a:pPr>
                       <a:r>
@@ -16029,6 +16061,11 @@
                     </a:lnB>
                   </a:tcPr>
                 </a:tc>
+                <a:extLst>
+                  <a:ext uri="{0D108BD9-81ED-4DB2-BD59-A6C34878D82A}">
+                    <a16:rowId xmlns:a16="http://schemas.microsoft.com/office/drawing/2014/main" val="10001"/>
+                  </a:ext>
+                </a:extLst>
               </a:tr>
               <a:tr h="566928">
                 <a:tc>
@@ -16036,7 +16073,7 @@
                     <a:bodyPr/>
                     <a:lstStyle/>
                     <a:p>
-                      <a:pPr indent="0" marL="0">
+                      <a:pPr marL="0" indent="0">
                         <a:buNone/>
                       </a:pPr>
                       <a:r>
@@ -16104,7 +16141,7 @@
                     <a:bodyPr/>
                     <a:lstStyle/>
                     <a:p>
-                      <a:pPr indent="0" marL="0">
+                      <a:pPr marL="0" indent="0">
                         <a:buNone/>
                       </a:pPr>
                       <a:r>
@@ -16164,6 +16201,11 @@
                     </a:lnB>
                   </a:tcPr>
                 </a:tc>
+                <a:extLst>
+                  <a:ext uri="{0D108BD9-81ED-4DB2-BD59-A6C34878D82A}">
+                    <a16:rowId xmlns:a16="http://schemas.microsoft.com/office/drawing/2014/main" val="10002"/>
+                  </a:ext>
+                </a:extLst>
               </a:tr>
               <a:tr h="457200">
                 <a:tc>
@@ -16171,7 +16213,7 @@
                     <a:bodyPr/>
                     <a:lstStyle/>
                     <a:p>
-                      <a:pPr indent="0" marL="0">
+                      <a:pPr marL="0" indent="0">
                         <a:buNone/>
                       </a:pPr>
                       <a:r>
@@ -16239,7 +16281,7 @@
                     <a:bodyPr/>
                     <a:lstStyle/>
                     <a:p>
-                      <a:pPr indent="0" marL="0">
+                      <a:pPr marL="0" indent="0">
                         <a:buNone/>
                       </a:pPr>
                       <a:r>
@@ -16299,6 +16341,11 @@
                     </a:lnB>
                   </a:tcPr>
                 </a:tc>
+                <a:extLst>
+                  <a:ext uri="{0D108BD9-81ED-4DB2-BD59-A6C34878D82A}">
+                    <a16:rowId xmlns:a16="http://schemas.microsoft.com/office/drawing/2014/main" val="10003"/>
+                  </a:ext>
+                </a:extLst>
               </a:tr>
             </a:tbl>
           </a:graphicData>
@@ -16325,7 +16372,7 @@
           <a:bodyPr wrap="square" lIns="0" tIns="0" rIns="0" bIns="0" rtlCol="0" anchor="t"/>
           <a:lstStyle/>
           <a:p>
-            <a:pPr indent="0" marL="0">
+            <a:pPr marL="0" indent="0">
               <a:buNone/>
             </a:pPr>
             <a:r>
@@ -16491,7 +16538,7 @@
           <a:bodyPr wrap="square" lIns="0" tIns="0" rIns="0" bIns="0" rtlCol="0" anchor="t"/>
           <a:lstStyle/>
           <a:p>
-            <a:pPr indent="0" marL="0">
+            <a:pPr marL="0" indent="0">
               <a:buNone/>
             </a:pPr>
             <a:r>
@@ -16508,7 +16555,7 @@
       </p:sp>
       <p:sp>
         <p:nvSpPr>
-          <p:cNvPr id="25" name="Slide Number Placeholder 0"/>
+          <p:cNvPr id="32" name="Slide Number Placeholder 0"/>
           <p:cNvSpPr>
             <a:spLocks noGrp="1"/>
           </p:cNvSpPr>
@@ -16526,7 +16573,7 @@
           </a:prstGeom>
           <a:extLst>
             <a:ext uri="{C572A759-6A51-4108-AA02-DFA0A04FC94B}">
-              <ma14:wrappingTextBoxFlag xmlns:ma14="http://schemas.microsoft.com/office/mac/drawingml/2011/main" val="0"/>
+              <ma14:wrappingTextBoxFlag xmlns:ma14="http://schemas.microsoft.com/office/mac/drawingml/2011/main" xmlns="" val="0"/>
             </a:ext>
           </a:extLst>
         </p:spPr>
@@ -16544,7 +16591,7 @@
           <a:p>
             <a:pPr algn="r"/>
             <a:fld id="{F7021451-1387-4CA6-816F-3879F97B5CBC}" type="slidenum">
-              <a:rPr b="0" lang="en-US"/>
+              <a:rPr lang="en-US" b="0"/>
               <a:t>15</a:t>
             </a:fld>
             <a:endParaRPr lang="en-US"/>
@@ -16579,9 +16626,11 @@
       <p:sp>
         <p:nvSpPr>
           <p:cNvPr id="2" name="Text 1"/>
-          <p:cNvSpPr/>
+          <p:cNvSpPr>
+            <a:spLocks noGrp="1"/>
+          </p:cNvSpPr>
           <p:nvPr>
-            <p:ph idx="101" type="body" hasCustomPrompt="1"/>
+            <p:ph type="body" idx="101" hasCustomPrompt="1"/>
           </p:nvPr>
         </p:nvSpPr>
         <p:spPr>
@@ -16599,7 +16648,7 @@
           <a:bodyPr wrap="square" lIns="0" tIns="0" rIns="0" bIns="0" rtlCol="0" anchor="ctr"/>
           <a:lstStyle/>
           <a:p>
-            <a:pPr indent="0" marL="0">
+            <a:pPr marL="0" indent="0">
               <a:buNone/>
             </a:pPr>
             <a:r>
@@ -16617,9 +16666,11 @@
       <p:sp>
         <p:nvSpPr>
           <p:cNvPr id="3" name="Text 1"/>
-          <p:cNvSpPr/>
+          <p:cNvSpPr>
+            <a:spLocks noGrp="1"/>
+          </p:cNvSpPr>
           <p:nvPr>
-            <p:ph idx="102" type="title" hasCustomPrompt="1"/>
+            <p:ph type="title" idx="102" hasCustomPrompt="1"/>
           </p:nvPr>
         </p:nvSpPr>
         <p:spPr>
@@ -16637,7 +16688,7 @@
           <a:bodyPr wrap="square" lIns="0" tIns="0" rIns="0" bIns="0" rtlCol="0" anchor="ctr"/>
           <a:lstStyle/>
           <a:p>
-            <a:pPr algn="l" indent="0" marL="0">
+            <a:pPr marL="0" indent="0" algn="l">
               <a:buNone/>
             </a:pPr>
             <a:r>
@@ -16673,7 +16724,7 @@
           <a:bodyPr wrap="square" lIns="0" tIns="0" rIns="0" bIns="0" rtlCol="0" anchor="t"/>
           <a:lstStyle/>
           <a:p>
-            <a:pPr indent="0" marL="0">
+            <a:pPr marL="0" indent="0">
               <a:buNone/>
             </a:pPr>
             <a:r>
@@ -16821,7 +16872,7 @@
           <a:bodyPr wrap="square" lIns="0" tIns="0" rIns="0" bIns="0" rtlCol="0" anchor="t"/>
           <a:lstStyle/>
           <a:p>
-            <a:pPr indent="0" marL="0">
+            <a:pPr marL="0" indent="0">
               <a:buNone/>
             </a:pPr>
             <a:r>
@@ -16933,7 +16984,7 @@
           <a:bodyPr wrap="square" lIns="0" tIns="0" rIns="0" bIns="0" rtlCol="0" anchor="t"/>
           <a:lstStyle/>
           <a:p>
-            <a:pPr indent="0" marL="0">
+            <a:pPr marL="0" indent="0">
               <a:buNone/>
             </a:pPr>
             <a:r>
@@ -16951,7 +17002,7 @@
       <p:sp>
         <p:nvSpPr>
           <p:cNvPr id="9" name="Text 7">
-            <a:hlinkClick r:id="rId1" tooltip=""/>
+            <a:hlinkClick r:id="rId3"/>
           </p:cNvPr>
           <p:cNvSpPr txBox="1"/>
           <p:nvPr/>
@@ -16971,7 +17022,7 @@
           <a:bodyPr wrap="square" lIns="0" tIns="0" rIns="0" bIns="0" rtlCol="0" anchor="t"/>
           <a:lstStyle/>
           <a:p>
-            <a:pPr indent="0" marL="0">
+            <a:pPr marL="0" indent="0">
               <a:buNone/>
             </a:pPr>
             <a:r>
@@ -16979,7 +17030,7 @@
                 <a:solidFill>
                   <a:schemeClr val="accent1"/>
                 </a:solidFill>
-                <a:hlinkClick r:id="rId1" invalidUrl="" action="" tgtFrame="" tooltip="" history="1" highlightClick="0" endSnd="0">
+                <a:hlinkClick r:id="rId3">
                   <a:extLst>
                     <a:ext uri="{A12FA001-AC4F-418D-AE19-62706E023703}">
                       <ahyp:hlinkClr xmlns:ahyp="http://schemas.microsoft.com/office/drawing/2018/hyperlinkcolor" val="tx"/>
@@ -17014,7 +17065,7 @@
           <a:bodyPr wrap="square" lIns="0" tIns="0" rIns="0" bIns="0" rtlCol="0" anchor="t"/>
           <a:lstStyle/>
           <a:p>
-            <a:pPr indent="0" marL="0">
+            <a:pPr marL="0" indent="0">
               <a:buNone/>
             </a:pPr>
             <a:r>
@@ -17028,7 +17079,7 @@
             <a:endParaRPr lang="zh-TW" sz="1250" dirty="0"/>
           </a:p>
           <a:p>
-            <a:pPr indent="0" marL="0">
+            <a:pPr marL="0" indent="0">
               <a:buNone/>
             </a:pPr>
             <a:r>
@@ -17064,7 +17115,7 @@
           <a:bodyPr wrap="square" lIns="0" tIns="0" rIns="0" bIns="0" rtlCol="0" anchor="t"/>
           <a:lstStyle/>
           <a:p>
-            <a:pPr indent="0" marL="0">
+            <a:pPr marL="0" indent="0">
               <a:buNone/>
             </a:pPr>
             <a:r>
@@ -17078,7 +17129,7 @@
             <a:endParaRPr lang="zh-TW" sz="1250" dirty="0"/>
           </a:p>
           <a:p>
-            <a:pPr indent="0" marL="0">
+            <a:pPr marL="0" indent="0">
               <a:buNone/>
             </a:pPr>
             <a:r>
@@ -17114,7 +17165,7 @@
           <a:bodyPr wrap="square" lIns="0" tIns="0" rIns="0" bIns="0" rtlCol="0" anchor="t"/>
           <a:lstStyle/>
           <a:p>
-            <a:pPr indent="0" marL="0">
+            <a:pPr marL="0" indent="0">
               <a:buNone/>
             </a:pPr>
             <a:r>
@@ -17128,7 +17179,7 @@
             <a:endParaRPr lang="zh-TW" sz="1250" dirty="0"/>
           </a:p>
           <a:p>
-            <a:pPr indent="0" marL="0">
+            <a:pPr marL="0" indent="0">
               <a:buNone/>
             </a:pPr>
             <a:r>
@@ -17164,7 +17215,7 @@
           <a:bodyPr wrap="square" lIns="0" tIns="0" rIns="0" bIns="0" rtlCol="0" anchor="t"/>
           <a:lstStyle/>
           <a:p>
-            <a:pPr indent="0" marL="0">
+            <a:pPr marL="0" indent="0">
               <a:buNone/>
             </a:pPr>
             <a:r>
@@ -17178,7 +17229,7 @@
             <a:endParaRPr lang="zh-TW" sz="1250" dirty="0"/>
           </a:p>
           <a:p>
-            <a:pPr indent="0" marL="0">
+            <a:pPr marL="0" indent="0">
               <a:buNone/>
             </a:pPr>
             <a:r>
@@ -17214,7 +17265,7 @@
           <a:bodyPr wrap="square" lIns="0" tIns="0" rIns="0" bIns="0" rtlCol="0" anchor="t"/>
           <a:lstStyle/>
           <a:p>
-            <a:pPr indent="0" marL="0">
+            <a:pPr marL="0" indent="0">
               <a:buNone/>
             </a:pPr>
             <a:r>
@@ -17228,7 +17279,7 @@
             <a:endParaRPr lang="zh-TW" sz="1250" dirty="0"/>
           </a:p>
           <a:p>
-            <a:pPr indent="0" marL="0">
+            <a:pPr marL="0" indent="0">
               <a:buNone/>
             </a:pPr>
             <a:r>
@@ -17264,7 +17315,7 @@
           <a:bodyPr wrap="square" lIns="0" tIns="0" rIns="0" bIns="0" rtlCol="0" anchor="t"/>
           <a:lstStyle/>
           <a:p>
-            <a:pPr indent="0" marL="0">
+            <a:pPr marL="0" indent="0">
               <a:buNone/>
             </a:pPr>
             <a:r>
@@ -17278,7 +17329,7 @@
             <a:endParaRPr lang="zh-TW" sz="1250" dirty="0"/>
           </a:p>
           <a:p>
-            <a:pPr indent="0" marL="0">
+            <a:pPr marL="0" indent="0">
               <a:buNone/>
             </a:pPr>
             <a:r>
@@ -17314,7 +17365,7 @@
           <a:bodyPr wrap="square" lIns="0" tIns="0" rIns="0" bIns="0" rtlCol="0" anchor="t"/>
           <a:lstStyle/>
           <a:p>
-            <a:pPr indent="0" marL="0">
+            <a:pPr marL="0" indent="0">
               <a:buNone/>
             </a:pPr>
             <a:r>
@@ -17331,14 +17382,14 @@
       </p:sp>
       <p:pic>
         <p:nvPicPr>
-          <p:cNvPr id="17" name="Image 0" descr="營運後台預警頁實機截圖">    </p:cNvPr>
+          <p:cNvPr id="17" name="Image 0" descr="營運後台預警頁實機截圖"/>
           <p:cNvPicPr>
             <a:picLocks noChangeAspect="1"/>
           </p:cNvPicPr>
           <p:nvPr/>
         </p:nvPicPr>
         <p:blipFill>
-          <a:blip r:embed="rId2"/>
+          <a:blip r:embed="rId4"/>
           <a:stretch>
             <a:fillRect/>
           </a:stretch>
@@ -17377,14 +17428,14 @@
       </p:sp>
       <p:pic>
         <p:nvPicPr>
-          <p:cNvPr id="19" name="Image 1" descr="手機 App 選擇車輛頁實機截圖，整備中的車不能借">    </p:cNvPr>
+          <p:cNvPr id="19" name="Image 1" descr="手機 App 選擇車輛頁實機截圖，整備中的車不能借"/>
           <p:cNvPicPr>
             <a:picLocks noChangeAspect="1"/>
           </p:cNvPicPr>
           <p:nvPr/>
         </p:nvPicPr>
         <p:blipFill>
-          <a:blip r:embed="rId3"/>
+          <a:blip r:embed="rId5"/>
           <a:stretch>
             <a:fillRect/>
           </a:stretch>
@@ -17423,14 +17474,14 @@
       </p:sp>
       <p:pic>
         <p:nvPicPr>
-          <p:cNvPr id="21" name="Image 2" descr="手機 App 還車確認單實機截圖">    </p:cNvPr>
+          <p:cNvPr id="21" name="Image 2" descr="手機 App 還車確認單實機截圖"/>
           <p:cNvPicPr>
             <a:picLocks noChangeAspect="1"/>
           </p:cNvPicPr>
           <p:nvPr/>
         </p:nvPicPr>
         <p:blipFill>
-          <a:blip r:embed="rId4"/>
+          <a:blip r:embed="rId6"/>
           <a:stretch>
             <a:fillRect/>
           </a:stretch>
@@ -17515,7 +17566,7 @@
           <a:bodyPr wrap="square" lIns="0" tIns="0" rIns="0" bIns="0" rtlCol="0" anchor="ctr"/>
           <a:lstStyle/>
           <a:p>
-            <a:pPr indent="0" marL="0">
+            <a:pPr marL="0" indent="0">
               <a:buNone/>
             </a:pPr>
             <a:r>
@@ -17558,7 +17609,7 @@
           </a:prstGeom>
           <a:extLst>
             <a:ext uri="{C572A759-6A51-4108-AA02-DFA0A04FC94B}">
-              <ma14:wrappingTextBoxFlag xmlns:ma14="http://schemas.microsoft.com/office/mac/drawingml/2011/main" val="0"/>
+              <ma14:wrappingTextBoxFlag xmlns:ma14="http://schemas.microsoft.com/office/mac/drawingml/2011/main" xmlns="" val="0"/>
             </a:ext>
           </a:extLst>
         </p:spPr>
@@ -17576,7 +17627,7 @@
           <a:p>
             <a:pPr algn="r"/>
             <a:fld id="{F7021451-1387-4CA6-816F-3879F97B5CBC}" type="slidenum">
-              <a:rPr b="0" lang="en-US"/>
+              <a:rPr lang="en-US" b="0"/>
               <a:t>16</a:t>
             </a:fld>
             <a:endParaRPr lang="en-US"/>
@@ -17611,9 +17662,11 @@
       <p:sp>
         <p:nvSpPr>
           <p:cNvPr id="2" name="Text 1"/>
-          <p:cNvSpPr/>
+          <p:cNvSpPr>
+            <a:spLocks noGrp="1"/>
+          </p:cNvSpPr>
           <p:nvPr>
-            <p:ph idx="101" type="title" hasCustomPrompt="1"/>
+            <p:ph type="title" idx="101" hasCustomPrompt="1"/>
           </p:nvPr>
         </p:nvSpPr>
         <p:spPr>
@@ -17631,7 +17684,7 @@
           <a:bodyPr wrap="square" lIns="0" tIns="0" rIns="0" bIns="0" rtlCol="0" anchor="ctr"/>
           <a:lstStyle/>
           <a:p>
-            <a:pPr algn="l" indent="0" marL="0">
+            <a:pPr marL="0" indent="0" algn="l">
               <a:buNone/>
             </a:pPr>
             <a:r>
@@ -17655,22 +17708,34 @@
           <p:nvPr>
             <p:extLst>
               <p:ext uri="{D42A27DB-BD31-4B8C-83A1-F6EECF244321}">
-                <p14:modId xmlns:p14="http://schemas.microsoft.com/office/powerpoint/2010/main" val="1579011935"/>
+                <p14:modId xmlns:p14="http://schemas.microsoft.com/office/powerpoint/2010/main" val="1678444519"/>
               </p:ext>
             </p:extLst>
           </p:nvPr>
         </p:nvGraphicFramePr>
         <p:xfrm>
-          <a:off x="548640" y="1325880"/>
-          <a:ext cx="11094415" cy="914400"/>
+          <a:off x="492980" y="1236428"/>
+          <a:ext cx="11205733" cy="4599432"/>
         </p:xfrm>
         <a:graphic>
           <a:graphicData uri="http://schemas.openxmlformats.org/drawingml/2006/table">
             <a:tbl>
               <a:tblPr/>
               <a:tblGrid>
-                <a:gridCol w="2514600"/>
-                <a:gridCol w="8579815"/>
+                <a:gridCol w="1744753">
+                  <a:extLst>
+                    <a:ext uri="{9D8B030D-6E8A-4147-A177-3AD203B41FA5}">
+                      <a16:colId xmlns:a16="http://schemas.microsoft.com/office/drawing/2014/main" val="20000"/>
+                    </a:ext>
+                  </a:extLst>
+                </a:gridCol>
+                <a:gridCol w="9460980">
+                  <a:extLst>
+                    <a:ext uri="{9D8B030D-6E8A-4147-A177-3AD203B41FA5}">
+                      <a16:colId xmlns:a16="http://schemas.microsoft.com/office/drawing/2014/main" val="20001"/>
+                    </a:ext>
+                  </a:extLst>
+                </a:gridCol>
               </a:tblGrid>
               <a:tr h="365760">
                 <a:tc>
@@ -17678,11 +17743,11 @@
                     <a:bodyPr/>
                     <a:lstStyle/>
                     <a:p>
-                      <a:pPr indent="0" marL="0">
+                      <a:pPr marL="0" indent="0" algn="l">
                         <a:buNone/>
                       </a:pPr>
                       <a:r>
-                        <a:rPr lang="en-US" sz="1350" b="1" dirty="0">
+                        <a:rPr lang="en-US" sz="1300" b="1" dirty="0">
                           <a:solidFill>
                             <a:srgbClr val="141414"/>
                           </a:solidFill>
@@ -17692,7 +17757,7 @@
                         </a:rPr>
                         <a:t>團隊名稱</a:t>
                       </a:r>
-                      <a:endParaRPr lang="en-US" sz="1350" dirty="0">
+                      <a:endParaRPr lang="en-US" sz="1300" dirty="0">
                         <a:latin typeface="Microsoft JhengHei" charset="0"/>
                         <a:ea typeface="Microsoft JhengHei" charset="0"/>
                         <a:cs typeface="Microsoft JhengHei" charset="0"/>
@@ -17746,11 +17811,11 @@
                     <a:bodyPr/>
                     <a:lstStyle/>
                     <a:p>
-                      <a:pPr indent="0" marL="0">
+                      <a:pPr marL="0" indent="0" algn="l">
                         <a:buNone/>
                       </a:pPr>
                       <a:r>
-                        <a:rPr lang="en-US" sz="1350" dirty="0">
+                        <a:rPr lang="en-US" sz="1300" dirty="0">
                           <a:solidFill>
                             <a:srgbClr val="141414"/>
                           </a:solidFill>
@@ -17760,7 +17825,7 @@
                         </a:rPr>
                         <a:t>pp</a:t>
                       </a:r>
-                      <a:endParaRPr lang="en-US" sz="1350" dirty="0">
+                      <a:endParaRPr lang="en-US" sz="1300" dirty="0">
                         <a:latin typeface="Microsoft JhengHei" charset="0"/>
                         <a:ea typeface="Microsoft JhengHei" charset="0"/>
                         <a:cs typeface="Microsoft JhengHei" charset="0"/>
@@ -17806,6 +17871,11 @@
                     </a:lnB>
                   </a:tcPr>
                 </a:tc>
+                <a:extLst>
+                  <a:ext uri="{0D108BD9-81ED-4DB2-BD59-A6C34878D82A}">
+                    <a16:rowId xmlns:a16="http://schemas.microsoft.com/office/drawing/2014/main" val="10000"/>
+                  </a:ext>
+                </a:extLst>
               </a:tr>
               <a:tr h="365760">
                 <a:tc>
@@ -17813,11 +17883,11 @@
                     <a:bodyPr/>
                     <a:lstStyle/>
                     <a:p>
-                      <a:pPr indent="0" marL="0">
+                      <a:pPr marL="0" indent="0" algn="l">
                         <a:buNone/>
                       </a:pPr>
                       <a:r>
-                        <a:rPr lang="en-US" sz="1350" b="1" dirty="0">
+                        <a:rPr lang="en-US" sz="1300" b="1" dirty="0">
                           <a:solidFill>
                             <a:srgbClr val="141414"/>
                           </a:solidFill>
@@ -17827,7 +17897,7 @@
                         </a:rPr>
                         <a:t>產品/服務名稱</a:t>
                       </a:r>
-                      <a:endParaRPr lang="en-US" sz="1350" dirty="0">
+                      <a:endParaRPr lang="en-US" sz="1300" dirty="0">
                         <a:latin typeface="Microsoft JhengHei" charset="0"/>
                         <a:ea typeface="Microsoft JhengHei" charset="0"/>
                         <a:cs typeface="Microsoft JhengHei" charset="0"/>
@@ -17881,11 +17951,11 @@
                     <a:bodyPr/>
                     <a:lstStyle/>
                     <a:p>
-                      <a:pPr indent="0" marL="0">
+                      <a:pPr marL="0" indent="0">
                         <a:buNone/>
                       </a:pPr>
                       <a:r>
-                        <a:rPr lang="en-US" sz="1350" dirty="0">
+                        <a:rPr lang="en-US" sz="1300" dirty="0">
                           <a:solidFill>
                             <a:srgbClr val="141414"/>
                           </a:solidFill>
@@ -17895,7 +17965,7 @@
                         </a:rPr>
                         <a:t>iRent+ AI 智能車況管家</a:t>
                       </a:r>
-                      <a:endParaRPr lang="en-US" sz="1350" dirty="0">
+                      <a:endParaRPr lang="en-US" sz="1300" dirty="0">
                         <a:latin typeface="Microsoft JhengHei" charset="0"/>
                         <a:ea typeface="Microsoft JhengHei" charset="0"/>
                         <a:cs typeface="Microsoft JhengHei" charset="0"/>
@@ -17941,6 +18011,11 @@
                     </a:lnB>
                   </a:tcPr>
                 </a:tc>
+                <a:extLst>
+                  <a:ext uri="{0D108BD9-81ED-4DB2-BD59-A6C34878D82A}">
+                    <a16:rowId xmlns:a16="http://schemas.microsoft.com/office/drawing/2014/main" val="10001"/>
+                  </a:ext>
+                </a:extLst>
               </a:tr>
               <a:tr h="365760">
                 <a:tc>
@@ -17948,11 +18023,11 @@
                     <a:bodyPr/>
                     <a:lstStyle/>
                     <a:p>
-                      <a:pPr indent="0" marL="0">
+                      <a:pPr marL="0" indent="0" algn="l">
                         <a:buNone/>
                       </a:pPr>
                       <a:r>
-                        <a:rPr lang="en-US" sz="1350" b="1" dirty="0">
+                        <a:rPr lang="en-US" sz="1300" b="1" dirty="0">
                           <a:solidFill>
                             <a:srgbClr val="141414"/>
                           </a:solidFill>
@@ -17962,7 +18037,7 @@
                         </a:rPr>
                         <a:t>企業挑戰題目</a:t>
                       </a:r>
-                      <a:endParaRPr lang="en-US" sz="1350" dirty="0">
+                      <a:endParaRPr lang="en-US" sz="1300" dirty="0">
                         <a:latin typeface="Microsoft JhengHei" charset="0"/>
                         <a:ea typeface="Microsoft JhengHei" charset="0"/>
                         <a:cs typeface="Microsoft JhengHei" charset="0"/>
@@ -18016,11 +18091,11 @@
                     <a:bodyPr/>
                     <a:lstStyle/>
                     <a:p>
-                      <a:pPr indent="0" marL="0">
+                      <a:pPr marL="0" indent="0">
                         <a:buNone/>
                       </a:pPr>
                       <a:r>
-                        <a:rPr lang="en-US" sz="1350" dirty="0">
+                        <a:rPr lang="en-US" sz="1300" dirty="0">
                           <a:solidFill>
                             <a:srgbClr val="141414"/>
                           </a:solidFill>
@@ -18030,7 +18105,7 @@
                         </a:rPr>
                         <a:t>iRent｜運用 AI 打造 iRent 智能車況管家：優化租還車體驗與營運效率</a:t>
                       </a:r>
-                      <a:endParaRPr lang="en-US" sz="1350" dirty="0">
+                      <a:endParaRPr lang="en-US" sz="1300" dirty="0">
                         <a:latin typeface="Microsoft JhengHei" charset="0"/>
                         <a:ea typeface="Microsoft JhengHei" charset="0"/>
                         <a:cs typeface="Microsoft JhengHei" charset="0"/>
@@ -18076,6 +18151,11 @@
                     </a:lnB>
                   </a:tcPr>
                 </a:tc>
+                <a:extLst>
+                  <a:ext uri="{0D108BD9-81ED-4DB2-BD59-A6C34878D82A}">
+                    <a16:rowId xmlns:a16="http://schemas.microsoft.com/office/drawing/2014/main" val="10002"/>
+                  </a:ext>
+                </a:extLst>
               </a:tr>
               <a:tr h="457200">
                 <a:tc>
@@ -18083,11 +18163,11 @@
                     <a:bodyPr/>
                     <a:lstStyle/>
                     <a:p>
-                      <a:pPr indent="0" marL="0">
+                      <a:pPr marL="0" indent="0" algn="l">
                         <a:buNone/>
                       </a:pPr>
                       <a:r>
-                        <a:rPr lang="en-US" sz="1350" b="1" dirty="0">
+                        <a:rPr lang="en-US" sz="1300" b="1" dirty="0">
                           <a:solidFill>
                             <a:srgbClr val="141414"/>
                           </a:solidFill>
@@ -18097,7 +18177,7 @@
                         </a:rPr>
                         <a:t>目標對象</a:t>
                       </a:r>
-                      <a:endParaRPr lang="en-US" sz="1350" dirty="0">
+                      <a:endParaRPr lang="en-US" sz="1300" dirty="0">
                         <a:latin typeface="Microsoft JhengHei" charset="0"/>
                         <a:ea typeface="Microsoft JhengHei" charset="0"/>
                         <a:cs typeface="Microsoft JhengHei" charset="0"/>
@@ -18151,11 +18231,11 @@
                     <a:bodyPr/>
                     <a:lstStyle/>
                     <a:p>
-                      <a:pPr indent="0" marL="0">
+                      <a:pPr marL="0" indent="0">
                         <a:buNone/>
                       </a:pPr>
                       <a:r>
-                        <a:rPr lang="en-US" sz="1350" dirty="0">
+                        <a:rPr lang="en-US" sz="1300" dirty="0">
                           <a:solidFill>
                             <a:srgbClr val="141414"/>
                           </a:solidFill>
@@ -18165,7 +18245,7 @@
                         </a:rPr>
                         <a:t>iRent 自助取還車的租車用戶，以及負責檢視車況、安排清潔與檢修的營運團隊</a:t>
                       </a:r>
-                      <a:endParaRPr lang="en-US" sz="1350" dirty="0">
+                      <a:endParaRPr lang="en-US" sz="1300" dirty="0">
                         <a:latin typeface="Microsoft JhengHei" charset="0"/>
                         <a:ea typeface="Microsoft JhengHei" charset="0"/>
                         <a:cs typeface="Microsoft JhengHei" charset="0"/>
@@ -18211,6 +18291,11 @@
                     </a:lnB>
                   </a:tcPr>
                 </a:tc>
+                <a:extLst>
+                  <a:ext uri="{0D108BD9-81ED-4DB2-BD59-A6C34878D82A}">
+                    <a16:rowId xmlns:a16="http://schemas.microsoft.com/office/drawing/2014/main" val="10003"/>
+                  </a:ext>
+                </a:extLst>
               </a:tr>
               <a:tr h="1143000">
                 <a:tc>
@@ -18218,11 +18303,11 @@
                     <a:bodyPr/>
                     <a:lstStyle/>
                     <a:p>
-                      <a:pPr indent="0" marL="0">
+                      <a:pPr marL="0" indent="0" algn="l">
                         <a:buNone/>
                       </a:pPr>
                       <a:r>
-                        <a:rPr lang="en-US" sz="1350" b="1" dirty="0">
+                        <a:rPr lang="en-US" sz="1300" b="1" dirty="0">
                           <a:solidFill>
                             <a:srgbClr val="141414"/>
                           </a:solidFill>
@@ -18232,18 +18317,18 @@
                         </a:rPr>
                         <a:t>解決方案設計重點</a:t>
                       </a:r>
-                      <a:endParaRPr lang="en-US" sz="1350" dirty="0">
+                      <a:endParaRPr lang="en-US" sz="1300" dirty="0">
                         <a:latin typeface="Microsoft JhengHei" charset="0"/>
                         <a:ea typeface="Microsoft JhengHei" charset="0"/>
                         <a:cs typeface="Microsoft JhengHei" charset="0"/>
                       </a:endParaRPr>
                     </a:p>
                     <a:p>
-                      <a:pPr indent="0" marL="0">
+                      <a:pPr marL="0" indent="0" algn="l">
                         <a:buNone/>
                       </a:pPr>
                       <a:r>
-                        <a:rPr lang="en-US" sz="1350" b="1" dirty="0">
+                        <a:rPr lang="en-US" sz="1300" b="1" dirty="0">
                           <a:solidFill>
                             <a:srgbClr val="141414"/>
                           </a:solidFill>
@@ -18253,7 +18338,7 @@
                         </a:rPr>
                         <a:t>(至多3項)</a:t>
                       </a:r>
-                      <a:endParaRPr lang="en-US" sz="1350" dirty="0">
+                      <a:endParaRPr lang="en-US" sz="1300" dirty="0">
                         <a:latin typeface="Microsoft JhengHei" charset="0"/>
                         <a:ea typeface="Microsoft JhengHei" charset="0"/>
                         <a:cs typeface="Microsoft JhengHei" charset="0"/>
@@ -18307,11 +18392,11 @@
                     <a:bodyPr/>
                     <a:lstStyle/>
                     <a:p>
-                      <a:pPr indent="0" marL="0">
+                      <a:pPr marL="0" indent="0">
                         <a:buNone/>
                       </a:pPr>
                       <a:r>
-                        <a:rPr lang="en-US" sz="1350" dirty="0">
+                        <a:rPr lang="en-US" sz="1300" dirty="0">
                           <a:solidFill>
                             <a:srgbClr val="141414"/>
                           </a:solidFill>
@@ -18319,20 +18404,75 @@
                           <a:ea typeface="Microsoft JhengHei" pitchFamily="34" charset="-122"/>
                           <a:cs typeface="Microsoft JhengHei" pitchFamily="34" charset="-120"/>
                         </a:rPr>
-                        <a:t>1. 拍照時把關：疊影對齊上次照片，手機即時檢查畫質、車牌、角度與遠近，不合格當場重拍</a:t>
+                        <a:t>1. </a:t>
                       </a:r>
-                      <a:endParaRPr lang="en-US" sz="1350" dirty="0">
+                      <a:r>
+                        <a:rPr lang="en-US" sz="1300" dirty="0" err="1">
+                          <a:solidFill>
+                            <a:srgbClr val="141414"/>
+                          </a:solidFill>
+                          <a:latin typeface="Microsoft JhengHei" pitchFamily="34" charset="0"/>
+                          <a:ea typeface="Microsoft JhengHei" pitchFamily="34" charset="-122"/>
+                          <a:cs typeface="Microsoft JhengHei" pitchFamily="34" charset="-120"/>
+                        </a:rPr>
+                        <a:t>拍照當下就把關：疊影對齊上次照片</a:t>
+                      </a:r>
+                      <a:r>
+                        <a:rPr lang="en-US" sz="1300" dirty="0">
+                          <a:solidFill>
+                            <a:srgbClr val="141414"/>
+                          </a:solidFill>
+                          <a:latin typeface="Microsoft JhengHei" pitchFamily="34" charset="0"/>
+                          <a:ea typeface="Microsoft JhengHei" pitchFamily="34" charset="-122"/>
+                          <a:cs typeface="Microsoft JhengHei" pitchFamily="34" charset="-120"/>
+                        </a:rPr>
+                        <a:t>，</a:t>
+                      </a:r>
+                      <a:r>
+                        <a:rPr lang="zh-TW" altLang="en-US" sz="1300" dirty="0">
+                          <a:solidFill>
+                            <a:srgbClr val="141414"/>
+                          </a:solidFill>
+                          <a:latin typeface="Microsoft JhengHei" pitchFamily="34" charset="0"/>
+                          <a:ea typeface="Microsoft JhengHei" pitchFamily="34" charset="-122"/>
+                          <a:cs typeface="Microsoft JhengHei" pitchFamily="34" charset="-120"/>
+                        </a:rPr>
+                        <a:t>手機每 </a:t>
+                      </a:r>
+                      <a:r>
+                        <a:rPr lang="en-US" altLang="zh-TW" sz="1300" dirty="0">
+                          <a:solidFill>
+                            <a:srgbClr val="141414"/>
+                          </a:solidFill>
+                          <a:latin typeface="Microsoft JhengHei" pitchFamily="34" charset="0"/>
+                          <a:ea typeface="Microsoft JhengHei" pitchFamily="34" charset="-122"/>
+                          <a:cs typeface="Microsoft JhengHei" pitchFamily="34" charset="-120"/>
+                        </a:rPr>
+                        <a:t>0.5 </a:t>
+                      </a:r>
+                      <a:r>
+                        <a:rPr lang="zh-TW" altLang="en-US" sz="1300" dirty="0">
+                          <a:solidFill>
+                            <a:srgbClr val="141414"/>
+                          </a:solidFill>
+                          <a:latin typeface="Microsoft JhengHei" pitchFamily="34" charset="0"/>
+                          <a:ea typeface="Microsoft JhengHei" pitchFamily="34" charset="-122"/>
+                          <a:cs typeface="Microsoft JhengHei" pitchFamily="34" charset="-120"/>
+                        </a:rPr>
+                        <a:t>秒辨識車牌、檢查畫質與站位，不合格當場重拍</a:t>
+                      </a:r>
+                      <a:endParaRPr lang="en-US" sz="1300" dirty="0">
                         <a:latin typeface="Microsoft JhengHei" charset="0"/>
                         <a:ea typeface="Microsoft JhengHei" charset="0"/>
                         <a:cs typeface="Microsoft JhengHei" charset="0"/>
                       </a:endParaRPr>
                     </a:p>
                     <a:p>
-                      <a:pPr indent="0" marL="0">
+                      <a:pPr marL="0" indent="0">
                         <a:buNone/>
                       </a:pPr>
                       <a:r>
-                        <a:rPr lang="en-US" sz="1350" dirty="0">
+                        <a:rPr lang="en-US" sz="1300" dirty="0">
                           <a:solidFill>
                             <a:srgbClr val="141414"/>
                           </a:solidFill>
@@ -18342,18 +18482,18 @@
                         </a:rPr>
                         <a:t>2. 送出後比對：後台 VLM 比對前後照片，判讀新車損、車內整潔、遺留物與卡片，三次判讀取多數</a:t>
                       </a:r>
-                      <a:endParaRPr lang="en-US" sz="1350" dirty="0">
+                      <a:endParaRPr lang="en-US" sz="1300" dirty="0">
                         <a:latin typeface="Microsoft JhengHei" charset="0"/>
                         <a:ea typeface="Microsoft JhengHei" charset="0"/>
                         <a:cs typeface="Microsoft JhengHei" charset="0"/>
                       </a:endParaRPr>
                     </a:p>
                     <a:p>
-                      <a:pPr indent="0" marL="0">
+                      <a:pPr marL="0" indent="0">
                         <a:buNone/>
                       </a:pPr>
                       <a:r>
-                        <a:rPr lang="en-US" sz="1350" dirty="0">
+                        <a:rPr lang="en-US" sz="1300" dirty="0">
                           <a:solidFill>
                             <a:srgbClr val="141414"/>
                           </a:solidFill>
@@ -18361,9 +18501,64 @@
                           <a:ea typeface="Microsoft JhengHei" pitchFamily="34" charset="-122"/>
                           <a:cs typeface="Microsoft JhengHei" pitchFamily="34" charset="-120"/>
                         </a:rPr>
-                        <a:t>3. 發現問題自動處理：自動開工單、暫停出租；嚴重車損先送修，小損傷記錄後恢復出租；用戶看得到取還車確認單</a:t>
+                        <a:t>3. </a:t>
                       </a:r>
-                      <a:endParaRPr lang="en-US" sz="1350" dirty="0">
+                      <a:r>
+                        <a:rPr lang="en-US" sz="1300" dirty="0" err="1">
+                          <a:solidFill>
+                            <a:srgbClr val="141414"/>
+                          </a:solidFill>
+                          <a:latin typeface="Microsoft JhengHei" pitchFamily="34" charset="0"/>
+                          <a:ea typeface="Microsoft JhengHei" pitchFamily="34" charset="-122"/>
+                          <a:cs typeface="Microsoft JhengHei" pitchFamily="34" charset="-120"/>
+                        </a:rPr>
+                        <a:t>發現問題自動處理：自動開工單、暫停出租；嚴重車損先送修，小損傷記錄後恢復出租</a:t>
+                      </a:r>
+                      <a:r>
+                        <a:rPr lang="en-US" sz="1300" dirty="0">
+                          <a:solidFill>
+                            <a:srgbClr val="141414"/>
+                          </a:solidFill>
+                          <a:latin typeface="Microsoft JhengHei" pitchFamily="34" charset="0"/>
+                          <a:ea typeface="Microsoft JhengHei" pitchFamily="34" charset="-122"/>
+                          <a:cs typeface="Microsoft JhengHei" pitchFamily="34" charset="-120"/>
+                        </a:rPr>
+                        <a:t>；</a:t>
+                      </a:r>
+                      <a:r>
+                        <a:rPr lang="zh-TW" altLang="en-US" sz="1300" dirty="0">
+                          <a:solidFill>
+                            <a:srgbClr val="141414"/>
+                          </a:solidFill>
+                          <a:latin typeface="Microsoft JhengHei" pitchFamily="34" charset="0"/>
+                          <a:ea typeface="Microsoft JhengHei" pitchFamily="34" charset="-122"/>
+                          <a:cs typeface="Microsoft JhengHei" pitchFamily="34" charset="-120"/>
+                        </a:rPr>
+                        <a:t>用戶可查看 </a:t>
+                      </a:r>
+                      <a:r>
+                        <a:rPr lang="en-US" sz="1300" dirty="0">
+                          <a:solidFill>
+                            <a:srgbClr val="141414"/>
+                          </a:solidFill>
+                          <a:latin typeface="Microsoft JhengHei" pitchFamily="34" charset="0"/>
+                          <a:ea typeface="Microsoft JhengHei" pitchFamily="34" charset="-122"/>
+                          <a:cs typeface="Microsoft JhengHei" pitchFamily="34" charset="-120"/>
+                        </a:rPr>
+                        <a:t>AI </a:t>
+                      </a:r>
+                      <a:r>
+                        <a:rPr lang="zh-TW" altLang="en-US" sz="1300" dirty="0">
+                          <a:solidFill>
+                            <a:srgbClr val="141414"/>
+                          </a:solidFill>
+                          <a:latin typeface="Microsoft JhengHei" pitchFamily="34" charset="0"/>
+                          <a:ea typeface="Microsoft JhengHei" pitchFamily="34" charset="-122"/>
+                          <a:cs typeface="Microsoft JhengHei" pitchFamily="34" charset="-120"/>
+                        </a:rPr>
+                        <a:t>判讀與營運確認結果</a:t>
+                      </a:r>
+                      <a:endParaRPr lang="en-US" sz="1300" dirty="0">
                         <a:latin typeface="Microsoft JhengHei" charset="0"/>
                         <a:ea typeface="Microsoft JhengHei" charset="0"/>
                         <a:cs typeface="Microsoft JhengHei" charset="0"/>
@@ -18409,6 +18604,11 @@
                     </a:lnB>
                   </a:tcPr>
                 </a:tc>
+                <a:extLst>
+                  <a:ext uri="{0D108BD9-81ED-4DB2-BD59-A6C34878D82A}">
+                    <a16:rowId xmlns:a16="http://schemas.microsoft.com/office/drawing/2014/main" val="10004"/>
+                  </a:ext>
+                </a:extLst>
               </a:tr>
               <a:tr h="1005840">
                 <a:tc>
@@ -18416,11 +18616,11 @@
                     <a:bodyPr/>
                     <a:lstStyle/>
                     <a:p>
-                      <a:pPr indent="0" marL="0">
+                      <a:pPr marL="0" indent="0" algn="l">
                         <a:buNone/>
                       </a:pPr>
                       <a:r>
-                        <a:rPr lang="en-US" sz="1350" b="1" dirty="0">
+                        <a:rPr lang="en-US" sz="1300" b="1" dirty="0">
                           <a:solidFill>
                             <a:srgbClr val="141414"/>
                           </a:solidFill>
@@ -18430,18 +18630,18 @@
                         </a:rPr>
                         <a:t>運用到的AI技術、</a:t>
                       </a:r>
-                      <a:endParaRPr lang="en-US" sz="1350" dirty="0">
+                      <a:endParaRPr lang="en-US" sz="1300" dirty="0">
                         <a:latin typeface="Microsoft JhengHei" charset="0"/>
                         <a:ea typeface="Microsoft JhengHei" charset="0"/>
                         <a:cs typeface="Microsoft JhengHei" charset="0"/>
                       </a:endParaRPr>
                     </a:p>
                     <a:p>
-                      <a:pPr indent="0" marL="0">
+                      <a:pPr marL="0" indent="0" algn="l">
                         <a:buNone/>
                       </a:pPr>
                       <a:r>
-                        <a:rPr lang="en-US" sz="1350" b="1" dirty="0">
+                        <a:rPr lang="en-US" sz="1300" b="1" dirty="0">
                           <a:solidFill>
                             <a:srgbClr val="141414"/>
                           </a:solidFill>
@@ -18451,7 +18651,7 @@
                         </a:rPr>
                         <a:t>服務或模型等資源</a:t>
                       </a:r>
-                      <a:endParaRPr lang="en-US" sz="1350" dirty="0">
+                      <a:endParaRPr lang="en-US" sz="1300" dirty="0">
                         <a:latin typeface="Microsoft JhengHei" charset="0"/>
                         <a:ea typeface="Microsoft JhengHei" charset="0"/>
                         <a:cs typeface="Microsoft JhengHei" charset="0"/>
@@ -18505,11 +18705,11 @@
                     <a:bodyPr/>
                     <a:lstStyle/>
                     <a:p>
-                      <a:pPr indent="0" marL="0">
+                      <a:pPr marL="0" indent="0">
                         <a:buNone/>
                       </a:pPr>
                       <a:r>
-                        <a:rPr lang="en-US" sz="1350" dirty="0">
+                        <a:rPr lang="en-US" sz="1300" dirty="0">
                           <a:solidFill>
                             <a:srgbClr val="141414"/>
                           </a:solidFill>
@@ -18519,18 +18719,18 @@
                         </a:rPr>
                         <a:t>Qwen 系列開源視覺語言模型（以 vLLM 自架推論，照片不外流）；</a:t>
                       </a:r>
-                      <a:endParaRPr lang="en-US" sz="1350" dirty="0">
+                      <a:endParaRPr lang="en-US" sz="1300" dirty="0">
                         <a:latin typeface="Microsoft JhengHei" charset="0"/>
                         <a:ea typeface="Microsoft JhengHei" charset="0"/>
                         <a:cs typeface="Microsoft JhengHei" charset="0"/>
                       </a:endParaRPr>
                     </a:p>
                     <a:p>
-                      <a:pPr indent="0" marL="0">
+                      <a:pPr marL="0" indent="0">
                         <a:buNone/>
                       </a:pPr>
                       <a:r>
-                        <a:rPr lang="en-US" sz="1350" dirty="0">
+                        <a:rPr lang="en-US" sz="1300" dirty="0">
                           <a:solidFill>
                             <a:srgbClr val="141414"/>
                           </a:solidFill>
@@ -18538,20 +18738,74 @@
                           <a:ea typeface="Microsoft JhengHei" pitchFamily="34" charset="-122"/>
                           <a:cs typeface="Microsoft JhengHei" pitchFamily="34" charset="-120"/>
                         </a:rPr>
-                        <a:t>手機端：PaddleOCR PP-OCRv4 車牌辨識（App 用 ONNX Runtime Mobile，原型以 onnxruntime-web 驗證）與畫質檢查，都在手機上運算；</a:t>
+                        <a:t>手機端：PaddleOCR PP-OCRv4 車牌辨識（App 用 ONNX Runtime Mobile，原型以 onnxruntime-web </a:t>
                       </a:r>
-                      <a:endParaRPr lang="en-US" sz="1350" dirty="0">
+                      <a:r>
+                        <a:rPr lang="en-US" sz="1300" dirty="0" err="1">
+                          <a:solidFill>
+                            <a:srgbClr val="141414"/>
+                          </a:solidFill>
+                          <a:latin typeface="Microsoft JhengHei" pitchFamily="34" charset="0"/>
+                          <a:ea typeface="Microsoft JhengHei" pitchFamily="34" charset="-122"/>
+                          <a:cs typeface="Microsoft JhengHei" pitchFamily="34" charset="-120"/>
+                        </a:rPr>
+                        <a:t>驗證</a:t>
+                      </a:r>
+                      <a:r>
+                        <a:rPr lang="en-US" sz="1300" dirty="0">
+                          <a:solidFill>
+                            <a:srgbClr val="141414"/>
+                          </a:solidFill>
+                          <a:latin typeface="Microsoft JhengHei" pitchFamily="34" charset="0"/>
+                          <a:ea typeface="Microsoft JhengHei" pitchFamily="34" charset="-122"/>
+                          <a:cs typeface="Microsoft JhengHei" pitchFamily="34" charset="-120"/>
+                        </a:rPr>
+                        <a:t>）</a:t>
+                      </a:r>
+                      <a:br>
+                        <a:rPr lang="en-US" sz="1300" dirty="0">
+                          <a:solidFill>
+                            <a:srgbClr val="141414"/>
+                          </a:solidFill>
+                          <a:latin typeface="Microsoft JhengHei" pitchFamily="34" charset="0"/>
+                          <a:ea typeface="Microsoft JhengHei" pitchFamily="34" charset="-122"/>
+                          <a:cs typeface="Microsoft JhengHei" pitchFamily="34" charset="-120"/>
+                        </a:rPr>
+                      </a:br>
+                      <a:r>
+                        <a:rPr lang="en-US" sz="1300" dirty="0" err="1">
+                          <a:solidFill>
+                            <a:srgbClr val="141414"/>
+                          </a:solidFill>
+                          <a:latin typeface="Microsoft JhengHei" pitchFamily="34" charset="0"/>
+                          <a:ea typeface="Microsoft JhengHei" pitchFamily="34" charset="-122"/>
+                          <a:cs typeface="Microsoft JhengHei" pitchFamily="34" charset="-120"/>
+                        </a:rPr>
+                        <a:t>與畫質檢查，都在手機上運算</a:t>
+                      </a:r>
+                      <a:r>
+                        <a:rPr lang="en-US" sz="1300" dirty="0">
+                          <a:solidFill>
+                            <a:srgbClr val="141414"/>
+                          </a:solidFill>
+                          <a:latin typeface="Microsoft JhengHei" pitchFamily="34" charset="0"/>
+                          <a:ea typeface="Microsoft JhengHei" pitchFamily="34" charset="-122"/>
+                          <a:cs typeface="Microsoft JhengHei" pitchFamily="34" charset="-120"/>
+                        </a:rPr>
+                        <a:t>；</a:t>
+                      </a:r>
+                      <a:endParaRPr lang="en-US" sz="1300" dirty="0">
                         <a:latin typeface="Microsoft JhengHei" charset="0"/>
                         <a:ea typeface="Microsoft JhengHei" charset="0"/>
                         <a:cs typeface="Microsoft JhengHei" charset="0"/>
                       </a:endParaRPr>
                     </a:p>
                     <a:p>
-                      <a:pPr indent="0" marL="0">
+                      <a:pPr marL="0" indent="0">
                         <a:buNone/>
                       </a:pPr>
                       <a:r>
-                        <a:rPr lang="en-US" sz="1350" dirty="0">
+                        <a:rPr lang="en-US" sz="1300" dirty="0">
                           <a:solidFill>
                             <a:srgbClr val="141414"/>
                           </a:solidFill>
@@ -18561,7 +18815,7 @@
                         </a:rPr>
                         <a:t>架構：App 拍照模組 → 車況資料庫 → 判讀佇列 → 自架 GPU 判讀服務 → 營運後台；確認結果回訓模型</a:t>
                       </a:r>
-                      <a:endParaRPr lang="en-US" sz="1350" dirty="0">
+                      <a:endParaRPr lang="en-US" sz="1300" dirty="0">
                         <a:latin typeface="Microsoft JhengHei" charset="0"/>
                         <a:ea typeface="Microsoft JhengHei" charset="0"/>
                         <a:cs typeface="Microsoft JhengHei" charset="0"/>
@@ -18607,6 +18861,11 @@
                     </a:lnB>
                   </a:tcPr>
                 </a:tc>
+                <a:extLst>
+                  <a:ext uri="{0D108BD9-81ED-4DB2-BD59-A6C34878D82A}">
+                    <a16:rowId xmlns:a16="http://schemas.microsoft.com/office/drawing/2014/main" val="10005"/>
+                  </a:ext>
+                </a:extLst>
               </a:tr>
               <a:tr h="896112">
                 <a:tc>
@@ -18614,11 +18873,11 @@
                     <a:bodyPr/>
                     <a:lstStyle/>
                     <a:p>
-                      <a:pPr indent="0" marL="0">
+                      <a:pPr marL="0" indent="0" algn="l">
                         <a:buNone/>
                       </a:pPr>
                       <a:r>
-                        <a:rPr lang="en-US" sz="1350" b="1" dirty="0">
+                        <a:rPr lang="en-US" sz="1300" b="1" dirty="0">
                           <a:solidFill>
                             <a:srgbClr val="141414"/>
                           </a:solidFill>
@@ -18628,7 +18887,7 @@
                         </a:rPr>
                         <a:t>預期效益簡述</a:t>
                       </a:r>
-                      <a:endParaRPr lang="en-US" sz="1350" dirty="0">
+                      <a:endParaRPr lang="en-US" sz="1300" dirty="0">
                         <a:latin typeface="Microsoft JhengHei" charset="0"/>
                         <a:ea typeface="Microsoft JhengHei" charset="0"/>
                         <a:cs typeface="Microsoft JhengHei" charset="0"/>
@@ -18682,11 +18941,11 @@
                     <a:bodyPr/>
                     <a:lstStyle/>
                     <a:p>
-                      <a:pPr indent="0" marL="0">
+                      <a:pPr marL="0" indent="0">
                         <a:buNone/>
                       </a:pPr>
                       <a:r>
-                        <a:rPr lang="en-US" sz="1350" dirty="0">
+                        <a:rPr lang="en-US" sz="1300" dirty="0">
                           <a:solidFill>
                             <a:srgbClr val="141414"/>
                           </a:solidFill>
@@ -18696,18 +18955,18 @@
                         </a:rPr>
                         <a:t>主辦方 144 組取還車照片實測：車損召回率 100%、誤報率 3%。</a:t>
                       </a:r>
-                      <a:endParaRPr lang="en-US" sz="1350" dirty="0">
+                      <a:endParaRPr lang="en-US" sz="1300" dirty="0">
                         <a:latin typeface="Microsoft JhengHei" charset="0"/>
                         <a:ea typeface="Microsoft JhengHei" charset="0"/>
                         <a:cs typeface="Microsoft JhengHei" charset="0"/>
                       </a:endParaRPr>
                     </a:p>
                     <a:p>
-                      <a:pPr indent="0" marL="0">
+                      <a:pPr marL="0" indent="0">
                         <a:buNone/>
                       </a:pPr>
                       <a:r>
-                        <a:rPr lang="en-US" sz="1350" dirty="0">
+                        <a:rPr lang="en-US" sz="1300" dirty="0">
                           <a:solidFill>
                             <a:srgbClr val="141414"/>
                           </a:solidFill>
@@ -18717,18 +18976,18 @@
                         </a:rPr>
                         <a:t>每天約 4,820 筆取還車全數檢查，所需人力由約 10–20 人降至 1–2 人（約 −90%）；</a:t>
                       </a:r>
-                      <a:endParaRPr lang="en-US" sz="1350" dirty="0">
+                      <a:endParaRPr lang="en-US" sz="1300" dirty="0">
                         <a:latin typeface="Microsoft JhengHei" charset="0"/>
                         <a:ea typeface="Microsoft JhengHei" charset="0"/>
                         <a:cs typeface="Microsoft JhengHei" charset="0"/>
                       </a:endParaRPr>
                     </a:p>
                     <a:p>
-                      <a:pPr indent="0" marL="0">
+                      <a:pPr marL="0" indent="0">
                         <a:buNone/>
                       </a:pPr>
                       <a:r>
-                        <a:rPr lang="en-US" sz="1350" dirty="0">
+                        <a:rPr lang="zh-TW" altLang="en-US" sz="1300" dirty="0">
                           <a:solidFill>
                             <a:srgbClr val="141414"/>
                           </a:solidFill>
@@ -18736,9 +18995,53 @@
                           <a:ea typeface="Microsoft JhengHei" pitchFamily="34" charset="-122"/>
                           <a:cs typeface="Microsoft JhengHei" pitchFamily="34" charset="-120"/>
                         </a:rPr>
-                        <a:t>不合格照片當場重拍；髒車與嚴重車損自動暫停出租；每次取還車都有確認單</a:t>
+                        <a:t>每天約 </a:t>
                       </a:r>
-                      <a:endParaRPr lang="en-US" sz="1350" dirty="0">
+                      <a:r>
+                        <a:rPr lang="en-US" altLang="zh-TW" sz="1300" dirty="0">
+                          <a:solidFill>
+                            <a:srgbClr val="141414"/>
+                          </a:solidFill>
+                          <a:latin typeface="Microsoft JhengHei" pitchFamily="34" charset="0"/>
+                          <a:ea typeface="Microsoft JhengHei" pitchFamily="34" charset="-122"/>
+                          <a:cs typeface="Microsoft JhengHei" pitchFamily="34" charset="-120"/>
+                        </a:rPr>
+                        <a:t>550–820 </a:t>
+                      </a:r>
+                      <a:r>
+                        <a:rPr lang="zh-TW" altLang="en-US" sz="1300" dirty="0">
+                          <a:solidFill>
+                            <a:srgbClr val="141414"/>
+                          </a:solidFill>
+                          <a:latin typeface="Microsoft JhengHei" pitchFamily="34" charset="0"/>
+                          <a:ea typeface="Microsoft JhengHei" pitchFamily="34" charset="-122"/>
+                          <a:cs typeface="Microsoft JhengHei" pitchFamily="34" charset="-120"/>
+                        </a:rPr>
+                        <a:t>張不合格照片當場重拍</a:t>
+                      </a:r>
+                      <a:r>
+                        <a:rPr lang="en-US" sz="1300" dirty="0">
+                          <a:solidFill>
+                            <a:srgbClr val="141414"/>
+                          </a:solidFill>
+                          <a:latin typeface="Microsoft JhengHei" pitchFamily="34" charset="0"/>
+                          <a:ea typeface="Microsoft JhengHei" pitchFamily="34" charset="-122"/>
+                          <a:cs typeface="Microsoft JhengHei" pitchFamily="34" charset="-120"/>
+                        </a:rPr>
+                        <a:t>；</a:t>
+                      </a:r>
+                      <a:r>
+                        <a:rPr lang="en-US" sz="1300" dirty="0" err="1">
+                          <a:solidFill>
+                            <a:srgbClr val="141414"/>
+                          </a:solidFill>
+                          <a:latin typeface="Microsoft JhengHei" pitchFamily="34" charset="0"/>
+                          <a:ea typeface="Microsoft JhengHei" pitchFamily="34" charset="-122"/>
+                          <a:cs typeface="Microsoft JhengHei" pitchFamily="34" charset="-120"/>
+                        </a:rPr>
+                        <a:t>髒車與嚴重車損自動暫停出租；每次取還車都有確認單</a:t>
+                      </a:r>
+                      <a:endParaRPr lang="en-US" sz="1300" dirty="0">
                         <a:latin typeface="Microsoft JhengHei" charset="0"/>
                         <a:ea typeface="Microsoft JhengHei" charset="0"/>
                         <a:cs typeface="Microsoft JhengHei" charset="0"/>
@@ -18784,6 +19087,11 @@
                     </a:lnB>
                   </a:tcPr>
                 </a:tc>
+                <a:extLst>
+                  <a:ext uri="{0D108BD9-81ED-4DB2-BD59-A6C34878D82A}">
+                    <a16:rowId xmlns:a16="http://schemas.microsoft.com/office/drawing/2014/main" val="10006"/>
+                  </a:ext>
+                </a:extLst>
               </a:tr>
             </a:tbl>
           </a:graphicData>
@@ -18809,7 +19117,7 @@
           </a:prstGeom>
           <a:extLst>
             <a:ext uri="{C572A759-6A51-4108-AA02-DFA0A04FC94B}">
-              <ma14:wrappingTextBoxFlag xmlns:ma14="http://schemas.microsoft.com/office/mac/drawingml/2011/main" val="0"/>
+              <ma14:wrappingTextBoxFlag xmlns:ma14="http://schemas.microsoft.com/office/mac/drawingml/2011/main" xmlns="" val="0"/>
             </a:ext>
           </a:extLst>
         </p:spPr>
@@ -18827,7 +19135,7 @@
           <a:p>
             <a:pPr algn="r"/>
             <a:fld id="{F7021451-1387-4CA6-816F-3879F97B5CBC}" type="slidenum">
-              <a:rPr b="0" lang="en-US"/>
+              <a:rPr lang="en-US" b="0"/>
               <a:t>2</a:t>
             </a:fld>
             <a:endParaRPr lang="en-US"/>
@@ -18862,9 +19170,11 @@
       <p:sp>
         <p:nvSpPr>
           <p:cNvPr id="2" name="Text 1"/>
-          <p:cNvSpPr/>
+          <p:cNvSpPr>
+            <a:spLocks noGrp="1"/>
+          </p:cNvSpPr>
           <p:nvPr>
-            <p:ph idx="101" type="body" hasCustomPrompt="1"/>
+            <p:ph type="body" idx="101" hasCustomPrompt="1"/>
           </p:nvPr>
         </p:nvSpPr>
         <p:spPr>
@@ -18882,7 +19192,7 @@
           <a:bodyPr wrap="square" lIns="0" tIns="0" rIns="0" bIns="0" rtlCol="0" anchor="ctr"/>
           <a:lstStyle/>
           <a:p>
-            <a:pPr indent="0" marL="0">
+            <a:pPr marL="0" indent="0">
               <a:buNone/>
             </a:pPr>
             <a:r>
@@ -18900,9 +19210,11 @@
       <p:sp>
         <p:nvSpPr>
           <p:cNvPr id="3" name="Text 1"/>
-          <p:cNvSpPr/>
+          <p:cNvSpPr>
+            <a:spLocks noGrp="1"/>
+          </p:cNvSpPr>
           <p:nvPr>
-            <p:ph idx="102" type="title" hasCustomPrompt="1"/>
+            <p:ph type="title" idx="102" hasCustomPrompt="1"/>
           </p:nvPr>
         </p:nvSpPr>
         <p:spPr>
@@ -18920,7 +19232,7 @@
           <a:bodyPr wrap="square" lIns="0" tIns="0" rIns="0" bIns="0" rtlCol="0" anchor="ctr"/>
           <a:lstStyle/>
           <a:p>
-            <a:pPr algn="l" indent="0" marL="0">
+            <a:pPr marL="0" indent="0" algn="l">
               <a:buNone/>
             </a:pPr>
             <a:r>
@@ -18983,7 +19295,7 @@
           <a:bodyPr wrap="square" lIns="0" tIns="0" rIns="0" bIns="0" rtlCol="0" anchor="t"/>
           <a:lstStyle/>
           <a:p>
-            <a:pPr indent="0" marL="0">
+            <a:pPr marL="0" indent="0">
               <a:buNone/>
             </a:pPr>
             <a:r>
@@ -19019,7 +19331,7 @@
           <a:bodyPr wrap="square" lIns="0" tIns="0" rIns="0" bIns="0" rtlCol="0" anchor="t"/>
           <a:lstStyle/>
           <a:p>
-            <a:pPr indent="0" marL="0">
+            <a:pPr marL="0" indent="0">
               <a:buNone/>
             </a:pPr>
             <a:r>
@@ -19055,7 +19367,7 @@
           <a:bodyPr wrap="square" lIns="0" tIns="0" rIns="0" bIns="0" rtlCol="0" anchor="t"/>
           <a:lstStyle/>
           <a:p>
-            <a:pPr indent="0" marL="0">
+            <a:pPr marL="0" indent="0">
               <a:buNone/>
             </a:pPr>
             <a:r>
@@ -19091,7 +19403,7 @@
           <a:bodyPr wrap="square" lIns="0" tIns="0" rIns="0" bIns="0" rtlCol="0" anchor="t"/>
           <a:lstStyle/>
           <a:p>
-            <a:pPr indent="0" marL="0">
+            <a:pPr marL="0" indent="0">
               <a:buNone/>
             </a:pPr>
             <a:r>
@@ -19105,7 +19417,7 @@
             <a:endParaRPr lang="zh-TW" sz="1500" dirty="0"/>
           </a:p>
           <a:p>
-            <a:pPr indent="0" marL="0">
+            <a:pPr marL="0" indent="0">
               <a:buNone/>
             </a:pPr>
             <a:r>
@@ -19168,7 +19480,7 @@
           <a:bodyPr wrap="square" lIns="0" tIns="0" rIns="0" bIns="0" rtlCol="0" anchor="t"/>
           <a:lstStyle/>
           <a:p>
-            <a:pPr indent="0" marL="0">
+            <a:pPr marL="0" indent="0">
               <a:buNone/>
             </a:pPr>
             <a:r>
@@ -19204,7 +19516,7 @@
           <a:bodyPr wrap="square" lIns="0" tIns="0" rIns="0" bIns="0" rtlCol="0" anchor="ctr"/>
           <a:lstStyle/>
           <a:p>
-            <a:pPr algn="ctr" indent="0" marL="0">
+            <a:pPr marL="0" indent="0" algn="ctr">
               <a:buNone/>
             </a:pPr>
             <a:r>
@@ -19267,7 +19579,7 @@
           <a:bodyPr wrap="square" lIns="0" tIns="0" rIns="0" bIns="0" rtlCol="0" anchor="t"/>
           <a:lstStyle/>
           <a:p>
-            <a:pPr indent="0" marL="0">
+            <a:pPr marL="0" indent="0">
               <a:buNone/>
             </a:pPr>
             <a:r>
@@ -19303,7 +19615,7 @@
           <a:bodyPr wrap="square" lIns="0" tIns="0" rIns="0" bIns="0" rtlCol="0" anchor="ctr"/>
           <a:lstStyle/>
           <a:p>
-            <a:pPr algn="ctr" indent="0" marL="0">
+            <a:pPr marL="0" indent="0" algn="ctr">
               <a:buNone/>
             </a:pPr>
             <a:r>
@@ -19366,7 +19678,7 @@
           <a:bodyPr wrap="square" lIns="0" tIns="0" rIns="0" bIns="0" rtlCol="0" anchor="t"/>
           <a:lstStyle/>
           <a:p>
-            <a:pPr indent="0" marL="0">
+            <a:pPr marL="0" indent="0">
               <a:buNone/>
             </a:pPr>
             <a:r>
@@ -19402,7 +19714,7 @@
           <a:bodyPr wrap="square" lIns="0" tIns="0" rIns="0" bIns="0" rtlCol="0" anchor="t"/>
           <a:lstStyle/>
           <a:p>
-            <a:pPr indent="0" marL="0">
+            <a:pPr marL="0" indent="0">
               <a:spcAft>
                 <a:spcPts val="200"/>
               </a:spcAft>
@@ -19419,7 +19731,7 @@
             <a:endParaRPr lang="zh-TW" sz="1400" dirty="0"/>
           </a:p>
           <a:p>
-            <a:pPr indent="0" marL="0">
+            <a:pPr marL="0" indent="0">
               <a:spcAft>
                 <a:spcPts val="200"/>
               </a:spcAft>
@@ -19436,7 +19748,7 @@
             <a:endParaRPr lang="zh-TW" sz="1400" dirty="0"/>
           </a:p>
           <a:p>
-            <a:pPr indent="0" marL="0">
+            <a:pPr marL="0" indent="0">
               <a:spcAft>
                 <a:spcPts val="200"/>
               </a:spcAft>
@@ -19453,7 +19765,7 @@
             <a:endParaRPr lang="zh-TW" sz="1400" dirty="0"/>
           </a:p>
           <a:p>
-            <a:pPr indent="0" marL="0">
+            <a:pPr marL="0" indent="0">
               <a:spcAft>
                 <a:spcPts val="1400"/>
               </a:spcAft>
@@ -19470,7 +19782,7 @@
             <a:endParaRPr lang="zh-TW" sz="1400" dirty="0"/>
           </a:p>
           <a:p>
-            <a:pPr indent="0" marL="0">
+            <a:pPr marL="0" indent="0">
               <a:spcAft>
                 <a:spcPts val="200"/>
               </a:spcAft>
@@ -19487,7 +19799,7 @@
             <a:endParaRPr lang="zh-TW" sz="1400" dirty="0"/>
           </a:p>
           <a:p>
-            <a:pPr indent="0" marL="0">
+            <a:pPr marL="0" indent="0">
               <a:spcAft>
                 <a:spcPts val="200"/>
               </a:spcAft>
@@ -19504,7 +19816,7 @@
             <a:endParaRPr lang="zh-TW" sz="1400" dirty="0"/>
           </a:p>
           <a:p>
-            <a:pPr indent="0" marL="0">
+            <a:pPr marL="0" indent="0">
               <a:spcAft>
                 <a:spcPts val="200"/>
               </a:spcAft>
@@ -19521,7 +19833,7 @@
             <a:endParaRPr lang="zh-TW" sz="1400" dirty="0"/>
           </a:p>
           <a:p>
-            <a:pPr indent="0" marL="0">
+            <a:pPr marL="0" indent="0">
               <a:spcAft>
                 <a:spcPts val="200"/>
               </a:spcAft>
@@ -19560,7 +19872,7 @@
           <a:bodyPr wrap="square" lIns="0" tIns="0" rIns="0" bIns="0" rtlCol="0" anchor="t"/>
           <a:lstStyle/>
           <a:p>
-            <a:pPr indent="0" marL="0">
+            <a:pPr marL="0" indent="0">
               <a:buNone/>
             </a:pPr>
             <a:r>
@@ -19598,7 +19910,7 @@
           <a:bodyPr wrap="square" lIns="0" tIns="0" rIns="0" bIns="0" rtlCol="0" anchor="ctr"/>
           <a:lstStyle/>
           <a:p>
-            <a:pPr algn="ctr" indent="0" marL="0">
+            <a:pPr marL="0" indent="0" algn="ctr">
               <a:buNone/>
             </a:pPr>
             <a:r>
@@ -19621,7 +19933,7 @@
         </p:nvSpPr>
         <p:spPr>
           <a:xfrm>
-            <a:off x="5115458" y="3931920"/>
+            <a:off x="5115458" y="3872286"/>
             <a:ext cx="2417978" cy="640080"/>
           </a:xfrm>
           <a:prstGeom prst="rect">
@@ -19634,7 +19946,7 @@
           <a:bodyPr wrap="square" lIns="0" tIns="0" rIns="0" bIns="0" rtlCol="0" anchor="t"/>
           <a:lstStyle/>
           <a:p>
-            <a:pPr indent="0" marL="0">
+            <a:pPr marL="0" indent="0">
               <a:buNone/>
             </a:pPr>
             <a:r>
@@ -19648,7 +19960,7 @@
             <a:endParaRPr lang="zh-TW" sz="1350" dirty="0"/>
           </a:p>
           <a:p>
-            <a:pPr indent="0" marL="0">
+            <a:pPr marL="0" indent="0">
               <a:buNone/>
             </a:pPr>
             <a:r>
@@ -19662,7 +19974,7 @@
             <a:endParaRPr lang="zh-TW" sz="1350" dirty="0"/>
           </a:p>
           <a:p>
-            <a:pPr indent="0" marL="0">
+            <a:pPr marL="0" indent="0">
               <a:buNone/>
             </a:pPr>
             <a:r>
@@ -19700,7 +20012,7 @@
           <a:bodyPr wrap="square" lIns="0" tIns="0" rIns="0" bIns="0" rtlCol="0" anchor="ctr"/>
           <a:lstStyle/>
           <a:p>
-            <a:pPr algn="ctr" indent="0" marL="0">
+            <a:pPr marL="0" indent="0" algn="ctr">
               <a:buNone/>
             </a:pPr>
             <a:r>
@@ -19724,7 +20036,7 @@
         <p:spPr>
           <a:xfrm>
             <a:off x="5115458" y="4617720"/>
-            <a:ext cx="2417978" cy="640080"/>
+            <a:ext cx="2417978" cy="457200"/>
           </a:xfrm>
           <a:prstGeom prst="rect">
             <a:avLst/>
@@ -19736,7 +20048,7 @@
           <a:bodyPr wrap="square" lIns="0" tIns="0" rIns="0" bIns="0" rtlCol="0" anchor="t"/>
           <a:lstStyle/>
           <a:p>
-            <a:pPr indent="0" marL="0">
+            <a:pPr marL="0" indent="0">
               <a:buNone/>
             </a:pPr>
             <a:r>
@@ -19750,7 +20062,7 @@
             <a:endParaRPr lang="zh-TW" sz="1350" dirty="0"/>
           </a:p>
           <a:p>
-            <a:pPr indent="0" marL="0">
+            <a:pPr marL="0" indent="0">
               <a:buNone/>
             </a:pPr>
             <a:r>
@@ -19788,7 +20100,7 @@
           <a:bodyPr wrap="square" lIns="0" tIns="0" rIns="0" bIns="0" rtlCol="0" anchor="ctr"/>
           <a:lstStyle/>
           <a:p>
-            <a:pPr algn="ctr" indent="0" marL="0">
+            <a:pPr marL="0" indent="0" algn="ctr">
               <a:buNone/>
             </a:pPr>
             <a:r>
@@ -19811,7 +20123,7 @@
         </p:nvSpPr>
         <p:spPr>
           <a:xfrm>
-            <a:off x="5115458" y="5303520"/>
+            <a:off x="5115458" y="5241897"/>
             <a:ext cx="2417978" cy="640080"/>
           </a:xfrm>
           <a:prstGeom prst="rect">
@@ -19824,7 +20136,7 @@
           <a:bodyPr wrap="square" lIns="0" tIns="0" rIns="0" bIns="0" rtlCol="0" anchor="t"/>
           <a:lstStyle/>
           <a:p>
-            <a:pPr indent="0" marL="0">
+            <a:pPr marL="0" indent="0">
               <a:buNone/>
             </a:pPr>
             <a:r>
@@ -19838,7 +20150,7 @@
             <a:endParaRPr lang="zh-TW" sz="1350" dirty="0"/>
           </a:p>
           <a:p>
-            <a:pPr indent="0" marL="0">
+            <a:pPr marL="0" indent="0">
               <a:buNone/>
             </a:pPr>
             <a:r>
@@ -19852,16 +20164,9 @@
             <a:endParaRPr lang="zh-TW" sz="1350" dirty="0"/>
           </a:p>
           <a:p>
-            <a:pPr indent="0" marL="0">
-              <a:buNone/>
-            </a:pPr>
-            <a:r>
-              <a:rPr lang="zh-TW" altLang="en-US" sz="1350" dirty="0">
-                <a:solidFill>
-                  <a:schemeClr val="tx1"/>
-                </a:solidFill>
-              </a:rPr>
-              <a:t>用戶看得到結果</a:t>
+            <a:r>
+              <a:rPr lang="zh-TW" altLang="en-US" sz="1350" dirty="0"/>
+              <a:t>用戶看得到判讀與確認結果</a:t>
             </a:r>
             <a:endParaRPr lang="zh-TW" sz="1350" dirty="0"/>
           </a:p>
@@ -19888,7 +20193,7 @@
           <a:bodyPr wrap="square" lIns="0" tIns="0" rIns="0" bIns="0" rtlCol="0" anchor="t"/>
           <a:lstStyle/>
           <a:p>
-            <a:pPr indent="0" marL="0">
+            <a:pPr marL="0" indent="0">
               <a:buNone/>
             </a:pPr>
             <a:r>
@@ -19924,7 +20229,7 @@
           <a:bodyPr wrap="square" lIns="0" tIns="0" rIns="0" bIns="0" rtlCol="0" anchor="t"/>
           <a:lstStyle/>
           <a:p>
-            <a:pPr indent="0" marL="0">
+            <a:pPr marL="0" indent="0">
               <a:buNone/>
             </a:pPr>
             <a:r>
@@ -19938,7 +20243,7 @@
             <a:endParaRPr lang="zh-TW" sz="1300" dirty="0"/>
           </a:p>
           <a:p>
-            <a:pPr indent="0" marL="0">
+            <a:pPr marL="0" indent="0">
               <a:buNone/>
             </a:pPr>
             <a:r>
@@ -19974,7 +20279,7 @@
           <a:bodyPr wrap="square" lIns="0" tIns="0" rIns="0" bIns="0" rtlCol="0" anchor="t"/>
           <a:lstStyle/>
           <a:p>
-            <a:pPr indent="0" marL="0">
+            <a:pPr marL="0" indent="0">
               <a:buNone/>
             </a:pPr>
             <a:r>
@@ -20010,7 +20315,7 @@
           <a:bodyPr wrap="square" lIns="0" tIns="0" rIns="0" bIns="0" rtlCol="0" anchor="t"/>
           <a:lstStyle/>
           <a:p>
-            <a:pPr indent="0" marL="0">
+            <a:pPr marL="0" indent="0">
               <a:buNone/>
             </a:pPr>
             <a:r>
@@ -20024,7 +20329,7 @@
             <a:endParaRPr lang="zh-TW" sz="1300" dirty="0"/>
           </a:p>
           <a:p>
-            <a:pPr indent="0" marL="0">
+            <a:pPr marL="0" indent="0">
               <a:buNone/>
             </a:pPr>
             <a:r>
@@ -20060,9 +20365,6 @@
           <a:bodyPr wrap="square" lIns="0" tIns="0" rIns="0" bIns="0" rtlCol="0" anchor="t"/>
           <a:lstStyle/>
           <a:p>
-            <a:pPr indent="0" marL="0">
-              <a:buNone/>
-            </a:pPr>
             <a:r>
               <a:rPr lang="zh-TW" altLang="en-US" sz="2400" b="1" dirty="0">
                 <a:solidFill>
@@ -20096,7 +20398,7 @@
           <a:bodyPr wrap="square" lIns="0" tIns="0" rIns="0" bIns="0" rtlCol="0" anchor="t"/>
           <a:lstStyle/>
           <a:p>
-            <a:pPr indent="0" marL="0">
+            <a:pPr marL="0" indent="0">
               <a:buNone/>
             </a:pPr>
             <a:r>
@@ -20113,7 +20415,7 @@
       </p:sp>
       <p:sp>
         <p:nvSpPr>
-          <p:cNvPr id="25" name="Slide Number Placeholder 0"/>
+          <p:cNvPr id="31" name="Slide Number Placeholder 0"/>
           <p:cNvSpPr>
             <a:spLocks noGrp="1"/>
           </p:cNvSpPr>
@@ -20131,7 +20433,7 @@
           </a:prstGeom>
           <a:extLst>
             <a:ext uri="{C572A759-6A51-4108-AA02-DFA0A04FC94B}">
-              <ma14:wrappingTextBoxFlag xmlns:ma14="http://schemas.microsoft.com/office/mac/drawingml/2011/main" val="0"/>
+              <ma14:wrappingTextBoxFlag xmlns:ma14="http://schemas.microsoft.com/office/mac/drawingml/2011/main" xmlns="" val="0"/>
             </a:ext>
           </a:extLst>
         </p:spPr>
@@ -20149,7 +20451,7 @@
           <a:p>
             <a:pPr algn="r"/>
             <a:fld id="{F7021451-1387-4CA6-816F-3879F97B5CBC}" type="slidenum">
-              <a:rPr b="0" lang="en-US"/>
+              <a:rPr lang="en-US" b="0"/>
               <a:t>3</a:t>
             </a:fld>
             <a:endParaRPr lang="en-US"/>
@@ -20184,9 +20486,11 @@
       <p:sp>
         <p:nvSpPr>
           <p:cNvPr id="2" name="Text 1"/>
-          <p:cNvSpPr/>
+          <p:cNvSpPr>
+            <a:spLocks noGrp="1"/>
+          </p:cNvSpPr>
           <p:nvPr>
-            <p:ph idx="101" type="body" hasCustomPrompt="1"/>
+            <p:ph type="body" idx="101" hasCustomPrompt="1"/>
           </p:nvPr>
         </p:nvSpPr>
         <p:spPr>
@@ -20204,7 +20508,7 @@
           <a:bodyPr wrap="square" lIns="0" tIns="0" rIns="0" bIns="0" rtlCol="0" anchor="ctr"/>
           <a:lstStyle/>
           <a:p>
-            <a:pPr indent="0" marL="0">
+            <a:pPr marL="0" indent="0">
               <a:buNone/>
             </a:pPr>
             <a:r>
@@ -20222,9 +20526,11 @@
       <p:sp>
         <p:nvSpPr>
           <p:cNvPr id="3" name="Text 1"/>
-          <p:cNvSpPr/>
+          <p:cNvSpPr>
+            <a:spLocks noGrp="1"/>
+          </p:cNvSpPr>
           <p:nvPr>
-            <p:ph idx="102" type="title" hasCustomPrompt="1"/>
+            <p:ph type="title" idx="102" hasCustomPrompt="1"/>
           </p:nvPr>
         </p:nvSpPr>
         <p:spPr>
@@ -20242,7 +20548,7 @@
           <a:bodyPr wrap="square" lIns="0" tIns="0" rIns="0" bIns="0" rtlCol="0" anchor="ctr"/>
           <a:lstStyle/>
           <a:p>
-            <a:pPr algn="l" indent="0" marL="0">
+            <a:pPr marL="0" indent="0" algn="l">
               <a:buNone/>
             </a:pPr>
             <a:r>
@@ -20311,14 +20617,14 @@
       </p:sp>
       <p:pic>
         <p:nvPicPr>
-          <p:cNvPr id="6" name="Image 0" descr="preencoded.png">    </p:cNvPr>
+          <p:cNvPr id="6" name="Image 0" descr="preencoded.png"/>
           <p:cNvPicPr>
             <a:picLocks noChangeAspect="1"/>
           </p:cNvPicPr>
           <p:nvPr/>
         </p:nvPicPr>
         <p:blipFill>
-          <a:blip r:embed="rId1"/>
+          <a:blip r:embed="rId3"/>
           <a:stretch>
             <a:fillRect/>
           </a:stretch>
@@ -20354,7 +20660,7 @@
           <a:bodyPr wrap="square" lIns="0" tIns="0" rIns="0" bIns="0" rtlCol="0" anchor="t"/>
           <a:lstStyle/>
           <a:p>
-            <a:pPr indent="0" marL="0">
+            <a:pPr marL="0" indent="0">
               <a:buNone/>
             </a:pPr>
             <a:r>
@@ -20499,14 +20805,14 @@
       </p:sp>
       <p:pic>
         <p:nvPicPr>
-          <p:cNvPr id="11" name="Image 1" descr="preencoded.png">    </p:cNvPr>
+          <p:cNvPr id="11" name="Image 1" descr="preencoded.png"/>
           <p:cNvPicPr>
             <a:picLocks noChangeAspect="1"/>
           </p:cNvPicPr>
           <p:nvPr/>
         </p:nvPicPr>
         <p:blipFill>
-          <a:blip r:embed="rId2"/>
+          <a:blip r:embed="rId4"/>
           <a:stretch>
             <a:fillRect/>
           </a:stretch>
@@ -20542,7 +20848,7 @@
           <a:bodyPr wrap="square" lIns="0" tIns="0" rIns="0" bIns="0" rtlCol="0" anchor="t"/>
           <a:lstStyle/>
           <a:p>
-            <a:pPr indent="0" marL="0">
+            <a:pPr marL="0" indent="0">
               <a:buNone/>
             </a:pPr>
             <a:r>
@@ -20654,7 +20960,7 @@
           <a:bodyPr wrap="square" lIns="0" tIns="0" rIns="0" bIns="0" rtlCol="0" anchor="t"/>
           <a:lstStyle/>
           <a:p>
-            <a:pPr indent="0" marL="0">
+            <a:pPr marL="0" indent="0">
               <a:buNone/>
             </a:pPr>
             <a:r>
@@ -20717,7 +21023,7 @@
           <a:bodyPr wrap="square" lIns="0" tIns="0" rIns="0" bIns="0" rtlCol="0" anchor="ctr"/>
           <a:lstStyle/>
           <a:p>
-            <a:pPr algn="ctr" indent="0" marL="0">
+            <a:pPr marL="0" indent="0" algn="ctr">
               <a:buNone/>
             </a:pPr>
             <a:r>
@@ -20804,7 +21110,7 @@
           <a:bodyPr wrap="square" lIns="0" tIns="0" rIns="0" bIns="0" rtlCol="0" anchor="ctr"/>
           <a:lstStyle/>
           <a:p>
-            <a:pPr algn="ctr" indent="0" marL="0">
+            <a:pPr marL="0" indent="0" algn="ctr">
               <a:buNone/>
             </a:pPr>
             <a:r>
@@ -20891,7 +21197,7 @@
           <a:bodyPr wrap="square" lIns="0" tIns="0" rIns="0" bIns="0" rtlCol="0" anchor="ctr"/>
           <a:lstStyle/>
           <a:p>
-            <a:pPr algn="ctr" indent="0" marL="0">
+            <a:pPr marL="0" indent="0" algn="ctr">
               <a:buNone/>
             </a:pPr>
             <a:r>
@@ -20905,7 +21211,7 @@
             <a:endParaRPr lang="zh-TW" sz="1300" dirty="0"/>
           </a:p>
           <a:p>
-            <a:pPr algn="ctr" indent="0" marL="0">
+            <a:pPr marL="0" indent="0" algn="ctr">
               <a:buNone/>
             </a:pPr>
             <a:r>
@@ -20992,7 +21298,7 @@
           <a:bodyPr wrap="square" lIns="0" tIns="0" rIns="0" bIns="0" rtlCol="0" anchor="ctr"/>
           <a:lstStyle/>
           <a:p>
-            <a:pPr algn="ctr" indent="0" marL="0">
+            <a:pPr marL="0" indent="0" algn="ctr">
               <a:buNone/>
             </a:pPr>
             <a:r>
@@ -21006,7 +21312,7 @@
             <a:endParaRPr lang="zh-TW" sz="1300" dirty="0"/>
           </a:p>
           <a:p>
-            <a:pPr algn="ctr" indent="0" marL="0">
+            <a:pPr marL="0" indent="0" algn="ctr">
               <a:buNone/>
             </a:pPr>
             <a:r>
@@ -21093,7 +21399,7 @@
           <a:bodyPr wrap="square" lIns="0" tIns="0" rIns="0" bIns="0" rtlCol="0" anchor="ctr"/>
           <a:lstStyle/>
           <a:p>
-            <a:pPr algn="ctr" indent="0" marL="0">
+            <a:pPr marL="0" indent="0" algn="ctr">
               <a:buNone/>
             </a:pPr>
             <a:r>
@@ -21180,7 +21486,7 @@
           <a:bodyPr wrap="square" lIns="0" tIns="0" rIns="0" bIns="0" rtlCol="0" anchor="ctr"/>
           <a:lstStyle/>
           <a:p>
-            <a:pPr algn="ctr" indent="0" marL="0">
+            <a:pPr marL="0" indent="0" algn="ctr">
               <a:buNone/>
             </a:pPr>
             <a:r>
@@ -21268,7 +21574,7 @@
           <a:bodyPr wrap="square" lIns="0" tIns="0" rIns="0" bIns="0" rtlCol="0" anchor="ctr"/>
           <a:lstStyle/>
           <a:p>
-            <a:pPr algn="ctr" indent="0" marL="0">
+            <a:pPr marL="0" indent="0" algn="ctr">
               <a:buNone/>
             </a:pPr>
             <a:r>
@@ -21304,7 +21610,7 @@
           <a:bodyPr wrap="square" lIns="0" tIns="0" rIns="0" bIns="0" rtlCol="0" anchor="t"/>
           <a:lstStyle/>
           <a:p>
-            <a:pPr indent="0" marL="0">
+            <a:pPr marL="0" indent="0">
               <a:buNone/>
             </a:pPr>
             <a:r>
@@ -21318,9 +21624,6 @@
             <a:endParaRPr lang="zh-TW" sz="1450" dirty="0"/>
           </a:p>
           <a:p>
-            <a:pPr indent="0" marL="0">
-              <a:buNone/>
-            </a:pPr>
             <a:r>
               <a:rPr lang="zh-TW" altLang="en-US" sz="1250" dirty="0">
                 <a:solidFill>
@@ -21356,7 +21659,7 @@
           <a:bodyPr wrap="square" lIns="0" tIns="0" rIns="0" bIns="0" rtlCol="0" anchor="ctr"/>
           <a:lstStyle/>
           <a:p>
-            <a:pPr algn="ctr" indent="0" marL="0">
+            <a:pPr marL="0" indent="0" algn="ctr">
               <a:buNone/>
             </a:pPr>
             <a:r>
@@ -21392,7 +21695,7 @@
           <a:bodyPr wrap="square" lIns="0" tIns="0" rIns="0" bIns="0" rtlCol="0" anchor="t"/>
           <a:lstStyle/>
           <a:p>
-            <a:pPr indent="0" marL="0">
+            <a:pPr marL="0" indent="0">
               <a:buNone/>
             </a:pPr>
             <a:r>
@@ -21406,7 +21709,7 @@
             <a:endParaRPr lang="zh-TW" sz="1450" dirty="0"/>
           </a:p>
           <a:p>
-            <a:pPr indent="0" marL="0">
+            <a:pPr marL="0" indent="0">
               <a:buNone/>
             </a:pPr>
             <a:r>
@@ -21429,7 +21732,7 @@
         </p:nvSpPr>
         <p:spPr>
           <a:xfrm>
-            <a:off x="548640" y="5276088"/>
+            <a:off x="548640" y="5401719"/>
             <a:ext cx="329184" cy="329184"/>
           </a:xfrm>
           <a:prstGeom prst="ellipse">
@@ -21444,7 +21747,7 @@
           <a:bodyPr wrap="square" lIns="0" tIns="0" rIns="0" bIns="0" rtlCol="0" anchor="ctr"/>
           <a:lstStyle/>
           <a:p>
-            <a:pPr algn="ctr" indent="0" marL="0">
+            <a:pPr marL="0" indent="0" algn="ctr">
               <a:buNone/>
             </a:pPr>
             <a:r>
@@ -21467,7 +21770,7 @@
         </p:nvSpPr>
         <p:spPr>
           <a:xfrm>
-            <a:off x="987552" y="5230368"/>
+            <a:off x="988712" y="5359974"/>
             <a:ext cx="6858000" cy="594360"/>
           </a:xfrm>
           <a:prstGeom prst="rect">
@@ -21480,7 +21783,7 @@
           <a:bodyPr wrap="square" lIns="0" tIns="0" rIns="0" bIns="0" rtlCol="0" anchor="t"/>
           <a:lstStyle/>
           <a:p>
-            <a:pPr indent="0" marL="0">
+            <a:pPr marL="0" indent="0">
               <a:buNone/>
             </a:pPr>
             <a:r>
@@ -21494,7 +21797,7 @@
             <a:endParaRPr lang="zh-TW" sz="1450" dirty="0"/>
           </a:p>
           <a:p>
-            <a:pPr indent="0" marL="0">
+            <a:pPr marL="0" indent="0">
               <a:buNone/>
             </a:pPr>
             <a:r>
@@ -21517,7 +21820,7 @@
         </p:nvSpPr>
         <p:spPr>
           <a:xfrm>
-            <a:off x="8165958" y="5349240"/>
+            <a:off x="960493" y="5029200"/>
             <a:ext cx="3477097" cy="274320"/>
           </a:xfrm>
           <a:prstGeom prst="rect">
@@ -21530,7 +21833,7 @@
           <a:bodyPr wrap="square" lIns="0" tIns="0" rIns="0" bIns="0" rtlCol="0" anchor="t"/>
           <a:lstStyle/>
           <a:p>
-            <a:pPr indent="0" marL="0">
+            <a:pPr marL="0" indent="0">
               <a:buNone/>
             </a:pPr>
             <a:r>
@@ -21566,7 +21869,7 @@
           <a:bodyPr wrap="square" lIns="0" tIns="0" rIns="0" bIns="0" rtlCol="0" anchor="t"/>
           <a:lstStyle/>
           <a:p>
-            <a:pPr indent="0" marL="0">
+            <a:pPr marL="0" indent="0">
               <a:buNone/>
             </a:pPr>
             <a:r>
@@ -21583,7 +21886,7 @@
       </p:sp>
       <p:sp>
         <p:nvSpPr>
-          <p:cNvPr id="25" name="Slide Number Placeholder 0"/>
+          <p:cNvPr id="42" name="Slide Number Placeholder 0"/>
           <p:cNvSpPr>
             <a:spLocks noGrp="1"/>
           </p:cNvSpPr>
@@ -21601,7 +21904,7 @@
           </a:prstGeom>
           <a:extLst>
             <a:ext uri="{C572A759-6A51-4108-AA02-DFA0A04FC94B}">
-              <ma14:wrappingTextBoxFlag xmlns:ma14="http://schemas.microsoft.com/office/mac/drawingml/2011/main" val="0"/>
+              <ma14:wrappingTextBoxFlag xmlns:ma14="http://schemas.microsoft.com/office/mac/drawingml/2011/main" xmlns="" val="0"/>
             </a:ext>
           </a:extLst>
         </p:spPr>
@@ -21619,7 +21922,7 @@
           <a:p>
             <a:pPr algn="r"/>
             <a:fld id="{F7021451-1387-4CA6-816F-3879F97B5CBC}" type="slidenum">
-              <a:rPr b="0" lang="en-US"/>
+              <a:rPr lang="en-US" b="0"/>
               <a:t>4</a:t>
             </a:fld>
             <a:endParaRPr lang="en-US"/>
@@ -21654,9 +21957,11 @@
       <p:sp>
         <p:nvSpPr>
           <p:cNvPr id="2" name="Text 1"/>
-          <p:cNvSpPr/>
+          <p:cNvSpPr>
+            <a:spLocks noGrp="1"/>
+          </p:cNvSpPr>
           <p:nvPr>
-            <p:ph idx="101" type="body" hasCustomPrompt="1"/>
+            <p:ph type="body" idx="101" hasCustomPrompt="1"/>
           </p:nvPr>
         </p:nvSpPr>
         <p:spPr>
@@ -21674,7 +21979,7 @@
           <a:bodyPr wrap="square" lIns="0" tIns="0" rIns="0" bIns="0" rtlCol="0" anchor="ctr"/>
           <a:lstStyle/>
           <a:p>
-            <a:pPr indent="0" marL="0">
+            <a:pPr marL="0" indent="0">
               <a:buNone/>
             </a:pPr>
             <a:r>
@@ -21692,9 +21997,11 @@
       <p:sp>
         <p:nvSpPr>
           <p:cNvPr id="3" name="Text 1"/>
-          <p:cNvSpPr/>
+          <p:cNvSpPr>
+            <a:spLocks noGrp="1"/>
+          </p:cNvSpPr>
           <p:nvPr>
-            <p:ph idx="102" type="title" hasCustomPrompt="1"/>
+            <p:ph type="title" idx="102" hasCustomPrompt="1"/>
           </p:nvPr>
         </p:nvSpPr>
         <p:spPr>
@@ -21712,7 +22019,7 @@
           <a:bodyPr wrap="square" lIns="0" tIns="0" rIns="0" bIns="0" rtlCol="0" anchor="ctr"/>
           <a:lstStyle/>
           <a:p>
-            <a:pPr algn="l" indent="0" marL="0">
+            <a:pPr marL="0" indent="0" algn="l">
               <a:buNone/>
             </a:pPr>
             <a:r>
@@ -21748,7 +22055,7 @@
           <a:bodyPr wrap="square" lIns="0" tIns="0" rIns="0" bIns="0" rtlCol="0" anchor="t"/>
           <a:lstStyle/>
           <a:p>
-            <a:pPr indent="0" marL="0">
+            <a:pPr marL="0" indent="0">
               <a:buNone/>
             </a:pPr>
             <a:r>
@@ -21765,7 +22072,7 @@
       </p:sp>
       <p:graphicFrame>
         <p:nvGraphicFramePr>
-          <p:cNvPr id="5" name="Chart 0" descr=""/>
+          <p:cNvPr id="5" name="Chart 0"/>
           <p:cNvGraphicFramePr/>
           <p:nvPr/>
         </p:nvGraphicFramePr>
@@ -21773,9 +22080,9 @@
           <a:off x="457200" y="1783080"/>
           <a:ext cx="6949440" cy="3657600"/>
         </p:xfrm>
-        <a:graphic xmlns:a="http://schemas.openxmlformats.org/drawingml/2006/main">
+        <a:graphic>
           <a:graphicData uri="http://schemas.openxmlformats.org/drawingml/2006/chart">
-            <c:chart xmlns:c="http://schemas.openxmlformats.org/drawingml/2006/chart" r:id="rId1"/>
+            <c:chart xmlns:c="http://schemas.openxmlformats.org/drawingml/2006/chart" xmlns:r="http://schemas.openxmlformats.org/officeDocument/2006/relationships" r:id="rId3"/>
           </a:graphicData>
         </a:graphic>
       </p:graphicFrame>
@@ -21802,7 +22109,7 @@
           <a:bodyPr wrap="square" lIns="0" tIns="0" rIns="0" bIns="0" rtlCol="0" anchor="t"/>
           <a:lstStyle/>
           <a:p>
-            <a:pPr algn="r" indent="0" marL="0">
+            <a:pPr marL="0" indent="0" algn="r">
               <a:buNone/>
             </a:pPr>
             <a:r>
@@ -21816,7 +22123,7 @@
             <a:endParaRPr lang="zh-TW" sz="1400" dirty="0"/>
           </a:p>
           <a:p>
-            <a:pPr algn="r" indent="0" marL="0">
+            <a:pPr marL="0" indent="0" algn="r">
               <a:buNone/>
             </a:pPr>
             <a:r>
@@ -21876,7 +22183,7 @@
           <a:bodyPr wrap="square" lIns="0" tIns="0" rIns="0" bIns="0" rtlCol="0" anchor="t"/>
           <a:lstStyle/>
           <a:p>
-            <a:pPr indent="0" marL="0">
+            <a:pPr marL="0" indent="0">
               <a:buNone/>
             </a:pPr>
             <a:r>
@@ -21912,7 +22219,7 @@
           <a:bodyPr wrap="square" lIns="0" tIns="0" rIns="0" bIns="0" rtlCol="0" anchor="t"/>
           <a:lstStyle/>
           <a:p>
-            <a:pPr indent="0" marL="0">
+            <a:pPr marL="0" indent="0">
               <a:buNone/>
             </a:pPr>
             <a:r>
@@ -21948,7 +22255,7 @@
           <a:bodyPr wrap="square" lIns="0" tIns="0" rIns="0" bIns="0" rtlCol="0" anchor="t"/>
           <a:lstStyle/>
           <a:p>
-            <a:pPr indent="0" marL="0">
+            <a:pPr marL="0" indent="0">
               <a:buNone/>
             </a:pPr>
             <a:r>
@@ -21984,7 +22291,7 @@
           <a:bodyPr wrap="square" lIns="0" tIns="0" rIns="0" bIns="0" rtlCol="0" anchor="t"/>
           <a:lstStyle/>
           <a:p>
-            <a:pPr indent="0" marL="0">
+            <a:pPr marL="0" indent="0">
               <a:buNone/>
             </a:pPr>
             <a:r>
@@ -22020,7 +22327,7 @@
           <a:bodyPr wrap="square" lIns="0" tIns="0" rIns="0" bIns="0" rtlCol="0" anchor="t"/>
           <a:lstStyle/>
           <a:p>
-            <a:pPr indent="0" marL="0">
+            <a:pPr marL="0" indent="0">
               <a:buNone/>
             </a:pPr>
             <a:r>
@@ -22056,7 +22363,7 @@
           <a:bodyPr wrap="square" lIns="0" tIns="0" rIns="0" bIns="0" rtlCol="0" anchor="t"/>
           <a:lstStyle/>
           <a:p>
-            <a:pPr indent="0" marL="0">
+            <a:pPr marL="0" indent="0">
               <a:buNone/>
             </a:pPr>
             <a:r>
@@ -22092,7 +22399,7 @@
           <a:bodyPr wrap="square" lIns="0" tIns="0" rIns="0" bIns="0" rtlCol="0" anchor="t"/>
           <a:lstStyle/>
           <a:p>
-            <a:pPr indent="0" marL="0">
+            <a:pPr marL="0" indent="0">
               <a:buNone/>
             </a:pPr>
             <a:r>
@@ -22128,7 +22435,7 @@
           <a:bodyPr wrap="square" lIns="0" tIns="0" rIns="0" bIns="0" rtlCol="0" anchor="t"/>
           <a:lstStyle/>
           <a:p>
-            <a:pPr indent="0" marL="0">
+            <a:pPr marL="0" indent="0">
               <a:buNone/>
             </a:pPr>
             <a:r>
@@ -22364,7 +22671,7 @@
           <a:bodyPr wrap="square" lIns="0" tIns="0" rIns="0" bIns="0" rtlCol="0" anchor="ctr"/>
           <a:lstStyle/>
           <a:p>
-            <a:pPr indent="0" marL="0">
+            <a:pPr marL="0" indent="0">
               <a:buNone/>
             </a:pPr>
             <a:r>
@@ -22408,7 +22715,7 @@
           <a:bodyPr wrap="square" lIns="0" tIns="0" rIns="0" bIns="0" rtlCol="0" anchor="t"/>
           <a:lstStyle/>
           <a:p>
-            <a:pPr indent="0" marL="0">
+            <a:pPr marL="0" indent="0">
               <a:buNone/>
             </a:pPr>
             <a:r>
@@ -22444,7 +22751,7 @@
           <a:bodyPr wrap="square" lIns="0" tIns="0" rIns="0" bIns="0" rtlCol="0" anchor="t"/>
           <a:lstStyle/>
           <a:p>
-            <a:pPr indent="0" marL="0">
+            <a:pPr marL="0" indent="0">
               <a:buNone/>
             </a:pPr>
             <a:r>
@@ -22461,7 +22768,7 @@
       </p:sp>
       <p:sp>
         <p:nvSpPr>
-          <p:cNvPr id="25" name="Slide Number Placeholder 0"/>
+          <p:cNvPr id="27" name="Slide Number Placeholder 0"/>
           <p:cNvSpPr>
             <a:spLocks noGrp="1"/>
           </p:cNvSpPr>
@@ -22479,7 +22786,7 @@
           </a:prstGeom>
           <a:extLst>
             <a:ext uri="{C572A759-6A51-4108-AA02-DFA0A04FC94B}">
-              <ma14:wrappingTextBoxFlag xmlns:ma14="http://schemas.microsoft.com/office/mac/drawingml/2011/main" val="0"/>
+              <ma14:wrappingTextBoxFlag xmlns:ma14="http://schemas.microsoft.com/office/mac/drawingml/2011/main" xmlns="" val="0"/>
             </a:ext>
           </a:extLst>
         </p:spPr>
@@ -22497,7 +22804,7 @@
           <a:p>
             <a:pPr algn="r"/>
             <a:fld id="{F7021451-1387-4CA6-816F-3879F97B5CBC}" type="slidenum">
-              <a:rPr b="0" lang="en-US"/>
+              <a:rPr lang="en-US" b="0"/>
               <a:t>5</a:t>
             </a:fld>
             <a:endParaRPr lang="en-US"/>
@@ -22532,9 +22839,11 @@
       <p:sp>
         <p:nvSpPr>
           <p:cNvPr id="2" name="Text 1"/>
-          <p:cNvSpPr/>
+          <p:cNvSpPr>
+            <a:spLocks noGrp="1"/>
+          </p:cNvSpPr>
           <p:nvPr>
-            <p:ph idx="101" type="body" hasCustomPrompt="1"/>
+            <p:ph type="body" idx="101" hasCustomPrompt="1"/>
           </p:nvPr>
         </p:nvSpPr>
         <p:spPr>
@@ -22552,7 +22861,7 @@
           <a:bodyPr wrap="square" lIns="0" tIns="0" rIns="0" bIns="0" rtlCol="0" anchor="ctr"/>
           <a:lstStyle/>
           <a:p>
-            <a:pPr indent="0" marL="0">
+            <a:pPr marL="0" indent="0">
               <a:buNone/>
             </a:pPr>
             <a:r>
@@ -22570,9 +22879,11 @@
       <p:sp>
         <p:nvSpPr>
           <p:cNvPr id="3" name="Text 1"/>
-          <p:cNvSpPr/>
+          <p:cNvSpPr>
+            <a:spLocks noGrp="1"/>
+          </p:cNvSpPr>
           <p:nvPr>
-            <p:ph idx="102" type="title" hasCustomPrompt="1"/>
+            <p:ph type="title" idx="102" hasCustomPrompt="1"/>
           </p:nvPr>
         </p:nvSpPr>
         <p:spPr>
@@ -22590,7 +22901,7 @@
           <a:bodyPr wrap="square" lIns="0" tIns="0" rIns="0" bIns="0" rtlCol="0" anchor="ctr"/>
           <a:lstStyle/>
           <a:p>
-            <a:pPr algn="l" indent="0" marL="0">
+            <a:pPr marL="0" indent="0" algn="l">
               <a:buNone/>
             </a:pPr>
             <a:r>
@@ -22626,16 +22937,17 @@
           <a:bodyPr wrap="square" lIns="0" tIns="0" rIns="0" bIns="0" rtlCol="0" anchor="t"/>
           <a:lstStyle/>
           <a:p>
-            <a:pPr indent="0" marL="0">
-              <a:buNone/>
-            </a:pPr>
             <a:r>
               <a:rPr lang="zh-TW" altLang="en-US" sz="1300" b="1" dirty="0">
                 <a:solidFill>
                   <a:schemeClr val="tx1"/>
                 </a:solidFill>
               </a:rPr>
-              <a:t>我們做的評論管理後台（原型實機畫面）：924 則依問題自動分類</a:t>
+              <a:t>我們做的評論管理後台（原型實機畫面）：924 則</a:t>
+            </a:r>
+            <a:r>
+              <a:rPr lang="zh-TW" altLang="en-US" sz="1300" b="1" dirty="0"/>
+              <a:t>依關鍵字規則自動分類</a:t>
             </a:r>
             <a:endParaRPr lang="zh-TW" sz="1300" dirty="0"/>
           </a:p>
@@ -22643,14 +22955,14 @@
       </p:sp>
       <p:pic>
         <p:nvPicPr>
-          <p:cNvPr id="5" name="Image 0" descr="營運後台顧客評論頁實機截圖：924 則評論、App 平均 2.1 星、問題分類長條圖">    </p:cNvPr>
+          <p:cNvPr id="5" name="Image 0" descr="營運後台顧客評論頁實機截圖：924 則評論、App 平均 2.1 星、問題分類長條圖"/>
           <p:cNvPicPr>
             <a:picLocks noChangeAspect="1"/>
           </p:cNvPicPr>
           <p:nvPr/>
         </p:nvPicPr>
         <p:blipFill>
-          <a:blip r:embed="rId1"/>
+          <a:blip r:embed="rId3"/>
           <a:stretch>
             <a:fillRect/>
           </a:stretch>
@@ -22780,7 +23092,7 @@
           <a:bodyPr wrap="square" lIns="0" tIns="0" rIns="0" bIns="0" rtlCol="0" anchor="t"/>
           <a:lstStyle/>
           <a:p>
-            <a:pPr indent="0" marL="0">
+            <a:pPr marL="0" indent="0">
               <a:buNone/>
             </a:pPr>
             <a:r>
@@ -22794,7 +23106,7 @@
             <a:endParaRPr lang="zh-TW" sz="1000" dirty="0"/>
           </a:p>
           <a:p>
-            <a:pPr indent="0" marL="0">
+            <a:pPr marL="0" indent="0">
               <a:buNone/>
             </a:pPr>
             <a:r>
@@ -22830,7 +23142,7 @@
           <a:bodyPr wrap="square" lIns="0" tIns="0" rIns="0" bIns="0" rtlCol="0" anchor="ctr"/>
           <a:lstStyle/>
           <a:p>
-            <a:pPr indent="0" marL="0">
+            <a:pPr marL="0" indent="0">
               <a:buNone/>
             </a:pPr>
             <a:r>
@@ -22874,7 +23186,7 @@
           <a:bodyPr wrap="square" lIns="0" tIns="0" rIns="0" bIns="0" rtlCol="0" anchor="t"/>
           <a:lstStyle/>
           <a:p>
-            <a:pPr indent="0" marL="0">
+            <a:pPr marL="0" indent="0">
               <a:buNone/>
             </a:pPr>
             <a:r>
@@ -22937,7 +23249,7 @@
           <a:bodyPr wrap="square" lIns="0" tIns="0" rIns="0" bIns="0" rtlCol="0" anchor="ctr"/>
           <a:lstStyle/>
           <a:p>
-            <a:pPr indent="0" marL="0">
+            <a:pPr marL="0" indent="0">
               <a:buNone/>
             </a:pPr>
             <a:r>
@@ -22973,7 +23285,7 @@
           <a:bodyPr wrap="square" lIns="0" tIns="0" rIns="0" bIns="0" rtlCol="0" anchor="ctr"/>
           <a:lstStyle/>
           <a:p>
-            <a:pPr algn="r" indent="0" marL="0">
+            <a:pPr marL="0" indent="0" algn="r">
               <a:buNone/>
             </a:pPr>
             <a:r>
@@ -23009,7 +23321,7 @@
           <a:bodyPr wrap="square" lIns="0" tIns="0" rIns="0" bIns="0" rtlCol="0" anchor="t"/>
           <a:lstStyle/>
           <a:p>
-            <a:pPr indent="0" marL="0">
+            <a:pPr marL="0" indent="0">
               <a:buNone/>
             </a:pPr>
             <a:r>
@@ -23023,7 +23335,7 @@
             <a:endParaRPr lang="zh-TW" sz="1200" dirty="0"/>
           </a:p>
           <a:p>
-            <a:pPr indent="0" marL="0">
+            <a:pPr marL="0" indent="0">
               <a:buNone/>
             </a:pPr>
             <a:r>
@@ -23086,7 +23398,7 @@
           <a:bodyPr wrap="square" lIns="0" tIns="0" rIns="0" bIns="0" rtlCol="0" anchor="ctr"/>
           <a:lstStyle/>
           <a:p>
-            <a:pPr indent="0" marL="0">
+            <a:pPr marL="0" indent="0">
               <a:buNone/>
             </a:pPr>
             <a:r>
@@ -23122,7 +23434,7 @@
           <a:bodyPr wrap="square" lIns="0" tIns="0" rIns="0" bIns="0" rtlCol="0" anchor="ctr"/>
           <a:lstStyle/>
           <a:p>
-            <a:pPr algn="r" indent="0" marL="0">
+            <a:pPr marL="0" indent="0" algn="r">
               <a:buNone/>
             </a:pPr>
             <a:r>
@@ -23158,7 +23470,7 @@
           <a:bodyPr wrap="square" lIns="0" tIns="0" rIns="0" bIns="0" rtlCol="0" anchor="t"/>
           <a:lstStyle/>
           <a:p>
-            <a:pPr indent="0" marL="0">
+            <a:pPr marL="0" indent="0">
               <a:buNone/>
             </a:pPr>
             <a:r>
@@ -23172,7 +23484,7 @@
             <a:endParaRPr lang="zh-TW" sz="1200" dirty="0"/>
           </a:p>
           <a:p>
-            <a:pPr indent="0" marL="0">
+            <a:pPr marL="0" indent="0">
               <a:buNone/>
             </a:pPr>
             <a:r>
@@ -23235,7 +23547,7 @@
           <a:bodyPr wrap="square" lIns="0" tIns="0" rIns="0" bIns="0" rtlCol="0" anchor="ctr"/>
           <a:lstStyle/>
           <a:p>
-            <a:pPr indent="0" marL="0">
+            <a:pPr marL="0" indent="0">
               <a:buNone/>
             </a:pPr>
             <a:r>
@@ -23271,7 +23583,7 @@
           <a:bodyPr wrap="square" lIns="0" tIns="0" rIns="0" bIns="0" rtlCol="0" anchor="ctr"/>
           <a:lstStyle/>
           <a:p>
-            <a:pPr algn="r" indent="0" marL="0">
+            <a:pPr marL="0" indent="0" algn="r">
               <a:buNone/>
             </a:pPr>
             <a:r>
@@ -23307,7 +23619,7 @@
           <a:bodyPr wrap="square" lIns="0" tIns="0" rIns="0" bIns="0" rtlCol="0" anchor="t"/>
           <a:lstStyle/>
           <a:p>
-            <a:pPr indent="0" marL="0">
+            <a:pPr marL="0" indent="0">
               <a:buNone/>
             </a:pPr>
             <a:r>
@@ -23321,7 +23633,7 @@
             <a:endParaRPr lang="zh-TW" sz="1200" dirty="0"/>
           </a:p>
           <a:p>
-            <a:pPr indent="0" marL="0">
+            <a:pPr marL="0" indent="0">
               <a:buNone/>
             </a:pPr>
             <a:r>
@@ -23356,7 +23668,7 @@
           </a:prstGeom>
           <a:extLst>
             <a:ext uri="{C572A759-6A51-4108-AA02-DFA0A04FC94B}">
-              <ma14:wrappingTextBoxFlag xmlns:ma14="http://schemas.microsoft.com/office/mac/drawingml/2011/main" val="0"/>
+              <ma14:wrappingTextBoxFlag xmlns:ma14="http://schemas.microsoft.com/office/mac/drawingml/2011/main" xmlns="" val="0"/>
             </a:ext>
           </a:extLst>
         </p:spPr>
@@ -23374,7 +23686,7 @@
           <a:p>
             <a:pPr algn="r"/>
             <a:fld id="{F7021451-1387-4CA6-816F-3879F97B5CBC}" type="slidenum">
-              <a:rPr b="0" lang="en-US"/>
+              <a:rPr lang="en-US" b="0"/>
               <a:t>6</a:t>
             </a:fld>
             <a:endParaRPr lang="en-US"/>
@@ -23409,9 +23721,11 @@
       <p:sp>
         <p:nvSpPr>
           <p:cNvPr id="2" name="Text 1"/>
-          <p:cNvSpPr/>
+          <p:cNvSpPr>
+            <a:spLocks noGrp="1"/>
+          </p:cNvSpPr>
           <p:nvPr>
-            <p:ph idx="101" type="body" hasCustomPrompt="1"/>
+            <p:ph type="body" idx="101" hasCustomPrompt="1"/>
           </p:nvPr>
         </p:nvSpPr>
         <p:spPr>
@@ -23429,7 +23743,7 @@
           <a:bodyPr wrap="square" lIns="0" tIns="0" rIns="0" bIns="0" rtlCol="0" anchor="ctr"/>
           <a:lstStyle/>
           <a:p>
-            <a:pPr indent="0" marL="0">
+            <a:pPr marL="0" indent="0">
               <a:buNone/>
             </a:pPr>
             <a:r>
@@ -23447,9 +23761,11 @@
       <p:sp>
         <p:nvSpPr>
           <p:cNvPr id="3" name="Text 1"/>
-          <p:cNvSpPr/>
+          <p:cNvSpPr>
+            <a:spLocks noGrp="1"/>
+          </p:cNvSpPr>
           <p:nvPr>
-            <p:ph idx="102" type="title" hasCustomPrompt="1"/>
+            <p:ph type="title" idx="102" hasCustomPrompt="1"/>
           </p:nvPr>
         </p:nvSpPr>
         <p:spPr>
@@ -23467,7 +23783,7 @@
           <a:bodyPr wrap="square" lIns="0" tIns="0" rIns="0" bIns="0" rtlCol="0" anchor="ctr"/>
           <a:lstStyle/>
           <a:p>
-            <a:pPr algn="l" indent="0" marL="0">
+            <a:pPr marL="0" indent="0" algn="l">
               <a:buNone/>
             </a:pPr>
             <a:r>
@@ -23503,7 +23819,7 @@
           <a:bodyPr wrap="square" lIns="0" tIns="0" rIns="0" bIns="0" rtlCol="0" anchor="t"/>
           <a:lstStyle/>
           <a:p>
-            <a:pPr indent="0" marL="0">
+            <a:pPr marL="0" indent="0">
               <a:buNone/>
             </a:pPr>
             <a:r>
@@ -23512,7 +23828,7 @@
                   <a:schemeClr val="accent1"/>
                 </a:solidFill>
               </a:rPr>
-              <a:t>補斷點 ① 拍照沒人檢查、③ 角度對不上</a:t>
+              <a:t>補斷點 ① 拍照沒人檢查、③ 前後對不上</a:t>
             </a:r>
             <a:endParaRPr lang="zh-TW" sz="1200" dirty="0"/>
           </a:p>
@@ -23593,7 +23909,7 @@
           <a:bodyPr wrap="square" lIns="0" tIns="0" rIns="0" bIns="0" rtlCol="0" anchor="ctr"/>
           <a:lstStyle/>
           <a:p>
-            <a:pPr indent="0" marL="0">
+            <a:pPr marL="0" indent="0">
               <a:buNone/>
             </a:pPr>
             <a:r>
@@ -23639,7 +23955,7 @@
           <a:bodyPr wrap="square" lIns="0" tIns="0" rIns="0" bIns="0" rtlCol="0" anchor="ctr"/>
           <a:lstStyle/>
           <a:p>
-            <a:pPr algn="ctr" indent="0" marL="0">
+            <a:pPr marL="0" indent="0" algn="ctr">
               <a:buNone/>
             </a:pPr>
             <a:r>
@@ -23675,7 +23991,7 @@
           <a:bodyPr wrap="square" lIns="0" tIns="0" rIns="0" bIns="0" rtlCol="0" anchor="t"/>
           <a:lstStyle/>
           <a:p>
-            <a:pPr indent="0" marL="0">
+            <a:pPr marL="0" indent="0">
               <a:buNone/>
             </a:pPr>
             <a:r>
@@ -23689,7 +24005,7 @@
             <a:endParaRPr lang="zh-TW" sz="1400" dirty="0"/>
           </a:p>
           <a:p>
-            <a:pPr indent="0" marL="0">
+            <a:pPr marL="0" indent="0">
               <a:buNone/>
             </a:pPr>
             <a:r>
@@ -23727,7 +24043,7 @@
           <a:bodyPr wrap="square" lIns="0" tIns="0" rIns="0" bIns="0" rtlCol="0" anchor="ctr"/>
           <a:lstStyle/>
           <a:p>
-            <a:pPr algn="ctr" indent="0" marL="0">
+            <a:pPr marL="0" indent="0" algn="ctr">
               <a:buNone/>
             </a:pPr>
             <a:r>
@@ -23763,7 +24079,7 @@
           <a:bodyPr wrap="square" lIns="0" tIns="0" rIns="0" bIns="0" rtlCol="0" anchor="t"/>
           <a:lstStyle/>
           <a:p>
-            <a:pPr indent="0" marL="0">
+            <a:pPr marL="0" indent="0">
               <a:buNone/>
             </a:pPr>
             <a:r>
@@ -23777,7 +24093,7 @@
             <a:endParaRPr lang="zh-TW" sz="1400" dirty="0"/>
           </a:p>
           <a:p>
-            <a:pPr indent="0" marL="0">
+            <a:pPr marL="0" indent="0">
               <a:buNone/>
             </a:pPr>
             <a:r>
@@ -23815,7 +24131,7 @@
           <a:bodyPr wrap="square" lIns="0" tIns="0" rIns="0" bIns="0" rtlCol="0" anchor="ctr"/>
           <a:lstStyle/>
           <a:p>
-            <a:pPr algn="ctr" indent="0" marL="0">
+            <a:pPr marL="0" indent="0" algn="ctr">
               <a:buNone/>
             </a:pPr>
             <a:r>
@@ -23851,7 +24167,7 @@
           <a:bodyPr wrap="square" lIns="0" tIns="0" rIns="0" bIns="0" rtlCol="0" anchor="t"/>
           <a:lstStyle/>
           <a:p>
-            <a:pPr indent="0" marL="0">
+            <a:pPr marL="0" indent="0">
               <a:buNone/>
             </a:pPr>
             <a:r>
@@ -23865,16 +24181,29 @@
             <a:endParaRPr lang="zh-TW" sz="1400" dirty="0"/>
           </a:p>
           <a:p>
-            <a:pPr indent="0" marL="0">
-              <a:buNone/>
-            </a:pPr>
             <a:r>
               <a:rPr lang="zh-TW" altLang="en-US" sz="1250" dirty="0">
                 <a:solidFill>
                   <a:schemeClr val="tx2"/>
                 </a:solidFill>
               </a:rPr>
-              <a:t>站錯、太遠太近、太暗都提醒</a:t>
+              <a:t>每 </a:t>
+            </a:r>
+            <a:r>
+              <a:rPr lang="en-US" altLang="zh-TW" sz="1250" dirty="0">
+                <a:solidFill>
+                  <a:schemeClr val="tx2"/>
+                </a:solidFill>
+              </a:rPr>
+              <a:t>0.5 </a:t>
+            </a:r>
+            <a:r>
+              <a:rPr lang="zh-TW" altLang="en-US" sz="1250" dirty="0">
+                <a:solidFill>
+                  <a:schemeClr val="tx2"/>
+                </a:solidFill>
+              </a:rPr>
+              <a:t>秒提醒一次：站錯角度、太暗</a:t>
             </a:r>
             <a:endParaRPr lang="zh-TW" sz="1400" dirty="0"/>
           </a:p>
@@ -23903,7 +24232,7 @@
           <a:bodyPr wrap="square" lIns="0" tIns="0" rIns="0" bIns="0" rtlCol="0" anchor="ctr"/>
           <a:lstStyle/>
           <a:p>
-            <a:pPr algn="ctr" indent="0" marL="0">
+            <a:pPr marL="0" indent="0" algn="ctr">
               <a:buNone/>
             </a:pPr>
             <a:r>
@@ -23926,7 +24255,7 @@
         </p:nvSpPr>
         <p:spPr>
           <a:xfrm>
-            <a:off x="1298448" y="4700016"/>
+            <a:off x="1312164" y="4645152"/>
             <a:ext cx="2606954" cy="658368"/>
           </a:xfrm>
           <a:prstGeom prst="rect">
@@ -23939,7 +24268,7 @@
           <a:bodyPr wrap="square" lIns="0" tIns="0" rIns="0" bIns="0" rtlCol="0" anchor="t"/>
           <a:lstStyle/>
           <a:p>
-            <a:pPr indent="0" marL="0">
+            <a:pPr marL="0" indent="0">
               <a:buNone/>
             </a:pPr>
             <a:r>
@@ -23953,16 +24282,29 @@
             <a:endParaRPr lang="zh-TW" sz="1400" dirty="0"/>
           </a:p>
           <a:p>
-            <a:pPr indent="0" marL="0">
-              <a:buNone/>
-            </a:pPr>
             <a:r>
               <a:rPr lang="zh-TW" altLang="en-US" sz="1250" dirty="0">
                 <a:solidFill>
                   <a:schemeClr val="tx2"/>
                 </a:solidFill>
               </a:rPr>
-              <a:t>按下還車就停止計費</a:t>
+              <a:t>按下還車就停止計費，</a:t>
+            </a:r>
+            <a:r>
+              <a:rPr lang="en-US" altLang="zh-TW" sz="1250" dirty="0">
+                <a:solidFill>
+                  <a:schemeClr val="tx2"/>
+                </a:solidFill>
+              </a:rPr>
+              <a:t>5 </a:t>
+            </a:r>
+            <a:r>
+              <a:rPr lang="zh-TW" altLang="en-US" sz="1250" dirty="0">
+                <a:solidFill>
+                  <a:schemeClr val="tx2"/>
+                </a:solidFill>
+              </a:rPr>
+              <a:t>分鐘內未鎖門則還車取消</a:t>
             </a:r>
             <a:endParaRPr lang="zh-TW" sz="1400" dirty="0"/>
           </a:p>
@@ -23989,16 +24331,13 @@
           <a:bodyPr wrap="square" lIns="0" tIns="0" rIns="0" bIns="0" rtlCol="0" anchor="t"/>
           <a:lstStyle/>
           <a:p>
-            <a:pPr indent="0" marL="0">
-              <a:buNone/>
-            </a:pPr>
             <a:r>
               <a:rPr lang="zh-TW" altLang="en-US" sz="1200" b="1" dirty="0">
                 <a:solidFill>
                   <a:schemeClr val="accent1"/>
                 </a:solidFill>
               </a:rPr>
-              <a:t>補斷點 ② 人工看不完、③ 前後難比對</a:t>
+              <a:t>補斷點 ② 人工看不完、③ 前後對不上</a:t>
             </a:r>
             <a:endParaRPr lang="zh-TW" sz="1200" dirty="0"/>
           </a:p>
@@ -24079,7 +24418,7 @@
           <a:bodyPr wrap="square" lIns="0" tIns="0" rIns="0" bIns="0" rtlCol="0" anchor="ctr"/>
           <a:lstStyle/>
           <a:p>
-            <a:pPr indent="0" marL="0">
+            <a:pPr marL="0" indent="0">
               <a:buNone/>
             </a:pPr>
             <a:r>
@@ -24125,7 +24464,7 @@
           <a:bodyPr wrap="square" lIns="0" tIns="0" rIns="0" bIns="0" rtlCol="0" anchor="ctr"/>
           <a:lstStyle/>
           <a:p>
-            <a:pPr algn="ctr" indent="0" marL="0">
+            <a:pPr marL="0" indent="0" algn="ctr">
               <a:buNone/>
             </a:pPr>
             <a:r>
@@ -24161,7 +24500,7 @@
           <a:bodyPr wrap="square" lIns="0" tIns="0" rIns="0" bIns="0" rtlCol="0" anchor="t"/>
           <a:lstStyle/>
           <a:p>
-            <a:pPr indent="0" marL="0">
+            <a:pPr marL="0" indent="0">
               <a:buNone/>
             </a:pPr>
             <a:r>
@@ -24175,7 +24514,7 @@
             <a:endParaRPr lang="zh-TW" sz="1400" dirty="0"/>
           </a:p>
           <a:p>
-            <a:pPr indent="0" marL="0">
+            <a:pPr marL="0" indent="0">
               <a:buNone/>
             </a:pPr>
             <a:r>
@@ -24213,7 +24552,7 @@
           <a:bodyPr wrap="square" lIns="0" tIns="0" rIns="0" bIns="0" rtlCol="0" anchor="ctr"/>
           <a:lstStyle/>
           <a:p>
-            <a:pPr algn="ctr" indent="0" marL="0">
+            <a:pPr marL="0" indent="0" algn="ctr">
               <a:buNone/>
             </a:pPr>
             <a:r>
@@ -24249,7 +24588,7 @@
           <a:bodyPr wrap="square" lIns="0" tIns="0" rIns="0" bIns="0" rtlCol="0" anchor="t"/>
           <a:lstStyle/>
           <a:p>
-            <a:pPr indent="0" marL="0">
+            <a:pPr marL="0" indent="0">
               <a:buNone/>
             </a:pPr>
             <a:r>
@@ -24263,7 +24602,7 @@
             <a:endParaRPr lang="zh-TW" sz="1400" dirty="0"/>
           </a:p>
           <a:p>
-            <a:pPr indent="0" marL="0">
+            <a:pPr marL="0" indent="0">
               <a:buNone/>
             </a:pPr>
             <a:r>
@@ -24286,8 +24625,8 @@
         </p:nvSpPr>
         <p:spPr>
           <a:xfrm>
-            <a:off x="5084978" y="4069080"/>
-            <a:ext cx="2606954" cy="566928"/>
+            <a:off x="4563770" y="3892179"/>
+            <a:ext cx="3292754" cy="244074"/>
           </a:xfrm>
           <a:prstGeom prst="rect">
             <a:avLst/>
@@ -24299,30 +24638,12 @@
           <a:bodyPr wrap="square" lIns="0" tIns="0" rIns="0" bIns="0" rtlCol="0" anchor="t"/>
           <a:lstStyle/>
           <a:p>
-            <a:pPr indent="0" marL="0">
-              <a:buNone/>
-            </a:pPr>
-            <a:r>
-              <a:rPr lang="zh-TW" altLang="en-US" sz="1250" i="1" dirty="0">
-                <a:solidFill>
-                  <a:schemeClr val="accent2"/>
-                </a:solidFill>
-              </a:rPr>
-              <a:t>照片送出後自動檢查，</a:t>
-            </a:r>
-            <a:endParaRPr lang="zh-TW" sz="1250" dirty="0"/>
-          </a:p>
-          <a:p>
-            <a:pPr indent="0" marL="0">
-              <a:buNone/>
-            </a:pPr>
-            <a:r>
-              <a:rPr lang="zh-TW" altLang="en-US" sz="1250" i="1" dirty="0">
-                <a:solidFill>
-                  <a:schemeClr val="accent2"/>
-                </a:solidFill>
-              </a:rPr>
-              <a:t>用戶不必在現場等結果</a:t>
+            <a:pPr marL="0" indent="0">
+              <a:buNone/>
+            </a:pPr>
+            <a:r>
+              <a:rPr lang="zh-TW" altLang="en-US" sz="1250" dirty="0"/>
+              <a:t>照片送出後自動檢查，用戶不必在現場等結果</a:t>
             </a:r>
             <a:endParaRPr lang="zh-TW" sz="1250" dirty="0"/>
           </a:p>
@@ -24349,7 +24670,7 @@
           <a:bodyPr wrap="square" lIns="0" tIns="0" rIns="0" bIns="0" rtlCol="0" anchor="t"/>
           <a:lstStyle/>
           <a:p>
-            <a:pPr indent="0" marL="0">
+            <a:pPr marL="0" indent="0">
               <a:buNone/>
             </a:pPr>
             <a:r>
@@ -24439,7 +24760,7 @@
           <a:bodyPr wrap="square" lIns="0" tIns="0" rIns="0" bIns="0" rtlCol="0" anchor="ctr"/>
           <a:lstStyle/>
           <a:p>
-            <a:pPr indent="0" marL="0">
+            <a:pPr marL="0" indent="0">
               <a:buNone/>
             </a:pPr>
             <a:r>
@@ -24485,7 +24806,7 @@
           <a:bodyPr wrap="square" lIns="0" tIns="0" rIns="0" bIns="0" rtlCol="0" anchor="ctr"/>
           <a:lstStyle/>
           <a:p>
-            <a:pPr algn="ctr" indent="0" marL="0">
+            <a:pPr marL="0" indent="0" algn="ctr">
               <a:buNone/>
             </a:pPr>
             <a:r>
@@ -24521,7 +24842,7 @@
           <a:bodyPr wrap="square" lIns="0" tIns="0" rIns="0" bIns="0" rtlCol="0" anchor="t"/>
           <a:lstStyle/>
           <a:p>
-            <a:pPr indent="0" marL="0">
+            <a:pPr marL="0" indent="0">
               <a:buNone/>
             </a:pPr>
             <a:r>
@@ -24535,7 +24856,7 @@
             <a:endParaRPr lang="zh-TW" sz="1400" dirty="0"/>
           </a:p>
           <a:p>
-            <a:pPr indent="0" marL="0">
+            <a:pPr marL="0" indent="0">
               <a:buNone/>
             </a:pPr>
             <a:r>
@@ -24573,7 +24894,7 @@
           <a:bodyPr wrap="square" lIns="0" tIns="0" rIns="0" bIns="0" rtlCol="0" anchor="ctr"/>
           <a:lstStyle/>
           <a:p>
-            <a:pPr algn="ctr" indent="0" marL="0">
+            <a:pPr marL="0" indent="0" algn="ctr">
               <a:buNone/>
             </a:pPr>
             <a:r>
@@ -24609,7 +24930,7 @@
           <a:bodyPr wrap="square" lIns="0" tIns="0" rIns="0" bIns="0" rtlCol="0" anchor="t"/>
           <a:lstStyle/>
           <a:p>
-            <a:pPr indent="0" marL="0">
+            <a:pPr marL="0" indent="0">
               <a:buNone/>
             </a:pPr>
             <a:r>
@@ -24623,7 +24944,7 @@
             <a:endParaRPr lang="zh-TW" sz="1400" dirty="0"/>
           </a:p>
           <a:p>
-            <a:pPr indent="0" marL="0">
+            <a:pPr marL="0" indent="0">
               <a:buNone/>
             </a:pPr>
             <a:r>
@@ -24661,7 +24982,7 @@
           <a:bodyPr wrap="square" lIns="0" tIns="0" rIns="0" bIns="0" rtlCol="0" anchor="ctr"/>
           <a:lstStyle/>
           <a:p>
-            <a:pPr algn="ctr" indent="0" marL="0">
+            <a:pPr marL="0" indent="0" algn="ctr">
               <a:buNone/>
             </a:pPr>
             <a:r>
@@ -24697,7 +25018,7 @@
           <a:bodyPr wrap="square" lIns="0" tIns="0" rIns="0" bIns="0" rtlCol="0" anchor="t"/>
           <a:lstStyle/>
           <a:p>
-            <a:pPr indent="0" marL="0">
+            <a:pPr marL="0" indent="0">
               <a:buNone/>
             </a:pPr>
             <a:r>
@@ -24711,7 +25032,7 @@
             <a:endParaRPr lang="zh-TW" sz="1400" dirty="0"/>
           </a:p>
           <a:p>
-            <a:pPr indent="0" marL="0">
+            <a:pPr marL="0" indent="0">
               <a:buNone/>
             </a:pPr>
             <a:r>
@@ -24774,7 +25095,7 @@
           <a:bodyPr wrap="square" lIns="0" tIns="0" rIns="0" bIns="0" rtlCol="0" anchor="ctr"/>
           <a:lstStyle/>
           <a:p>
-            <a:pPr indent="0" marL="0">
+            <a:pPr marL="0" indent="0">
               <a:buNone/>
             </a:pPr>
             <a:r>
@@ -24799,7 +25120,7 @@
       </p:sp>
       <p:sp>
         <p:nvSpPr>
-          <p:cNvPr id="25" name="Slide Number Placeholder 0"/>
+          <p:cNvPr id="37" name="Slide Number Placeholder 0"/>
           <p:cNvSpPr>
             <a:spLocks noGrp="1"/>
           </p:cNvSpPr>
@@ -24817,7 +25138,7 @@
           </a:prstGeom>
           <a:extLst>
             <a:ext uri="{C572A759-6A51-4108-AA02-DFA0A04FC94B}">
-              <ma14:wrappingTextBoxFlag xmlns:ma14="http://schemas.microsoft.com/office/mac/drawingml/2011/main" val="0"/>
+              <ma14:wrappingTextBoxFlag xmlns:ma14="http://schemas.microsoft.com/office/mac/drawingml/2011/main" xmlns="" val="0"/>
             </a:ext>
           </a:extLst>
         </p:spPr>
@@ -24835,7 +25156,7 @@
           <a:p>
             <a:pPr algn="r"/>
             <a:fld id="{F7021451-1387-4CA6-816F-3879F97B5CBC}" type="slidenum">
-              <a:rPr b="0" lang="en-US"/>
+              <a:rPr lang="en-US" b="0"/>
               <a:t>7</a:t>
             </a:fld>
             <a:endParaRPr lang="en-US"/>
@@ -24870,9 +25191,11 @@
       <p:sp>
         <p:nvSpPr>
           <p:cNvPr id="2" name="Text 1"/>
-          <p:cNvSpPr/>
+          <p:cNvSpPr>
+            <a:spLocks noGrp="1"/>
+          </p:cNvSpPr>
           <p:nvPr>
-            <p:ph idx="101" type="body" hasCustomPrompt="1"/>
+            <p:ph type="body" idx="101" hasCustomPrompt="1"/>
           </p:nvPr>
         </p:nvSpPr>
         <p:spPr>
@@ -24890,7 +25213,7 @@
           <a:bodyPr wrap="square" lIns="0" tIns="0" rIns="0" bIns="0" rtlCol="0" anchor="ctr"/>
           <a:lstStyle/>
           <a:p>
-            <a:pPr indent="0" marL="0">
+            <a:pPr marL="0" indent="0">
               <a:buNone/>
             </a:pPr>
             <a:r>
@@ -24908,9 +25231,11 @@
       <p:sp>
         <p:nvSpPr>
           <p:cNvPr id="3" name="Text 1"/>
-          <p:cNvSpPr/>
+          <p:cNvSpPr>
+            <a:spLocks noGrp="1"/>
+          </p:cNvSpPr>
           <p:nvPr>
-            <p:ph idx="102" type="title" hasCustomPrompt="1"/>
+            <p:ph type="title" idx="102" hasCustomPrompt="1"/>
           </p:nvPr>
         </p:nvSpPr>
         <p:spPr>
@@ -24928,7 +25253,7 @@
           <a:bodyPr wrap="square" lIns="0" tIns="0" rIns="0" bIns="0" rtlCol="0" anchor="ctr"/>
           <a:lstStyle/>
           <a:p>
-            <a:pPr algn="l" indent="0" marL="0">
+            <a:pPr marL="0" indent="0" algn="l">
               <a:buNone/>
             </a:pPr>
             <a:r>
@@ -24966,7 +25291,7 @@
           <a:bodyPr wrap="square" lIns="0" tIns="0" rIns="0" bIns="0" rtlCol="0" anchor="ctr"/>
           <a:lstStyle/>
           <a:p>
-            <a:pPr algn="ctr" indent="0" marL="0">
+            <a:pPr marL="0" indent="0" algn="ctr">
               <a:buNone/>
             </a:pPr>
             <a:r>
@@ -25002,7 +25327,7 @@
           <a:bodyPr wrap="square" lIns="0" tIns="0" rIns="0" bIns="0" rtlCol="0" anchor="ctr"/>
           <a:lstStyle/>
           <a:p>
-            <a:pPr indent="0" marL="0">
+            <a:pPr marL="0" indent="0">
               <a:buNone/>
             </a:pPr>
             <a:r>
@@ -25019,465 +25344,7 @@
       </p:sp>
       <p:pic>
         <p:nvPicPr>
-          <p:cNvPr id="6" name="Image 0" descr="原型實機截圖：取車拍照頁，提示這台車已記錄 1 處損傷">    </p:cNvPr>
-          <p:cNvPicPr>
-            <a:picLocks noChangeAspect="1"/>
-          </p:cNvPicPr>
-          <p:nvPr/>
-        </p:nvPicPr>
-        <p:blipFill>
-          <a:blip r:embed="rId1"/>
-          <a:stretch>
-            <a:fillRect/>
-          </a:stretch>
-        </p:blipFill>
-        <p:spPr>
-          <a:xfrm>
-            <a:off x="548640" y="1874520"/>
-            <a:ext cx="1828800" cy="3500184"/>
-          </a:xfrm>
-          <a:prstGeom prst="rect">
-            <a:avLst/>
-          </a:prstGeom>
-        </p:spPr>
-      </p:pic>
-      <p:sp>
-        <p:nvSpPr>
-          <p:cNvPr id="7" name="Shape 4"/>
-          <p:cNvSpPr/>
-          <p:nvPr/>
-        </p:nvSpPr>
-        <p:spPr>
-          <a:xfrm>
-            <a:off x="548640" y="1874520"/>
-            <a:ext cx="1828800" cy="3500184"/>
-          </a:xfrm>
-          <a:prstGeom prst="rect">
-            <a:avLst/>
-          </a:prstGeom>
-          <a:ln w="9525">
-            <a:solidFill>
-              <a:srgbClr val="C9C9C9"/>
-            </a:solidFill>
-            <a:prstDash val="solid"/>
-          </a:ln>
-        </p:spPr>
-      </p:sp>
-      <p:sp>
-        <p:nvSpPr>
-          <p:cNvPr id="8" name="Text 5"/>
-          <p:cNvSpPr txBox="1"/>
-          <p:nvPr/>
-        </p:nvSpPr>
-        <p:spPr>
-          <a:xfrm>
-            <a:off x="548640" y="5466144"/>
-            <a:ext cx="1965960" cy="411480"/>
-          </a:xfrm>
-          <a:prstGeom prst="rect">
-            <a:avLst/>
-          </a:prstGeom>
-          <a:noFill/>
-          <a:ln/>
-        </p:spPr>
-        <p:txBody>
-          <a:bodyPr wrap="square" lIns="0" tIns="0" rIns="0" bIns="0" rtlCol="0" anchor="t"/>
-          <a:lstStyle/>
-          <a:p>
-            <a:pPr indent="0" marL="0">
-              <a:buNone/>
-            </a:pPr>
-            <a:r>
-              <a:rPr lang="zh-TW" altLang="en-US" sz="1150" dirty="0">
-                <a:solidFill>
-                  <a:schemeClr val="tx2"/>
-                </a:solidFill>
-              </a:rPr>
-              <a:t>「這台車已記錄 1 處損傷」</a:t>
-            </a:r>
-            <a:endParaRPr lang="zh-TW" sz="1150" dirty="0"/>
-          </a:p>
-          <a:p>
-            <a:pPr indent="0" marL="0">
-              <a:buNone/>
-            </a:pPr>
-            <a:r>
-              <a:rPr lang="zh-TW" altLang="en-US" sz="1150" dirty="0">
-                <a:solidFill>
-                  <a:schemeClr val="tx2"/>
-                </a:solidFill>
-              </a:rPr>
-              <a:t>提醒用戶拍下來</a:t>
-            </a:r>
-            <a:endParaRPr lang="zh-TW" sz="1150" dirty="0"/>
-          </a:p>
-        </p:txBody>
-      </p:sp>
-      <p:sp>
-        <p:nvSpPr>
-          <p:cNvPr id="9" name="Text 6"/>
-          <p:cNvSpPr txBox="1"/>
-          <p:nvPr/>
-        </p:nvSpPr>
-        <p:spPr>
-          <a:xfrm>
-            <a:off x="2377440" y="3396012"/>
-            <a:ext cx="487604" cy="457200"/>
-          </a:xfrm>
-          <a:prstGeom prst="rect">
-            <a:avLst/>
-          </a:prstGeom>
-          <a:noFill/>
-          <a:ln/>
-        </p:spPr>
-        <p:txBody>
-          <a:bodyPr wrap="square" lIns="0" tIns="0" rIns="0" bIns="0" rtlCol="0" anchor="ctr"/>
-          <a:lstStyle/>
-          <a:p>
-            <a:pPr algn="ctr" indent="0" marL="0">
-              <a:buNone/>
-            </a:pPr>
-            <a:r>
-              <a:rPr lang="zh-TW" altLang="en-US" sz="2200" b="1" dirty="0">
-                <a:solidFill>
-                  <a:schemeClr val="accent1"/>
-                </a:solidFill>
-              </a:rPr>
-              <a:t>›</a:t>
-            </a:r>
-            <a:endParaRPr lang="zh-TW" sz="2200" dirty="0"/>
-          </a:p>
-        </p:txBody>
-      </p:sp>
-      <p:sp>
-        <p:nvSpPr>
-          <p:cNvPr id="10" name="Text 7"/>
-          <p:cNvSpPr txBox="1"/>
-          <p:nvPr/>
-        </p:nvSpPr>
-        <p:spPr>
-          <a:xfrm>
-            <a:off x="2865044" y="1463040"/>
-            <a:ext cx="292608" cy="292608"/>
-          </a:xfrm>
-          <a:prstGeom prst="ellipse">
-            <a:avLst/>
-          </a:prstGeom>
-          <a:solidFill>
-            <a:schemeClr val="accent1"/>
-          </a:solidFill>
-          <a:ln/>
-        </p:spPr>
-        <p:txBody>
-          <a:bodyPr wrap="square" lIns="0" tIns="0" rIns="0" bIns="0" rtlCol="0" anchor="ctr"/>
-          <a:lstStyle/>
-          <a:p>
-            <a:pPr algn="ctr" indent="0" marL="0">
-              <a:buNone/>
-            </a:pPr>
-            <a:r>
-              <a:rPr lang="zh-TW" altLang="en-US" sz="1000" b="1" dirty="0">
-                <a:solidFill>
-                  <a:schemeClr val="bg1"/>
-                </a:solidFill>
-              </a:rPr>
-              <a:t>2</a:t>
-            </a:r>
-            <a:endParaRPr lang="zh-TW" sz="1000" dirty="0"/>
-          </a:p>
-        </p:txBody>
-      </p:sp>
-      <p:sp>
-        <p:nvSpPr>
-          <p:cNvPr id="11" name="Text 8"/>
-          <p:cNvSpPr txBox="1"/>
-          <p:nvPr/>
-        </p:nvSpPr>
-        <p:spPr>
-          <a:xfrm>
-            <a:off x="3212516" y="1463040"/>
-            <a:ext cx="292608" cy="292608"/>
-          </a:xfrm>
-          <a:prstGeom prst="ellipse">
-            <a:avLst/>
-          </a:prstGeom>
-          <a:solidFill>
-            <a:schemeClr val="accent1"/>
-          </a:solidFill>
-          <a:ln/>
-        </p:spPr>
-        <p:txBody>
-          <a:bodyPr wrap="square" lIns="0" tIns="0" rIns="0" bIns="0" rtlCol="0" anchor="ctr"/>
-          <a:lstStyle/>
-          <a:p>
-            <a:pPr algn="ctr" indent="0" marL="0">
-              <a:buNone/>
-            </a:pPr>
-            <a:r>
-              <a:rPr lang="zh-TW" altLang="en-US" sz="1000" b="1" dirty="0">
-                <a:solidFill>
-                  <a:schemeClr val="bg1"/>
-                </a:solidFill>
-              </a:rPr>
-              <a:t>3</a:t>
-            </a:r>
-            <a:endParaRPr lang="zh-TW" sz="1000" dirty="0"/>
-          </a:p>
-        </p:txBody>
-      </p:sp>
-      <p:sp>
-        <p:nvSpPr>
-          <p:cNvPr id="12" name="Text 9"/>
-          <p:cNvSpPr txBox="1"/>
-          <p:nvPr/>
-        </p:nvSpPr>
-        <p:spPr>
-          <a:xfrm>
-            <a:off x="3596564" y="1435608"/>
-            <a:ext cx="1133856" cy="347472"/>
-          </a:xfrm>
-          <a:prstGeom prst="rect">
-            <a:avLst/>
-          </a:prstGeom>
-          <a:noFill/>
-          <a:ln/>
-        </p:spPr>
-        <p:txBody>
-          <a:bodyPr wrap="square" lIns="0" tIns="0" rIns="0" bIns="0" rtlCol="0" anchor="ctr"/>
-          <a:lstStyle/>
-          <a:p>
-            <a:pPr indent="0" marL="0">
-              <a:buNone/>
-            </a:pPr>
-            <a:r>
-              <a:rPr lang="zh-TW" altLang="en-US" sz="1350" b="1" dirty="0">
-                <a:solidFill>
-                  <a:schemeClr val="tx1"/>
-                </a:solidFill>
-              </a:rPr>
-              <a:t>疊影對齊</a:t>
-            </a:r>
-            <a:endParaRPr lang="zh-TW" sz="1350" dirty="0"/>
-          </a:p>
-        </p:txBody>
-      </p:sp>
-      <p:pic>
-        <p:nvPicPr>
-          <p:cNvPr id="13" name="Image 1" descr="說明影片畫面：相機疊著上一次同角度照片與車身輪廓虛線，車牌已模糊">    </p:cNvPr>
-          <p:cNvPicPr>
-            <a:picLocks noChangeAspect="1"/>
-          </p:cNvPicPr>
-          <p:nvPr/>
-        </p:nvPicPr>
-        <p:blipFill>
-          <a:blip r:embed="rId2"/>
-          <a:stretch>
-            <a:fillRect/>
-          </a:stretch>
-        </p:blipFill>
-        <p:spPr>
-          <a:xfrm>
-            <a:off x="2865044" y="1874520"/>
-            <a:ext cx="1828800" cy="3500184"/>
-          </a:xfrm>
-          <a:prstGeom prst="rect">
-            <a:avLst/>
-          </a:prstGeom>
-        </p:spPr>
-      </p:pic>
-      <p:sp>
-        <p:nvSpPr>
-          <p:cNvPr id="14" name="Shape 10"/>
-          <p:cNvSpPr/>
-          <p:nvPr/>
-        </p:nvSpPr>
-        <p:spPr>
-          <a:xfrm>
-            <a:off x="2865044" y="1874520"/>
-            <a:ext cx="1828800" cy="3500184"/>
-          </a:xfrm>
-          <a:prstGeom prst="rect">
-            <a:avLst/>
-          </a:prstGeom>
-          <a:ln w="9525">
-            <a:solidFill>
-              <a:srgbClr val="C9C9C9"/>
-            </a:solidFill>
-            <a:prstDash val="solid"/>
-          </a:ln>
-        </p:spPr>
-      </p:sp>
-      <p:sp>
-        <p:nvSpPr>
-          <p:cNvPr id="15" name="Text 11"/>
-          <p:cNvSpPr txBox="1"/>
-          <p:nvPr/>
-        </p:nvSpPr>
-        <p:spPr>
-          <a:xfrm>
-            <a:off x="2865044" y="5466144"/>
-            <a:ext cx="1965960" cy="411480"/>
-          </a:xfrm>
-          <a:prstGeom prst="rect">
-            <a:avLst/>
-          </a:prstGeom>
-          <a:noFill/>
-          <a:ln/>
-        </p:spPr>
-        <p:txBody>
-          <a:bodyPr wrap="square" lIns="0" tIns="0" rIns="0" bIns="0" rtlCol="0" anchor="t"/>
-          <a:lstStyle/>
-          <a:p>
-            <a:pPr indent="0" marL="0">
-              <a:buNone/>
-            </a:pPr>
-            <a:r>
-              <a:rPr lang="zh-TW" altLang="en-US" sz="1150" b="1" dirty="0">
-                <a:solidFill>
-                  <a:schemeClr val="accent1"/>
-                </a:solidFill>
-              </a:rPr>
-              <a:t>影片畫面・</a:t>
-            </a:r>
-            <a:r>
-              <a:rPr lang="zh-TW" altLang="en-US" sz="1150" dirty="0">
-                <a:solidFill>
-                  <a:schemeClr val="tx2"/>
-                </a:solidFill>
-              </a:rPr>
-              <a:t>疊上次照片</a:t>
-            </a:r>
-            <a:endParaRPr lang="zh-TW" sz="1150" dirty="0"/>
-          </a:p>
-          <a:p>
-            <a:pPr indent="0" marL="0">
-              <a:buNone/>
-            </a:pPr>
-            <a:r>
-              <a:rPr lang="zh-TW" altLang="en-US" sz="1150" dirty="0">
-                <a:solidFill>
-                  <a:schemeClr val="tx2"/>
-                </a:solidFill>
-              </a:rPr>
-              <a:t>與輪廓，不合格當場重拍</a:t>
-            </a:r>
-            <a:endParaRPr lang="zh-TW" sz="1150" dirty="0"/>
-          </a:p>
-        </p:txBody>
-      </p:sp>
-      <p:sp>
-        <p:nvSpPr>
-          <p:cNvPr id="16" name="Text 12"/>
-          <p:cNvSpPr txBox="1"/>
-          <p:nvPr/>
-        </p:nvSpPr>
-        <p:spPr>
-          <a:xfrm>
-            <a:off x="4693844" y="3396012"/>
-            <a:ext cx="487604" cy="457200"/>
-          </a:xfrm>
-          <a:prstGeom prst="rect">
-            <a:avLst/>
-          </a:prstGeom>
-          <a:noFill/>
-          <a:ln/>
-        </p:spPr>
-        <p:txBody>
-          <a:bodyPr wrap="square" lIns="0" tIns="0" rIns="0" bIns="0" rtlCol="0" anchor="ctr"/>
-          <a:lstStyle/>
-          <a:p>
-            <a:pPr algn="ctr" indent="0" marL="0">
-              <a:buNone/>
-            </a:pPr>
-            <a:r>
-              <a:rPr lang="zh-TW" altLang="en-US" sz="2200" b="1" dirty="0">
-                <a:solidFill>
-                  <a:schemeClr val="accent1"/>
-                </a:solidFill>
-              </a:rPr>
-              <a:t>›</a:t>
-            </a:r>
-            <a:endParaRPr lang="zh-TW" sz="2200" dirty="0"/>
-          </a:p>
-        </p:txBody>
-      </p:sp>
-      <p:sp>
-        <p:nvSpPr>
-          <p:cNvPr id="17" name="Text 13"/>
-          <p:cNvSpPr txBox="1"/>
-          <p:nvPr/>
-        </p:nvSpPr>
-        <p:spPr>
-          <a:xfrm>
-            <a:off x="5181448" y="1463040"/>
-            <a:ext cx="292608" cy="292608"/>
-          </a:xfrm>
-          <a:prstGeom prst="ellipse">
-            <a:avLst/>
-          </a:prstGeom>
-          <a:solidFill>
-            <a:schemeClr val="accent1"/>
-          </a:solidFill>
-          <a:ln/>
-        </p:spPr>
-        <p:txBody>
-          <a:bodyPr wrap="square" lIns="0" tIns="0" rIns="0" bIns="0" rtlCol="0" anchor="ctr"/>
-          <a:lstStyle/>
-          <a:p>
-            <a:pPr algn="ctr" indent="0" marL="0">
-              <a:buNone/>
-            </a:pPr>
-            <a:r>
-              <a:rPr lang="zh-TW" altLang="en-US" sz="1000" b="1" dirty="0">
-                <a:solidFill>
-                  <a:schemeClr val="bg1"/>
-                </a:solidFill>
-              </a:rPr>
-              <a:t>4</a:t>
-            </a:r>
-            <a:endParaRPr lang="zh-TW" sz="1000" dirty="0"/>
-          </a:p>
-        </p:txBody>
-      </p:sp>
-      <p:sp>
-        <p:nvSpPr>
-          <p:cNvPr id="18" name="Text 14"/>
-          <p:cNvSpPr txBox="1"/>
-          <p:nvPr/>
-        </p:nvSpPr>
-        <p:spPr>
-          <a:xfrm>
-            <a:off x="5565496" y="1435608"/>
-            <a:ext cx="1481328" cy="347472"/>
-          </a:xfrm>
-          <a:prstGeom prst="rect">
-            <a:avLst/>
-          </a:prstGeom>
-          <a:noFill/>
-          <a:ln/>
-        </p:spPr>
-        <p:txBody>
-          <a:bodyPr wrap="square" lIns="0" tIns="0" rIns="0" bIns="0" rtlCol="0" anchor="ctr"/>
-          <a:lstStyle/>
-          <a:p>
-            <a:pPr indent="0" marL="0">
-              <a:buNone/>
-            </a:pPr>
-            <a:r>
-              <a:rPr lang="zh-TW" altLang="en-US" sz="1350" b="1" dirty="0">
-                <a:solidFill>
-                  <a:schemeClr val="tx1"/>
-                </a:solidFill>
-              </a:rPr>
-              <a:t>先拍車內再鎖門</a:t>
-            </a:r>
-            <a:endParaRPr lang="zh-TW" sz="1350" dirty="0"/>
-          </a:p>
-        </p:txBody>
-      </p:sp>
-      <p:pic>
-        <p:nvPicPr>
-          <p:cNvPr id="19" name="Image 2" descr="說明影片畫面：還車先拍車內，倒數計時，拍完確認鎖門">    </p:cNvPr>
+          <p:cNvPr id="6" name="Image 0" descr="原型實機截圖：取車拍照頁，提示這台車已記錄 1 處損傷"/>
           <p:cNvPicPr>
             <a:picLocks noChangeAspect="1"/>
           </p:cNvPicPr>
@@ -25491,7 +25358,7 @@
         </p:blipFill>
         <p:spPr>
           <a:xfrm>
-            <a:off x="5181448" y="1874520"/>
+            <a:off x="548640" y="1874520"/>
             <a:ext cx="1828800" cy="3500184"/>
           </a:xfrm>
           <a:prstGeom prst="rect">
@@ -25501,13 +25368,13 @@
       </p:pic>
       <p:sp>
         <p:nvSpPr>
-          <p:cNvPr id="20" name="Shape 15"/>
+          <p:cNvPr id="7" name="Shape 4"/>
           <p:cNvSpPr/>
           <p:nvPr/>
         </p:nvSpPr>
         <p:spPr>
           <a:xfrm>
-            <a:off x="5181448" y="1874520"/>
+            <a:off x="548640" y="1874520"/>
             <a:ext cx="1828800" cy="3500184"/>
           </a:xfrm>
           <a:prstGeom prst="rect">
@@ -25523,13 +25390,13 @@
       </p:sp>
       <p:sp>
         <p:nvSpPr>
-          <p:cNvPr id="21" name="Text 16"/>
+          <p:cNvPr id="8" name="Text 5"/>
           <p:cNvSpPr txBox="1"/>
           <p:nvPr/>
         </p:nvSpPr>
         <p:spPr>
           <a:xfrm>
-            <a:off x="5181448" y="5466144"/>
+            <a:off x="548640" y="5466144"/>
             <a:ext cx="1965960" cy="411480"/>
           </a:xfrm>
           <a:prstGeom prst="rect">
@@ -25542,88 +25409,80 @@
           <a:bodyPr wrap="square" lIns="0" tIns="0" rIns="0" bIns="0" rtlCol="0" anchor="t"/>
           <a:lstStyle/>
           <a:p>
-            <a:pPr indent="0" marL="0">
-              <a:buNone/>
-            </a:pPr>
-            <a:r>
-              <a:rPr lang="zh-TW" altLang="en-US" sz="1150" b="1" dirty="0">
+            <a:pPr marL="0" indent="0">
+              <a:buNone/>
+            </a:pPr>
+            <a:r>
+              <a:rPr lang="zh-TW" altLang="en-US" sz="1150" dirty="0">
+                <a:solidFill>
+                  <a:schemeClr val="tx2"/>
+                </a:solidFill>
+              </a:rPr>
+              <a:t>「這台車已記錄 1 處損傷」</a:t>
+            </a:r>
+            <a:endParaRPr lang="zh-TW" sz="1150" dirty="0"/>
+          </a:p>
+          <a:p>
+            <a:pPr marL="0" indent="0">
+              <a:buNone/>
+            </a:pPr>
+            <a:r>
+              <a:rPr lang="zh-TW" altLang="en-US" sz="1150" dirty="0">
+                <a:solidFill>
+                  <a:schemeClr val="tx2"/>
+                </a:solidFill>
+              </a:rPr>
+              <a:t>提醒用戶拍下來</a:t>
+            </a:r>
+            <a:endParaRPr lang="zh-TW" sz="1150" dirty="0"/>
+          </a:p>
+        </p:txBody>
+      </p:sp>
+      <p:sp>
+        <p:nvSpPr>
+          <p:cNvPr id="9" name="Text 6"/>
+          <p:cNvSpPr txBox="1"/>
+          <p:nvPr/>
+        </p:nvSpPr>
+        <p:spPr>
+          <a:xfrm>
+            <a:off x="2377440" y="3396012"/>
+            <a:ext cx="487604" cy="457200"/>
+          </a:xfrm>
+          <a:prstGeom prst="rect">
+            <a:avLst/>
+          </a:prstGeom>
+          <a:noFill/>
+          <a:ln/>
+        </p:spPr>
+        <p:txBody>
+          <a:bodyPr wrap="square" lIns="0" tIns="0" rIns="0" bIns="0" rtlCol="0" anchor="ctr"/>
+          <a:lstStyle/>
+          <a:p>
+            <a:pPr marL="0" indent="0" algn="ctr">
+              <a:buNone/>
+            </a:pPr>
+            <a:r>
+              <a:rPr lang="zh-TW" altLang="en-US" sz="2200" b="1" dirty="0">
                 <a:solidFill>
                   <a:schemeClr val="accent1"/>
                 </a:solidFill>
               </a:rPr>
-              <a:t>影片畫面・</a:t>
-            </a:r>
-            <a:r>
-              <a:rPr lang="zh-TW" altLang="en-US" sz="1150" dirty="0">
-                <a:solidFill>
-                  <a:schemeClr val="tx2"/>
-                </a:solidFill>
-              </a:rPr>
-              <a:t>按下還車即停計費</a:t>
-            </a:r>
-            <a:endParaRPr lang="zh-TW" sz="1150" dirty="0"/>
-          </a:p>
-          <a:p>
-            <a:pPr indent="0" marL="0">
-              <a:buNone/>
-            </a:pPr>
-            <a:r>
-              <a:rPr lang="zh-TW" altLang="en-US" sz="1150" dirty="0">
-                <a:solidFill>
-                  <a:schemeClr val="tx2"/>
-                </a:solidFill>
-              </a:rPr>
-              <a:t>拍完車內、下車鎖門</a:t>
-            </a:r>
-            <a:endParaRPr lang="zh-TW" sz="1150" dirty="0"/>
-          </a:p>
-        </p:txBody>
-      </p:sp>
-      <p:sp>
-        <p:nvSpPr>
-          <p:cNvPr id="22" name="Text 17"/>
+              <a:t>›</a:t>
+            </a:r>
+            <a:endParaRPr lang="zh-TW" sz="2200" dirty="0"/>
+          </a:p>
+        </p:txBody>
+      </p:sp>
+      <p:sp>
+        <p:nvSpPr>
+          <p:cNvPr id="10" name="Text 7"/>
           <p:cNvSpPr txBox="1"/>
           <p:nvPr/>
         </p:nvSpPr>
         <p:spPr>
           <a:xfrm>
-            <a:off x="7010248" y="3396012"/>
-            <a:ext cx="487604" cy="457200"/>
-          </a:xfrm>
-          <a:prstGeom prst="rect">
-            <a:avLst/>
-          </a:prstGeom>
-          <a:noFill/>
-          <a:ln/>
-        </p:spPr>
-        <p:txBody>
-          <a:bodyPr wrap="square" lIns="0" tIns="0" rIns="0" bIns="0" rtlCol="0" anchor="ctr"/>
-          <a:lstStyle/>
-          <a:p>
-            <a:pPr algn="ctr" indent="0" marL="0">
-              <a:buNone/>
-            </a:pPr>
-            <a:r>
-              <a:rPr lang="zh-TW" altLang="en-US" sz="2200" b="1" dirty="0">
-                <a:solidFill>
-                  <a:schemeClr val="accent1"/>
-                </a:solidFill>
-              </a:rPr>
-              <a:t>›</a:t>
-            </a:r>
-            <a:endParaRPr lang="zh-TW" sz="2200" dirty="0"/>
-          </a:p>
-        </p:txBody>
-      </p:sp>
-      <p:sp>
-        <p:nvSpPr>
-          <p:cNvPr id="23" name="Text 18"/>
-          <p:cNvSpPr txBox="1"/>
-          <p:nvPr/>
-        </p:nvSpPr>
-        <p:spPr>
-          <a:xfrm>
-            <a:off x="7497851" y="1463040"/>
+            <a:off x="2865044" y="1463040"/>
             <a:ext cx="292608" cy="292608"/>
           </a:xfrm>
           <a:prstGeom prst="ellipse">
@@ -25638,7 +25497,7 @@
           <a:bodyPr wrap="square" lIns="0" tIns="0" rIns="0" bIns="0" rtlCol="0" anchor="ctr"/>
           <a:lstStyle/>
           <a:p>
-            <a:pPr algn="ctr" indent="0" marL="0">
+            <a:pPr marL="0" indent="0" algn="ctr">
               <a:buNone/>
             </a:pPr>
             <a:r>
@@ -25647,7 +25506,7 @@
                   <a:schemeClr val="bg1"/>
                 </a:solidFill>
               </a:rPr>
-              <a:t>9</a:t>
+              <a:t>2</a:t>
             </a:r>
             <a:endParaRPr lang="zh-TW" sz="1000" dirty="0"/>
           </a:p>
@@ -25655,26 +25514,64 @@
       </p:sp>
       <p:sp>
         <p:nvSpPr>
-          <p:cNvPr id="24" name="Text 19"/>
+          <p:cNvPr id="11" name="Text 8"/>
           <p:cNvSpPr txBox="1"/>
           <p:nvPr/>
         </p:nvSpPr>
         <p:spPr>
           <a:xfrm>
-            <a:off x="7881899" y="1435608"/>
-            <a:ext cx="1481328" cy="347472"/>
-          </a:xfrm>
-          <a:prstGeom prst="rect">
-            <a:avLst/>
-          </a:prstGeom>
-          <a:noFill/>
+            <a:off x="3212516" y="1463040"/>
+            <a:ext cx="292608" cy="292608"/>
+          </a:xfrm>
+          <a:prstGeom prst="ellipse">
+            <a:avLst/>
+          </a:prstGeom>
+          <a:solidFill>
+            <a:schemeClr val="accent1"/>
+          </a:solidFill>
           <a:ln/>
         </p:spPr>
         <p:txBody>
           <a:bodyPr wrap="square" lIns="0" tIns="0" rIns="0" bIns="0" rtlCol="0" anchor="ctr"/>
           <a:lstStyle/>
           <a:p>
-            <a:pPr indent="0" marL="0">
+            <a:pPr marL="0" indent="0" algn="ctr">
+              <a:buNone/>
+            </a:pPr>
+            <a:r>
+              <a:rPr lang="zh-TW" altLang="en-US" sz="1000" b="1" dirty="0">
+                <a:solidFill>
+                  <a:schemeClr val="bg1"/>
+                </a:solidFill>
+              </a:rPr>
+              <a:t>3</a:t>
+            </a:r>
+            <a:endParaRPr lang="zh-TW" sz="1000" dirty="0"/>
+          </a:p>
+        </p:txBody>
+      </p:sp>
+      <p:sp>
+        <p:nvSpPr>
+          <p:cNvPr id="12" name="Text 9"/>
+          <p:cNvSpPr txBox="1"/>
+          <p:nvPr/>
+        </p:nvSpPr>
+        <p:spPr>
+          <a:xfrm>
+            <a:off x="3596564" y="1435608"/>
+            <a:ext cx="1133856" cy="347472"/>
+          </a:xfrm>
+          <a:prstGeom prst="rect">
+            <a:avLst/>
+          </a:prstGeom>
+          <a:noFill/>
+          <a:ln/>
+        </p:spPr>
+        <p:txBody>
+          <a:bodyPr wrap="square" lIns="0" tIns="0" rIns="0" bIns="0" rtlCol="0" anchor="ctr"/>
+          <a:lstStyle/>
+          <a:p>
+            <a:pPr marL="0" indent="0">
               <a:buNone/>
             </a:pPr>
             <a:r>
@@ -25683,7 +25580,7 @@
                   <a:schemeClr val="tx1"/>
                 </a:solidFill>
               </a:rPr>
-              <a:t>歷史訂單</a:t>
+              <a:t>疊影對齊</a:t>
             </a:r>
             <a:endParaRPr lang="zh-TW" sz="1350" dirty="0"/>
           </a:p>
@@ -25691,7 +25588,7 @@
       </p:sp>
       <p:pic>
         <p:nvPicPr>
-          <p:cNvPr id="25" name="Image 3" descr="原型實機截圖：歷史訂單，每筆列出取車確認與還車確認狀態">    </p:cNvPr>
+          <p:cNvPr id="13" name="Image 1" descr="說明影片畫面：相機疊著上一次同角度照片與車身輪廓虛線，車牌已模糊"/>
           <p:cNvPicPr>
             <a:picLocks noChangeAspect="1"/>
           </p:cNvPicPr>
@@ -25705,7 +25602,7 @@
         </p:blipFill>
         <p:spPr>
           <a:xfrm>
-            <a:off x="7497851" y="1874520"/>
+            <a:off x="2865044" y="1874520"/>
             <a:ext cx="1828800" cy="3500184"/>
           </a:xfrm>
           <a:prstGeom prst="rect">
@@ -25715,13 +25612,13 @@
       </p:pic>
       <p:sp>
         <p:nvSpPr>
-          <p:cNvPr id="26" name="Shape 20"/>
+          <p:cNvPr id="14" name="Shape 10"/>
           <p:cNvSpPr/>
           <p:nvPr/>
         </p:nvSpPr>
         <p:spPr>
           <a:xfrm>
-            <a:off x="7497851" y="1874520"/>
+            <a:off x="2865044" y="1874520"/>
             <a:ext cx="1828800" cy="3500184"/>
           </a:xfrm>
           <a:prstGeom prst="rect">
@@ -25737,13 +25634,13 @@
       </p:sp>
       <p:sp>
         <p:nvSpPr>
-          <p:cNvPr id="27" name="Text 21"/>
+          <p:cNvPr id="15" name="Text 11"/>
           <p:cNvSpPr txBox="1"/>
           <p:nvPr/>
         </p:nvSpPr>
         <p:spPr>
           <a:xfrm>
-            <a:off x="7497851" y="5466144"/>
+            <a:off x="2865044" y="5466144"/>
             <a:ext cx="1965960" cy="411480"/>
           </a:xfrm>
           <a:prstGeom prst="rect">
@@ -25756,21 +25653,29 @@
           <a:bodyPr wrap="square" lIns="0" tIns="0" rIns="0" bIns="0" rtlCol="0" anchor="t"/>
           <a:lstStyle/>
           <a:p>
-            <a:pPr indent="0" marL="0">
-              <a:buNone/>
-            </a:pPr>
+            <a:pPr marL="0" indent="0">
+              <a:buNone/>
+            </a:pPr>
+            <a:r>
+              <a:rPr lang="zh-TW" altLang="en-US" sz="1150" b="1" dirty="0">
+                <a:solidFill>
+                  <a:schemeClr val="accent1"/>
+                </a:solidFill>
+              </a:rPr>
+              <a:t>影片畫面・</a:t>
+            </a:r>
             <a:r>
               <a:rPr lang="zh-TW" altLang="en-US" sz="1150" dirty="0">
                 <a:solidFill>
                   <a:schemeClr val="tx2"/>
                 </a:solidFill>
               </a:rPr>
-              <a:t>每筆都有取車確認</a:t>
+              <a:t>疊上次照片</a:t>
             </a:r>
             <a:endParaRPr lang="zh-TW" sz="1150" dirty="0"/>
           </a:p>
           <a:p>
-            <a:pPr indent="0" marL="0">
+            <a:pPr marL="0" indent="0">
               <a:buNone/>
             </a:pPr>
             <a:r>
@@ -25779,7 +25684,7 @@
                   <a:schemeClr val="tx2"/>
                 </a:solidFill>
               </a:rPr>
-              <a:t>與還車確認</a:t>
+              <a:t>與輪廓，不合格當場重拍</a:t>
             </a:r>
             <a:endParaRPr lang="zh-TW" sz="1150" dirty="0"/>
           </a:p>
@@ -25787,13 +25692,13 @@
       </p:sp>
       <p:sp>
         <p:nvSpPr>
-          <p:cNvPr id="28" name="Text 22"/>
+          <p:cNvPr id="16" name="Text 12"/>
           <p:cNvSpPr txBox="1"/>
           <p:nvPr/>
         </p:nvSpPr>
         <p:spPr>
           <a:xfrm>
-            <a:off x="9326651" y="3396012"/>
+            <a:off x="4693844" y="3396012"/>
             <a:ext cx="487604" cy="457200"/>
           </a:xfrm>
           <a:prstGeom prst="rect">
@@ -25806,7 +25711,7 @@
           <a:bodyPr wrap="square" lIns="0" tIns="0" rIns="0" bIns="0" rtlCol="0" anchor="ctr"/>
           <a:lstStyle/>
           <a:p>
-            <a:pPr algn="ctr" indent="0" marL="0">
+            <a:pPr marL="0" indent="0" algn="ctr">
               <a:buNone/>
             </a:pPr>
             <a:r>
@@ -25823,13 +25728,13 @@
       </p:sp>
       <p:sp>
         <p:nvSpPr>
-          <p:cNvPr id="29" name="Text 23"/>
+          <p:cNvPr id="17" name="Text 13"/>
           <p:cNvSpPr txBox="1"/>
           <p:nvPr/>
         </p:nvSpPr>
         <p:spPr>
           <a:xfrm>
-            <a:off x="9814255" y="1463040"/>
+            <a:off x="5181448" y="1463040"/>
             <a:ext cx="292608" cy="292608"/>
           </a:xfrm>
           <a:prstGeom prst="ellipse">
@@ -25844,7 +25749,7 @@
           <a:bodyPr wrap="square" lIns="0" tIns="0" rIns="0" bIns="0" rtlCol="0" anchor="ctr"/>
           <a:lstStyle/>
           <a:p>
-            <a:pPr algn="ctr" indent="0" marL="0">
+            <a:pPr marL="0" indent="0" algn="ctr">
               <a:buNone/>
             </a:pPr>
             <a:r>
@@ -25853,7 +25758,7 @@
                   <a:schemeClr val="bg1"/>
                 </a:solidFill>
               </a:rPr>
-              <a:t>9</a:t>
+              <a:t>4</a:t>
             </a:r>
             <a:endParaRPr lang="zh-TW" sz="1000" dirty="0"/>
           </a:p>
@@ -25861,13 +25766,13 @@
       </p:sp>
       <p:sp>
         <p:nvSpPr>
-          <p:cNvPr id="30" name="Text 24"/>
+          <p:cNvPr id="18" name="Text 14"/>
           <p:cNvSpPr txBox="1"/>
           <p:nvPr/>
         </p:nvSpPr>
         <p:spPr>
           <a:xfrm>
-            <a:off x="10198303" y="1435608"/>
+            <a:off x="5565496" y="1435608"/>
             <a:ext cx="1481328" cy="347472"/>
           </a:xfrm>
           <a:prstGeom prst="rect">
@@ -25880,7 +25785,7 @@
           <a:bodyPr wrap="square" lIns="0" tIns="0" rIns="0" bIns="0" rtlCol="0" anchor="ctr"/>
           <a:lstStyle/>
           <a:p>
-            <a:pPr indent="0" marL="0">
+            <a:pPr marL="0" indent="0">
               <a:buNone/>
             </a:pPr>
             <a:r>
@@ -25889,7 +25794,7 @@
                   <a:schemeClr val="tx1"/>
                 </a:solidFill>
               </a:rPr>
-              <a:t>還車確認單</a:t>
+              <a:t>先拍車內再鎖門</a:t>
             </a:r>
             <a:endParaRPr lang="zh-TW" sz="1350" dirty="0"/>
           </a:p>
@@ -25897,7 +25802,7 @@
       </p:sp>
       <p:pic>
         <p:nvPicPr>
-          <p:cNvPr id="31" name="Image 4" descr="原型實機截圖：還車確認單，疑似新的車損，AI 初步判讀">    </p:cNvPr>
+          <p:cNvPr id="19" name="Image 2" descr="說明影片畫面：還車先拍車內，倒數計時，拍完確認鎖門"/>
           <p:cNvPicPr>
             <a:picLocks noChangeAspect="1"/>
           </p:cNvPicPr>
@@ -25911,7 +25816,7 @@
         </p:blipFill>
         <p:spPr>
           <a:xfrm>
-            <a:off x="9814255" y="1874520"/>
+            <a:off x="5181448" y="1874520"/>
             <a:ext cx="1828800" cy="3500184"/>
           </a:xfrm>
           <a:prstGeom prst="rect">
@@ -25921,13 +25826,13 @@
       </p:pic>
       <p:sp>
         <p:nvSpPr>
-          <p:cNvPr id="32" name="Shape 25"/>
+          <p:cNvPr id="20" name="Shape 15"/>
           <p:cNvSpPr/>
           <p:nvPr/>
         </p:nvSpPr>
         <p:spPr>
           <a:xfrm>
-            <a:off x="9814255" y="1874520"/>
+            <a:off x="5181448" y="1874520"/>
             <a:ext cx="1828800" cy="3500184"/>
           </a:xfrm>
           <a:prstGeom prst="rect">
@@ -25943,6 +25848,426 @@
       </p:sp>
       <p:sp>
         <p:nvSpPr>
+          <p:cNvPr id="21" name="Text 16"/>
+          <p:cNvSpPr txBox="1"/>
+          <p:nvPr/>
+        </p:nvSpPr>
+        <p:spPr>
+          <a:xfrm>
+            <a:off x="5181448" y="5466144"/>
+            <a:ext cx="1965960" cy="411480"/>
+          </a:xfrm>
+          <a:prstGeom prst="rect">
+            <a:avLst/>
+          </a:prstGeom>
+          <a:noFill/>
+          <a:ln/>
+        </p:spPr>
+        <p:txBody>
+          <a:bodyPr wrap="square" lIns="0" tIns="0" rIns="0" bIns="0" rtlCol="0" anchor="t"/>
+          <a:lstStyle/>
+          <a:p>
+            <a:pPr marL="0" indent="0">
+              <a:buNone/>
+            </a:pPr>
+            <a:r>
+              <a:rPr lang="zh-TW" altLang="en-US" sz="1150" b="1" dirty="0">
+                <a:solidFill>
+                  <a:schemeClr val="accent1"/>
+                </a:solidFill>
+              </a:rPr>
+              <a:t>影片畫面・</a:t>
+            </a:r>
+            <a:r>
+              <a:rPr lang="zh-TW" altLang="en-US" sz="1150" dirty="0">
+                <a:solidFill>
+                  <a:schemeClr val="tx2"/>
+                </a:solidFill>
+              </a:rPr>
+              <a:t>按下還車即停計費</a:t>
+            </a:r>
+            <a:endParaRPr lang="zh-TW" sz="1150" dirty="0"/>
+          </a:p>
+          <a:p>
+            <a:pPr marL="0" indent="0">
+              <a:buNone/>
+            </a:pPr>
+            <a:r>
+              <a:rPr lang="zh-TW" altLang="en-US" sz="1150" dirty="0">
+                <a:solidFill>
+                  <a:schemeClr val="tx2"/>
+                </a:solidFill>
+              </a:rPr>
+              <a:t>拍完車內、下車鎖門</a:t>
+            </a:r>
+            <a:endParaRPr lang="zh-TW" sz="1150" dirty="0"/>
+          </a:p>
+        </p:txBody>
+      </p:sp>
+      <p:sp>
+        <p:nvSpPr>
+          <p:cNvPr id="22" name="Text 17"/>
+          <p:cNvSpPr txBox="1"/>
+          <p:nvPr/>
+        </p:nvSpPr>
+        <p:spPr>
+          <a:xfrm>
+            <a:off x="7010248" y="3396012"/>
+            <a:ext cx="487604" cy="457200"/>
+          </a:xfrm>
+          <a:prstGeom prst="rect">
+            <a:avLst/>
+          </a:prstGeom>
+          <a:noFill/>
+          <a:ln/>
+        </p:spPr>
+        <p:txBody>
+          <a:bodyPr wrap="square" lIns="0" tIns="0" rIns="0" bIns="0" rtlCol="0" anchor="ctr"/>
+          <a:lstStyle/>
+          <a:p>
+            <a:pPr marL="0" indent="0" algn="ctr">
+              <a:buNone/>
+            </a:pPr>
+            <a:r>
+              <a:rPr lang="zh-TW" altLang="en-US" sz="2200" b="1" dirty="0">
+                <a:solidFill>
+                  <a:schemeClr val="accent1"/>
+                </a:solidFill>
+              </a:rPr>
+              <a:t>›</a:t>
+            </a:r>
+            <a:endParaRPr lang="zh-TW" sz="2200" dirty="0"/>
+          </a:p>
+        </p:txBody>
+      </p:sp>
+      <p:sp>
+        <p:nvSpPr>
+          <p:cNvPr id="23" name="Text 18"/>
+          <p:cNvSpPr txBox="1"/>
+          <p:nvPr/>
+        </p:nvSpPr>
+        <p:spPr>
+          <a:xfrm>
+            <a:off x="7497851" y="1463040"/>
+            <a:ext cx="292608" cy="292608"/>
+          </a:xfrm>
+          <a:prstGeom prst="ellipse">
+            <a:avLst/>
+          </a:prstGeom>
+          <a:solidFill>
+            <a:schemeClr val="accent1"/>
+          </a:solidFill>
+          <a:ln/>
+        </p:spPr>
+        <p:txBody>
+          <a:bodyPr wrap="square" lIns="0" tIns="0" rIns="0" bIns="0" rtlCol="0" anchor="ctr"/>
+          <a:lstStyle/>
+          <a:p>
+            <a:pPr marL="0" indent="0" algn="ctr">
+              <a:buNone/>
+            </a:pPr>
+            <a:r>
+              <a:rPr lang="zh-TW" altLang="en-US" sz="1000" b="1" dirty="0">
+                <a:solidFill>
+                  <a:schemeClr val="bg1"/>
+                </a:solidFill>
+              </a:rPr>
+              <a:t>9</a:t>
+            </a:r>
+            <a:endParaRPr lang="zh-TW" sz="1000" dirty="0"/>
+          </a:p>
+        </p:txBody>
+      </p:sp>
+      <p:sp>
+        <p:nvSpPr>
+          <p:cNvPr id="24" name="Text 19"/>
+          <p:cNvSpPr txBox="1"/>
+          <p:nvPr/>
+        </p:nvSpPr>
+        <p:spPr>
+          <a:xfrm>
+            <a:off x="7881899" y="1435608"/>
+            <a:ext cx="1481328" cy="347472"/>
+          </a:xfrm>
+          <a:prstGeom prst="rect">
+            <a:avLst/>
+          </a:prstGeom>
+          <a:noFill/>
+          <a:ln/>
+        </p:spPr>
+        <p:txBody>
+          <a:bodyPr wrap="square" lIns="0" tIns="0" rIns="0" bIns="0" rtlCol="0" anchor="ctr"/>
+          <a:lstStyle/>
+          <a:p>
+            <a:pPr marL="0" indent="0">
+              <a:buNone/>
+            </a:pPr>
+            <a:r>
+              <a:rPr lang="zh-TW" altLang="en-US" sz="1350" b="1" dirty="0">
+                <a:solidFill>
+                  <a:schemeClr val="tx1"/>
+                </a:solidFill>
+              </a:rPr>
+              <a:t>歷史訂單</a:t>
+            </a:r>
+            <a:endParaRPr lang="zh-TW" sz="1350" dirty="0"/>
+          </a:p>
+        </p:txBody>
+      </p:sp>
+      <p:pic>
+        <p:nvPicPr>
+          <p:cNvPr id="25" name="Image 3" descr="原型實機截圖：歷史訂單，每筆列出取車確認與還車確認狀態"/>
+          <p:cNvPicPr>
+            <a:picLocks noChangeAspect="1"/>
+          </p:cNvPicPr>
+          <p:nvPr/>
+        </p:nvPicPr>
+        <p:blipFill>
+          <a:blip r:embed="rId6"/>
+          <a:stretch>
+            <a:fillRect/>
+          </a:stretch>
+        </p:blipFill>
+        <p:spPr>
+          <a:xfrm>
+            <a:off x="7497851" y="1874520"/>
+            <a:ext cx="1828800" cy="3500184"/>
+          </a:xfrm>
+          <a:prstGeom prst="rect">
+            <a:avLst/>
+          </a:prstGeom>
+        </p:spPr>
+      </p:pic>
+      <p:sp>
+        <p:nvSpPr>
+          <p:cNvPr id="26" name="Shape 20"/>
+          <p:cNvSpPr/>
+          <p:nvPr/>
+        </p:nvSpPr>
+        <p:spPr>
+          <a:xfrm>
+            <a:off x="7497851" y="1874520"/>
+            <a:ext cx="1828800" cy="3500184"/>
+          </a:xfrm>
+          <a:prstGeom prst="rect">
+            <a:avLst/>
+          </a:prstGeom>
+          <a:ln w="9525">
+            <a:solidFill>
+              <a:srgbClr val="C9C9C9"/>
+            </a:solidFill>
+            <a:prstDash val="solid"/>
+          </a:ln>
+        </p:spPr>
+      </p:sp>
+      <p:sp>
+        <p:nvSpPr>
+          <p:cNvPr id="27" name="Text 21"/>
+          <p:cNvSpPr txBox="1"/>
+          <p:nvPr/>
+        </p:nvSpPr>
+        <p:spPr>
+          <a:xfrm>
+            <a:off x="7497851" y="5466144"/>
+            <a:ext cx="1965960" cy="411480"/>
+          </a:xfrm>
+          <a:prstGeom prst="rect">
+            <a:avLst/>
+          </a:prstGeom>
+          <a:noFill/>
+          <a:ln/>
+        </p:spPr>
+        <p:txBody>
+          <a:bodyPr wrap="square" lIns="0" tIns="0" rIns="0" bIns="0" rtlCol="0" anchor="t"/>
+          <a:lstStyle/>
+          <a:p>
+            <a:pPr marL="0" indent="0">
+              <a:buNone/>
+            </a:pPr>
+            <a:r>
+              <a:rPr lang="zh-TW" altLang="en-US" sz="1150" dirty="0">
+                <a:solidFill>
+                  <a:schemeClr val="tx2"/>
+                </a:solidFill>
+              </a:rPr>
+              <a:t>每筆都有取車確認</a:t>
+            </a:r>
+            <a:endParaRPr lang="zh-TW" sz="1150" dirty="0"/>
+          </a:p>
+          <a:p>
+            <a:pPr marL="0" indent="0">
+              <a:buNone/>
+            </a:pPr>
+            <a:r>
+              <a:rPr lang="zh-TW" altLang="en-US" sz="1150" dirty="0">
+                <a:solidFill>
+                  <a:schemeClr val="tx2"/>
+                </a:solidFill>
+              </a:rPr>
+              <a:t>與還車確認</a:t>
+            </a:r>
+            <a:endParaRPr lang="zh-TW" sz="1150" dirty="0"/>
+          </a:p>
+        </p:txBody>
+      </p:sp>
+      <p:sp>
+        <p:nvSpPr>
+          <p:cNvPr id="28" name="Text 22"/>
+          <p:cNvSpPr txBox="1"/>
+          <p:nvPr/>
+        </p:nvSpPr>
+        <p:spPr>
+          <a:xfrm>
+            <a:off x="9326651" y="3396012"/>
+            <a:ext cx="487604" cy="457200"/>
+          </a:xfrm>
+          <a:prstGeom prst="rect">
+            <a:avLst/>
+          </a:prstGeom>
+          <a:noFill/>
+          <a:ln/>
+        </p:spPr>
+        <p:txBody>
+          <a:bodyPr wrap="square" lIns="0" tIns="0" rIns="0" bIns="0" rtlCol="0" anchor="ctr"/>
+          <a:lstStyle/>
+          <a:p>
+            <a:pPr marL="0" indent="0" algn="ctr">
+              <a:buNone/>
+            </a:pPr>
+            <a:r>
+              <a:rPr lang="zh-TW" altLang="en-US" sz="2200" b="1" dirty="0">
+                <a:solidFill>
+                  <a:schemeClr val="accent1"/>
+                </a:solidFill>
+              </a:rPr>
+              <a:t>›</a:t>
+            </a:r>
+            <a:endParaRPr lang="zh-TW" sz="2200" dirty="0"/>
+          </a:p>
+        </p:txBody>
+      </p:sp>
+      <p:sp>
+        <p:nvSpPr>
+          <p:cNvPr id="29" name="Text 23"/>
+          <p:cNvSpPr txBox="1"/>
+          <p:nvPr/>
+        </p:nvSpPr>
+        <p:spPr>
+          <a:xfrm>
+            <a:off x="9814255" y="1463040"/>
+            <a:ext cx="292608" cy="292608"/>
+          </a:xfrm>
+          <a:prstGeom prst="ellipse">
+            <a:avLst/>
+          </a:prstGeom>
+          <a:solidFill>
+            <a:schemeClr val="accent1"/>
+          </a:solidFill>
+          <a:ln/>
+        </p:spPr>
+        <p:txBody>
+          <a:bodyPr wrap="square" lIns="0" tIns="0" rIns="0" bIns="0" rtlCol="0" anchor="ctr"/>
+          <a:lstStyle/>
+          <a:p>
+            <a:pPr marL="0" indent="0" algn="ctr">
+              <a:buNone/>
+            </a:pPr>
+            <a:r>
+              <a:rPr lang="zh-TW" altLang="en-US" sz="1000" b="1" dirty="0">
+                <a:solidFill>
+                  <a:schemeClr val="bg1"/>
+                </a:solidFill>
+              </a:rPr>
+              <a:t>9</a:t>
+            </a:r>
+            <a:endParaRPr lang="zh-TW" sz="1000" dirty="0"/>
+          </a:p>
+        </p:txBody>
+      </p:sp>
+      <p:sp>
+        <p:nvSpPr>
+          <p:cNvPr id="30" name="Text 24"/>
+          <p:cNvSpPr txBox="1"/>
+          <p:nvPr/>
+        </p:nvSpPr>
+        <p:spPr>
+          <a:xfrm>
+            <a:off x="10198303" y="1435608"/>
+            <a:ext cx="1481328" cy="347472"/>
+          </a:xfrm>
+          <a:prstGeom prst="rect">
+            <a:avLst/>
+          </a:prstGeom>
+          <a:noFill/>
+          <a:ln/>
+        </p:spPr>
+        <p:txBody>
+          <a:bodyPr wrap="square" lIns="0" tIns="0" rIns="0" bIns="0" rtlCol="0" anchor="ctr"/>
+          <a:lstStyle/>
+          <a:p>
+            <a:pPr marL="0" indent="0">
+              <a:buNone/>
+            </a:pPr>
+            <a:r>
+              <a:rPr lang="zh-TW" altLang="en-US" sz="1350" b="1" dirty="0">
+                <a:solidFill>
+                  <a:schemeClr val="tx1"/>
+                </a:solidFill>
+              </a:rPr>
+              <a:t>還車確認單</a:t>
+            </a:r>
+            <a:endParaRPr lang="zh-TW" sz="1350" dirty="0"/>
+          </a:p>
+        </p:txBody>
+      </p:sp>
+      <p:pic>
+        <p:nvPicPr>
+          <p:cNvPr id="31" name="Image 4" descr="原型實機截圖：還車確認單，疑似新的車損，AI 初步判讀"/>
+          <p:cNvPicPr>
+            <a:picLocks noChangeAspect="1"/>
+          </p:cNvPicPr>
+          <p:nvPr/>
+        </p:nvPicPr>
+        <p:blipFill>
+          <a:blip r:embed="rId7"/>
+          <a:stretch>
+            <a:fillRect/>
+          </a:stretch>
+        </p:blipFill>
+        <p:spPr>
+          <a:xfrm>
+            <a:off x="9814255" y="1874520"/>
+            <a:ext cx="1828800" cy="3500184"/>
+          </a:xfrm>
+          <a:prstGeom prst="rect">
+            <a:avLst/>
+          </a:prstGeom>
+        </p:spPr>
+      </p:pic>
+      <p:sp>
+        <p:nvSpPr>
+          <p:cNvPr id="32" name="Shape 25"/>
+          <p:cNvSpPr/>
+          <p:nvPr/>
+        </p:nvSpPr>
+        <p:spPr>
+          <a:xfrm>
+            <a:off x="9814255" y="1874520"/>
+            <a:ext cx="1828800" cy="3500184"/>
+          </a:xfrm>
+          <a:prstGeom prst="rect">
+            <a:avLst/>
+          </a:prstGeom>
+          <a:ln w="9525">
+            <a:solidFill>
+              <a:srgbClr val="C9C9C9"/>
+            </a:solidFill>
+            <a:prstDash val="solid"/>
+          </a:ln>
+        </p:spPr>
+      </p:sp>
+      <p:sp>
+        <p:nvSpPr>
           <p:cNvPr id="33" name="Text 26"/>
           <p:cNvSpPr txBox="1"/>
           <p:nvPr/>
@@ -25962,7 +26287,7 @@
           <a:bodyPr wrap="square" lIns="0" tIns="0" rIns="0" bIns="0" rtlCol="0" anchor="t"/>
           <a:lstStyle/>
           <a:p>
-            <a:pPr indent="0" marL="0">
+            <a:pPr marL="0" indent="0">
               <a:buNone/>
             </a:pPr>
             <a:r>
@@ -25976,7 +26301,7 @@
             <a:endParaRPr lang="zh-TW" sz="1150" dirty="0"/>
           </a:p>
           <a:p>
-            <a:pPr indent="0" marL="0">
+            <a:pPr marL="0" indent="0">
               <a:buNone/>
             </a:pPr>
             <a:r>
@@ -26012,7 +26337,7 @@
           <a:bodyPr wrap="square" lIns="0" tIns="0" rIns="0" bIns="0" rtlCol="0" anchor="ctr"/>
           <a:lstStyle/>
           <a:p>
-            <a:pPr indent="0" marL="0">
+            <a:pPr marL="0" indent="0">
               <a:buNone/>
             </a:pPr>
             <a:r>
@@ -26056,7 +26381,7 @@
           <a:bodyPr wrap="square" lIns="0" tIns="0" rIns="0" bIns="0" rtlCol="0" anchor="ctr"/>
           <a:lstStyle/>
           <a:p>
-            <a:pPr indent="0" marL="0">
+            <a:pPr marL="0" indent="0">
               <a:buNone/>
             </a:pPr>
             <a:r>
@@ -26073,7 +26398,7 @@
       </p:sp>
       <p:sp>
         <p:nvSpPr>
-          <p:cNvPr id="25" name="Slide Number Placeholder 0"/>
+          <p:cNvPr id="36" name="Slide Number Placeholder 0"/>
           <p:cNvSpPr>
             <a:spLocks noGrp="1"/>
           </p:cNvSpPr>
@@ -26091,7 +26416,7 @@
           </a:prstGeom>
           <a:extLst>
             <a:ext uri="{C572A759-6A51-4108-AA02-DFA0A04FC94B}">
-              <ma14:wrappingTextBoxFlag xmlns:ma14="http://schemas.microsoft.com/office/mac/drawingml/2011/main" val="0"/>
+              <ma14:wrappingTextBoxFlag xmlns:ma14="http://schemas.microsoft.com/office/mac/drawingml/2011/main" xmlns="" val="0"/>
             </a:ext>
           </a:extLst>
         </p:spPr>
@@ -26109,7 +26434,7 @@
           <a:p>
             <a:pPr algn="r"/>
             <a:fld id="{F7021451-1387-4CA6-816F-3879F97B5CBC}" type="slidenum">
-              <a:rPr b="0" lang="en-US"/>
+              <a:rPr lang="en-US" b="0"/>
               <a:t>8</a:t>
             </a:fld>
             <a:endParaRPr lang="en-US"/>
@@ -26144,9 +26469,11 @@
       <p:sp>
         <p:nvSpPr>
           <p:cNvPr id="2" name="Text 1"/>
-          <p:cNvSpPr/>
+          <p:cNvSpPr>
+            <a:spLocks noGrp="1"/>
+          </p:cNvSpPr>
           <p:nvPr>
-            <p:ph idx="101" type="body" hasCustomPrompt="1"/>
+            <p:ph type="body" idx="101" hasCustomPrompt="1"/>
           </p:nvPr>
         </p:nvSpPr>
         <p:spPr>
@@ -26164,7 +26491,7 @@
           <a:bodyPr wrap="square" lIns="0" tIns="0" rIns="0" bIns="0" rtlCol="0" anchor="ctr"/>
           <a:lstStyle/>
           <a:p>
-            <a:pPr indent="0" marL="0">
+            <a:pPr marL="0" indent="0">
               <a:buNone/>
             </a:pPr>
             <a:r>
@@ -26182,9 +26509,11 @@
       <p:sp>
         <p:nvSpPr>
           <p:cNvPr id="3" name="Text 1"/>
-          <p:cNvSpPr/>
+          <p:cNvSpPr>
+            <a:spLocks noGrp="1"/>
+          </p:cNvSpPr>
           <p:nvPr>
-            <p:ph idx="102" type="title" hasCustomPrompt="1"/>
+            <p:ph type="title" idx="102" hasCustomPrompt="1"/>
           </p:nvPr>
         </p:nvSpPr>
         <p:spPr>
@@ -26202,7 +26531,7 @@
           <a:bodyPr wrap="square" lIns="0" tIns="0" rIns="0" bIns="0" rtlCol="0" anchor="ctr"/>
           <a:lstStyle/>
           <a:p>
-            <a:pPr algn="l" indent="0" marL="0">
+            <a:pPr marL="0" indent="0" algn="l">
               <a:buNone/>
             </a:pPr>
             <a:r>
@@ -26219,14 +26548,14 @@
       </p:sp>
       <p:pic>
         <p:nvPicPr>
-          <p:cNvPr id="4" name="Image 0" descr="營運後台預警頁實機截圖：RDQ-1950 還車新車損，比對基準與這次照片並排，工單檢修進行中、車輛暫停出租，下方有確認與駁回按鈕">    </p:cNvPr>
+          <p:cNvPr id="4" name="Image 0" descr="營運後台預警頁實機截圖：RDQ-1950 還車新車損，比對基準與這次照片並排，工單檢修進行中、車輛暫停出租，下方有確認與駁回按鈕"/>
           <p:cNvPicPr>
             <a:picLocks noChangeAspect="1"/>
           </p:cNvPicPr>
           <p:nvPr/>
         </p:nvPicPr>
         <p:blipFill>
-          <a:blip r:embed="rId1"/>
+          <a:blip r:embed="rId3"/>
           <a:stretch>
             <a:fillRect/>
           </a:stretch>
@@ -26284,7 +26613,7 @@
           <a:bodyPr wrap="square" lIns="0" tIns="0" rIns="0" bIns="0" rtlCol="0" anchor="t"/>
           <a:lstStyle/>
           <a:p>
-            <a:pPr indent="0" marL="0">
+            <a:pPr marL="0" indent="0">
               <a:buNone/>
             </a:pPr>
             <a:r>
@@ -26320,7 +26649,7 @@
           <a:bodyPr wrap="square" lIns="0" tIns="0" rIns="0" bIns="0" rtlCol="0" anchor="t"/>
           <a:lstStyle/>
           <a:p>
-            <a:pPr indent="0" marL="0">
+            <a:pPr marL="0" indent="0">
               <a:buNone/>
             </a:pPr>
             <a:r>
@@ -26351,16 +26680,34 @@
         </p:nvGraphicFramePr>
         <p:xfrm>
           <a:off x="6812280" y="1783080"/>
-          <a:ext cx="4830775" cy="914400"/>
+          <a:ext cx="4830775" cy="1417320"/>
         </p:xfrm>
         <a:graphic>
           <a:graphicData uri="http://schemas.openxmlformats.org/drawingml/2006/table">
             <a:tbl>
               <a:tblPr/>
               <a:tblGrid>
-                <a:gridCol w="1920240"/>
-                <a:gridCol w="1417320"/>
-                <a:gridCol w="1493215"/>
+                <a:gridCol w="1920240">
+                  <a:extLst>
+                    <a:ext uri="{9D8B030D-6E8A-4147-A177-3AD203B41FA5}">
+                      <a16:colId xmlns:a16="http://schemas.microsoft.com/office/drawing/2014/main" val="20000"/>
+                    </a:ext>
+                  </a:extLst>
+                </a:gridCol>
+                <a:gridCol w="1417320">
+                  <a:extLst>
+                    <a:ext uri="{9D8B030D-6E8A-4147-A177-3AD203B41FA5}">
+                      <a16:colId xmlns:a16="http://schemas.microsoft.com/office/drawing/2014/main" val="20001"/>
+                    </a:ext>
+                  </a:extLst>
+                </a:gridCol>
+                <a:gridCol w="1493215">
+                  <a:extLst>
+                    <a:ext uri="{9D8B030D-6E8A-4147-A177-3AD203B41FA5}">
+                      <a16:colId xmlns:a16="http://schemas.microsoft.com/office/drawing/2014/main" val="20002"/>
+                    </a:ext>
+                  </a:extLst>
+                </a:gridCol>
               </a:tblGrid>
               <a:tr h="283464">
                 <a:tc>
@@ -26368,7 +26715,7 @@
                     <a:bodyPr/>
                     <a:lstStyle/>
                     <a:p>
-                      <a:pPr indent="0" marL="0">
+                      <a:pPr marL="0" indent="0">
                         <a:buNone/>
                       </a:pPr>
                       <a:r>
@@ -26436,7 +26783,7 @@
                     <a:bodyPr/>
                     <a:lstStyle/>
                     <a:p>
-                      <a:pPr indent="0" marL="0">
+                      <a:pPr marL="0" indent="0">
                         <a:buNone/>
                       </a:pPr>
                       <a:r>
@@ -26504,7 +26851,7 @@
                     <a:bodyPr/>
                     <a:lstStyle/>
                     <a:p>
-                      <a:pPr indent="0" marL="0">
+                      <a:pPr marL="0" indent="0">
                         <a:buNone/>
                       </a:pPr>
                       <a:r>
@@ -26567,6 +26914,11 @@
                     </a:solidFill>
                   </a:tcPr>
                 </a:tc>
+                <a:extLst>
+                  <a:ext uri="{0D108BD9-81ED-4DB2-BD59-A6C34878D82A}">
+                    <a16:rowId xmlns:a16="http://schemas.microsoft.com/office/drawing/2014/main" val="10000"/>
+                  </a:ext>
+                </a:extLst>
               </a:tr>
               <a:tr h="283464">
                 <a:tc>
@@ -26574,7 +26926,7 @@
                     <a:bodyPr/>
                     <a:lstStyle/>
                     <a:p>
-                      <a:pPr indent="0" marL="0">
+                      <a:pPr marL="0" indent="0">
                         <a:buNone/>
                       </a:pPr>
                       <a:r>
@@ -26639,7 +26991,7 @@
                     <a:bodyPr/>
                     <a:lstStyle/>
                     <a:p>
-                      <a:pPr indent="0" marL="0">
+                      <a:pPr marL="0" indent="0">
                         <a:buNone/>
                       </a:pPr>
                       <a:r>
@@ -26704,7 +27056,7 @@
                     <a:bodyPr/>
                     <a:lstStyle/>
                     <a:p>
-                      <a:pPr indent="0" marL="0">
+                      <a:pPr marL="0" indent="0">
                         <a:buNone/>
                       </a:pPr>
                       <a:r>
@@ -26764,6 +27116,11 @@
                     </a:lnB>
                   </a:tcPr>
                 </a:tc>
+                <a:extLst>
+                  <a:ext uri="{0D108BD9-81ED-4DB2-BD59-A6C34878D82A}">
+                    <a16:rowId xmlns:a16="http://schemas.microsoft.com/office/drawing/2014/main" val="10001"/>
+                  </a:ext>
+                </a:extLst>
               </a:tr>
               <a:tr h="283464">
                 <a:tc>
@@ -26771,7 +27128,7 @@
                     <a:bodyPr/>
                     <a:lstStyle/>
                     <a:p>
-                      <a:pPr indent="0" marL="0">
+                      <a:pPr marL="0" indent="0">
                         <a:buNone/>
                       </a:pPr>
                       <a:r>
@@ -26836,7 +27193,7 @@
                     <a:bodyPr/>
                     <a:lstStyle/>
                     <a:p>
-                      <a:pPr indent="0" marL="0">
+                      <a:pPr marL="0" indent="0">
                         <a:buNone/>
                       </a:pPr>
                       <a:r>
@@ -26901,7 +27258,7 @@
                     <a:bodyPr/>
                     <a:lstStyle/>
                     <a:p>
-                      <a:pPr indent="0" marL="0">
+                      <a:pPr marL="0" indent="0">
                         <a:buNone/>
                       </a:pPr>
                       <a:r>
@@ -26961,6 +27318,11 @@
                     </a:lnB>
                   </a:tcPr>
                 </a:tc>
+                <a:extLst>
+                  <a:ext uri="{0D108BD9-81ED-4DB2-BD59-A6C34878D82A}">
+                    <a16:rowId xmlns:a16="http://schemas.microsoft.com/office/drawing/2014/main" val="10002"/>
+                  </a:ext>
+                </a:extLst>
               </a:tr>
               <a:tr h="283464">
                 <a:tc>
@@ -26968,7 +27330,7 @@
                     <a:bodyPr/>
                     <a:lstStyle/>
                     <a:p>
-                      <a:pPr indent="0" marL="0">
+                      <a:pPr marL="0" indent="0">
                         <a:buNone/>
                       </a:pPr>
                       <a:r>
@@ -27033,7 +27395,7 @@
                     <a:bodyPr/>
                     <a:lstStyle/>
                     <a:p>
-                      <a:pPr indent="0" marL="0">
+                      <a:pPr marL="0" indent="0">
                         <a:buNone/>
                       </a:pPr>
                       <a:r>
@@ -27098,7 +27460,7 @@
                     <a:bodyPr/>
                     <a:lstStyle/>
                     <a:p>
-                      <a:pPr indent="0" marL="0">
+                      <a:pPr marL="0" indent="0">
                         <a:buNone/>
                       </a:pPr>
                       <a:r>
@@ -27158,6 +27520,11 @@
                     </a:lnB>
                   </a:tcPr>
                 </a:tc>
+                <a:extLst>
+                  <a:ext uri="{0D108BD9-81ED-4DB2-BD59-A6C34878D82A}">
+                    <a16:rowId xmlns:a16="http://schemas.microsoft.com/office/drawing/2014/main" val="10003"/>
+                  </a:ext>
+                </a:extLst>
               </a:tr>
               <a:tr h="283464">
                 <a:tc>
@@ -27165,7 +27532,7 @@
                     <a:bodyPr/>
                     <a:lstStyle/>
                     <a:p>
-                      <a:pPr indent="0" marL="0">
+                      <a:pPr marL="0" indent="0">
                         <a:buNone/>
                       </a:pPr>
                       <a:r>
@@ -27230,7 +27597,7 @@
                     <a:bodyPr/>
                     <a:lstStyle/>
                     <a:p>
-                      <a:pPr indent="0" marL="0">
+                      <a:pPr marL="0" indent="0">
                         <a:buNone/>
                       </a:pPr>
                       <a:r>
@@ -27295,7 +27662,7 @@
                     <a:bodyPr/>
                     <a:lstStyle/>
                     <a:p>
-                      <a:pPr indent="0" marL="0">
+                      <a:pPr marL="0" indent="0">
                         <a:buNone/>
                       </a:pPr>
                       <a:r>
@@ -27355,6 +27722,11 @@
                     </a:lnB>
                   </a:tcPr>
                 </a:tc>
+                <a:extLst>
+                  <a:ext uri="{0D108BD9-81ED-4DB2-BD59-A6C34878D82A}">
+                    <a16:rowId xmlns:a16="http://schemas.microsoft.com/office/drawing/2014/main" val="10004"/>
+                  </a:ext>
+                </a:extLst>
               </a:tr>
             </a:tbl>
           </a:graphicData>
@@ -27381,7 +27753,7 @@
           <a:bodyPr wrap="square" lIns="0" tIns="0" rIns="0" bIns="0" rtlCol="0" anchor="ctr"/>
           <a:lstStyle/>
           <a:p>
-            <a:pPr indent="0" marL="0">
+            <a:pPr marL="0" indent="0">
               <a:buNone/>
             </a:pPr>
             <a:r>
@@ -27398,14 +27770,14 @@
       </p:sp>
       <p:pic>
         <p:nvPicPr>
-          <p:cNvPr id="10" name="Image 1" descr="營運後台工單頁實機截圖：檢修 RDU-6956，車輛整備中、暫停出租中">    </p:cNvPr>
+          <p:cNvPr id="8" name="Image 1" descr="營運後台工單頁實機截圖：檢修 RDU-6956，車輛整備中、暫停出租中"/>
           <p:cNvPicPr>
             <a:picLocks noChangeAspect="1"/>
           </p:cNvPicPr>
           <p:nvPr/>
         </p:nvPicPr>
         <p:blipFill>
-          <a:blip r:embed="rId2"/>
+          <a:blip r:embed="rId4"/>
           <a:stretch>
             <a:fillRect/>
           </a:stretch>
@@ -27463,7 +27835,7 @@
           <a:bodyPr wrap="square" lIns="0" tIns="0" rIns="0" bIns="0" rtlCol="0" anchor="t"/>
           <a:lstStyle/>
           <a:p>
-            <a:pPr indent="0" marL="0">
+            <a:pPr marL="0" indent="0">
               <a:buNone/>
             </a:pPr>
             <a:r>
@@ -27503,7 +27875,7 @@
           <a:bodyPr wrap="square" lIns="0" tIns="0" rIns="0" bIns="0" rtlCol="0" anchor="ctr"/>
           <a:lstStyle/>
           <a:p>
-            <a:pPr algn="ctr" indent="0" marL="0">
+            <a:pPr marL="0" indent="0" algn="ctr">
               <a:buNone/>
             </a:pPr>
             <a:r>
@@ -27539,7 +27911,7 @@
           <a:bodyPr wrap="square" lIns="0" tIns="0" rIns="0" bIns="0" rtlCol="0" anchor="ctr"/>
           <a:lstStyle/>
           <a:p>
-            <a:pPr indent="0" marL="0">
+            <a:pPr marL="0" indent="0">
               <a:buNone/>
             </a:pPr>
             <a:r>
@@ -27587,7 +27959,7 @@
           <a:bodyPr wrap="square" lIns="0" tIns="0" rIns="0" bIns="0" rtlCol="0" anchor="ctr"/>
           <a:lstStyle/>
           <a:p>
-            <a:pPr algn="ctr" indent="0" marL="0">
+            <a:pPr marL="0" indent="0" algn="ctr">
               <a:buNone/>
             </a:pPr>
             <a:r>
@@ -27623,7 +27995,7 @@
           <a:bodyPr wrap="square" lIns="0" tIns="0" rIns="0" bIns="0" rtlCol="0" anchor="ctr"/>
           <a:lstStyle/>
           <a:p>
-            <a:pPr indent="0" marL="0">
+            <a:pPr marL="0" indent="0">
               <a:buNone/>
             </a:pPr>
             <a:r>
@@ -27675,7 +28047,7 @@
           <a:bodyPr wrap="square" lIns="0" tIns="0" rIns="0" bIns="0" rtlCol="0" anchor="ctr"/>
           <a:lstStyle/>
           <a:p>
-            <a:pPr algn="ctr" indent="0" marL="0">
+            <a:pPr marL="0" indent="0" algn="ctr">
               <a:buNone/>
             </a:pPr>
             <a:r>
@@ -27711,7 +28083,7 @@
           <a:bodyPr wrap="square" lIns="0" tIns="0" rIns="0" bIns="0" rtlCol="0" anchor="ctr"/>
           <a:lstStyle/>
           <a:p>
-            <a:pPr indent="0" marL="0">
+            <a:pPr marL="0" indent="0">
               <a:buNone/>
             </a:pPr>
             <a:r>
@@ -27754,7 +28126,7 @@
           </a:prstGeom>
           <a:extLst>
             <a:ext uri="{C572A759-6A51-4108-AA02-DFA0A04FC94B}">
-              <ma14:wrappingTextBoxFlag xmlns:ma14="http://schemas.microsoft.com/office/mac/drawingml/2011/main" val="0"/>
+              <ma14:wrappingTextBoxFlag xmlns:ma14="http://schemas.microsoft.com/office/mac/drawingml/2011/main" xmlns="" val="0"/>
             </a:ext>
           </a:extLst>
         </p:spPr>
@@ -27772,7 +28144,7 @@
           <a:p>
             <a:pPr algn="r"/>
             <a:fld id="{F7021451-1387-4CA6-816F-3879F97B5CBC}" type="slidenum">
-              <a:rPr b="0" lang="en-US"/>
+              <a:rPr lang="en-US" b="0"/>
               <a:t>9</a:t>
             </a:fld>
             <a:endParaRPr lang="en-US"/>
@@ -28080,4 +28452,299 @@
     </a:ext>
   </a:extLst>
 </a:theme>
+</file>
+
+<file path=ppt/theme/theme2.xml><?xml version="1.0" encoding="utf-8"?>
+<a:theme xmlns:a="http://schemas.openxmlformats.org/drawingml/2006/main" name="Office 佈景主題">
+  <a:themeElements>
+    <a:clrScheme name="Office">
+      <a:dk1>
+        <a:sysClr val="windowText" lastClr="000000"/>
+      </a:dk1>
+      <a:lt1>
+        <a:sysClr val="window" lastClr="FFFFFF"/>
+      </a:lt1>
+      <a:dk2>
+        <a:srgbClr val="44546A"/>
+      </a:dk2>
+      <a:lt2>
+        <a:srgbClr val="E7E6E6"/>
+      </a:lt2>
+      <a:accent1>
+        <a:srgbClr val="4472C4"/>
+      </a:accent1>
+      <a:accent2>
+        <a:srgbClr val="ED7D31"/>
+      </a:accent2>
+      <a:accent3>
+        <a:srgbClr val="A5A5A5"/>
+      </a:accent3>
+      <a:accent4>
+        <a:srgbClr val="FFC000"/>
+      </a:accent4>
+      <a:accent5>
+        <a:srgbClr val="5B9BD5"/>
+      </a:accent5>
+      <a:accent6>
+        <a:srgbClr val="70AD47"/>
+      </a:accent6>
+      <a:hlink>
+        <a:srgbClr val="0563C1"/>
+      </a:hlink>
+      <a:folHlink>
+        <a:srgbClr val="954F72"/>
+      </a:folHlink>
+    </a:clrScheme>
+    <a:fontScheme name="Office">
+      <a:majorFont>
+        <a:latin typeface="Calibri Light" panose="020F0302020204030204"/>
+        <a:ea typeface=""/>
+        <a:cs typeface=""/>
+        <a:font script="Jpan" typeface="游ゴシック Light"/>
+        <a:font script="Hang" typeface="맑은 고딕"/>
+        <a:font script="Hans" typeface="等线 Light"/>
+        <a:font script="Hant" typeface="新細明體"/>
+        <a:font script="Arab" typeface="Times New Roman"/>
+        <a:font script="Hebr" typeface="Times New Roman"/>
+        <a:font script="Thai" typeface="Angsana New"/>
+        <a:font script="Ethi" typeface="Nyala"/>
+        <a:font script="Beng" typeface="Vrinda"/>
+        <a:font script="Gujr" typeface="Shruti"/>
+        <a:font script="Khmr" typeface="MoolBoran"/>
+        <a:font script="Knda" typeface="Tunga"/>
+        <a:font script="Guru" typeface="Raavi"/>
+        <a:font script="Cans" typeface="Euphemia"/>
+        <a:font script="Cher" typeface="Plantagenet Cherokee"/>
+        <a:font script="Yiii" typeface="Microsoft Yi Baiti"/>
+        <a:font script="Tibt" typeface="Microsoft Himalaya"/>
+        <a:font script="Thaa" typeface="MV Boli"/>
+        <a:font script="Deva" typeface="Mangal"/>
+        <a:font script="Telu" typeface="Gautami"/>
+        <a:font script="Taml" typeface="Latha"/>
+        <a:font script="Syrc" typeface="Estrangelo Edessa"/>
+        <a:font script="Orya" typeface="Kalinga"/>
+        <a:font script="Mlym" typeface="Kartika"/>
+        <a:font script="Laoo" typeface="DokChampa"/>
+        <a:font script="Sinh" typeface="Iskoola Pota"/>
+        <a:font script="Mong" typeface="Mongolian Baiti"/>
+        <a:font script="Viet" typeface="Times New Roman"/>
+        <a:font script="Uigh" typeface="Microsoft Uighur"/>
+        <a:font script="Geor" typeface="Sylfaen"/>
+        <a:font script="Armn" typeface="Arial"/>
+        <a:font script="Bugi" typeface="Leelawadee UI"/>
+        <a:font script="Bopo" typeface="Microsoft JhengHei"/>
+        <a:font script="Java" typeface="Javanese Text"/>
+        <a:font script="Lisu" typeface="Segoe UI"/>
+        <a:font script="Mymr" typeface="Myanmar Text"/>
+        <a:font script="Nkoo" typeface="Ebrima"/>
+        <a:font script="Olck" typeface="Nirmala UI"/>
+        <a:font script="Osma" typeface="Ebrima"/>
+        <a:font script="Phag" typeface="Phagspa"/>
+        <a:font script="Syrn" typeface="Estrangelo Edessa"/>
+        <a:font script="Syrj" typeface="Estrangelo Edessa"/>
+        <a:font script="Syre" typeface="Estrangelo Edessa"/>
+        <a:font script="Sora" typeface="Nirmala UI"/>
+        <a:font script="Tale" typeface="Microsoft Tai Le"/>
+        <a:font script="Talu" typeface="Microsoft New Tai Lue"/>
+        <a:font script="Tfng" typeface="Ebrima"/>
+      </a:majorFont>
+      <a:minorFont>
+        <a:latin typeface="Calibri" panose="020F0502020204030204"/>
+        <a:ea typeface=""/>
+        <a:cs typeface=""/>
+        <a:font script="Jpan" typeface="游ゴシック"/>
+        <a:font script="Hang" typeface="맑은 고딕"/>
+        <a:font script="Hans" typeface="等线"/>
+        <a:font script="Hant" typeface="新細明體"/>
+        <a:font script="Arab" typeface="Arial"/>
+        <a:font script="Hebr" typeface="Arial"/>
+        <a:font script="Thai" typeface="Cordia New"/>
+        <a:font script="Ethi" typeface="Nyala"/>
+        <a:font script="Beng" typeface="Vrinda"/>
+        <a:font script="Gujr" typeface="Shruti"/>
+        <a:font script="Khmr" typeface="DaunPenh"/>
+        <a:font script="Knda" typeface="Tunga"/>
+        <a:font script="Guru" typeface="Raavi"/>
+        <a:font script="Cans" typeface="Euphemia"/>
+        <a:font script="Cher" typeface="Plantagenet Cherokee"/>
+        <a:font script="Yiii" typeface="Microsoft Yi Baiti"/>
+        <a:font script="Tibt" typeface="Microsoft Himalaya"/>
+        <a:font script="Thaa" typeface="MV Boli"/>
+        <a:font script="Deva" typeface="Mangal"/>
+        <a:font script="Telu" typeface="Gautami"/>
+        <a:font script="Taml" typeface="Latha"/>
+        <a:font script="Syrc" typeface="Estrangelo Edessa"/>
+        <a:font script="Orya" typeface="Kalinga"/>
+        <a:font script="Mlym" typeface="Kartika"/>
+        <a:font script="Laoo" typeface="DokChampa"/>
+        <a:font script="Sinh" typeface="Iskoola Pota"/>
+        <a:font script="Mong" typeface="Mongolian Baiti"/>
+        <a:font script="Viet" typeface="Arial"/>
+        <a:font script="Uigh" typeface="Microsoft Uighur"/>
+        <a:font script="Geor" typeface="Sylfaen"/>
+        <a:font script="Armn" typeface="Arial"/>
+        <a:font script="Bugi" typeface="Leelawadee UI"/>
+        <a:font script="Bopo" typeface="Microsoft JhengHei"/>
+        <a:font script="Java" typeface="Javanese Text"/>
+        <a:font script="Lisu" typeface="Segoe UI"/>
+        <a:font script="Mymr" typeface="Myanmar Text"/>
+        <a:font script="Nkoo" typeface="Ebrima"/>
+        <a:font script="Olck" typeface="Nirmala UI"/>
+        <a:font script="Osma" typeface="Ebrima"/>
+        <a:font script="Phag" typeface="Phagspa"/>
+        <a:font script="Syrn" typeface="Estrangelo Edessa"/>
+        <a:font script="Syrj" typeface="Estrangelo Edessa"/>
+        <a:font script="Syre" typeface="Estrangelo Edessa"/>
+        <a:font script="Sora" typeface="Nirmala UI"/>
+        <a:font script="Tale" typeface="Microsoft Tai Le"/>
+        <a:font script="Talu" typeface="Microsoft New Tai Lue"/>
+        <a:font script="Tfng" typeface="Ebrima"/>
+      </a:minorFont>
+    </a:fontScheme>
+    <a:fmtScheme name="Office">
+      <a:fillStyleLst>
+        <a:solidFill>
+          <a:schemeClr val="phClr"/>
+        </a:solidFill>
+        <a:gradFill rotWithShape="1">
+          <a:gsLst>
+            <a:gs pos="0">
+              <a:schemeClr val="phClr">
+                <a:lumMod val="110000"/>
+                <a:satMod val="105000"/>
+                <a:tint val="67000"/>
+              </a:schemeClr>
+            </a:gs>
+            <a:gs pos="50000">
+              <a:schemeClr val="phClr">
+                <a:lumMod val="105000"/>
+                <a:satMod val="103000"/>
+                <a:tint val="73000"/>
+              </a:schemeClr>
+            </a:gs>
+            <a:gs pos="100000">
+              <a:schemeClr val="phClr">
+                <a:lumMod val="105000"/>
+                <a:satMod val="109000"/>
+                <a:tint val="81000"/>
+              </a:schemeClr>
+            </a:gs>
+          </a:gsLst>
+          <a:lin ang="5400000" scaled="0"/>
+        </a:gradFill>
+        <a:gradFill rotWithShape="1">
+          <a:gsLst>
+            <a:gs pos="0">
+              <a:schemeClr val="phClr">
+                <a:satMod val="103000"/>
+                <a:lumMod val="102000"/>
+                <a:tint val="94000"/>
+              </a:schemeClr>
+            </a:gs>
+            <a:gs pos="50000">
+              <a:schemeClr val="phClr">
+                <a:satMod val="110000"/>
+                <a:lumMod val="100000"/>
+                <a:shade val="100000"/>
+              </a:schemeClr>
+            </a:gs>
+            <a:gs pos="100000">
+              <a:schemeClr val="phClr">
+                <a:lumMod val="99000"/>
+                <a:satMod val="120000"/>
+                <a:shade val="78000"/>
+              </a:schemeClr>
+            </a:gs>
+          </a:gsLst>
+          <a:lin ang="5400000" scaled="0"/>
+        </a:gradFill>
+      </a:fillStyleLst>
+      <a:lnStyleLst>
+        <a:ln w="6350" cap="flat" cmpd="sng" algn="ctr">
+          <a:solidFill>
+            <a:schemeClr val="phClr"/>
+          </a:solidFill>
+          <a:prstDash val="solid"/>
+          <a:miter lim="800000"/>
+        </a:ln>
+        <a:ln w="12700" cap="flat" cmpd="sng" algn="ctr">
+          <a:solidFill>
+            <a:schemeClr val="phClr"/>
+          </a:solidFill>
+          <a:prstDash val="solid"/>
+          <a:miter lim="800000"/>
+        </a:ln>
+        <a:ln w="19050" cap="flat" cmpd="sng" algn="ctr">
+          <a:solidFill>
+            <a:schemeClr val="phClr"/>
+          </a:solidFill>
+          <a:prstDash val="solid"/>
+          <a:miter lim="800000"/>
+        </a:ln>
+      </a:lnStyleLst>
+      <a:effectStyleLst>
+        <a:effectStyle>
+          <a:effectLst/>
+        </a:effectStyle>
+        <a:effectStyle>
+          <a:effectLst/>
+        </a:effectStyle>
+        <a:effectStyle>
+          <a:effectLst>
+            <a:outerShdw blurRad="57150" dist="19050" dir="5400000" algn="ctr" rotWithShape="0">
+              <a:srgbClr val="000000">
+                <a:alpha val="63000"/>
+              </a:srgbClr>
+            </a:outerShdw>
+          </a:effectLst>
+        </a:effectStyle>
+      </a:effectStyleLst>
+      <a:bgFillStyleLst>
+        <a:solidFill>
+          <a:schemeClr val="phClr"/>
+        </a:solidFill>
+        <a:solidFill>
+          <a:schemeClr val="phClr">
+            <a:tint val="95000"/>
+            <a:satMod val="170000"/>
+          </a:schemeClr>
+        </a:solidFill>
+        <a:gradFill rotWithShape="1">
+          <a:gsLst>
+            <a:gs pos="0">
+              <a:schemeClr val="phClr">
+                <a:tint val="93000"/>
+                <a:satMod val="150000"/>
+                <a:shade val="98000"/>
+                <a:lumMod val="102000"/>
+              </a:schemeClr>
+            </a:gs>
+            <a:gs pos="50000">
+              <a:schemeClr val="phClr">
+                <a:tint val="98000"/>
+                <a:satMod val="130000"/>
+                <a:shade val="90000"/>
+                <a:lumMod val="103000"/>
+              </a:schemeClr>
+            </a:gs>
+            <a:gs pos="100000">
+              <a:schemeClr val="phClr">
+                <a:shade val="63000"/>
+                <a:satMod val="120000"/>
+              </a:schemeClr>
+            </a:gs>
+          </a:gsLst>
+          <a:lin ang="5400000" scaled="0"/>
+        </a:gradFill>
+      </a:bgFillStyleLst>
+    </a:fmtScheme>
+  </a:themeElements>
+  <a:objectDefaults/>
+  <a:extraClrSchemeLst/>
+  <a:extLst>
+    <a:ext uri="{05A4C25C-085E-4340-85A3-A5531E510DB2}">
+      <thm15:themeFamily xmlns:thm15="http://schemas.microsoft.com/office/thememl/2012/main" name="Office Theme" id="{62F939B6-93AF-4DB8-9C6B-D6C7DFDC589F}" vid="{4A3C46E8-61CC-4603-A589-7422A47A8E4A}"/>
+    </a:ext>
+  </a:extLst>
+</a:theme>
 </file>